--- a/theory_05-http/theory_05-http.pptx
+++ b/theory_05-http/theory_05-http.pptx
@@ -5,7 +5,7 @@
     <p:sldMasterId id="2147483648" r:id="rId1"/>
   </p:sldMasterIdLst>
   <p:notesMasterIdLst>
-    <p:notesMasterId r:id="rId40"/>
+    <p:notesMasterId r:id="rId39"/>
   </p:notesMasterIdLst>
   <p:sldIdLst>
     <p:sldId id="256" r:id="rId2"/>
@@ -14,38 +14,37 @@
     <p:sldId id="282" r:id="rId5"/>
     <p:sldId id="275" r:id="rId6"/>
     <p:sldId id="284" r:id="rId7"/>
-    <p:sldId id="283" r:id="rId8"/>
-    <p:sldId id="279" r:id="rId9"/>
-    <p:sldId id="276" r:id="rId10"/>
-    <p:sldId id="285" r:id="rId11"/>
-    <p:sldId id="277" r:id="rId12"/>
-    <p:sldId id="281" r:id="rId13"/>
-    <p:sldId id="287" r:id="rId14"/>
-    <p:sldId id="303" r:id="rId15"/>
-    <p:sldId id="286" r:id="rId16"/>
-    <p:sldId id="288" r:id="rId17"/>
-    <p:sldId id="278" r:id="rId18"/>
-    <p:sldId id="280" r:id="rId19"/>
-    <p:sldId id="265" r:id="rId20"/>
-    <p:sldId id="301" r:id="rId21"/>
-    <p:sldId id="271" r:id="rId22"/>
-    <p:sldId id="289" r:id="rId23"/>
-    <p:sldId id="292" r:id="rId24"/>
-    <p:sldId id="293" r:id="rId25"/>
-    <p:sldId id="296" r:id="rId26"/>
-    <p:sldId id="297" r:id="rId27"/>
-    <p:sldId id="294" r:id="rId28"/>
-    <p:sldId id="273" r:id="rId29"/>
-    <p:sldId id="272" r:id="rId30"/>
-    <p:sldId id="295" r:id="rId31"/>
-    <p:sldId id="304" r:id="rId32"/>
-    <p:sldId id="306" r:id="rId33"/>
-    <p:sldId id="308" r:id="rId34"/>
-    <p:sldId id="309" r:id="rId35"/>
-    <p:sldId id="310" r:id="rId36"/>
-    <p:sldId id="311" r:id="rId37"/>
-    <p:sldId id="312" r:id="rId38"/>
-    <p:sldId id="302" r:id="rId39"/>
+    <p:sldId id="313" r:id="rId8"/>
+    <p:sldId id="283" r:id="rId9"/>
+    <p:sldId id="279" r:id="rId10"/>
+    <p:sldId id="314" r:id="rId11"/>
+    <p:sldId id="276" r:id="rId12"/>
+    <p:sldId id="277" r:id="rId13"/>
+    <p:sldId id="281" r:id="rId14"/>
+    <p:sldId id="287" r:id="rId15"/>
+    <p:sldId id="303" r:id="rId16"/>
+    <p:sldId id="286" r:id="rId17"/>
+    <p:sldId id="288" r:id="rId18"/>
+    <p:sldId id="278" r:id="rId19"/>
+    <p:sldId id="280" r:id="rId20"/>
+    <p:sldId id="265" r:id="rId21"/>
+    <p:sldId id="301" r:id="rId22"/>
+    <p:sldId id="271" r:id="rId23"/>
+    <p:sldId id="289" r:id="rId24"/>
+    <p:sldId id="292" r:id="rId25"/>
+    <p:sldId id="293" r:id="rId26"/>
+    <p:sldId id="294" r:id="rId27"/>
+    <p:sldId id="273" r:id="rId28"/>
+    <p:sldId id="272" r:id="rId29"/>
+    <p:sldId id="295" r:id="rId30"/>
+    <p:sldId id="304" r:id="rId31"/>
+    <p:sldId id="306" r:id="rId32"/>
+    <p:sldId id="308" r:id="rId33"/>
+    <p:sldId id="309" r:id="rId34"/>
+    <p:sldId id="310" r:id="rId35"/>
+    <p:sldId id="311" r:id="rId36"/>
+    <p:sldId id="312" r:id="rId37"/>
+    <p:sldId id="302" r:id="rId38"/>
   </p:sldIdLst>
   <p:sldSz cx="12192000" cy="6858000"/>
   <p:notesSz cx="6858000" cy="9144000"/>
@@ -234,7 +233,7 @@
           <a:p>
             <a:fld id="{19630131-546D-4C3D-A834-ED891C14EF89}" type="datetimeFigureOut">
               <a:rPr lang="en-GB" smtClean="0"/>
-              <a:t>26/03/2024</a:t>
+              <a:t>25/03/2025</a:t>
             </a:fld>
             <a:endParaRPr lang="en-GB"/>
           </a:p>
@@ -651,7 +650,7 @@
           <a:p>
             <a:fld id="{3452F5A9-226A-479A-BA7C-FE8E1E3031D5}" type="slidenum">
               <a:rPr lang="en-GB" smtClean="0"/>
-              <a:t>18</a:t>
+              <a:t>14</a:t>
             </a:fld>
             <a:endParaRPr lang="en-GB"/>
           </a:p>
@@ -660,7 +659,7 @@
     </p:spTree>
     <p:extLst>
       <p:ext uri="{BB962C8B-B14F-4D97-AF65-F5344CB8AC3E}">
-        <p14:creationId xmlns:p14="http://schemas.microsoft.com/office/powerpoint/2010/main" val="630822616"/>
+        <p14:creationId xmlns:p14="http://schemas.microsoft.com/office/powerpoint/2010/main" val="4056391978"/>
       </p:ext>
     </p:extLst>
   </p:cSld>
@@ -675,7 +674,13 @@
   <p:cSld>
     <p:spTree>
       <p:nvGrpSpPr>
-        <p:cNvPr id="1" name=""/>
+        <p:cNvPr id="1" name="">
+          <a:extLst>
+            <a:ext uri="{FF2B5EF4-FFF2-40B4-BE49-F238E27FC236}">
+              <a16:creationId xmlns:a16="http://schemas.microsoft.com/office/drawing/2014/main" id="{609A2635-6319-4C75-13F0-C653E634C118}"/>
+            </a:ext>
+          </a:extLst>
+        </p:cNvPr>
         <p:cNvGrpSpPr/>
         <p:nvPr/>
       </p:nvGrpSpPr>
@@ -689,7 +694,13 @@
       </p:grpSpPr>
       <p:sp>
         <p:nvSpPr>
-          <p:cNvPr id="2" name="Segnaposto immagine diapositiva 1"/>
+          <p:cNvPr id="2" name="Segnaposto immagine diapositiva 1">
+            <a:extLst>
+              <a:ext uri="{FF2B5EF4-FFF2-40B4-BE49-F238E27FC236}">
+                <a16:creationId xmlns:a16="http://schemas.microsoft.com/office/drawing/2014/main" id="{7A70384A-2514-5437-10CE-75E7E08C98FA}"/>
+              </a:ext>
+            </a:extLst>
+          </p:cNvPr>
           <p:cNvSpPr>
             <a:spLocks noGrp="1" noRot="1" noChangeAspect="1"/>
           </p:cNvSpPr>
@@ -701,7 +712,13 @@
       </p:sp>
       <p:sp>
         <p:nvSpPr>
-          <p:cNvPr id="3" name="Segnaposto note 2"/>
+          <p:cNvPr id="3" name="Segnaposto note 2">
+            <a:extLst>
+              <a:ext uri="{FF2B5EF4-FFF2-40B4-BE49-F238E27FC236}">
+                <a16:creationId xmlns:a16="http://schemas.microsoft.com/office/drawing/2014/main" id="{CE00A942-9207-452B-571F-69641A602ACD}"/>
+              </a:ext>
+            </a:extLst>
+          </p:cNvPr>
           <p:cNvSpPr>
             <a:spLocks noGrp="1"/>
           </p:cNvSpPr>
@@ -720,7 +737,13 @@
       </p:sp>
       <p:sp>
         <p:nvSpPr>
-          <p:cNvPr id="4" name="Segnaposto numero diapositiva 3"/>
+          <p:cNvPr id="4" name="Segnaposto numero diapositiva 3">
+            <a:extLst>
+              <a:ext uri="{FF2B5EF4-FFF2-40B4-BE49-F238E27FC236}">
+                <a16:creationId xmlns:a16="http://schemas.microsoft.com/office/drawing/2014/main" id="{3A15EC29-A89B-B786-8740-10B148A70D31}"/>
+              </a:ext>
+            </a:extLst>
+          </p:cNvPr>
           <p:cNvSpPr>
             <a:spLocks noGrp="1"/>
           </p:cNvSpPr>
@@ -735,7 +758,7 @@
           <a:p>
             <a:fld id="{3452F5A9-226A-479A-BA7C-FE8E1E3031D5}" type="slidenum">
               <a:rPr lang="en-GB" smtClean="0"/>
-              <a:t>21</a:t>
+              <a:t>15</a:t>
             </a:fld>
             <a:endParaRPr lang="en-GB"/>
           </a:p>
@@ -744,7 +767,7 @@
     </p:spTree>
     <p:extLst>
       <p:ext uri="{BB962C8B-B14F-4D97-AF65-F5344CB8AC3E}">
-        <p14:creationId xmlns:p14="http://schemas.microsoft.com/office/powerpoint/2010/main" val="2438641502"/>
+        <p14:creationId xmlns:p14="http://schemas.microsoft.com/office/powerpoint/2010/main" val="581638277"/>
       </p:ext>
     </p:extLst>
   </p:cSld>
@@ -819,7 +842,7 @@
           <a:p>
             <a:fld id="{3452F5A9-226A-479A-BA7C-FE8E1E3031D5}" type="slidenum">
               <a:rPr lang="en-GB" smtClean="0"/>
-              <a:t>22</a:t>
+              <a:t>19</a:t>
             </a:fld>
             <a:endParaRPr lang="en-GB"/>
           </a:p>
@@ -828,7 +851,7 @@
     </p:spTree>
     <p:extLst>
       <p:ext uri="{BB962C8B-B14F-4D97-AF65-F5344CB8AC3E}">
-        <p14:creationId xmlns:p14="http://schemas.microsoft.com/office/powerpoint/2010/main" val="2950402373"/>
+        <p14:creationId xmlns:p14="http://schemas.microsoft.com/office/powerpoint/2010/main" val="630822616"/>
       </p:ext>
     </p:extLst>
   </p:cSld>
@@ -903,7 +926,7 @@
           <a:p>
             <a:fld id="{3452F5A9-226A-479A-BA7C-FE8E1E3031D5}" type="slidenum">
               <a:rPr lang="en-GB" smtClean="0"/>
-              <a:t>23</a:t>
+              <a:t>22</a:t>
             </a:fld>
             <a:endParaRPr lang="en-GB"/>
           </a:p>
@@ -912,7 +935,7 @@
     </p:spTree>
     <p:extLst>
       <p:ext uri="{BB962C8B-B14F-4D97-AF65-F5344CB8AC3E}">
-        <p14:creationId xmlns:p14="http://schemas.microsoft.com/office/powerpoint/2010/main" val="2286591337"/>
+        <p14:creationId xmlns:p14="http://schemas.microsoft.com/office/powerpoint/2010/main" val="2438641502"/>
       </p:ext>
     </p:extLst>
   </p:cSld>
@@ -987,7 +1010,7 @@
           <a:p>
             <a:fld id="{3452F5A9-226A-479A-BA7C-FE8E1E3031D5}" type="slidenum">
               <a:rPr lang="en-GB" smtClean="0"/>
-              <a:t>24</a:t>
+              <a:t>23</a:t>
             </a:fld>
             <a:endParaRPr lang="en-GB"/>
           </a:p>
@@ -996,7 +1019,7 @@
     </p:spTree>
     <p:extLst>
       <p:ext uri="{BB962C8B-B14F-4D97-AF65-F5344CB8AC3E}">
-        <p14:creationId xmlns:p14="http://schemas.microsoft.com/office/powerpoint/2010/main" val="3244903835"/>
+        <p14:creationId xmlns:p14="http://schemas.microsoft.com/office/powerpoint/2010/main" val="2950402373"/>
       </p:ext>
     </p:extLst>
   </p:cSld>
@@ -1071,7 +1094,7 @@
           <a:p>
             <a:fld id="{3452F5A9-226A-479A-BA7C-FE8E1E3031D5}" type="slidenum">
               <a:rPr lang="en-GB" smtClean="0"/>
-              <a:t>25</a:t>
+              <a:t>24</a:t>
             </a:fld>
             <a:endParaRPr lang="en-GB"/>
           </a:p>
@@ -1080,7 +1103,7 @@
     </p:spTree>
     <p:extLst>
       <p:ext uri="{BB962C8B-B14F-4D97-AF65-F5344CB8AC3E}">
-        <p14:creationId xmlns:p14="http://schemas.microsoft.com/office/powerpoint/2010/main" val="191650378"/>
+        <p14:creationId xmlns:p14="http://schemas.microsoft.com/office/powerpoint/2010/main" val="2286591337"/>
       </p:ext>
     </p:extLst>
   </p:cSld>
@@ -1155,7 +1178,7 @@
           <a:p>
             <a:fld id="{3452F5A9-226A-479A-BA7C-FE8E1E3031D5}" type="slidenum">
               <a:rPr lang="en-GB" smtClean="0"/>
-              <a:t>26</a:t>
+              <a:t>25</a:t>
             </a:fld>
             <a:endParaRPr lang="en-GB"/>
           </a:p>
@@ -1164,7 +1187,7 @@
     </p:spTree>
     <p:extLst>
       <p:ext uri="{BB962C8B-B14F-4D97-AF65-F5344CB8AC3E}">
-        <p14:creationId xmlns:p14="http://schemas.microsoft.com/office/powerpoint/2010/main" val="68078027"/>
+        <p14:creationId xmlns:p14="http://schemas.microsoft.com/office/powerpoint/2010/main" val="3244903835"/>
       </p:ext>
     </p:extLst>
   </p:cSld>
@@ -1239,7 +1262,7 @@
           <a:p>
             <a:fld id="{3452F5A9-226A-479A-BA7C-FE8E1E3031D5}" type="slidenum">
               <a:rPr lang="en-GB" smtClean="0"/>
-              <a:t>27</a:t>
+              <a:t>26</a:t>
             </a:fld>
             <a:endParaRPr lang="en-GB"/>
           </a:p>
@@ -1323,7 +1346,7 @@
           <a:p>
             <a:fld id="{3452F5A9-226A-479A-BA7C-FE8E1E3031D5}" type="slidenum">
               <a:rPr lang="en-GB" smtClean="0"/>
-              <a:t>28</a:t>
+              <a:t>27</a:t>
             </a:fld>
             <a:endParaRPr lang="en-GB"/>
           </a:p>
@@ -1407,7 +1430,7 @@
           <a:p>
             <a:fld id="{3452F5A9-226A-479A-BA7C-FE8E1E3031D5}" type="slidenum">
               <a:rPr lang="en-GB" smtClean="0"/>
-              <a:t>29</a:t>
+              <a:t>28</a:t>
             </a:fld>
             <a:endParaRPr lang="en-GB"/>
           </a:p>
@@ -1599,7 +1622,13 @@
   <p:cSld>
     <p:spTree>
       <p:nvGrpSpPr>
-        <p:cNvPr id="1" name=""/>
+        <p:cNvPr id="1" name="">
+          <a:extLst>
+            <a:ext uri="{FF2B5EF4-FFF2-40B4-BE49-F238E27FC236}">
+              <a16:creationId xmlns:a16="http://schemas.microsoft.com/office/drawing/2014/main" id="{9E107B19-F0E0-66D4-4906-C41713D294A7}"/>
+            </a:ext>
+          </a:extLst>
+        </p:cNvPr>
         <p:cNvGrpSpPr/>
         <p:nvPr/>
       </p:nvGrpSpPr>
@@ -1613,7 +1642,13 @@
       </p:grpSpPr>
       <p:sp>
         <p:nvSpPr>
-          <p:cNvPr id="2" name="Segnaposto immagine diapositiva 1"/>
+          <p:cNvPr id="2" name="Segnaposto immagine diapositiva 1">
+            <a:extLst>
+              <a:ext uri="{FF2B5EF4-FFF2-40B4-BE49-F238E27FC236}">
+                <a16:creationId xmlns:a16="http://schemas.microsoft.com/office/drawing/2014/main" id="{5A34ECFB-5DCD-646E-6A53-7B4344E41DA4}"/>
+              </a:ext>
+            </a:extLst>
+          </p:cNvPr>
           <p:cNvSpPr>
             <a:spLocks noGrp="1" noRot="1" noChangeAspect="1"/>
           </p:cNvSpPr>
@@ -1625,7 +1660,13 @@
       </p:sp>
       <p:sp>
         <p:nvSpPr>
-          <p:cNvPr id="3" name="Segnaposto note 2"/>
+          <p:cNvPr id="3" name="Segnaposto note 2">
+            <a:extLst>
+              <a:ext uri="{FF2B5EF4-FFF2-40B4-BE49-F238E27FC236}">
+                <a16:creationId xmlns:a16="http://schemas.microsoft.com/office/drawing/2014/main" id="{60176FA2-8B88-AF43-5AF8-AC1EF9E5D11C}"/>
+              </a:ext>
+            </a:extLst>
+          </p:cNvPr>
           <p:cNvSpPr>
             <a:spLocks noGrp="1"/>
           </p:cNvSpPr>
@@ -1644,7 +1685,13 @@
       </p:sp>
       <p:sp>
         <p:nvSpPr>
-          <p:cNvPr id="4" name="Segnaposto numero diapositiva 3"/>
+          <p:cNvPr id="4" name="Segnaposto numero diapositiva 3">
+            <a:extLst>
+              <a:ext uri="{FF2B5EF4-FFF2-40B4-BE49-F238E27FC236}">
+                <a16:creationId xmlns:a16="http://schemas.microsoft.com/office/drawing/2014/main" id="{068AD0ED-5136-2D76-0C33-FAEF416CDC3B}"/>
+              </a:ext>
+            </a:extLst>
+          </p:cNvPr>
           <p:cNvSpPr>
             <a:spLocks noGrp="1"/>
           </p:cNvSpPr>
@@ -1668,7 +1715,7 @@
     </p:spTree>
     <p:extLst>
       <p:ext uri="{BB962C8B-B14F-4D97-AF65-F5344CB8AC3E}">
-        <p14:creationId xmlns:p14="http://schemas.microsoft.com/office/powerpoint/2010/main" val="246766273"/>
+        <p14:creationId xmlns:p14="http://schemas.microsoft.com/office/powerpoint/2010/main" val="213012697"/>
       </p:ext>
     </p:extLst>
   </p:cSld>
@@ -1752,7 +1799,7 @@
     </p:spTree>
     <p:extLst>
       <p:ext uri="{BB962C8B-B14F-4D97-AF65-F5344CB8AC3E}">
-        <p14:creationId xmlns:p14="http://schemas.microsoft.com/office/powerpoint/2010/main" val="624403081"/>
+        <p14:creationId xmlns:p14="http://schemas.microsoft.com/office/powerpoint/2010/main" val="246766273"/>
       </p:ext>
     </p:extLst>
   </p:cSld>
@@ -1836,7 +1883,7 @@
     </p:spTree>
     <p:extLst>
       <p:ext uri="{BB962C8B-B14F-4D97-AF65-F5344CB8AC3E}">
-        <p14:creationId xmlns:p14="http://schemas.microsoft.com/office/powerpoint/2010/main" val="2698144766"/>
+        <p14:creationId xmlns:p14="http://schemas.microsoft.com/office/powerpoint/2010/main" val="624403081"/>
       </p:ext>
     </p:extLst>
   </p:cSld>
@@ -1851,7 +1898,13 @@
   <p:cSld>
     <p:spTree>
       <p:nvGrpSpPr>
-        <p:cNvPr id="1" name=""/>
+        <p:cNvPr id="1" name="">
+          <a:extLst>
+            <a:ext uri="{FF2B5EF4-FFF2-40B4-BE49-F238E27FC236}">
+              <a16:creationId xmlns:a16="http://schemas.microsoft.com/office/drawing/2014/main" id="{3DCA9B27-BBFD-BB6F-7A26-BEAD3F55312F}"/>
+            </a:ext>
+          </a:extLst>
+        </p:cNvPr>
         <p:cNvGrpSpPr/>
         <p:nvPr/>
       </p:nvGrpSpPr>
@@ -1865,7 +1918,13 @@
       </p:grpSpPr>
       <p:sp>
         <p:nvSpPr>
-          <p:cNvPr id="2" name="Segnaposto immagine diapositiva 1"/>
+          <p:cNvPr id="2" name="Segnaposto immagine diapositiva 1">
+            <a:extLst>
+              <a:ext uri="{FF2B5EF4-FFF2-40B4-BE49-F238E27FC236}">
+                <a16:creationId xmlns:a16="http://schemas.microsoft.com/office/drawing/2014/main" id="{54D7DDEF-99AF-B125-FD75-12F8945BEC72}"/>
+              </a:ext>
+            </a:extLst>
+          </p:cNvPr>
           <p:cNvSpPr>
             <a:spLocks noGrp="1" noRot="1" noChangeAspect="1"/>
           </p:cNvSpPr>
@@ -1877,7 +1936,13 @@
       </p:sp>
       <p:sp>
         <p:nvSpPr>
-          <p:cNvPr id="3" name="Segnaposto note 2"/>
+          <p:cNvPr id="3" name="Segnaposto note 2">
+            <a:extLst>
+              <a:ext uri="{FF2B5EF4-FFF2-40B4-BE49-F238E27FC236}">
+                <a16:creationId xmlns:a16="http://schemas.microsoft.com/office/drawing/2014/main" id="{F6C480A9-4BF9-EF58-B9AE-94C7095499C2}"/>
+              </a:ext>
+            </a:extLst>
+          </p:cNvPr>
           <p:cNvSpPr>
             <a:spLocks noGrp="1"/>
           </p:cNvSpPr>
@@ -1896,7 +1961,13 @@
       </p:sp>
       <p:sp>
         <p:nvSpPr>
-          <p:cNvPr id="4" name="Segnaposto numero diapositiva 3"/>
+          <p:cNvPr id="4" name="Segnaposto numero diapositiva 3">
+            <a:extLst>
+              <a:ext uri="{FF2B5EF4-FFF2-40B4-BE49-F238E27FC236}">
+                <a16:creationId xmlns:a16="http://schemas.microsoft.com/office/drawing/2014/main" id="{EDCF96F4-7ECB-139D-15D3-698DBC0E0E1C}"/>
+              </a:ext>
+            </a:extLst>
+          </p:cNvPr>
           <p:cNvSpPr>
             <a:spLocks noGrp="1"/>
           </p:cNvSpPr>
@@ -1911,7 +1982,7 @@
           <a:p>
             <a:fld id="{3452F5A9-226A-479A-BA7C-FE8E1E3031D5}" type="slidenum">
               <a:rPr lang="en-GB" smtClean="0"/>
-              <a:t>12</a:t>
+              <a:t>10</a:t>
             </a:fld>
             <a:endParaRPr lang="en-GB"/>
           </a:p>
@@ -1920,7 +1991,7 @@
     </p:spTree>
     <p:extLst>
       <p:ext uri="{BB962C8B-B14F-4D97-AF65-F5344CB8AC3E}">
-        <p14:creationId xmlns:p14="http://schemas.microsoft.com/office/powerpoint/2010/main" val="2103150304"/>
+        <p14:creationId xmlns:p14="http://schemas.microsoft.com/office/powerpoint/2010/main" val="1029788000"/>
       </p:ext>
     </p:extLst>
   </p:cSld>
@@ -1995,7 +2066,7 @@
           <a:p>
             <a:fld id="{3452F5A9-226A-479A-BA7C-FE8E1E3031D5}" type="slidenum">
               <a:rPr lang="en-GB" smtClean="0"/>
-              <a:t>13</a:t>
+              <a:t>11</a:t>
             </a:fld>
             <a:endParaRPr lang="en-GB"/>
           </a:p>
@@ -2004,7 +2075,7 @@
     </p:spTree>
     <p:extLst>
       <p:ext uri="{BB962C8B-B14F-4D97-AF65-F5344CB8AC3E}">
-        <p14:creationId xmlns:p14="http://schemas.microsoft.com/office/powerpoint/2010/main" val="4056391978"/>
+        <p14:creationId xmlns:p14="http://schemas.microsoft.com/office/powerpoint/2010/main" val="2698144766"/>
       </p:ext>
     </p:extLst>
   </p:cSld>
@@ -2019,13 +2090,7 @@
   <p:cSld>
     <p:spTree>
       <p:nvGrpSpPr>
-        <p:cNvPr id="1" name="">
-          <a:extLst>
-            <a:ext uri="{FF2B5EF4-FFF2-40B4-BE49-F238E27FC236}">
-              <a16:creationId xmlns:a16="http://schemas.microsoft.com/office/drawing/2014/main" id="{609A2635-6319-4C75-13F0-C653E634C118}"/>
-            </a:ext>
-          </a:extLst>
-        </p:cNvPr>
+        <p:cNvPr id="1" name=""/>
         <p:cNvGrpSpPr/>
         <p:nvPr/>
       </p:nvGrpSpPr>
@@ -2039,13 +2104,7 @@
       </p:grpSpPr>
       <p:sp>
         <p:nvSpPr>
-          <p:cNvPr id="2" name="Segnaposto immagine diapositiva 1">
-            <a:extLst>
-              <a:ext uri="{FF2B5EF4-FFF2-40B4-BE49-F238E27FC236}">
-                <a16:creationId xmlns:a16="http://schemas.microsoft.com/office/drawing/2014/main" id="{7A70384A-2514-5437-10CE-75E7E08C98FA}"/>
-              </a:ext>
-            </a:extLst>
-          </p:cNvPr>
+          <p:cNvPr id="2" name="Segnaposto immagine diapositiva 1"/>
           <p:cNvSpPr>
             <a:spLocks noGrp="1" noRot="1" noChangeAspect="1"/>
           </p:cNvSpPr>
@@ -2057,13 +2116,7 @@
       </p:sp>
       <p:sp>
         <p:nvSpPr>
-          <p:cNvPr id="3" name="Segnaposto note 2">
-            <a:extLst>
-              <a:ext uri="{FF2B5EF4-FFF2-40B4-BE49-F238E27FC236}">
-                <a16:creationId xmlns:a16="http://schemas.microsoft.com/office/drawing/2014/main" id="{CE00A942-9207-452B-571F-69641A602ACD}"/>
-              </a:ext>
-            </a:extLst>
-          </p:cNvPr>
+          <p:cNvPr id="3" name="Segnaposto note 2"/>
           <p:cNvSpPr>
             <a:spLocks noGrp="1"/>
           </p:cNvSpPr>
@@ -2082,13 +2135,7 @@
       </p:sp>
       <p:sp>
         <p:nvSpPr>
-          <p:cNvPr id="4" name="Segnaposto numero diapositiva 3">
-            <a:extLst>
-              <a:ext uri="{FF2B5EF4-FFF2-40B4-BE49-F238E27FC236}">
-                <a16:creationId xmlns:a16="http://schemas.microsoft.com/office/drawing/2014/main" id="{3A15EC29-A89B-B786-8740-10B148A70D31}"/>
-              </a:ext>
-            </a:extLst>
-          </p:cNvPr>
+          <p:cNvPr id="4" name="Segnaposto numero diapositiva 3"/>
           <p:cNvSpPr>
             <a:spLocks noGrp="1"/>
           </p:cNvSpPr>
@@ -2103,7 +2150,7 @@
           <a:p>
             <a:fld id="{3452F5A9-226A-479A-BA7C-FE8E1E3031D5}" type="slidenum">
               <a:rPr lang="en-GB" smtClean="0"/>
-              <a:t>14</a:t>
+              <a:t>13</a:t>
             </a:fld>
             <a:endParaRPr lang="en-GB"/>
           </a:p>
@@ -2112,7 +2159,7 @@
     </p:spTree>
     <p:extLst>
       <p:ext uri="{BB962C8B-B14F-4D97-AF65-F5344CB8AC3E}">
-        <p14:creationId xmlns:p14="http://schemas.microsoft.com/office/powerpoint/2010/main" val="581638277"/>
+        <p14:creationId xmlns:p14="http://schemas.microsoft.com/office/powerpoint/2010/main" val="2103150304"/>
       </p:ext>
     </p:extLst>
   </p:cSld>
@@ -2157,7 +2204,13 @@
         </p:spPr>
         <p:txBody>
           <a:bodyPr/>
-          <a:lstStyle/>
+          <a:lstStyle>
+            <a:lvl1pPr>
+              <a:defRPr>
+                <a:latin typeface="Aptos" panose="020B0004020202020204" pitchFamily="34" charset="0"/>
+              </a:defRPr>
+            </a:lvl1pPr>
+          </a:lstStyle>
           <a:p>
             <a:r>
               <a:rPr lang="en-GB" noProof="0" dirty="0"/>
@@ -2206,8 +2259,30 @@
         <p:txBody>
           <a:bodyPr/>
           <a:lstStyle>
+            <a:lvl1pPr>
+              <a:defRPr>
+                <a:latin typeface="Aptos" panose="020B0004020202020204" pitchFamily="34" charset="0"/>
+              </a:defRPr>
+            </a:lvl1pPr>
+            <a:lvl2pPr>
+              <a:defRPr>
+                <a:latin typeface="Aptos" panose="020B0004020202020204" pitchFamily="34" charset="0"/>
+              </a:defRPr>
+            </a:lvl2pPr>
+            <a:lvl3pPr>
+              <a:defRPr>
+                <a:latin typeface="Aptos" panose="020B0004020202020204" pitchFamily="34" charset="0"/>
+              </a:defRPr>
+            </a:lvl3pPr>
+            <a:lvl4pPr>
+              <a:defRPr>
+                <a:latin typeface="Aptos" panose="020B0004020202020204" pitchFamily="34" charset="0"/>
+              </a:defRPr>
+            </a:lvl4pPr>
             <a:lvl5pPr>
-              <a:defRPr/>
+              <a:defRPr>
+                <a:latin typeface="Aptos" panose="020B0004020202020204" pitchFamily="34" charset="0"/>
+              </a:defRPr>
             </a:lvl5pPr>
           </a:lstStyle>
           <a:p>
@@ -2324,10 +2399,17 @@
         <p:spPr/>
         <p:txBody>
           <a:bodyPr/>
-          <a:lstStyle/>
+          <a:lstStyle>
+            <a:lvl1pPr>
+              <a:defRPr>
+                <a:latin typeface="Aptos" panose="020B0004020202020204" pitchFamily="34" charset="0"/>
+              </a:defRPr>
+            </a:lvl1pPr>
+          </a:lstStyle>
           <a:p>
             <a:fld id="{31DE2C5B-556E-47B8-A792-024C2FCA4ACC}" type="slidenum">
               <a:rPr lang="en-GB" smtClean="0"/>
+              <a:pPr/>
               <a:t>‹#›</a:t>
             </a:fld>
             <a:endParaRPr lang="en-GB"/>
@@ -2380,7 +2462,9 @@
           <a:lstStyle/>
           <a:p>
             <a:pPr algn="ctr"/>
-            <a:endParaRPr lang="en-GB" dirty="0"/>
+            <a:endParaRPr lang="en-GB" dirty="0">
+              <a:latin typeface="Aptos" panose="020B0004020202020204" pitchFamily="34" charset="0"/>
+            </a:endParaRPr>
           </a:p>
         </p:txBody>
       </p:sp>
@@ -2432,7 +2516,13 @@
         </p:spPr>
         <p:txBody>
           <a:bodyPr/>
-          <a:lstStyle/>
+          <a:lstStyle>
+            <a:lvl1pPr>
+              <a:defRPr>
+                <a:latin typeface="Aptos" panose="020B0004020202020204" pitchFamily="34" charset="0"/>
+              </a:defRPr>
+            </a:lvl1pPr>
+          </a:lstStyle>
           <a:p>
             <a:r>
               <a:rPr lang="en-GB" noProof="0" dirty="0"/>
@@ -2480,7 +2570,33 @@
         </p:spPr>
         <p:txBody>
           <a:bodyPr/>
-          <a:lstStyle/>
+          <a:lstStyle>
+            <a:lvl1pPr>
+              <a:defRPr>
+                <a:latin typeface="Aptos" panose="020B0004020202020204" pitchFamily="34" charset="0"/>
+              </a:defRPr>
+            </a:lvl1pPr>
+            <a:lvl2pPr>
+              <a:defRPr>
+                <a:latin typeface="Aptos" panose="020B0004020202020204" pitchFamily="34" charset="0"/>
+              </a:defRPr>
+            </a:lvl2pPr>
+            <a:lvl3pPr>
+              <a:defRPr>
+                <a:latin typeface="Aptos" panose="020B0004020202020204" pitchFamily="34" charset="0"/>
+              </a:defRPr>
+            </a:lvl3pPr>
+            <a:lvl4pPr>
+              <a:defRPr>
+                <a:latin typeface="Aptos" panose="020B0004020202020204" pitchFamily="34" charset="0"/>
+              </a:defRPr>
+            </a:lvl4pPr>
+            <a:lvl5pPr>
+              <a:defRPr>
+                <a:latin typeface="Aptos" panose="020B0004020202020204" pitchFamily="34" charset="0"/>
+              </a:defRPr>
+            </a:lvl5pPr>
+          </a:lstStyle>
           <a:p>
             <a:pPr lvl="0"/>
             <a:r>
@@ -2596,7 +2712,33 @@
         </p:spPr>
         <p:txBody>
           <a:bodyPr/>
-          <a:lstStyle/>
+          <a:lstStyle>
+            <a:lvl1pPr>
+              <a:defRPr>
+                <a:latin typeface="Aptos" panose="020B0004020202020204" pitchFamily="34" charset="0"/>
+              </a:defRPr>
+            </a:lvl1pPr>
+            <a:lvl2pPr>
+              <a:defRPr>
+                <a:latin typeface="Aptos" panose="020B0004020202020204" pitchFamily="34" charset="0"/>
+              </a:defRPr>
+            </a:lvl2pPr>
+            <a:lvl3pPr>
+              <a:defRPr>
+                <a:latin typeface="Aptos" panose="020B0004020202020204" pitchFamily="34" charset="0"/>
+              </a:defRPr>
+            </a:lvl3pPr>
+            <a:lvl4pPr>
+              <a:defRPr>
+                <a:latin typeface="Aptos" panose="020B0004020202020204" pitchFamily="34" charset="0"/>
+              </a:defRPr>
+            </a:lvl4pPr>
+            <a:lvl5pPr>
+              <a:defRPr>
+                <a:latin typeface="Aptos" panose="020B0004020202020204" pitchFamily="34" charset="0"/>
+              </a:defRPr>
+            </a:lvl5pPr>
+          </a:lstStyle>
           <a:p>
             <a:pPr lvl="0"/>
             <a:r>
@@ -2707,10 +2849,17 @@
         <p:spPr/>
         <p:txBody>
           <a:bodyPr/>
-          <a:lstStyle/>
+          <a:lstStyle>
+            <a:lvl1pPr>
+              <a:defRPr>
+                <a:latin typeface="Aptos" panose="020B0004020202020204" pitchFamily="34" charset="0"/>
+              </a:defRPr>
+            </a:lvl1pPr>
+          </a:lstStyle>
           <a:p>
             <a:fld id="{31DE2C5B-556E-47B8-A792-024C2FCA4ACC}" type="slidenum">
               <a:rPr lang="en-GB" smtClean="0"/>
+              <a:pPr/>
               <a:t>‹#›</a:t>
             </a:fld>
             <a:endParaRPr lang="en-GB"/>
@@ -2763,7 +2912,9 @@
           <a:lstStyle/>
           <a:p>
             <a:pPr algn="ctr"/>
-            <a:endParaRPr lang="en-GB" dirty="0"/>
+            <a:endParaRPr lang="en-GB" dirty="0">
+              <a:latin typeface="Aptos" panose="020B0004020202020204" pitchFamily="34" charset="0"/>
+            </a:endParaRPr>
           </a:p>
         </p:txBody>
       </p:sp>
@@ -2820,7 +2971,9 @@
           <a:lstStyle>
             <a:lvl1pPr marL="0" indent="0" algn="ctr">
               <a:buNone/>
-              <a:defRPr sz="4800" b="1"/>
+              <a:defRPr sz="4800" b="1">
+                <a:latin typeface="Aptos" panose="020B0004020202020204" pitchFamily="34" charset="0"/>
+              </a:defRPr>
             </a:lvl1pPr>
             <a:lvl2pPr marL="457200" indent="0" algn="ctr">
               <a:buNone/>
@@ -2906,7 +3059,9 @@
           <a:lstStyle/>
           <a:p>
             <a:pPr algn="ctr"/>
-            <a:endParaRPr lang="en-GB" dirty="0"/>
+            <a:endParaRPr lang="en-GB" dirty="0">
+              <a:latin typeface="Aptos" panose="020B0004020202020204" pitchFamily="34" charset="0"/>
+            </a:endParaRPr>
           </a:p>
         </p:txBody>
       </p:sp>
@@ -2956,7 +3111,9 @@
           <a:lstStyle/>
           <a:p>
             <a:pPr algn="ctr"/>
-            <a:endParaRPr lang="en-GB" dirty="0"/>
+            <a:endParaRPr lang="en-GB" dirty="0">
+              <a:latin typeface="Aptos" panose="020B0004020202020204" pitchFamily="34" charset="0"/>
+            </a:endParaRPr>
           </a:p>
         </p:txBody>
       </p:sp>
@@ -3002,36 +3159,52 @@
           </a:lstStyle>
           <a:p>
             <a:r>
-              <a:rPr lang="it-IT" sz="2800" b="0" dirty="0" err="1"/>
+              <a:rPr lang="it-IT" sz="2800" b="0" dirty="0" err="1">
+                <a:latin typeface="Aptos" panose="020B0004020202020204" pitchFamily="34" charset="0"/>
+              </a:rPr>
               <a:t>Biomedical</a:t>
             </a:r>
             <a:r>
-              <a:rPr lang="it-IT" sz="2800" b="0" dirty="0"/>
+              <a:rPr lang="it-IT" sz="2800" b="0" dirty="0">
+                <a:latin typeface="Aptos" panose="020B0004020202020204" pitchFamily="34" charset="0"/>
+              </a:rPr>
               <a:t> </a:t>
             </a:r>
             <a:r>
-              <a:rPr lang="it-IT" sz="2800" b="0" dirty="0" err="1"/>
+              <a:rPr lang="it-IT" sz="2800" b="0" dirty="0" err="1">
+                <a:latin typeface="Aptos" panose="020B0004020202020204" pitchFamily="34" charset="0"/>
+              </a:rPr>
               <a:t>Wearable</a:t>
             </a:r>
             <a:r>
-              <a:rPr lang="it-IT" sz="2800" b="0" dirty="0"/>
+              <a:rPr lang="it-IT" sz="2800" b="0" dirty="0">
+                <a:latin typeface="Aptos" panose="020B0004020202020204" pitchFamily="34" charset="0"/>
+              </a:rPr>
               <a:t> Technologies </a:t>
             </a:r>
           </a:p>
           <a:p>
             <a:r>
-              <a:rPr lang="it-IT" sz="2800" b="0" dirty="0"/>
+              <a:rPr lang="it-IT" sz="2800" b="0" dirty="0">
+                <a:latin typeface="Aptos" panose="020B0004020202020204" pitchFamily="34" charset="0"/>
+              </a:rPr>
               <a:t>for Healthcare and </a:t>
             </a:r>
             <a:r>
-              <a:rPr lang="it-IT" sz="2800" b="0" dirty="0" err="1"/>
+              <a:rPr lang="it-IT" sz="2800" b="0" dirty="0" err="1">
+                <a:latin typeface="Aptos" panose="020B0004020202020204" pitchFamily="34" charset="0"/>
+              </a:rPr>
               <a:t>Wellbeing</a:t>
             </a:r>
             <a:r>
-              <a:rPr lang="it-IT" sz="2800" b="0" dirty="0"/>
+              <a:rPr lang="it-IT" sz="2800" b="0" dirty="0">
+                <a:latin typeface="Aptos" panose="020B0004020202020204" pitchFamily="34" charset="0"/>
+              </a:rPr>
               <a:t>  </a:t>
             </a:r>
-            <a:endParaRPr lang="en-GB" sz="2800" b="0" dirty="0"/>
+            <a:endParaRPr lang="en-GB" sz="2800" b="0" dirty="0">
+              <a:latin typeface="Aptos" panose="020B0004020202020204" pitchFamily="34" charset="0"/>
+            </a:endParaRPr>
           </a:p>
         </p:txBody>
       </p:sp>
@@ -3082,8 +3255,10 @@
               </a:spcAft>
             </a:pPr>
             <a:r>
-              <a:rPr lang="it-IT" sz="2800" dirty="0"/>
-              <a:t>A.Y. 2023-2024</a:t>
+              <a:rPr lang="it-IT" sz="2800" dirty="0">
+                <a:latin typeface="Aptos" panose="020B0004020202020204" pitchFamily="34" charset="0"/>
+              </a:rPr>
+              <a:t>A.Y. 2024-2025</a:t>
             </a:r>
           </a:p>
           <a:p>
@@ -3093,10 +3268,14 @@
               </a:spcAft>
             </a:pPr>
             <a:r>
-              <a:rPr lang="it-IT" sz="2800" baseline="0" dirty="0"/>
+              <a:rPr lang="it-IT" sz="2800" baseline="0" dirty="0">
+                <a:latin typeface="Aptos" panose="020B0004020202020204" pitchFamily="34" charset="0"/>
+              </a:rPr>
               <a:t>Giacomo Cappon</a:t>
             </a:r>
-            <a:endParaRPr lang="en-GB" sz="2800" dirty="0"/>
+            <a:endParaRPr lang="en-GB" sz="2800" dirty="0">
+              <a:latin typeface="Aptos" panose="020B0004020202020204" pitchFamily="34" charset="0"/>
+            </a:endParaRPr>
           </a:p>
         </p:txBody>
       </p:sp>
@@ -3134,7 +3313,7 @@
                 <a:effectLst/>
                 <a:uLnTx/>
                 <a:uFillTx/>
-                <a:latin typeface="Palatino Linotype" panose="02040502050505030304" pitchFamily="18" charset="0"/>
+                <a:latin typeface="Aptos" panose="020B0004020202020204" pitchFamily="34" charset="0"/>
                 <a:ea typeface="+mj-ea"/>
                 <a:cs typeface="+mj-cs"/>
               </a:rPr>
@@ -3151,7 +3330,7 @@
                 <a:effectLst/>
                 <a:uLnTx/>
                 <a:uFillTx/>
-                <a:latin typeface="Palatino Linotype" panose="02040502050505030304" pitchFamily="18" charset="0"/>
+                <a:latin typeface="Aptos" panose="020B0004020202020204" pitchFamily="34" charset="0"/>
                 <a:ea typeface="+mj-ea"/>
                 <a:cs typeface="+mj-cs"/>
               </a:rPr>
@@ -3168,7 +3347,7 @@
                 <a:effectLst/>
                 <a:uLnTx/>
                 <a:uFillTx/>
-                <a:latin typeface="Palatino Linotype" panose="02040502050505030304" pitchFamily="18" charset="0"/>
+                <a:latin typeface="Aptos" panose="020B0004020202020204" pitchFamily="34" charset="0"/>
                 <a:ea typeface="+mj-ea"/>
                 <a:cs typeface="+mj-cs"/>
               </a:rPr>
@@ -3184,7 +3363,7 @@
                 <a:effectLst/>
                 <a:uLnTx/>
                 <a:uFillTx/>
-                <a:latin typeface="Palatino Linotype" panose="02040502050505030304" pitchFamily="18" charset="0"/>
+                <a:latin typeface="Aptos" panose="020B0004020202020204" pitchFamily="34" charset="0"/>
                 <a:ea typeface="+mj-ea"/>
                 <a:cs typeface="+mj-cs"/>
               </a:rPr>
@@ -3201,7 +3380,7 @@
                 <a:effectLst/>
                 <a:uLnTx/>
                 <a:uFillTx/>
-                <a:latin typeface="Palatino Linotype" panose="02040502050505030304" pitchFamily="18" charset="0"/>
+                <a:latin typeface="Aptos" panose="020B0004020202020204" pitchFamily="34" charset="0"/>
                 <a:ea typeface="+mj-ea"/>
                 <a:cs typeface="+mj-cs"/>
               </a:rPr>
@@ -3218,13 +3397,15 @@
                 <a:effectLst/>
                 <a:uLnTx/>
                 <a:uFillTx/>
-                <a:latin typeface="Palatino Linotype" panose="02040502050505030304" pitchFamily="18" charset="0"/>
+                <a:latin typeface="Aptos" panose="020B0004020202020204" pitchFamily="34" charset="0"/>
                 <a:ea typeface="+mj-ea"/>
                 <a:cs typeface="+mj-cs"/>
               </a:rPr>
               <a:t>Engineering</a:t>
             </a:r>
-            <a:endParaRPr lang="en-GB" sz="1100" cap="small" baseline="0" dirty="0"/>
+            <a:endParaRPr lang="en-GB" sz="1100" cap="small" baseline="0" dirty="0">
+              <a:latin typeface="Aptos" panose="020B0004020202020204" pitchFamily="34" charset="0"/>
+            </a:endParaRPr>
           </a:p>
         </p:txBody>
       </p:sp>
@@ -3695,12 +3876,14 @@
                     <a:tint val="75000"/>
                   </a:schemeClr>
                 </a:solidFill>
+                <a:latin typeface="Aptos" panose="020B0004020202020204" pitchFamily="34" charset="0"/>
               </a:defRPr>
             </a:lvl1pPr>
           </a:lstStyle>
           <a:p>
             <a:fld id="{31DE2C5B-556E-47B8-A792-024C2FCA4ACC}" type="slidenum">
               <a:rPr lang="en-GB" smtClean="0"/>
+              <a:pPr/>
               <a:t>‹#›</a:t>
             </a:fld>
             <a:endParaRPr lang="en-GB"/>
@@ -3736,7 +3919,7 @@
           <a:solidFill>
             <a:schemeClr val="tx1"/>
           </a:solidFill>
-          <a:latin typeface="Palatino Linotype" panose="02040502050505030304" pitchFamily="18" charset="0"/>
+          <a:latin typeface="Aptos" panose="020B0004020202020204" pitchFamily="34" charset="0"/>
           <a:ea typeface="+mj-ea"/>
           <a:cs typeface="+mj-cs"/>
         </a:defRPr>
@@ -3759,7 +3942,7 @@
           <a:solidFill>
             <a:schemeClr val="tx1"/>
           </a:solidFill>
-          <a:latin typeface="Palatino Linotype" panose="02040502050505030304" pitchFamily="18" charset="0"/>
+          <a:latin typeface="Aptos" panose="020B0004020202020204" pitchFamily="34" charset="0"/>
           <a:ea typeface="+mn-ea"/>
           <a:cs typeface="+mn-cs"/>
         </a:defRPr>
@@ -3780,7 +3963,7 @@
           <a:solidFill>
             <a:schemeClr val="tx1"/>
           </a:solidFill>
-          <a:latin typeface="Palatino Linotype" panose="02040502050505030304" pitchFamily="18" charset="0"/>
+          <a:latin typeface="Aptos" panose="020B0004020202020204" pitchFamily="34" charset="0"/>
           <a:ea typeface="+mn-ea"/>
           <a:cs typeface="+mn-cs"/>
         </a:defRPr>
@@ -3801,7 +3984,7 @@
           <a:solidFill>
             <a:schemeClr val="tx1"/>
           </a:solidFill>
-          <a:latin typeface="Palatino Linotype" panose="02040502050505030304" pitchFamily="18" charset="0"/>
+          <a:latin typeface="Aptos" panose="020B0004020202020204" pitchFamily="34" charset="0"/>
           <a:ea typeface="+mn-ea"/>
           <a:cs typeface="+mn-cs"/>
         </a:defRPr>
@@ -3822,7 +4005,7 @@
           <a:solidFill>
             <a:schemeClr val="tx1"/>
           </a:solidFill>
-          <a:latin typeface="Palatino Linotype" panose="02040502050505030304" pitchFamily="18" charset="0"/>
+          <a:latin typeface="Aptos" panose="020B0004020202020204" pitchFamily="34" charset="0"/>
           <a:ea typeface="+mn-ea"/>
           <a:cs typeface="+mn-cs"/>
         </a:defRPr>
@@ -3843,7 +4026,7 @@
           <a:solidFill>
             <a:schemeClr val="tx1"/>
           </a:solidFill>
-          <a:latin typeface="Palatino Linotype" panose="02040502050505030304" pitchFamily="18" charset="0"/>
+          <a:latin typeface="Aptos" panose="020B0004020202020204" pitchFamily="34" charset="0"/>
           <a:ea typeface="+mn-ea"/>
           <a:cs typeface="+mn-cs"/>
         </a:defRPr>
@@ -4077,6 +4260,293 @@
   <p:cSld>
     <p:spTree>
       <p:nvGrpSpPr>
+        <p:cNvPr id="1" name="">
+          <a:extLst>
+            <a:ext uri="{FF2B5EF4-FFF2-40B4-BE49-F238E27FC236}">
+              <a16:creationId xmlns:a16="http://schemas.microsoft.com/office/drawing/2014/main" id="{97E0CE7A-1693-09DA-FD9F-E0965E6CC173}"/>
+            </a:ext>
+          </a:extLst>
+        </p:cNvPr>
+        <p:cNvGrpSpPr/>
+        <p:nvPr/>
+      </p:nvGrpSpPr>
+      <p:grpSpPr>
+        <a:xfrm>
+          <a:off x="0" y="0"/>
+          <a:ext cx="0" cy="0"/>
+          <a:chOff x="0" y="0"/>
+          <a:chExt cx="0" cy="0"/>
+        </a:xfrm>
+      </p:grpSpPr>
+      <p:sp>
+        <p:nvSpPr>
+          <p:cNvPr id="2" name="Titolo 1">
+            <a:extLst>
+              <a:ext uri="{FF2B5EF4-FFF2-40B4-BE49-F238E27FC236}">
+                <a16:creationId xmlns:a16="http://schemas.microsoft.com/office/drawing/2014/main" id="{1E73E35A-1259-1E64-8E6F-D8DDDB89D984}"/>
+              </a:ext>
+            </a:extLst>
+          </p:cNvPr>
+          <p:cNvSpPr>
+            <a:spLocks noGrp="1"/>
+          </p:cNvSpPr>
+          <p:nvPr>
+            <p:ph type="title"/>
+          </p:nvPr>
+        </p:nvSpPr>
+        <p:spPr/>
+        <p:txBody>
+          <a:bodyPr/>
+          <a:lstStyle/>
+          <a:p>
+            <a:r>
+              <a:rPr lang="it-IT" dirty="0"/>
+              <a:t>(</a:t>
+            </a:r>
+            <a:r>
+              <a:rPr lang="it-IT" dirty="0" err="1"/>
+              <a:t>Other</a:t>
+            </a:r>
+            <a:r>
+              <a:rPr lang="it-IT" dirty="0"/>
+              <a:t>) </a:t>
+            </a:r>
+            <a:r>
+              <a:rPr lang="it-IT" dirty="0" err="1"/>
+              <a:t>Examples</a:t>
+            </a:r>
+            <a:r>
+              <a:rPr lang="it-IT" dirty="0"/>
+              <a:t> of </a:t>
+            </a:r>
+            <a:r>
+              <a:rPr lang="it-IT" dirty="0" err="1"/>
+              <a:t>response</a:t>
+            </a:r>
+            <a:r>
+              <a:rPr lang="it-IT" dirty="0"/>
+              <a:t> </a:t>
+            </a:r>
+            <a:r>
+              <a:rPr lang="it-IT" dirty="0" err="1"/>
+              <a:t>headers</a:t>
+            </a:r>
+            <a:endParaRPr lang="en-GB" dirty="0"/>
+          </a:p>
+        </p:txBody>
+      </p:sp>
+      <p:sp>
+        <p:nvSpPr>
+          <p:cNvPr id="3" name="Segnaposto contenuto 2">
+            <a:extLst>
+              <a:ext uri="{FF2B5EF4-FFF2-40B4-BE49-F238E27FC236}">
+                <a16:creationId xmlns:a16="http://schemas.microsoft.com/office/drawing/2014/main" id="{2E9D6CE8-5D87-A7C7-E9B5-5BA0196527AD}"/>
+              </a:ext>
+            </a:extLst>
+          </p:cNvPr>
+          <p:cNvSpPr>
+            <a:spLocks noGrp="1"/>
+          </p:cNvSpPr>
+          <p:nvPr>
+            <p:ph idx="1"/>
+          </p:nvPr>
+        </p:nvSpPr>
+        <p:spPr/>
+        <p:txBody>
+          <a:bodyPr/>
+          <a:lstStyle/>
+          <a:p>
+            <a:r>
+              <a:rPr lang="en-US" i="1" dirty="0"/>
+              <a:t>Content-Language</a:t>
+            </a:r>
+            <a:r>
+              <a:rPr lang="en-US" dirty="0"/>
+              <a:t>: the natural language used in the page</a:t>
+            </a:r>
+          </a:p>
+          <a:p>
+            <a:r>
+              <a:rPr lang="en-US" i="1" dirty="0"/>
+              <a:t>Expires</a:t>
+            </a:r>
+            <a:r>
+              <a:rPr lang="en-US" dirty="0"/>
+              <a:t>: </a:t>
+            </a:r>
+            <a:r>
+              <a:rPr lang="en-GB" dirty="0"/>
+              <a:t>Time and date when the page stops being valid</a:t>
+            </a:r>
+          </a:p>
+          <a:p>
+            <a:r>
+              <a:rPr lang="it-IT" i="1" dirty="0" err="1"/>
+              <a:t>ETag</a:t>
+            </a:r>
+            <a:r>
+              <a:rPr lang="it-IT" dirty="0"/>
+              <a:t>: </a:t>
+            </a:r>
+            <a:r>
+              <a:rPr lang="it-IT" dirty="0" err="1"/>
+              <a:t>tag</a:t>
+            </a:r>
+            <a:r>
+              <a:rPr lang="it-IT" dirty="0"/>
+              <a:t> for the </a:t>
+            </a:r>
+            <a:r>
+              <a:rPr lang="it-IT" dirty="0" err="1"/>
+              <a:t>content</a:t>
+            </a:r>
+            <a:r>
+              <a:rPr lang="it-IT" dirty="0"/>
+              <a:t> of the page (</a:t>
+            </a:r>
+            <a:r>
+              <a:rPr lang="it-IT" dirty="0" err="1"/>
+              <a:t>used</a:t>
+            </a:r>
+            <a:r>
+              <a:rPr lang="it-IT" dirty="0"/>
+              <a:t> for </a:t>
+            </a:r>
+            <a:r>
+              <a:rPr lang="it-IT" dirty="0" err="1"/>
+              <a:t>caching</a:t>
+            </a:r>
+            <a:r>
+              <a:rPr lang="it-IT" dirty="0"/>
+              <a:t>)</a:t>
+            </a:r>
+          </a:p>
+          <a:p>
+            <a:pPr algn="just"/>
+            <a:r>
+              <a:rPr lang="it-IT" i="1" dirty="0"/>
+              <a:t>Location</a:t>
+            </a:r>
+            <a:r>
+              <a:rPr lang="it-IT" dirty="0"/>
+              <a:t>: </a:t>
+            </a:r>
+            <a:r>
+              <a:rPr lang="en-GB" dirty="0"/>
+              <a:t>redirect the recipient to a location other than the requested URL for completion of the request or identification of a new resource</a:t>
+            </a:r>
+            <a:endParaRPr lang="it-IT" dirty="0"/>
+          </a:p>
+          <a:p>
+            <a:r>
+              <a:rPr lang="it-IT" dirty="0"/>
+              <a:t>…</a:t>
+            </a:r>
+            <a:endParaRPr lang="en-US" dirty="0"/>
+          </a:p>
+        </p:txBody>
+      </p:sp>
+      <p:sp>
+        <p:nvSpPr>
+          <p:cNvPr id="4" name="Segnaposto numero diapositiva 3">
+            <a:extLst>
+              <a:ext uri="{FF2B5EF4-FFF2-40B4-BE49-F238E27FC236}">
+                <a16:creationId xmlns:a16="http://schemas.microsoft.com/office/drawing/2014/main" id="{25E833CF-2D11-478E-4948-14B6502403C6}"/>
+              </a:ext>
+            </a:extLst>
+          </p:cNvPr>
+          <p:cNvSpPr>
+            <a:spLocks noGrp="1"/>
+          </p:cNvSpPr>
+          <p:nvPr>
+            <p:ph type="sldNum" sz="quarter" idx="12"/>
+          </p:nvPr>
+        </p:nvSpPr>
+        <p:spPr/>
+        <p:txBody>
+          <a:bodyPr/>
+          <a:lstStyle/>
+          <a:p>
+            <a:fld id="{31DE2C5B-556E-47B8-A792-024C2FCA4ACC}" type="slidenum">
+              <a:rPr lang="en-GB" smtClean="0"/>
+              <a:t>10</a:t>
+            </a:fld>
+            <a:endParaRPr lang="en-GB"/>
+          </a:p>
+        </p:txBody>
+      </p:sp>
+      <p:sp>
+        <p:nvSpPr>
+          <p:cNvPr id="5" name="Rectangle 4">
+            <a:extLst>
+              <a:ext uri="{FF2B5EF4-FFF2-40B4-BE49-F238E27FC236}">
+                <a16:creationId xmlns:a16="http://schemas.microsoft.com/office/drawing/2014/main" id="{9CBCBDD3-2ED5-B054-5365-6FCAF7BDD46A}"/>
+              </a:ext>
+            </a:extLst>
+          </p:cNvPr>
+          <p:cNvSpPr/>
+          <p:nvPr/>
+        </p:nvSpPr>
+        <p:spPr>
+          <a:xfrm>
+            <a:off x="9900745" y="325821"/>
+            <a:ext cx="1975945" cy="588579"/>
+          </a:xfrm>
+          <a:prstGeom prst="rect">
+            <a:avLst/>
+          </a:prstGeom>
+        </p:spPr>
+        <p:style>
+          <a:lnRef idx="2">
+            <a:schemeClr val="accent6">
+              <a:shade val="15000"/>
+            </a:schemeClr>
+          </a:lnRef>
+          <a:fillRef idx="1">
+            <a:schemeClr val="accent6"/>
+          </a:fillRef>
+          <a:effectRef idx="0">
+            <a:schemeClr val="accent6"/>
+          </a:effectRef>
+          <a:fontRef idx="minor">
+            <a:schemeClr val="lt1"/>
+          </a:fontRef>
+        </p:style>
+        <p:txBody>
+          <a:bodyPr rtlCol="0" anchor="ctr"/>
+          <a:lstStyle/>
+          <a:p>
+            <a:pPr algn="ctr"/>
+            <a:r>
+              <a:rPr lang="en-US" sz="2000" b="1" dirty="0">
+                <a:solidFill>
+                  <a:schemeClr val="bg1"/>
+                </a:solidFill>
+                <a:latin typeface="Aptos" panose="020B0004020202020204" pitchFamily="34" charset="0"/>
+              </a:rPr>
+              <a:t>BONUS</a:t>
+            </a:r>
+          </a:p>
+        </p:txBody>
+      </p:sp>
+    </p:spTree>
+    <p:extLst>
+      <p:ext uri="{BB962C8B-B14F-4D97-AF65-F5344CB8AC3E}">
+        <p14:creationId xmlns:p14="http://schemas.microsoft.com/office/powerpoint/2010/main" val="844995605"/>
+      </p:ext>
+    </p:extLst>
+  </p:cSld>
+  <p:clrMapOvr>
+    <a:masterClrMapping/>
+  </p:clrMapOvr>
+</p:sld>
+</file>
+
+<file path=ppt/slides/slide11.xml><?xml version="1.0" encoding="utf-8"?>
+<p:sld xmlns:a="http://schemas.openxmlformats.org/drawingml/2006/main" xmlns:r="http://schemas.openxmlformats.org/officeDocument/2006/relationships" xmlns:p="http://schemas.openxmlformats.org/presentationml/2006/main">
+  <p:cSld>
+    <p:spTree>
+      <p:nvGrpSpPr>
         <p:cNvPr id="1" name=""/>
         <p:cNvGrpSpPr/>
         <p:nvPr/>
@@ -4105,20 +4575,8 @@
           <a:lstStyle/>
           <a:p>
             <a:r>
-              <a:rPr lang="it-IT" dirty="0" err="1"/>
-              <a:t>Conditional</a:t>
-            </a:r>
-            <a:r>
               <a:rPr lang="it-IT" dirty="0"/>
-              <a:t> GET and </a:t>
-            </a:r>
-            <a:r>
-              <a:rPr lang="it-IT" dirty="0" err="1"/>
-              <a:t>Partial</a:t>
-            </a:r>
-            <a:r>
-              <a:rPr lang="it-IT" dirty="0"/>
-              <a:t> GET</a:t>
+              <a:t>GET</a:t>
             </a:r>
             <a:endParaRPr lang="en-GB" dirty="0"/>
           </a:p>
@@ -4137,7 +4595,7 @@
         <p:spPr>
           <a:xfrm>
             <a:off x="428172" y="1361167"/>
-            <a:ext cx="11368314" cy="5337345"/>
+            <a:ext cx="11368314" cy="4954574"/>
           </a:xfrm>
         </p:spPr>
         <p:txBody>
@@ -4147,108 +4605,178 @@
           <a:lstStyle/>
           <a:p>
             <a:r>
-              <a:rPr lang="en-GB" dirty="0"/>
-              <a:t>The GET can become </a:t>
-            </a:r>
-            <a:r>
-              <a:rPr lang="en-GB" b="1" dirty="0"/>
-              <a:t>conditional </a:t>
-            </a:r>
-            <a:r>
-              <a:rPr lang="en-GB" dirty="0"/>
-              <a:t>if the request message includes an </a:t>
-            </a:r>
-            <a:r>
-              <a:rPr lang="en-GB" i="1" dirty="0"/>
-              <a:t>If-Modified-Since</a:t>
-            </a:r>
-            <a:r>
-              <a:rPr lang="en-GB" dirty="0"/>
-              <a:t>, </a:t>
-            </a:r>
-            <a:r>
-              <a:rPr lang="en-GB" i="1" dirty="0"/>
-              <a:t>If-Unmodified-Since</a:t>
-            </a:r>
-            <a:r>
-              <a:rPr lang="en-GB" dirty="0"/>
-              <a:t>, </a:t>
-            </a:r>
-            <a:r>
-              <a:rPr lang="en-GB" i="1" dirty="0"/>
-              <a:t>If-Match</a:t>
-            </a:r>
-            <a:r>
-              <a:rPr lang="en-GB" dirty="0"/>
-              <a:t>, </a:t>
-            </a:r>
-            <a:r>
-              <a:rPr lang="en-GB" i="1" dirty="0"/>
-              <a:t>If-None-Match</a:t>
-            </a:r>
-            <a:r>
-              <a:rPr lang="en-GB" dirty="0"/>
-              <a:t>, or </a:t>
-            </a:r>
-            <a:r>
-              <a:rPr lang="en-GB" i="1" dirty="0"/>
-              <a:t>If-Range</a:t>
-            </a:r>
-            <a:r>
-              <a:rPr lang="en-GB" dirty="0"/>
-              <a:t> header field. </a:t>
-            </a:r>
-          </a:p>
-          <a:p>
-            <a:pPr lvl="1"/>
-            <a:r>
-              <a:rPr lang="en-GB" sz="2400" dirty="0"/>
-              <a:t>The content is transferred only under the circumstances described by the conditional header field(s). </a:t>
-            </a:r>
-          </a:p>
-          <a:p>
-            <a:pPr lvl="1"/>
-            <a:r>
-              <a:rPr lang="en-GB" sz="2400" dirty="0"/>
-              <a:t>The conditional GET reduces unnecessary network usage by allowing cached entities to be refreshed without requiring the transfer of data already held by the client.</a:t>
-            </a:r>
-          </a:p>
-          <a:p>
-            <a:r>
-              <a:rPr lang="en-GB" dirty="0"/>
-              <a:t>The GET can become </a:t>
-            </a:r>
-            <a:r>
-              <a:rPr lang="en-GB" b="1" dirty="0"/>
-              <a:t>partial</a:t>
-            </a:r>
-            <a:r>
-              <a:rPr lang="en-GB" dirty="0"/>
-              <a:t> if the request message includes a </a:t>
-            </a:r>
-            <a:r>
-              <a:rPr lang="en-GB" i="1" dirty="0"/>
-              <a:t>Range</a:t>
-            </a:r>
-            <a:r>
-              <a:rPr lang="en-GB" dirty="0"/>
-              <a:t> header field. </a:t>
-            </a:r>
-          </a:p>
-          <a:p>
-            <a:pPr lvl="1"/>
-            <a:r>
-              <a:rPr lang="en-GB" sz="2400" dirty="0"/>
-              <a:t>Only part of the entity is transferred. </a:t>
-            </a:r>
-          </a:p>
-          <a:p>
-            <a:pPr lvl="1"/>
-            <a:r>
-              <a:rPr lang="en-GB" sz="2400" dirty="0"/>
-              <a:t>The partial GET method reduces unnecessary network usage by allowing partially-retrieved entities to be completed without transferring data already held by the client.</a:t>
-            </a:r>
-            <a:endParaRPr lang="it-IT" sz="1800" dirty="0"/>
+              <a:rPr lang="en-US" b="1" dirty="0"/>
+              <a:t>GET</a:t>
+            </a:r>
+            <a:r>
+              <a:rPr lang="en-US" dirty="0"/>
+              <a:t>: </a:t>
+            </a:r>
+            <a:r>
+              <a:rPr lang="en-US" sz="2400" noProof="0" dirty="0"/>
+              <a:t>Retrieves a resource</a:t>
+            </a:r>
+            <a:r>
+              <a:rPr lang="en-US" dirty="0"/>
+              <a:t>.</a:t>
+            </a:r>
+          </a:p>
+          <a:p>
+            <a:pPr marL="0" indent="0">
+              <a:buNone/>
+            </a:pPr>
+            <a:r>
+              <a:rPr lang="en-US" dirty="0"/>
+              <a:t>			GET / HTTP/1.1 </a:t>
+            </a:r>
+          </a:p>
+          <a:p>
+            <a:pPr marL="0" indent="0">
+              <a:buNone/>
+            </a:pPr>
+            <a:r>
+              <a:rPr lang="en-US" dirty="0"/>
+              <a:t>			Host: </a:t>
+            </a:r>
+            <a:r>
+              <a:rPr lang="en-US" dirty="0" err="1"/>
+              <a:t>www.example.com</a:t>
+            </a:r>
+            <a:endParaRPr lang="en-US" dirty="0"/>
+          </a:p>
+          <a:p>
+            <a:pPr marL="0" indent="0">
+              <a:buNone/>
+            </a:pPr>
+            <a:r>
+              <a:rPr lang="en-US" dirty="0"/>
+              <a:t>			Accept-Language: </a:t>
+            </a:r>
+            <a:r>
+              <a:rPr lang="en-US" dirty="0" err="1"/>
+              <a:t>en</a:t>
+            </a:r>
+            <a:endParaRPr lang="en-US" dirty="0"/>
+          </a:p>
+        </p:txBody>
+      </p:sp>
+      <p:pic>
+        <p:nvPicPr>
+          <p:cNvPr id="14" name="Immagine 13"/>
+          <p:cNvPicPr>
+            <a:picLocks noChangeAspect="1"/>
+          </p:cNvPicPr>
+          <p:nvPr/>
+        </p:nvPicPr>
+        <p:blipFill>
+          <a:blip r:embed="rId3">
+            <a:extLst>
+              <a:ext uri="{28A0092B-C50C-407E-A947-70E740481C1C}">
+                <a14:useLocalDpi xmlns:a14="http://schemas.microsoft.com/office/drawing/2010/main" val="0"/>
+              </a:ext>
+            </a:extLst>
+          </a:blip>
+          <a:stretch>
+            <a:fillRect/>
+          </a:stretch>
+        </p:blipFill>
+        <p:spPr>
+          <a:xfrm>
+            <a:off x="7186152" y="3415958"/>
+            <a:ext cx="4549534" cy="3238781"/>
+          </a:xfrm>
+          <a:prstGeom prst="rect">
+            <a:avLst/>
+          </a:prstGeom>
+        </p:spPr>
+      </p:pic>
+      <p:pic>
+        <p:nvPicPr>
+          <p:cNvPr id="15" name="Immagine 14"/>
+          <p:cNvPicPr>
+            <a:picLocks noChangeAspect="1"/>
+          </p:cNvPicPr>
+          <p:nvPr/>
+        </p:nvPicPr>
+        <p:blipFill>
+          <a:blip r:embed="rId4">
+            <a:extLst>
+              <a:ext uri="{28A0092B-C50C-407E-A947-70E740481C1C}">
+                <a14:useLocalDpi xmlns:a14="http://schemas.microsoft.com/office/drawing/2010/main" val="0"/>
+              </a:ext>
+            </a:extLst>
+          </a:blip>
+          <a:stretch>
+            <a:fillRect/>
+          </a:stretch>
+        </p:blipFill>
+        <p:spPr>
+          <a:xfrm>
+            <a:off x="229698" y="4093722"/>
+            <a:ext cx="6535678" cy="1208217"/>
+          </a:xfrm>
+          <a:prstGeom prst="rect">
+            <a:avLst/>
+          </a:prstGeom>
+        </p:spPr>
+      </p:pic>
+      <p:sp>
+        <p:nvSpPr>
+          <p:cNvPr id="16" name="Rettangolo 15"/>
+          <p:cNvSpPr/>
+          <p:nvPr/>
+        </p:nvSpPr>
+        <p:spPr>
+          <a:xfrm>
+            <a:off x="155313" y="3693612"/>
+            <a:ext cx="2284472" cy="400110"/>
+          </a:xfrm>
+          <a:prstGeom prst="rect">
+            <a:avLst/>
+          </a:prstGeom>
+        </p:spPr>
+        <p:txBody>
+          <a:bodyPr wrap="none">
+            <a:spAutoFit/>
+          </a:bodyPr>
+          <a:lstStyle/>
+          <a:p>
+            <a:r>
+              <a:rPr lang="en-US" sz="2000" b="1" dirty="0">
+                <a:latin typeface="Aptos" panose="020B0004020202020204" pitchFamily="34" charset="0"/>
+              </a:rPr>
+              <a:t>Request example:</a:t>
+            </a:r>
+          </a:p>
+        </p:txBody>
+      </p:sp>
+      <p:sp>
+        <p:nvSpPr>
+          <p:cNvPr id="17" name="Rettangolo 16"/>
+          <p:cNvSpPr/>
+          <p:nvPr/>
+        </p:nvSpPr>
+        <p:spPr>
+          <a:xfrm>
+            <a:off x="7041667" y="2975239"/>
+            <a:ext cx="2475742" cy="400110"/>
+          </a:xfrm>
+          <a:prstGeom prst="rect">
+            <a:avLst/>
+          </a:prstGeom>
+        </p:spPr>
+        <p:txBody>
+          <a:bodyPr wrap="none">
+            <a:spAutoFit/>
+          </a:bodyPr>
+          <a:lstStyle/>
+          <a:p>
+            <a:r>
+              <a:rPr lang="en-US" sz="2000" b="1" dirty="0">
+                <a:latin typeface="Aptos" panose="020B0004020202020204" pitchFamily="34" charset="0"/>
+              </a:rPr>
+              <a:t>Response example:</a:t>
+            </a:r>
           </a:p>
         </p:txBody>
       </p:sp>
@@ -4269,7 +4797,7 @@
           <a:p>
             <a:fld id="{31DE2C5B-556E-47B8-A792-024C2FCA4ACC}" type="slidenum">
               <a:rPr lang="en-GB" smtClean="0"/>
-              <a:t>10</a:t>
+              <a:t>11</a:t>
             </a:fld>
             <a:endParaRPr lang="en-GB"/>
           </a:p>
@@ -4278,158 +4806,17 @@
     </p:spTree>
     <p:extLst>
       <p:ext uri="{BB962C8B-B14F-4D97-AF65-F5344CB8AC3E}">
-        <p14:creationId xmlns:p14="http://schemas.microsoft.com/office/powerpoint/2010/main" val="3310644876"/>
+        <p14:creationId xmlns:p14="http://schemas.microsoft.com/office/powerpoint/2010/main" val="1011575136"/>
       </p:ext>
     </p:extLst>
   </p:cSld>
   <p:clrMapOvr>
     <a:masterClrMapping/>
   </p:clrMapOvr>
-  <p:timing>
-    <p:tnLst>
-      <p:par>
-        <p:cTn id="1" dur="indefinite" restart="never" nodeType="tmRoot">
-          <p:childTnLst>
-            <p:seq concurrent="1" nextAc="seek">
-              <p:cTn id="2" dur="indefinite" nodeType="mainSeq">
-                <p:childTnLst>
-                  <p:par>
-                    <p:cTn id="3" fill="hold">
-                      <p:stCondLst>
-                        <p:cond delay="indefinite"/>
-                      </p:stCondLst>
-                      <p:childTnLst>
-                        <p:par>
-                          <p:cTn id="4" fill="hold">
-                            <p:stCondLst>
-                              <p:cond delay="0"/>
-                            </p:stCondLst>
-                            <p:childTnLst>
-                              <p:par>
-                                <p:cTn id="5" presetID="1" presetClass="entr" presetSubtype="0" fill="hold" nodeType="clickEffect">
-                                  <p:stCondLst>
-                                    <p:cond delay="0"/>
-                                  </p:stCondLst>
-                                  <p:childTnLst>
-                                    <p:set>
-                                      <p:cBhvr>
-                                        <p:cTn id="6" dur="1" fill="hold">
-                                          <p:stCondLst>
-                                            <p:cond delay="0"/>
-                                          </p:stCondLst>
-                                        </p:cTn>
-                                        <p:tgtEl>
-                                          <p:spTgt spid="3">
-                                            <p:txEl>
-                                              <p:pRg st="3" end="3"/>
-                                            </p:txEl>
-                                          </p:spTgt>
-                                        </p:tgtEl>
-                                        <p:attrNameLst>
-                                          <p:attrName>style.visibility</p:attrName>
-                                        </p:attrNameLst>
-                                      </p:cBhvr>
-                                      <p:to>
-                                        <p:strVal val="visible"/>
-                                      </p:to>
-                                    </p:set>
-                                  </p:childTnLst>
-                                </p:cTn>
-                              </p:par>
-                              <p:par>
-                                <p:cTn id="7" presetID="1" presetClass="entr" presetSubtype="0" fill="hold" nodeType="withEffect">
-                                  <p:stCondLst>
-                                    <p:cond delay="0"/>
-                                  </p:stCondLst>
-                                  <p:childTnLst>
-                                    <p:set>
-                                      <p:cBhvr>
-                                        <p:cTn id="8" dur="1" fill="hold">
-                                          <p:stCondLst>
-                                            <p:cond delay="0"/>
-                                          </p:stCondLst>
-                                        </p:cTn>
-                                        <p:tgtEl>
-                                          <p:spTgt spid="3">
-                                            <p:txEl>
-                                              <p:pRg st="4" end="4"/>
-                                            </p:txEl>
-                                          </p:spTgt>
-                                        </p:tgtEl>
-                                        <p:attrNameLst>
-                                          <p:attrName>style.visibility</p:attrName>
-                                        </p:attrNameLst>
-                                      </p:cBhvr>
-                                      <p:to>
-                                        <p:strVal val="visible"/>
-                                      </p:to>
-                                    </p:set>
-                                  </p:childTnLst>
-                                </p:cTn>
-                              </p:par>
-                              <p:par>
-                                <p:cTn id="9" presetID="1" presetClass="entr" presetSubtype="0" fill="hold" nodeType="withEffect">
-                                  <p:stCondLst>
-                                    <p:cond delay="0"/>
-                                  </p:stCondLst>
-                                  <p:childTnLst>
-                                    <p:set>
-                                      <p:cBhvr>
-                                        <p:cTn id="10" dur="1" fill="hold">
-                                          <p:stCondLst>
-                                            <p:cond delay="0"/>
-                                          </p:stCondLst>
-                                        </p:cTn>
-                                        <p:tgtEl>
-                                          <p:spTgt spid="3">
-                                            <p:txEl>
-                                              <p:pRg st="5" end="5"/>
-                                            </p:txEl>
-                                          </p:spTgt>
-                                        </p:tgtEl>
-                                        <p:attrNameLst>
-                                          <p:attrName>style.visibility</p:attrName>
-                                        </p:attrNameLst>
-                                      </p:cBhvr>
-                                      <p:to>
-                                        <p:strVal val="visible"/>
-                                      </p:to>
-                                    </p:set>
-                                  </p:childTnLst>
-                                </p:cTn>
-                              </p:par>
-                            </p:childTnLst>
-                          </p:cTn>
-                        </p:par>
-                      </p:childTnLst>
-                    </p:cTn>
-                  </p:par>
-                </p:childTnLst>
-              </p:cTn>
-              <p:prevCondLst>
-                <p:cond evt="onPrev" delay="0">
-                  <p:tgtEl>
-                    <p:sldTgt/>
-                  </p:tgtEl>
-                </p:cond>
-              </p:prevCondLst>
-              <p:nextCondLst>
-                <p:cond evt="onNext" delay="0">
-                  <p:tgtEl>
-                    <p:sldTgt/>
-                  </p:tgtEl>
-                </p:cond>
-              </p:nextCondLst>
-            </p:seq>
-          </p:childTnLst>
-        </p:cTn>
-      </p:par>
-    </p:tnLst>
-  </p:timing>
 </p:sld>
 </file>
 
-<file path=ppt/slides/slide11.xml><?xml version="1.0" encoding="utf-8"?>
+<file path=ppt/slides/slide12.xml><?xml version="1.0" encoding="utf-8"?>
 <p:sld xmlns:a="http://schemas.openxmlformats.org/drawingml/2006/main" xmlns:r="http://schemas.openxmlformats.org/officeDocument/2006/relationships" xmlns:p="http://schemas.openxmlformats.org/presentationml/2006/main">
   <p:cSld>
     <p:spTree>
@@ -4633,7 +5020,7 @@
           <a:p>
             <a:fld id="{31DE2C5B-556E-47B8-A792-024C2FCA4ACC}" type="slidenum">
               <a:rPr lang="en-GB" smtClean="0"/>
-              <a:t>11</a:t>
+              <a:t>12</a:t>
             </a:fld>
             <a:endParaRPr lang="en-GB"/>
           </a:p>
@@ -4865,7 +5252,7 @@
 </p:sld>
 </file>
 
-<file path=ppt/slides/slide12.xml><?xml version="1.0" encoding="utf-8"?>
+<file path=ppt/slides/slide13.xml><?xml version="1.0" encoding="utf-8"?>
 <p:sld xmlns:a="http://schemas.openxmlformats.org/drawingml/2006/main" xmlns:r="http://schemas.openxmlformats.org/officeDocument/2006/relationships" xmlns:p="http://schemas.openxmlformats.org/presentationml/2006/main">
   <p:cSld>
     <p:spTree>
@@ -5021,7 +5408,7 @@
           <a:p>
             <a:fld id="{31DE2C5B-556E-47B8-A792-024C2FCA4ACC}" type="slidenum">
               <a:rPr lang="en-GB" smtClean="0"/>
-              <a:t>12</a:t>
+              <a:t>13</a:t>
             </a:fld>
             <a:endParaRPr lang="en-GB"/>
           </a:p>
@@ -5217,7 +5604,7 @@
 </p:sld>
 </file>
 
-<file path=ppt/slides/slide13.xml><?xml version="1.0" encoding="utf-8"?>
+<file path=ppt/slides/slide14.xml><?xml version="1.0" encoding="utf-8"?>
 <p:sld xmlns:a="http://schemas.openxmlformats.org/drawingml/2006/main" xmlns:r="http://schemas.openxmlformats.org/officeDocument/2006/relationships" xmlns:p="http://schemas.openxmlformats.org/presentationml/2006/main">
   <p:cSld>
     <p:spTree>
@@ -5370,7 +5757,7 @@
           <a:p>
             <a:fld id="{31DE2C5B-556E-47B8-A792-024C2FCA4ACC}" type="slidenum">
               <a:rPr lang="en-GB" smtClean="0"/>
-              <a:t>13</a:t>
+              <a:t>14</a:t>
             </a:fld>
             <a:endParaRPr lang="en-GB"/>
           </a:p>
@@ -5530,7 +5917,7 @@
 </p:sld>
 </file>
 
-<file path=ppt/slides/slide14.xml><?xml version="1.0" encoding="utf-8"?>
+<file path=ppt/slides/slide15.xml><?xml version="1.0" encoding="utf-8"?>
 <p:sld xmlns:a="http://schemas.openxmlformats.org/drawingml/2006/main" xmlns:r="http://schemas.openxmlformats.org/officeDocument/2006/relationships" xmlns:p="http://schemas.openxmlformats.org/presentationml/2006/main">
   <p:cSld>
     <p:spTree>
@@ -5694,7 +6081,7 @@
           <a:p>
             <a:fld id="{31DE2C5B-556E-47B8-A792-024C2FCA4ACC}" type="slidenum">
               <a:rPr lang="en-GB" smtClean="0"/>
-              <a:t>14</a:t>
+              <a:t>15</a:t>
             </a:fld>
             <a:endParaRPr lang="en-GB"/>
           </a:p>
@@ -5747,7 +6134,7 @@
                 <a:solidFill>
                   <a:schemeClr val="bg1"/>
                 </a:solidFill>
-                <a:latin typeface="Palatino Linotype" panose="02040502050505030304" pitchFamily="18" charset="0"/>
+                <a:latin typeface="Aptos" panose="020B0004020202020204" pitchFamily="34" charset="0"/>
               </a:rPr>
               <a:t>BONUS</a:t>
             </a:r>
@@ -5944,7 +6331,7 @@
 </p:sld>
 </file>
 
-<file path=ppt/slides/slide15.xml><?xml version="1.0" encoding="utf-8"?>
+<file path=ppt/slides/slide16.xml><?xml version="1.0" encoding="utf-8"?>
 <p:sld xmlns:a="http://schemas.openxmlformats.org/drawingml/2006/main" xmlns:r="http://schemas.openxmlformats.org/officeDocument/2006/relationships" xmlns:p="http://schemas.openxmlformats.org/presentationml/2006/main">
   <p:cSld>
     <p:spTree>
@@ -6098,7 +6485,7 @@
           <a:p>
             <a:fld id="{31DE2C5B-556E-47B8-A792-024C2FCA4ACC}" type="slidenum">
               <a:rPr lang="en-GB" smtClean="0"/>
-              <a:t>15</a:t>
+              <a:t>16</a:t>
             </a:fld>
             <a:endParaRPr lang="en-GB"/>
           </a:p>
@@ -6338,7 +6725,7 @@
 </p:sld>
 </file>
 
-<file path=ppt/slides/slide16.xml><?xml version="1.0" encoding="utf-8"?>
+<file path=ppt/slides/slide17.xml><?xml version="1.0" encoding="utf-8"?>
 <p:sld xmlns:a="http://schemas.openxmlformats.org/drawingml/2006/main" xmlns:r="http://schemas.openxmlformats.org/officeDocument/2006/relationships" xmlns:p="http://schemas.openxmlformats.org/presentationml/2006/main">
   <p:cSld>
     <p:spTree>
@@ -6403,7 +6790,7 @@
           <p:nvPr>
             <p:extLst>
               <p:ext uri="{D42A27DB-BD31-4B8C-83A1-F6EECF244321}">
-                <p14:modId xmlns:p14="http://schemas.microsoft.com/office/powerpoint/2010/main" val="615196024"/>
+                <p14:modId xmlns:p14="http://schemas.microsoft.com/office/powerpoint/2010/main" val="3781630043"/>
               </p:ext>
             </p:extLst>
           </p:nvPr>
@@ -6471,12 +6858,12 @@
                       <a:pPr algn="ctr"/>
                       <a:r>
                         <a:rPr lang="it-IT" sz="1800" b="1" dirty="0">
-                          <a:latin typeface="Palatino Linotype" panose="02040502050505030304" pitchFamily="18" charset="0"/>
+                          <a:latin typeface="Aptos" panose="020B0004020202020204" pitchFamily="34" charset="0"/>
                         </a:rPr>
                         <a:t>METHOD</a:t>
                       </a:r>
                       <a:endParaRPr lang="en-GB" sz="1800" b="1" dirty="0">
-                        <a:latin typeface="Palatino Linotype" panose="02040502050505030304" pitchFamily="18" charset="0"/>
+                        <a:latin typeface="Aptos" panose="020B0004020202020204" pitchFamily="34" charset="0"/>
                       </a:endParaRPr>
                     </a:p>
                   </a:txBody>
@@ -6490,12 +6877,12 @@
                       <a:pPr algn="ctr"/>
                       <a:r>
                         <a:rPr lang="it-IT" sz="1800" b="1" dirty="0">
-                          <a:latin typeface="Palatino Linotype" panose="02040502050505030304" pitchFamily="18" charset="0"/>
+                          <a:latin typeface="Aptos" panose="020B0004020202020204" pitchFamily="34" charset="0"/>
                         </a:rPr>
                         <a:t>REQUEST HAS BODY</a:t>
                       </a:r>
                       <a:endParaRPr lang="en-GB" sz="1800" b="1" dirty="0">
-                        <a:latin typeface="Palatino Linotype" panose="02040502050505030304" pitchFamily="18" charset="0"/>
+                        <a:latin typeface="Aptos" panose="020B0004020202020204" pitchFamily="34" charset="0"/>
                       </a:endParaRPr>
                     </a:p>
                   </a:txBody>
@@ -6509,12 +6896,12 @@
                       <a:pPr algn="ctr"/>
                       <a:r>
                         <a:rPr lang="it-IT" sz="1800" b="1" dirty="0">
-                          <a:latin typeface="Palatino Linotype" panose="02040502050505030304" pitchFamily="18" charset="0"/>
+                          <a:latin typeface="Aptos" panose="020B0004020202020204" pitchFamily="34" charset="0"/>
                         </a:rPr>
                         <a:t>RESPONSE HAS BODY</a:t>
                       </a:r>
                       <a:endParaRPr lang="en-GB" sz="1800" b="1" dirty="0">
-                        <a:latin typeface="Palatino Linotype" panose="02040502050505030304" pitchFamily="18" charset="0"/>
+                        <a:latin typeface="Aptos" panose="020B0004020202020204" pitchFamily="34" charset="0"/>
                       </a:endParaRPr>
                     </a:p>
                   </a:txBody>
@@ -6528,12 +6915,12 @@
                       <a:pPr algn="ctr"/>
                       <a:r>
                         <a:rPr lang="it-IT" sz="1800" b="1" dirty="0">
-                          <a:latin typeface="Palatino Linotype" panose="02040502050505030304" pitchFamily="18" charset="0"/>
+                          <a:latin typeface="Aptos" panose="020B0004020202020204" pitchFamily="34" charset="0"/>
                         </a:rPr>
                         <a:t>IS SAFE</a:t>
                       </a:r>
                       <a:endParaRPr lang="en-GB" sz="1800" b="1" dirty="0">
-                        <a:latin typeface="Palatino Linotype" panose="02040502050505030304" pitchFamily="18" charset="0"/>
+                        <a:latin typeface="Aptos" panose="020B0004020202020204" pitchFamily="34" charset="0"/>
                       </a:endParaRPr>
                     </a:p>
                   </a:txBody>
@@ -6547,12 +6934,12 @@
                       <a:pPr algn="ctr"/>
                       <a:r>
                         <a:rPr lang="it-IT" sz="1800" b="1" dirty="0">
-                          <a:latin typeface="Palatino Linotype" panose="02040502050505030304" pitchFamily="18" charset="0"/>
+                          <a:latin typeface="Aptos" panose="020B0004020202020204" pitchFamily="34" charset="0"/>
                         </a:rPr>
                         <a:t>IS IDEMPOTENT</a:t>
                       </a:r>
                       <a:endParaRPr lang="en-GB" sz="1800" b="1" dirty="0">
-                        <a:latin typeface="Palatino Linotype" panose="02040502050505030304" pitchFamily="18" charset="0"/>
+                        <a:latin typeface="Aptos" panose="020B0004020202020204" pitchFamily="34" charset="0"/>
                       </a:endParaRPr>
                     </a:p>
                   </a:txBody>
@@ -6566,12 +6953,12 @@
                       <a:pPr algn="ctr"/>
                       <a:r>
                         <a:rPr lang="it-IT" sz="1800" b="1" dirty="0">
-                          <a:latin typeface="Palatino Linotype" panose="02040502050505030304" pitchFamily="18" charset="0"/>
+                          <a:latin typeface="Aptos" panose="020B0004020202020204" pitchFamily="34" charset="0"/>
                         </a:rPr>
                         <a:t>IS CACHEABLE</a:t>
                       </a:r>
                       <a:endParaRPr lang="en-GB" sz="1800" b="1" dirty="0">
-                        <a:latin typeface="Palatino Linotype" panose="02040502050505030304" pitchFamily="18" charset="0"/>
+                        <a:latin typeface="Aptos" panose="020B0004020202020204" pitchFamily="34" charset="0"/>
                       </a:endParaRPr>
                     </a:p>
                   </a:txBody>
@@ -6591,7 +6978,7 @@
                     <a:p>
                       <a:r>
                         <a:rPr lang="en-US" sz="1800" b="1" noProof="0" dirty="0">
-                          <a:latin typeface="Palatino Linotype" panose="02040502050505030304" pitchFamily="18" charset="0"/>
+                          <a:latin typeface="Aptos" panose="020B0004020202020204" pitchFamily="34" charset="0"/>
                         </a:rPr>
                         <a:t>GET</a:t>
                       </a:r>
@@ -6607,12 +6994,12 @@
                       <a:pPr algn="ctr"/>
                       <a:r>
                         <a:rPr lang="it-IT" sz="1800" dirty="0">
-                          <a:latin typeface="Palatino Linotype" panose="02040502050505030304" pitchFamily="18" charset="0"/>
+                          <a:latin typeface="Aptos" panose="020B0004020202020204" pitchFamily="34" charset="0"/>
                         </a:rPr>
                         <a:t>Optional</a:t>
                       </a:r>
                       <a:endParaRPr lang="en-GB" sz="1800" dirty="0">
-                        <a:latin typeface="Palatino Linotype" panose="02040502050505030304" pitchFamily="18" charset="0"/>
+                        <a:latin typeface="Aptos" panose="020B0004020202020204" pitchFamily="34" charset="0"/>
                       </a:endParaRPr>
                     </a:p>
                   </a:txBody>
@@ -6626,12 +7013,12 @@
                       <a:pPr algn="ctr"/>
                       <a:r>
                         <a:rPr lang="it-IT" sz="1800" dirty="0">
-                          <a:latin typeface="Palatino Linotype" panose="02040502050505030304" pitchFamily="18" charset="0"/>
+                          <a:latin typeface="Aptos" panose="020B0004020202020204" pitchFamily="34" charset="0"/>
                         </a:rPr>
                         <a:t>Yes</a:t>
                       </a:r>
                       <a:endParaRPr lang="en-GB" sz="1800" dirty="0">
-                        <a:latin typeface="Palatino Linotype" panose="02040502050505030304" pitchFamily="18" charset="0"/>
+                        <a:latin typeface="Aptos" panose="020B0004020202020204" pitchFamily="34" charset="0"/>
                       </a:endParaRPr>
                     </a:p>
                   </a:txBody>
@@ -6645,12 +7032,12 @@
                       <a:pPr algn="ctr"/>
                       <a:r>
                         <a:rPr lang="it-IT" sz="1800" dirty="0">
-                          <a:latin typeface="Palatino Linotype" panose="02040502050505030304" pitchFamily="18" charset="0"/>
+                          <a:latin typeface="Aptos" panose="020B0004020202020204" pitchFamily="34" charset="0"/>
                         </a:rPr>
                         <a:t>Yes</a:t>
                       </a:r>
                       <a:endParaRPr lang="en-GB" sz="1800" dirty="0">
-                        <a:latin typeface="Palatino Linotype" panose="02040502050505030304" pitchFamily="18" charset="0"/>
+                        <a:latin typeface="Aptos" panose="020B0004020202020204" pitchFamily="34" charset="0"/>
                       </a:endParaRPr>
                     </a:p>
                   </a:txBody>
@@ -6664,12 +7051,12 @@
                       <a:pPr algn="ctr"/>
                       <a:r>
                         <a:rPr lang="it-IT" sz="1800" dirty="0">
-                          <a:latin typeface="Palatino Linotype" panose="02040502050505030304" pitchFamily="18" charset="0"/>
+                          <a:latin typeface="Aptos" panose="020B0004020202020204" pitchFamily="34" charset="0"/>
                         </a:rPr>
                         <a:t>Yes</a:t>
                       </a:r>
                       <a:endParaRPr lang="en-GB" sz="1800" dirty="0">
-                        <a:latin typeface="Palatino Linotype" panose="02040502050505030304" pitchFamily="18" charset="0"/>
+                        <a:latin typeface="Aptos" panose="020B0004020202020204" pitchFamily="34" charset="0"/>
                       </a:endParaRPr>
                     </a:p>
                   </a:txBody>
@@ -6683,12 +7070,12 @@
                       <a:pPr algn="ctr"/>
                       <a:r>
                         <a:rPr lang="it-IT" sz="1800" dirty="0">
-                          <a:latin typeface="Palatino Linotype" panose="02040502050505030304" pitchFamily="18" charset="0"/>
+                          <a:latin typeface="Aptos" panose="020B0004020202020204" pitchFamily="34" charset="0"/>
                         </a:rPr>
                         <a:t>Yes</a:t>
                       </a:r>
                       <a:endParaRPr lang="en-GB" sz="1800" dirty="0">
-                        <a:latin typeface="Palatino Linotype" panose="02040502050505030304" pitchFamily="18" charset="0"/>
+                        <a:latin typeface="Aptos" panose="020B0004020202020204" pitchFamily="34" charset="0"/>
                       </a:endParaRPr>
                     </a:p>
                   </a:txBody>
@@ -6708,7 +7095,7 @@
                     <a:p>
                       <a:r>
                         <a:rPr lang="en-US" sz="1800" b="1" noProof="0" dirty="0">
-                          <a:latin typeface="Palatino Linotype" panose="02040502050505030304" pitchFamily="18" charset="0"/>
+                          <a:latin typeface="Aptos" panose="020B0004020202020204" pitchFamily="34" charset="0"/>
                         </a:rPr>
                         <a:t>HEAD</a:t>
                       </a:r>
@@ -6724,12 +7111,12 @@
                       <a:pPr algn="ctr"/>
                       <a:r>
                         <a:rPr lang="it-IT" sz="1800" dirty="0">
-                          <a:latin typeface="Palatino Linotype" panose="02040502050505030304" pitchFamily="18" charset="0"/>
+                          <a:latin typeface="Aptos" panose="020B0004020202020204" pitchFamily="34" charset="0"/>
                         </a:rPr>
                         <a:t>Optional</a:t>
                       </a:r>
                       <a:endParaRPr lang="en-GB" sz="1800" dirty="0">
-                        <a:latin typeface="Palatino Linotype" panose="02040502050505030304" pitchFamily="18" charset="0"/>
+                        <a:latin typeface="Aptos" panose="020B0004020202020204" pitchFamily="34" charset="0"/>
                       </a:endParaRPr>
                     </a:p>
                   </a:txBody>
@@ -6743,12 +7130,12 @@
                       <a:pPr algn="ctr"/>
                       <a:r>
                         <a:rPr lang="it-IT" sz="1800" dirty="0">
-                          <a:latin typeface="Palatino Linotype" panose="02040502050505030304" pitchFamily="18" charset="0"/>
+                          <a:latin typeface="Aptos" panose="020B0004020202020204" pitchFamily="34" charset="0"/>
                         </a:rPr>
                         <a:t>No</a:t>
                       </a:r>
                       <a:endParaRPr lang="en-GB" sz="1800" dirty="0">
-                        <a:latin typeface="Palatino Linotype" panose="02040502050505030304" pitchFamily="18" charset="0"/>
+                        <a:latin typeface="Aptos" panose="020B0004020202020204" pitchFamily="34" charset="0"/>
                       </a:endParaRPr>
                     </a:p>
                   </a:txBody>
@@ -6762,12 +7149,12 @@
                       <a:pPr algn="ctr"/>
                       <a:r>
                         <a:rPr lang="it-IT" sz="1800" dirty="0">
-                          <a:latin typeface="Palatino Linotype" panose="02040502050505030304" pitchFamily="18" charset="0"/>
+                          <a:latin typeface="Aptos" panose="020B0004020202020204" pitchFamily="34" charset="0"/>
                         </a:rPr>
                         <a:t>Yes</a:t>
                       </a:r>
                       <a:endParaRPr lang="en-GB" sz="1800" dirty="0">
-                        <a:latin typeface="Palatino Linotype" panose="02040502050505030304" pitchFamily="18" charset="0"/>
+                        <a:latin typeface="Aptos" panose="020B0004020202020204" pitchFamily="34" charset="0"/>
                       </a:endParaRPr>
                     </a:p>
                   </a:txBody>
@@ -6781,12 +7168,12 @@
                       <a:pPr algn="ctr"/>
                       <a:r>
                         <a:rPr lang="it-IT" sz="1800" dirty="0">
-                          <a:latin typeface="Palatino Linotype" panose="02040502050505030304" pitchFamily="18" charset="0"/>
+                          <a:latin typeface="Aptos" panose="020B0004020202020204" pitchFamily="34" charset="0"/>
                         </a:rPr>
                         <a:t>Yes</a:t>
                       </a:r>
                       <a:endParaRPr lang="en-GB" sz="1800" dirty="0">
-                        <a:latin typeface="Palatino Linotype" panose="02040502050505030304" pitchFamily="18" charset="0"/>
+                        <a:latin typeface="Aptos" panose="020B0004020202020204" pitchFamily="34" charset="0"/>
                       </a:endParaRPr>
                     </a:p>
                   </a:txBody>
@@ -6800,12 +7187,12 @@
                       <a:pPr algn="ctr"/>
                       <a:r>
                         <a:rPr lang="it-IT" sz="1800" dirty="0">
-                          <a:latin typeface="Palatino Linotype" panose="02040502050505030304" pitchFamily="18" charset="0"/>
+                          <a:latin typeface="Aptos" panose="020B0004020202020204" pitchFamily="34" charset="0"/>
                         </a:rPr>
                         <a:t>Yes</a:t>
                       </a:r>
                       <a:endParaRPr lang="en-GB" sz="1800" dirty="0">
-                        <a:latin typeface="Palatino Linotype" panose="02040502050505030304" pitchFamily="18" charset="0"/>
+                        <a:latin typeface="Aptos" panose="020B0004020202020204" pitchFamily="34" charset="0"/>
                       </a:endParaRPr>
                     </a:p>
                   </a:txBody>
@@ -6825,7 +7212,7 @@
                     <a:p>
                       <a:r>
                         <a:rPr lang="en-US" sz="1800" b="1" noProof="0" dirty="0">
-                          <a:latin typeface="Palatino Linotype" panose="02040502050505030304" pitchFamily="18" charset="0"/>
+                          <a:latin typeface="Aptos" panose="020B0004020202020204" pitchFamily="34" charset="0"/>
                         </a:rPr>
                         <a:t>POST</a:t>
                       </a:r>
@@ -6841,12 +7228,12 @@
                       <a:pPr algn="ctr"/>
                       <a:r>
                         <a:rPr lang="it-IT" sz="1800" dirty="0">
-                          <a:latin typeface="Palatino Linotype" panose="02040502050505030304" pitchFamily="18" charset="0"/>
+                          <a:latin typeface="Aptos" panose="020B0004020202020204" pitchFamily="34" charset="0"/>
                         </a:rPr>
                         <a:t>Yes</a:t>
                       </a:r>
                       <a:endParaRPr lang="en-GB" sz="1800" dirty="0">
-                        <a:latin typeface="Palatino Linotype" panose="02040502050505030304" pitchFamily="18" charset="0"/>
+                        <a:latin typeface="Aptos" panose="020B0004020202020204" pitchFamily="34" charset="0"/>
                       </a:endParaRPr>
                     </a:p>
                   </a:txBody>
@@ -6860,12 +7247,12 @@
                       <a:pPr algn="ctr"/>
                       <a:r>
                         <a:rPr lang="it-IT" sz="1800" dirty="0">
-                          <a:latin typeface="Palatino Linotype" panose="02040502050505030304" pitchFamily="18" charset="0"/>
+                          <a:latin typeface="Aptos" panose="020B0004020202020204" pitchFamily="34" charset="0"/>
                         </a:rPr>
                         <a:t>Yes</a:t>
                       </a:r>
                       <a:endParaRPr lang="en-GB" sz="1800" dirty="0">
-                        <a:latin typeface="Palatino Linotype" panose="02040502050505030304" pitchFamily="18" charset="0"/>
+                        <a:latin typeface="Aptos" panose="020B0004020202020204" pitchFamily="34" charset="0"/>
                       </a:endParaRPr>
                     </a:p>
                   </a:txBody>
@@ -6879,12 +7266,12 @@
                       <a:pPr algn="ctr"/>
                       <a:r>
                         <a:rPr lang="it-IT" sz="1800" dirty="0">
-                          <a:latin typeface="Palatino Linotype" panose="02040502050505030304" pitchFamily="18" charset="0"/>
+                          <a:latin typeface="Aptos" panose="020B0004020202020204" pitchFamily="34" charset="0"/>
                         </a:rPr>
                         <a:t>No</a:t>
                       </a:r>
                       <a:endParaRPr lang="en-GB" sz="1800" dirty="0">
-                        <a:latin typeface="Palatino Linotype" panose="02040502050505030304" pitchFamily="18" charset="0"/>
+                        <a:latin typeface="Aptos" panose="020B0004020202020204" pitchFamily="34" charset="0"/>
                       </a:endParaRPr>
                     </a:p>
                   </a:txBody>
@@ -6898,12 +7285,12 @@
                       <a:pPr algn="ctr"/>
                       <a:r>
                         <a:rPr lang="it-IT" sz="1800" dirty="0">
-                          <a:latin typeface="Palatino Linotype" panose="02040502050505030304" pitchFamily="18" charset="0"/>
+                          <a:latin typeface="Aptos" panose="020B0004020202020204" pitchFamily="34" charset="0"/>
                         </a:rPr>
                         <a:t>No</a:t>
                       </a:r>
                       <a:endParaRPr lang="en-GB" sz="1800" dirty="0">
-                        <a:latin typeface="Palatino Linotype" panose="02040502050505030304" pitchFamily="18" charset="0"/>
+                        <a:latin typeface="Aptos" panose="020B0004020202020204" pitchFamily="34" charset="0"/>
                       </a:endParaRPr>
                     </a:p>
                   </a:txBody>
@@ -6917,12 +7304,12 @@
                       <a:pPr algn="ctr"/>
                       <a:r>
                         <a:rPr lang="it-IT" sz="1800" dirty="0">
-                          <a:latin typeface="Palatino Linotype" panose="02040502050505030304" pitchFamily="18" charset="0"/>
+                          <a:latin typeface="Aptos" panose="020B0004020202020204" pitchFamily="34" charset="0"/>
                         </a:rPr>
                         <a:t>Yes</a:t>
                       </a:r>
                       <a:endParaRPr lang="en-GB" sz="1800" dirty="0">
-                        <a:latin typeface="Palatino Linotype" panose="02040502050505030304" pitchFamily="18" charset="0"/>
+                        <a:latin typeface="Aptos" panose="020B0004020202020204" pitchFamily="34" charset="0"/>
                       </a:endParaRPr>
                     </a:p>
                   </a:txBody>
@@ -6942,7 +7329,7 @@
                     <a:p>
                       <a:r>
                         <a:rPr lang="en-US" sz="1800" b="1" noProof="0" dirty="0">
-                          <a:latin typeface="Palatino Linotype" panose="02040502050505030304" pitchFamily="18" charset="0"/>
+                          <a:latin typeface="Aptos" panose="020B0004020202020204" pitchFamily="34" charset="0"/>
                         </a:rPr>
                         <a:t>PUT</a:t>
                       </a:r>
@@ -6958,12 +7345,12 @@
                       <a:pPr algn="ctr"/>
                       <a:r>
                         <a:rPr lang="it-IT" sz="1800" dirty="0">
-                          <a:latin typeface="Palatino Linotype" panose="02040502050505030304" pitchFamily="18" charset="0"/>
+                          <a:latin typeface="Aptos" panose="020B0004020202020204" pitchFamily="34" charset="0"/>
                         </a:rPr>
                         <a:t>Yes</a:t>
                       </a:r>
                       <a:endParaRPr lang="en-GB" sz="1800" dirty="0">
-                        <a:latin typeface="Palatino Linotype" panose="02040502050505030304" pitchFamily="18" charset="0"/>
+                        <a:latin typeface="Aptos" panose="020B0004020202020204" pitchFamily="34" charset="0"/>
                       </a:endParaRPr>
                     </a:p>
                   </a:txBody>
@@ -6977,12 +7364,12 @@
                       <a:pPr algn="ctr"/>
                       <a:r>
                         <a:rPr lang="it-IT" sz="1800" dirty="0">
-                          <a:latin typeface="Palatino Linotype" panose="02040502050505030304" pitchFamily="18" charset="0"/>
+                          <a:latin typeface="Aptos" panose="020B0004020202020204" pitchFamily="34" charset="0"/>
                         </a:rPr>
                         <a:t>Yes</a:t>
                       </a:r>
                       <a:endParaRPr lang="en-GB" sz="1800" dirty="0">
-                        <a:latin typeface="Palatino Linotype" panose="02040502050505030304" pitchFamily="18" charset="0"/>
+                        <a:latin typeface="Aptos" panose="020B0004020202020204" pitchFamily="34" charset="0"/>
                       </a:endParaRPr>
                     </a:p>
                   </a:txBody>
@@ -6996,12 +7383,12 @@
                       <a:pPr algn="ctr"/>
                       <a:r>
                         <a:rPr lang="it-IT" sz="1800" dirty="0">
-                          <a:latin typeface="Palatino Linotype" panose="02040502050505030304" pitchFamily="18" charset="0"/>
+                          <a:latin typeface="Aptos" panose="020B0004020202020204" pitchFamily="34" charset="0"/>
                         </a:rPr>
                         <a:t>No</a:t>
                       </a:r>
                       <a:endParaRPr lang="en-GB" sz="1800" dirty="0">
-                        <a:latin typeface="Palatino Linotype" panose="02040502050505030304" pitchFamily="18" charset="0"/>
+                        <a:latin typeface="Aptos" panose="020B0004020202020204" pitchFamily="34" charset="0"/>
                       </a:endParaRPr>
                     </a:p>
                   </a:txBody>
@@ -7015,12 +7402,12 @@
                       <a:pPr algn="ctr"/>
                       <a:r>
                         <a:rPr lang="it-IT" sz="1800" dirty="0">
-                          <a:latin typeface="Palatino Linotype" panose="02040502050505030304" pitchFamily="18" charset="0"/>
+                          <a:latin typeface="Aptos" panose="020B0004020202020204" pitchFamily="34" charset="0"/>
                         </a:rPr>
                         <a:t>Yes</a:t>
                       </a:r>
                       <a:endParaRPr lang="en-GB" sz="1800" dirty="0">
-                        <a:latin typeface="Palatino Linotype" panose="02040502050505030304" pitchFamily="18" charset="0"/>
+                        <a:latin typeface="Aptos" panose="020B0004020202020204" pitchFamily="34" charset="0"/>
                       </a:endParaRPr>
                     </a:p>
                   </a:txBody>
@@ -7034,12 +7421,12 @@
                       <a:pPr algn="ctr"/>
                       <a:r>
                         <a:rPr lang="it-IT" sz="1800" dirty="0">
-                          <a:latin typeface="Palatino Linotype" panose="02040502050505030304" pitchFamily="18" charset="0"/>
+                          <a:latin typeface="Aptos" panose="020B0004020202020204" pitchFamily="34" charset="0"/>
                         </a:rPr>
                         <a:t>No</a:t>
                       </a:r>
                       <a:endParaRPr lang="en-GB" sz="1800" dirty="0">
-                        <a:latin typeface="Palatino Linotype" panose="02040502050505030304" pitchFamily="18" charset="0"/>
+                        <a:latin typeface="Aptos" panose="020B0004020202020204" pitchFamily="34" charset="0"/>
                       </a:endParaRPr>
                     </a:p>
                   </a:txBody>
@@ -7059,7 +7446,7 @@
                     <a:p>
                       <a:r>
                         <a:rPr lang="en-US" sz="1800" b="1" noProof="0" dirty="0">
-                          <a:latin typeface="Palatino Linotype" panose="02040502050505030304" pitchFamily="18" charset="0"/>
+                          <a:latin typeface="Aptos" panose="020B0004020202020204" pitchFamily="34" charset="0"/>
                         </a:rPr>
                         <a:t>DELETE</a:t>
                       </a:r>
@@ -7075,12 +7462,12 @@
                       <a:pPr algn="ctr"/>
                       <a:r>
                         <a:rPr lang="it-IT" sz="1800" dirty="0">
-                          <a:latin typeface="Palatino Linotype" panose="02040502050505030304" pitchFamily="18" charset="0"/>
+                          <a:latin typeface="Aptos" panose="020B0004020202020204" pitchFamily="34" charset="0"/>
                         </a:rPr>
                         <a:t>Optional</a:t>
                       </a:r>
                       <a:endParaRPr lang="en-GB" sz="1800" dirty="0">
-                        <a:latin typeface="Palatino Linotype" panose="02040502050505030304" pitchFamily="18" charset="0"/>
+                        <a:latin typeface="Aptos" panose="020B0004020202020204" pitchFamily="34" charset="0"/>
                       </a:endParaRPr>
                     </a:p>
                   </a:txBody>
@@ -7094,12 +7481,12 @@
                       <a:pPr algn="ctr"/>
                       <a:r>
                         <a:rPr lang="it-IT" sz="1800" dirty="0">
-                          <a:latin typeface="Palatino Linotype" panose="02040502050505030304" pitchFamily="18" charset="0"/>
+                          <a:latin typeface="Aptos" panose="020B0004020202020204" pitchFamily="34" charset="0"/>
                         </a:rPr>
                         <a:t>Yes</a:t>
                       </a:r>
                       <a:endParaRPr lang="en-GB" sz="1800" dirty="0">
-                        <a:latin typeface="Palatino Linotype" panose="02040502050505030304" pitchFamily="18" charset="0"/>
+                        <a:latin typeface="Aptos" panose="020B0004020202020204" pitchFamily="34" charset="0"/>
                       </a:endParaRPr>
                     </a:p>
                   </a:txBody>
@@ -7113,12 +7500,12 @@
                       <a:pPr algn="ctr"/>
                       <a:r>
                         <a:rPr lang="it-IT" sz="1800" dirty="0">
-                          <a:latin typeface="Palatino Linotype" panose="02040502050505030304" pitchFamily="18" charset="0"/>
+                          <a:latin typeface="Aptos" panose="020B0004020202020204" pitchFamily="34" charset="0"/>
                         </a:rPr>
                         <a:t>No</a:t>
                       </a:r>
                       <a:endParaRPr lang="en-GB" sz="1800" dirty="0">
-                        <a:latin typeface="Palatino Linotype" panose="02040502050505030304" pitchFamily="18" charset="0"/>
+                        <a:latin typeface="Aptos" panose="020B0004020202020204" pitchFamily="34" charset="0"/>
                       </a:endParaRPr>
                     </a:p>
                   </a:txBody>
@@ -7132,12 +7519,12 @@
                       <a:pPr algn="ctr"/>
                       <a:r>
                         <a:rPr lang="it-IT" sz="1800" dirty="0">
-                          <a:latin typeface="Palatino Linotype" panose="02040502050505030304" pitchFamily="18" charset="0"/>
+                          <a:latin typeface="Aptos" panose="020B0004020202020204" pitchFamily="34" charset="0"/>
                         </a:rPr>
                         <a:t>Yes</a:t>
                       </a:r>
                       <a:endParaRPr lang="en-GB" sz="1800" dirty="0">
-                        <a:latin typeface="Palatino Linotype" panose="02040502050505030304" pitchFamily="18" charset="0"/>
+                        <a:latin typeface="Aptos" panose="020B0004020202020204" pitchFamily="34" charset="0"/>
                       </a:endParaRPr>
                     </a:p>
                   </a:txBody>
@@ -7151,12 +7538,12 @@
                       <a:pPr algn="ctr"/>
                       <a:r>
                         <a:rPr lang="it-IT" sz="1800" dirty="0">
-                          <a:latin typeface="Palatino Linotype" panose="02040502050505030304" pitchFamily="18" charset="0"/>
+                          <a:latin typeface="Aptos" panose="020B0004020202020204" pitchFamily="34" charset="0"/>
                         </a:rPr>
                         <a:t>No</a:t>
                       </a:r>
                       <a:endParaRPr lang="en-GB" sz="1800" dirty="0">
-                        <a:latin typeface="Palatino Linotype" panose="02040502050505030304" pitchFamily="18" charset="0"/>
+                        <a:latin typeface="Aptos" panose="020B0004020202020204" pitchFamily="34" charset="0"/>
                       </a:endParaRPr>
                     </a:p>
                   </a:txBody>
@@ -7176,7 +7563,7 @@
                     <a:p>
                       <a:r>
                         <a:rPr lang="en-US" sz="1800" b="1" noProof="0" dirty="0">
-                          <a:latin typeface="Palatino Linotype" panose="02040502050505030304" pitchFamily="18" charset="0"/>
+                          <a:latin typeface="Aptos" panose="020B0004020202020204" pitchFamily="34" charset="0"/>
                         </a:rPr>
                         <a:t>TRACE</a:t>
                       </a:r>
@@ -7192,12 +7579,12 @@
                       <a:pPr algn="ctr"/>
                       <a:r>
                         <a:rPr lang="it-IT" sz="1800" dirty="0">
-                          <a:latin typeface="Palatino Linotype" panose="02040502050505030304" pitchFamily="18" charset="0"/>
+                          <a:latin typeface="Aptos" panose="020B0004020202020204" pitchFamily="34" charset="0"/>
                         </a:rPr>
                         <a:t>No</a:t>
                       </a:r>
                       <a:endParaRPr lang="en-GB" sz="1800" dirty="0">
-                        <a:latin typeface="Palatino Linotype" panose="02040502050505030304" pitchFamily="18" charset="0"/>
+                        <a:latin typeface="Aptos" panose="020B0004020202020204" pitchFamily="34" charset="0"/>
                       </a:endParaRPr>
                     </a:p>
                   </a:txBody>
@@ -7211,12 +7598,12 @@
                       <a:pPr algn="ctr"/>
                       <a:r>
                         <a:rPr lang="it-IT" sz="1800" dirty="0">
-                          <a:latin typeface="Palatino Linotype" panose="02040502050505030304" pitchFamily="18" charset="0"/>
+                          <a:latin typeface="Aptos" panose="020B0004020202020204" pitchFamily="34" charset="0"/>
                         </a:rPr>
                         <a:t>Yes</a:t>
                       </a:r>
                       <a:endParaRPr lang="en-GB" sz="1800" dirty="0">
-                        <a:latin typeface="Palatino Linotype" panose="02040502050505030304" pitchFamily="18" charset="0"/>
+                        <a:latin typeface="Aptos" panose="020B0004020202020204" pitchFamily="34" charset="0"/>
                       </a:endParaRPr>
                     </a:p>
                   </a:txBody>
@@ -7230,12 +7617,12 @@
                       <a:pPr algn="ctr"/>
                       <a:r>
                         <a:rPr lang="it-IT" sz="1800" dirty="0">
-                          <a:latin typeface="Palatino Linotype" panose="02040502050505030304" pitchFamily="18" charset="0"/>
+                          <a:latin typeface="Aptos" panose="020B0004020202020204" pitchFamily="34" charset="0"/>
                         </a:rPr>
                         <a:t>Yes</a:t>
                       </a:r>
                       <a:endParaRPr lang="en-GB" sz="1800" dirty="0">
-                        <a:latin typeface="Palatino Linotype" panose="02040502050505030304" pitchFamily="18" charset="0"/>
+                        <a:latin typeface="Aptos" panose="020B0004020202020204" pitchFamily="34" charset="0"/>
                       </a:endParaRPr>
                     </a:p>
                   </a:txBody>
@@ -7249,12 +7636,12 @@
                       <a:pPr algn="ctr"/>
                       <a:r>
                         <a:rPr lang="it-IT" sz="1800" dirty="0">
-                          <a:latin typeface="Palatino Linotype" panose="02040502050505030304" pitchFamily="18" charset="0"/>
+                          <a:latin typeface="Aptos" panose="020B0004020202020204" pitchFamily="34" charset="0"/>
                         </a:rPr>
                         <a:t>Yes</a:t>
                       </a:r>
                       <a:endParaRPr lang="en-GB" sz="1800" dirty="0">
-                        <a:latin typeface="Palatino Linotype" panose="02040502050505030304" pitchFamily="18" charset="0"/>
+                        <a:latin typeface="Aptos" panose="020B0004020202020204" pitchFamily="34" charset="0"/>
                       </a:endParaRPr>
                     </a:p>
                   </a:txBody>
@@ -7268,12 +7655,12 @@
                       <a:pPr algn="ctr"/>
                       <a:r>
                         <a:rPr lang="it-IT" sz="1800" dirty="0">
-                          <a:latin typeface="Palatino Linotype" panose="02040502050505030304" pitchFamily="18" charset="0"/>
+                          <a:latin typeface="Aptos" panose="020B0004020202020204" pitchFamily="34" charset="0"/>
                         </a:rPr>
                         <a:t>No</a:t>
                       </a:r>
                       <a:endParaRPr lang="en-GB" sz="1800" dirty="0">
-                        <a:latin typeface="Palatino Linotype" panose="02040502050505030304" pitchFamily="18" charset="0"/>
+                        <a:latin typeface="Aptos" panose="020B0004020202020204" pitchFamily="34" charset="0"/>
                       </a:endParaRPr>
                     </a:p>
                   </a:txBody>
@@ -7293,7 +7680,7 @@
                     <a:p>
                       <a:r>
                         <a:rPr lang="en-US" sz="1800" b="1" noProof="0" dirty="0">
-                          <a:latin typeface="Palatino Linotype" panose="02040502050505030304" pitchFamily="18" charset="0"/>
+                          <a:latin typeface="Aptos" panose="020B0004020202020204" pitchFamily="34" charset="0"/>
                         </a:rPr>
                         <a:t>CONNECT</a:t>
                       </a:r>
@@ -7309,12 +7696,12 @@
                       <a:pPr algn="ctr"/>
                       <a:r>
                         <a:rPr lang="it-IT" sz="1800" dirty="0">
-                          <a:latin typeface="Palatino Linotype" panose="02040502050505030304" pitchFamily="18" charset="0"/>
+                          <a:latin typeface="Aptos" panose="020B0004020202020204" pitchFamily="34" charset="0"/>
                         </a:rPr>
                         <a:t>Optional</a:t>
                       </a:r>
                       <a:endParaRPr lang="en-GB" sz="1800" dirty="0">
-                        <a:latin typeface="Palatino Linotype" panose="02040502050505030304" pitchFamily="18" charset="0"/>
+                        <a:latin typeface="Aptos" panose="020B0004020202020204" pitchFamily="34" charset="0"/>
                       </a:endParaRPr>
                     </a:p>
                   </a:txBody>
@@ -7328,12 +7715,12 @@
                       <a:pPr algn="ctr"/>
                       <a:r>
                         <a:rPr lang="it-IT" sz="1800" dirty="0">
-                          <a:latin typeface="Palatino Linotype" panose="02040502050505030304" pitchFamily="18" charset="0"/>
+                          <a:latin typeface="Aptos" panose="020B0004020202020204" pitchFamily="34" charset="0"/>
                         </a:rPr>
                         <a:t>Yes</a:t>
                       </a:r>
                       <a:endParaRPr lang="en-GB" sz="1800" dirty="0">
-                        <a:latin typeface="Palatino Linotype" panose="02040502050505030304" pitchFamily="18" charset="0"/>
+                        <a:latin typeface="Aptos" panose="020B0004020202020204" pitchFamily="34" charset="0"/>
                       </a:endParaRPr>
                     </a:p>
                   </a:txBody>
@@ -7347,12 +7734,12 @@
                       <a:pPr algn="ctr"/>
                       <a:r>
                         <a:rPr lang="it-IT" sz="1800" dirty="0">
-                          <a:latin typeface="Palatino Linotype" panose="02040502050505030304" pitchFamily="18" charset="0"/>
+                          <a:latin typeface="Aptos" panose="020B0004020202020204" pitchFamily="34" charset="0"/>
                         </a:rPr>
                         <a:t>No</a:t>
                       </a:r>
                       <a:endParaRPr lang="en-GB" sz="1800" dirty="0">
-                        <a:latin typeface="Palatino Linotype" panose="02040502050505030304" pitchFamily="18" charset="0"/>
+                        <a:latin typeface="Aptos" panose="020B0004020202020204" pitchFamily="34" charset="0"/>
                       </a:endParaRPr>
                     </a:p>
                   </a:txBody>
@@ -7366,12 +7753,12 @@
                       <a:pPr algn="ctr"/>
                       <a:r>
                         <a:rPr lang="it-IT" sz="1800" dirty="0">
-                          <a:latin typeface="Palatino Linotype" panose="02040502050505030304" pitchFamily="18" charset="0"/>
+                          <a:latin typeface="Aptos" panose="020B0004020202020204" pitchFamily="34" charset="0"/>
                         </a:rPr>
                         <a:t>No</a:t>
                       </a:r>
                       <a:endParaRPr lang="en-GB" sz="1800" dirty="0">
-                        <a:latin typeface="Palatino Linotype" panose="02040502050505030304" pitchFamily="18" charset="0"/>
+                        <a:latin typeface="Aptos" panose="020B0004020202020204" pitchFamily="34" charset="0"/>
                       </a:endParaRPr>
                     </a:p>
                   </a:txBody>
@@ -7385,12 +7772,12 @@
                       <a:pPr algn="ctr"/>
                       <a:r>
                         <a:rPr lang="it-IT" sz="1800" dirty="0">
-                          <a:latin typeface="Palatino Linotype" panose="02040502050505030304" pitchFamily="18" charset="0"/>
+                          <a:latin typeface="Aptos" panose="020B0004020202020204" pitchFamily="34" charset="0"/>
                         </a:rPr>
                         <a:t>No</a:t>
                       </a:r>
                       <a:endParaRPr lang="en-GB" sz="1800" dirty="0">
-                        <a:latin typeface="Palatino Linotype" panose="02040502050505030304" pitchFamily="18" charset="0"/>
+                        <a:latin typeface="Aptos" panose="020B0004020202020204" pitchFamily="34" charset="0"/>
                       </a:endParaRPr>
                     </a:p>
                   </a:txBody>
@@ -7410,7 +7797,7 @@
                     <a:p>
                       <a:r>
                         <a:rPr lang="en-US" sz="1800" b="1" noProof="0" dirty="0">
-                          <a:latin typeface="Palatino Linotype" panose="02040502050505030304" pitchFamily="18" charset="0"/>
+                          <a:latin typeface="Aptos" panose="020B0004020202020204" pitchFamily="34" charset="0"/>
                         </a:rPr>
                         <a:t>OPTIONS</a:t>
                       </a:r>
@@ -7426,12 +7813,12 @@
                       <a:pPr algn="ctr"/>
                       <a:r>
                         <a:rPr lang="it-IT" sz="1800" dirty="0">
-                          <a:latin typeface="Palatino Linotype" panose="02040502050505030304" pitchFamily="18" charset="0"/>
+                          <a:latin typeface="Aptos" panose="020B0004020202020204" pitchFamily="34" charset="0"/>
                         </a:rPr>
                         <a:t>Optional</a:t>
                       </a:r>
                       <a:endParaRPr lang="en-GB" sz="1800" dirty="0">
-                        <a:latin typeface="Palatino Linotype" panose="02040502050505030304" pitchFamily="18" charset="0"/>
+                        <a:latin typeface="Aptos" panose="020B0004020202020204" pitchFamily="34" charset="0"/>
                       </a:endParaRPr>
                     </a:p>
                   </a:txBody>
@@ -7445,12 +7832,12 @@
                       <a:pPr algn="ctr"/>
                       <a:r>
                         <a:rPr lang="it-IT" sz="1800" dirty="0">
-                          <a:latin typeface="Palatino Linotype" panose="02040502050505030304" pitchFamily="18" charset="0"/>
+                          <a:latin typeface="Aptos" panose="020B0004020202020204" pitchFamily="34" charset="0"/>
                         </a:rPr>
                         <a:t>Yes</a:t>
                       </a:r>
                       <a:endParaRPr lang="en-GB" sz="1800" dirty="0">
-                        <a:latin typeface="Palatino Linotype" panose="02040502050505030304" pitchFamily="18" charset="0"/>
+                        <a:latin typeface="Aptos" panose="020B0004020202020204" pitchFamily="34" charset="0"/>
                       </a:endParaRPr>
                     </a:p>
                   </a:txBody>
@@ -7464,12 +7851,12 @@
                       <a:pPr algn="ctr"/>
                       <a:r>
                         <a:rPr lang="it-IT" sz="1800" dirty="0">
-                          <a:latin typeface="Palatino Linotype" panose="02040502050505030304" pitchFamily="18" charset="0"/>
+                          <a:latin typeface="Aptos" panose="020B0004020202020204" pitchFamily="34" charset="0"/>
                         </a:rPr>
                         <a:t>Yes</a:t>
                       </a:r>
                       <a:endParaRPr lang="en-GB" sz="1800" dirty="0">
-                        <a:latin typeface="Palatino Linotype" panose="02040502050505030304" pitchFamily="18" charset="0"/>
+                        <a:latin typeface="Aptos" panose="020B0004020202020204" pitchFamily="34" charset="0"/>
                       </a:endParaRPr>
                     </a:p>
                   </a:txBody>
@@ -7483,12 +7870,12 @@
                       <a:pPr algn="ctr"/>
                       <a:r>
                         <a:rPr lang="it-IT" sz="1800" dirty="0">
-                          <a:latin typeface="Palatino Linotype" panose="02040502050505030304" pitchFamily="18" charset="0"/>
+                          <a:latin typeface="Aptos" panose="020B0004020202020204" pitchFamily="34" charset="0"/>
                         </a:rPr>
                         <a:t>Yes</a:t>
                       </a:r>
                       <a:endParaRPr lang="en-GB" sz="1800" dirty="0">
-                        <a:latin typeface="Palatino Linotype" panose="02040502050505030304" pitchFamily="18" charset="0"/>
+                        <a:latin typeface="Aptos" panose="020B0004020202020204" pitchFamily="34" charset="0"/>
                       </a:endParaRPr>
                     </a:p>
                   </a:txBody>
@@ -7502,12 +7889,12 @@
                       <a:pPr algn="ctr"/>
                       <a:r>
                         <a:rPr lang="it-IT" sz="1800" dirty="0">
-                          <a:latin typeface="Palatino Linotype" panose="02040502050505030304" pitchFamily="18" charset="0"/>
+                          <a:latin typeface="Aptos" panose="020B0004020202020204" pitchFamily="34" charset="0"/>
                         </a:rPr>
                         <a:t>No</a:t>
                       </a:r>
                       <a:endParaRPr lang="en-GB" sz="1800" dirty="0">
-                        <a:latin typeface="Palatino Linotype" panose="02040502050505030304" pitchFamily="18" charset="0"/>
+                        <a:latin typeface="Aptos" panose="020B0004020202020204" pitchFamily="34" charset="0"/>
                       </a:endParaRPr>
                     </a:p>
                   </a:txBody>
@@ -7527,7 +7914,7 @@
                     <a:p>
                       <a:r>
                         <a:rPr lang="en-US" sz="1800" b="1" noProof="0" dirty="0">
-                          <a:latin typeface="Palatino Linotype" panose="02040502050505030304" pitchFamily="18" charset="0"/>
+                          <a:latin typeface="Aptos" panose="020B0004020202020204" pitchFamily="34" charset="0"/>
                         </a:rPr>
                         <a:t>PATCH</a:t>
                       </a:r>
@@ -7543,12 +7930,12 @@
                       <a:pPr algn="ctr"/>
                       <a:r>
                         <a:rPr lang="it-IT" sz="1800" dirty="0">
-                          <a:latin typeface="Palatino Linotype" panose="02040502050505030304" pitchFamily="18" charset="0"/>
+                          <a:latin typeface="Aptos" panose="020B0004020202020204" pitchFamily="34" charset="0"/>
                         </a:rPr>
                         <a:t>Yes</a:t>
                       </a:r>
                       <a:endParaRPr lang="en-GB" sz="1800" dirty="0">
-                        <a:latin typeface="Palatino Linotype" panose="02040502050505030304" pitchFamily="18" charset="0"/>
+                        <a:latin typeface="Aptos" panose="020B0004020202020204" pitchFamily="34" charset="0"/>
                       </a:endParaRPr>
                     </a:p>
                   </a:txBody>
@@ -7562,12 +7949,12 @@
                       <a:pPr algn="ctr"/>
                       <a:r>
                         <a:rPr lang="it-IT" sz="1800" dirty="0">
-                          <a:latin typeface="Palatino Linotype" panose="02040502050505030304" pitchFamily="18" charset="0"/>
+                          <a:latin typeface="Aptos" panose="020B0004020202020204" pitchFamily="34" charset="0"/>
                         </a:rPr>
                         <a:t>Yes</a:t>
                       </a:r>
                       <a:endParaRPr lang="en-GB" sz="1800" dirty="0">
-                        <a:latin typeface="Palatino Linotype" panose="02040502050505030304" pitchFamily="18" charset="0"/>
+                        <a:latin typeface="Aptos" panose="020B0004020202020204" pitchFamily="34" charset="0"/>
                       </a:endParaRPr>
                     </a:p>
                   </a:txBody>
@@ -7581,12 +7968,12 @@
                       <a:pPr algn="ctr"/>
                       <a:r>
                         <a:rPr lang="it-IT" sz="1800" dirty="0">
-                          <a:latin typeface="Palatino Linotype" panose="02040502050505030304" pitchFamily="18" charset="0"/>
+                          <a:latin typeface="Aptos" panose="020B0004020202020204" pitchFamily="34" charset="0"/>
                         </a:rPr>
                         <a:t>No</a:t>
                       </a:r>
                       <a:endParaRPr lang="en-GB" sz="1800" dirty="0">
-                        <a:latin typeface="Palatino Linotype" panose="02040502050505030304" pitchFamily="18" charset="0"/>
+                        <a:latin typeface="Aptos" panose="020B0004020202020204" pitchFamily="34" charset="0"/>
                       </a:endParaRPr>
                     </a:p>
                   </a:txBody>
@@ -7600,12 +7987,12 @@
                       <a:pPr algn="ctr"/>
                       <a:r>
                         <a:rPr lang="it-IT" sz="1800" dirty="0">
-                          <a:latin typeface="Palatino Linotype" panose="02040502050505030304" pitchFamily="18" charset="0"/>
+                          <a:latin typeface="Aptos" panose="020B0004020202020204" pitchFamily="34" charset="0"/>
                         </a:rPr>
                         <a:t>No</a:t>
                       </a:r>
                       <a:endParaRPr lang="en-GB" sz="1800" dirty="0">
-                        <a:latin typeface="Palatino Linotype" panose="02040502050505030304" pitchFamily="18" charset="0"/>
+                        <a:latin typeface="Aptos" panose="020B0004020202020204" pitchFamily="34" charset="0"/>
                       </a:endParaRPr>
                     </a:p>
                   </a:txBody>
@@ -7619,12 +8006,12 @@
                       <a:pPr algn="ctr"/>
                       <a:r>
                         <a:rPr lang="it-IT" sz="1800" dirty="0">
-                          <a:latin typeface="Palatino Linotype" panose="02040502050505030304" pitchFamily="18" charset="0"/>
+                          <a:latin typeface="Aptos" panose="020B0004020202020204" pitchFamily="34" charset="0"/>
                         </a:rPr>
                         <a:t>No</a:t>
                       </a:r>
                       <a:endParaRPr lang="en-GB" sz="1800" dirty="0">
-                        <a:latin typeface="Palatino Linotype" panose="02040502050505030304" pitchFamily="18" charset="0"/>
+                        <a:latin typeface="Aptos" panose="020B0004020202020204" pitchFamily="34" charset="0"/>
                       </a:endParaRPr>
                     </a:p>
                   </a:txBody>
@@ -7657,7 +8044,7 @@
           <a:p>
             <a:fld id="{31DE2C5B-556E-47B8-A792-024C2FCA4ACC}" type="slidenum">
               <a:rPr lang="en-GB" smtClean="0"/>
-              <a:t>16</a:t>
+              <a:t>17</a:t>
             </a:fld>
             <a:endParaRPr lang="en-GB"/>
           </a:p>
@@ -7676,7 +8063,7 @@
 </p:sld>
 </file>
 
-<file path=ppt/slides/slide17.xml><?xml version="1.0" encoding="utf-8"?>
+<file path=ppt/slides/slide18.xml><?xml version="1.0" encoding="utf-8"?>
 <p:sld xmlns:a="http://schemas.openxmlformats.org/drawingml/2006/main" xmlns:r="http://schemas.openxmlformats.org/officeDocument/2006/relationships" xmlns:p="http://schemas.openxmlformats.org/presentationml/2006/main">
   <p:cSld>
     <p:spTree>
@@ -7789,7 +8176,7 @@
           <a:p>
             <a:fld id="{31DE2C5B-556E-47B8-A792-024C2FCA4ACC}" type="slidenum">
               <a:rPr lang="en-GB" smtClean="0"/>
-              <a:t>17</a:t>
+              <a:t>18</a:t>
             </a:fld>
             <a:endParaRPr lang="en-GB"/>
           </a:p>
@@ -7984,7 +8371,7 @@
                 <a:solidFill>
                   <a:schemeClr val="tx1"/>
                 </a:solidFill>
-                <a:latin typeface="Palatino Linotype" panose="02040502050505030304" pitchFamily="18" charset="0"/>
+                <a:latin typeface="Aptos" panose="020B0004020202020204" pitchFamily="34" charset="0"/>
               </a:rPr>
               <a:t>Requested</a:t>
             </a:r>
@@ -7993,7 +8380,7 @@
                 <a:solidFill>
                   <a:schemeClr val="tx1"/>
                 </a:solidFill>
-                <a:latin typeface="Palatino Linotype" panose="02040502050505030304" pitchFamily="18" charset="0"/>
+                <a:latin typeface="Aptos" panose="020B0004020202020204" pitchFamily="34" charset="0"/>
               </a:rPr>
               <a:t> page and </a:t>
             </a:r>
@@ -8002,7 +8389,7 @@
                 <a:solidFill>
                   <a:schemeClr val="tx1"/>
                 </a:solidFill>
-                <a:latin typeface="Palatino Linotype" panose="02040502050505030304" pitchFamily="18" charset="0"/>
+                <a:latin typeface="Aptos" panose="020B0004020202020204" pitchFamily="34" charset="0"/>
               </a:rPr>
               <a:t>contents</a:t>
             </a:r>
@@ -8010,7 +8397,7 @@
               <a:solidFill>
                 <a:schemeClr val="tx1"/>
               </a:solidFill>
-              <a:latin typeface="Palatino Linotype" panose="02040502050505030304" pitchFamily="18" charset="0"/>
+              <a:latin typeface="Aptos" panose="020B0004020202020204" pitchFamily="34" charset="0"/>
             </a:endParaRPr>
           </a:p>
         </p:txBody>
@@ -8070,7 +8457,7 @@
                 <a:solidFill>
                   <a:schemeClr val="tx1"/>
                 </a:solidFill>
-                <a:latin typeface="Palatino Linotype" panose="02040502050505030304" pitchFamily="18" charset="0"/>
+                <a:latin typeface="Aptos" panose="020B0004020202020204" pitchFamily="34" charset="0"/>
               </a:rPr>
               <a:t>Request</a:t>
             </a:r>
@@ -8079,7 +8466,7 @@
                 <a:solidFill>
                   <a:schemeClr val="tx1"/>
                 </a:solidFill>
-                <a:latin typeface="Palatino Linotype" panose="02040502050505030304" pitchFamily="18" charset="0"/>
+                <a:latin typeface="Aptos" panose="020B0004020202020204" pitchFamily="34" charset="0"/>
               </a:rPr>
               <a:t> </a:t>
             </a:r>
@@ -8088,7 +8475,7 @@
                 <a:solidFill>
                   <a:schemeClr val="tx1"/>
                 </a:solidFill>
-                <a:latin typeface="Palatino Linotype" panose="02040502050505030304" pitchFamily="18" charset="0"/>
+                <a:latin typeface="Aptos" panose="020B0004020202020204" pitchFamily="34" charset="0"/>
               </a:rPr>
               <a:t>headers</a:t>
             </a:r>
@@ -8096,7 +8483,7 @@
               <a:solidFill>
                 <a:schemeClr val="tx1"/>
               </a:solidFill>
-              <a:latin typeface="Palatino Linotype" panose="02040502050505030304" pitchFamily="18" charset="0"/>
+              <a:latin typeface="Aptos" panose="020B0004020202020204" pitchFamily="34" charset="0"/>
             </a:endParaRPr>
           </a:p>
         </p:txBody>
@@ -8156,7 +8543,7 @@
                 <a:solidFill>
                   <a:schemeClr val="tx1"/>
                 </a:solidFill>
-                <a:latin typeface="Palatino Linotype" panose="02040502050505030304" pitchFamily="18" charset="0"/>
+                <a:latin typeface="Aptos" panose="020B0004020202020204" pitchFamily="34" charset="0"/>
               </a:rPr>
               <a:t>Response</a:t>
             </a:r>
@@ -8165,7 +8552,7 @@
                 <a:solidFill>
                   <a:schemeClr val="tx1"/>
                 </a:solidFill>
-                <a:latin typeface="Palatino Linotype" panose="02040502050505030304" pitchFamily="18" charset="0"/>
+                <a:latin typeface="Aptos" panose="020B0004020202020204" pitchFamily="34" charset="0"/>
               </a:rPr>
               <a:t> </a:t>
             </a:r>
@@ -8174,7 +8561,7 @@
                 <a:solidFill>
                   <a:schemeClr val="tx1"/>
                 </a:solidFill>
-                <a:latin typeface="Palatino Linotype" panose="02040502050505030304" pitchFamily="18" charset="0"/>
+                <a:latin typeface="Aptos" panose="020B0004020202020204" pitchFamily="34" charset="0"/>
               </a:rPr>
               <a:t>headers</a:t>
             </a:r>
@@ -8182,7 +8569,7 @@
               <a:solidFill>
                 <a:schemeClr val="tx1"/>
               </a:solidFill>
-              <a:latin typeface="Palatino Linotype" panose="02040502050505030304" pitchFamily="18" charset="0"/>
+              <a:latin typeface="Aptos" panose="020B0004020202020204" pitchFamily="34" charset="0"/>
             </a:endParaRPr>
           </a:p>
         </p:txBody>
@@ -8235,7 +8622,9 @@
           <a:lstStyle/>
           <a:p>
             <a:pPr algn="ctr"/>
-            <a:endParaRPr lang="it-IT"/>
+            <a:endParaRPr lang="it-IT">
+              <a:latin typeface="Aptos" panose="020B0004020202020204" pitchFamily="34" charset="0"/>
+            </a:endParaRPr>
           </a:p>
         </p:txBody>
       </p:sp>
@@ -8287,7 +8676,9 @@
           <a:lstStyle/>
           <a:p>
             <a:pPr algn="ctr"/>
-            <a:endParaRPr lang="it-IT"/>
+            <a:endParaRPr lang="it-IT">
+              <a:latin typeface="Aptos" panose="020B0004020202020204" pitchFamily="34" charset="0"/>
+            </a:endParaRPr>
           </a:p>
         </p:txBody>
       </p:sp>
@@ -8339,7 +8730,9 @@
           <a:lstStyle/>
           <a:p>
             <a:pPr algn="ctr"/>
-            <a:endParaRPr lang="it-IT"/>
+            <a:endParaRPr lang="it-IT">
+              <a:latin typeface="Aptos" panose="020B0004020202020204" pitchFamily="34" charset="0"/>
+            </a:endParaRPr>
           </a:p>
         </p:txBody>
       </p:sp>
@@ -8356,7 +8749,7 @@
 </p:sld>
 </file>
 
-<file path=ppt/slides/slide18.xml><?xml version="1.0" encoding="utf-8"?>
+<file path=ppt/slides/slide19.xml><?xml version="1.0" encoding="utf-8"?>
 <p:sld xmlns:a="http://schemas.openxmlformats.org/drawingml/2006/main" xmlns:r="http://schemas.openxmlformats.org/officeDocument/2006/relationships" xmlns:p="http://schemas.openxmlformats.org/presentationml/2006/main">
   <p:cSld>
     <p:spTree>
@@ -8560,7 +8953,7 @@
           <a:p>
             <a:fld id="{31DE2C5B-556E-47B8-A792-024C2FCA4ACC}" type="slidenum">
               <a:rPr lang="en-GB" smtClean="0"/>
-              <a:t>18</a:t>
+              <a:t>19</a:t>
             </a:fld>
             <a:endParaRPr lang="en-GB"/>
           </a:p>
@@ -8734,183 +9127,6 @@
 </p:sld>
 </file>
 
-<file path=ppt/slides/slide19.xml><?xml version="1.0" encoding="utf-8"?>
-<p:sld xmlns:a="http://schemas.openxmlformats.org/drawingml/2006/main" xmlns:r="http://schemas.openxmlformats.org/officeDocument/2006/relationships" xmlns:p="http://schemas.openxmlformats.org/presentationml/2006/main">
-  <p:cSld>
-    <p:spTree>
-      <p:nvGrpSpPr>
-        <p:cNvPr id="1" name=""/>
-        <p:cNvGrpSpPr/>
-        <p:nvPr/>
-      </p:nvGrpSpPr>
-      <p:grpSpPr>
-        <a:xfrm>
-          <a:off x="0" y="0"/>
-          <a:ext cx="0" cy="0"/>
-          <a:chOff x="0" y="0"/>
-          <a:chExt cx="0" cy="0"/>
-        </a:xfrm>
-      </p:grpSpPr>
-      <p:sp>
-        <p:nvSpPr>
-          <p:cNvPr id="2" name="Titolo 1"/>
-          <p:cNvSpPr>
-            <a:spLocks noGrp="1"/>
-          </p:cNvSpPr>
-          <p:nvPr>
-            <p:ph type="title"/>
-          </p:nvPr>
-        </p:nvSpPr>
-        <p:spPr/>
-        <p:txBody>
-          <a:bodyPr/>
-          <a:lstStyle/>
-          <a:p>
-            <a:r>
-              <a:rPr lang="it-IT" dirty="0"/>
-              <a:t>Web </a:t>
-            </a:r>
-            <a:r>
-              <a:rPr lang="it-IT" dirty="0" err="1"/>
-              <a:t>communication</a:t>
-            </a:r>
-            <a:r>
-              <a:rPr lang="it-IT" dirty="0"/>
-              <a:t> </a:t>
-            </a:r>
-            <a:r>
-              <a:rPr lang="it-IT" dirty="0" err="1"/>
-              <a:t>protocols</a:t>
-            </a:r>
-            <a:endParaRPr lang="en-GB" dirty="0"/>
-          </a:p>
-        </p:txBody>
-      </p:sp>
-      <p:sp>
-        <p:nvSpPr>
-          <p:cNvPr id="3" name="Segnaposto contenuto 2"/>
-          <p:cNvSpPr>
-            <a:spLocks noGrp="1"/>
-          </p:cNvSpPr>
-          <p:nvPr>
-            <p:ph idx="1"/>
-          </p:nvPr>
-        </p:nvSpPr>
-        <p:spPr>
-          <a:xfrm>
-            <a:off x="425551" y="1531289"/>
-            <a:ext cx="11368314" cy="779520"/>
-          </a:xfrm>
-        </p:spPr>
-        <p:txBody>
-          <a:bodyPr>
-            <a:normAutofit fontScale="92500" lnSpcReduction="20000"/>
-          </a:bodyPr>
-          <a:lstStyle/>
-          <a:p>
-            <a:r>
-              <a:rPr lang="en-US" sz="2600" dirty="0"/>
-              <a:t>HTTP is not the only Web communication protocol.</a:t>
-            </a:r>
-          </a:p>
-          <a:p>
-            <a:r>
-              <a:rPr lang="en-US" sz="2600" dirty="0"/>
-              <a:t>Different protocols have been defined for different purposes. </a:t>
-            </a:r>
-          </a:p>
-          <a:p>
-            <a:endParaRPr lang="it-IT" dirty="0"/>
-          </a:p>
-          <a:p>
-            <a:endParaRPr lang="it-IT" dirty="0"/>
-          </a:p>
-          <a:p>
-            <a:endParaRPr lang="it-IT" dirty="0"/>
-          </a:p>
-          <a:p>
-            <a:endParaRPr lang="it-IT" dirty="0"/>
-          </a:p>
-          <a:p>
-            <a:endParaRPr lang="it-IT" dirty="0"/>
-          </a:p>
-          <a:p>
-            <a:endParaRPr lang="it-IT" dirty="0"/>
-          </a:p>
-          <a:p>
-            <a:endParaRPr lang="it-IT" dirty="0"/>
-          </a:p>
-          <a:p>
-            <a:endParaRPr lang="en-GB" dirty="0"/>
-          </a:p>
-        </p:txBody>
-      </p:sp>
-      <p:pic>
-        <p:nvPicPr>
-          <p:cNvPr id="4" name="Immagine 3"/>
-          <p:cNvPicPr>
-            <a:picLocks noChangeAspect="1"/>
-          </p:cNvPicPr>
-          <p:nvPr/>
-        </p:nvPicPr>
-        <p:blipFill>
-          <a:blip r:embed="rId2">
-            <a:extLst>
-              <a:ext uri="{28A0092B-C50C-407E-A947-70E740481C1C}">
-                <a14:useLocalDpi xmlns:a14="http://schemas.microsoft.com/office/drawing/2010/main" val="0"/>
-              </a:ext>
-            </a:extLst>
-          </a:blip>
-          <a:stretch>
-            <a:fillRect/>
-          </a:stretch>
-        </p:blipFill>
-        <p:spPr>
-          <a:xfrm>
-            <a:off x="2825203" y="2585889"/>
-            <a:ext cx="6569009" cy="2880610"/>
-          </a:xfrm>
-          <a:prstGeom prst="rect">
-            <a:avLst/>
-          </a:prstGeom>
-        </p:spPr>
-      </p:pic>
-      <p:sp>
-        <p:nvSpPr>
-          <p:cNvPr id="5" name="Segnaposto numero diapositiva 4"/>
-          <p:cNvSpPr>
-            <a:spLocks noGrp="1"/>
-          </p:cNvSpPr>
-          <p:nvPr>
-            <p:ph type="sldNum" sz="quarter" idx="12"/>
-          </p:nvPr>
-        </p:nvSpPr>
-        <p:spPr/>
-        <p:txBody>
-          <a:bodyPr/>
-          <a:lstStyle/>
-          <a:p>
-            <a:fld id="{31DE2C5B-556E-47B8-A792-024C2FCA4ACC}" type="slidenum">
-              <a:rPr lang="en-GB" smtClean="0"/>
-              <a:t>19</a:t>
-            </a:fld>
-            <a:endParaRPr lang="en-GB"/>
-          </a:p>
-        </p:txBody>
-      </p:sp>
-    </p:spTree>
-    <p:extLst>
-      <p:ext uri="{BB962C8B-B14F-4D97-AF65-F5344CB8AC3E}">
-        <p14:creationId xmlns:p14="http://schemas.microsoft.com/office/powerpoint/2010/main" val="212415092"/>
-      </p:ext>
-    </p:extLst>
-  </p:cSld>
-  <p:clrMapOvr>
-    <a:masterClrMapping/>
-  </p:clrMapOvr>
-</p:sld>
-</file>
-
 <file path=ppt/slides/slide2.xml><?xml version="1.0" encoding="utf-8"?>
 <p:sld xmlns:a="http://schemas.openxmlformats.org/drawingml/2006/main" xmlns:r="http://schemas.openxmlformats.org/officeDocument/2006/relationships" xmlns:p="http://schemas.openxmlformats.org/presentationml/2006/main">
   <p:cSld>
@@ -9146,6 +9362,183 @@
       </p:grpSpPr>
       <p:sp>
         <p:nvSpPr>
+          <p:cNvPr id="2" name="Titolo 1"/>
+          <p:cNvSpPr>
+            <a:spLocks noGrp="1"/>
+          </p:cNvSpPr>
+          <p:nvPr>
+            <p:ph type="title"/>
+          </p:nvPr>
+        </p:nvSpPr>
+        <p:spPr/>
+        <p:txBody>
+          <a:bodyPr/>
+          <a:lstStyle/>
+          <a:p>
+            <a:r>
+              <a:rPr lang="it-IT" dirty="0"/>
+              <a:t>Web </a:t>
+            </a:r>
+            <a:r>
+              <a:rPr lang="it-IT" dirty="0" err="1"/>
+              <a:t>communication</a:t>
+            </a:r>
+            <a:r>
+              <a:rPr lang="it-IT" dirty="0"/>
+              <a:t> </a:t>
+            </a:r>
+            <a:r>
+              <a:rPr lang="it-IT" dirty="0" err="1"/>
+              <a:t>protocols</a:t>
+            </a:r>
+            <a:endParaRPr lang="en-GB" dirty="0"/>
+          </a:p>
+        </p:txBody>
+      </p:sp>
+      <p:sp>
+        <p:nvSpPr>
+          <p:cNvPr id="3" name="Segnaposto contenuto 2"/>
+          <p:cNvSpPr>
+            <a:spLocks noGrp="1"/>
+          </p:cNvSpPr>
+          <p:nvPr>
+            <p:ph idx="1"/>
+          </p:nvPr>
+        </p:nvSpPr>
+        <p:spPr>
+          <a:xfrm>
+            <a:off x="425551" y="1531289"/>
+            <a:ext cx="11368314" cy="779520"/>
+          </a:xfrm>
+        </p:spPr>
+        <p:txBody>
+          <a:bodyPr>
+            <a:normAutofit fontScale="92500" lnSpcReduction="20000"/>
+          </a:bodyPr>
+          <a:lstStyle/>
+          <a:p>
+            <a:r>
+              <a:rPr lang="en-US" sz="2600" dirty="0"/>
+              <a:t>HTTP is not the only Web communication protocol.</a:t>
+            </a:r>
+          </a:p>
+          <a:p>
+            <a:r>
+              <a:rPr lang="en-US" sz="2600" dirty="0"/>
+              <a:t>Different protocols have been defined for different purposes. </a:t>
+            </a:r>
+          </a:p>
+          <a:p>
+            <a:endParaRPr lang="it-IT" dirty="0"/>
+          </a:p>
+          <a:p>
+            <a:endParaRPr lang="it-IT" dirty="0"/>
+          </a:p>
+          <a:p>
+            <a:endParaRPr lang="it-IT" dirty="0"/>
+          </a:p>
+          <a:p>
+            <a:endParaRPr lang="it-IT" dirty="0"/>
+          </a:p>
+          <a:p>
+            <a:endParaRPr lang="it-IT" dirty="0"/>
+          </a:p>
+          <a:p>
+            <a:endParaRPr lang="it-IT" dirty="0"/>
+          </a:p>
+          <a:p>
+            <a:endParaRPr lang="it-IT" dirty="0"/>
+          </a:p>
+          <a:p>
+            <a:endParaRPr lang="en-GB" dirty="0"/>
+          </a:p>
+        </p:txBody>
+      </p:sp>
+      <p:pic>
+        <p:nvPicPr>
+          <p:cNvPr id="4" name="Immagine 3"/>
+          <p:cNvPicPr>
+            <a:picLocks noChangeAspect="1"/>
+          </p:cNvPicPr>
+          <p:nvPr/>
+        </p:nvPicPr>
+        <p:blipFill>
+          <a:blip r:embed="rId2">
+            <a:extLst>
+              <a:ext uri="{28A0092B-C50C-407E-A947-70E740481C1C}">
+                <a14:useLocalDpi xmlns:a14="http://schemas.microsoft.com/office/drawing/2010/main" val="0"/>
+              </a:ext>
+            </a:extLst>
+          </a:blip>
+          <a:stretch>
+            <a:fillRect/>
+          </a:stretch>
+        </p:blipFill>
+        <p:spPr>
+          <a:xfrm>
+            <a:off x="2825203" y="2585889"/>
+            <a:ext cx="6569009" cy="2880610"/>
+          </a:xfrm>
+          <a:prstGeom prst="rect">
+            <a:avLst/>
+          </a:prstGeom>
+        </p:spPr>
+      </p:pic>
+      <p:sp>
+        <p:nvSpPr>
+          <p:cNvPr id="5" name="Segnaposto numero diapositiva 4"/>
+          <p:cNvSpPr>
+            <a:spLocks noGrp="1"/>
+          </p:cNvSpPr>
+          <p:nvPr>
+            <p:ph type="sldNum" sz="quarter" idx="12"/>
+          </p:nvPr>
+        </p:nvSpPr>
+        <p:spPr/>
+        <p:txBody>
+          <a:bodyPr/>
+          <a:lstStyle/>
+          <a:p>
+            <a:fld id="{31DE2C5B-556E-47B8-A792-024C2FCA4ACC}" type="slidenum">
+              <a:rPr lang="en-GB" smtClean="0"/>
+              <a:t>20</a:t>
+            </a:fld>
+            <a:endParaRPr lang="en-GB"/>
+          </a:p>
+        </p:txBody>
+      </p:sp>
+    </p:spTree>
+    <p:extLst>
+      <p:ext uri="{BB962C8B-B14F-4D97-AF65-F5344CB8AC3E}">
+        <p14:creationId xmlns:p14="http://schemas.microsoft.com/office/powerpoint/2010/main" val="212415092"/>
+      </p:ext>
+    </p:extLst>
+  </p:cSld>
+  <p:clrMapOvr>
+    <a:masterClrMapping/>
+  </p:clrMapOvr>
+</p:sld>
+</file>
+
+<file path=ppt/slides/slide21.xml><?xml version="1.0" encoding="utf-8"?>
+<p:sld xmlns:a="http://schemas.openxmlformats.org/drawingml/2006/main" xmlns:r="http://schemas.openxmlformats.org/officeDocument/2006/relationships" xmlns:p="http://schemas.openxmlformats.org/presentationml/2006/main">
+  <p:cSld>
+    <p:spTree>
+      <p:nvGrpSpPr>
+        <p:cNvPr id="1" name=""/>
+        <p:cNvGrpSpPr/>
+        <p:nvPr/>
+      </p:nvGrpSpPr>
+      <p:grpSpPr>
+        <a:xfrm>
+          <a:off x="0" y="0"/>
+          <a:ext cx="0" cy="0"/>
+          <a:chOff x="0" y="0"/>
+          <a:chExt cx="0" cy="0"/>
+        </a:xfrm>
+      </p:grpSpPr>
+      <p:sp>
+        <p:nvSpPr>
           <p:cNvPr id="2" name="Titolo 1">
             <a:extLst>
               <a:ext uri="{FF2B5EF4-FFF2-40B4-BE49-F238E27FC236}">
@@ -9258,7 +9651,7 @@
           <a:p>
             <a:fld id="{31DE2C5B-556E-47B8-A792-024C2FCA4ACC}" type="slidenum">
               <a:rPr lang="en-GB" smtClean="0"/>
-              <a:t>20</a:t>
+              <a:t>21</a:t>
             </a:fld>
             <a:endParaRPr lang="en-GB"/>
           </a:p>
@@ -9337,7 +9730,7 @@
 </p:sld>
 </file>
 
-<file path=ppt/slides/slide21.xml><?xml version="1.0" encoding="utf-8"?>
+<file path=ppt/slides/slide22.xml><?xml version="1.0" encoding="utf-8"?>
 <p:sld xmlns:a="http://schemas.openxmlformats.org/drawingml/2006/main" xmlns:r="http://schemas.openxmlformats.org/officeDocument/2006/relationships" xmlns:p="http://schemas.openxmlformats.org/presentationml/2006/main">
   <p:cSld>
     <p:spTree>
@@ -9447,29 +9840,25 @@
             </a:pPr>
             <a:r>
               <a:rPr lang="en-US" b="1" dirty="0">
-                <a:latin typeface="Palatino Linotype" panose="02040502050505030304" pitchFamily="18" charset="0"/>
+                <a:latin typeface="Aptos" panose="020B0004020202020204" pitchFamily="34" charset="0"/>
               </a:rPr>
               <a:t>Web application</a:t>
             </a:r>
             <a:r>
               <a:rPr lang="en-US" dirty="0">
-                <a:latin typeface="Palatino Linotype" panose="02040502050505030304" pitchFamily="18" charset="0"/>
+                <a:latin typeface="Aptos" panose="020B0004020202020204" pitchFamily="34" charset="0"/>
               </a:rPr>
               <a:t>:</a:t>
             </a:r>
             <a:r>
-              <a:rPr lang="en-GB" dirty="0"/>
-              <a:t> </a:t>
-            </a:r>
-            <a:r>
               <a:rPr lang="en-GB" dirty="0">
-                <a:latin typeface="Palatino Linotype" panose="02040502050505030304" pitchFamily="18" charset="0"/>
-              </a:rPr>
-              <a:t>a Web page or a collection of Web pages, delivered over HTTP, which use server-side or client-side processing, i.e., programs, to provide an "application-like" experience within a Web browser.</a:t>
+                <a:latin typeface="Aptos" panose="020B0004020202020204" pitchFamily="34" charset="0"/>
+              </a:rPr>
+              <a:t> a Web page or a collection of Web pages, delivered over HTTP, which use server-side or client-side processing, i.e., programs, to provide an "application-like" experience within a Web browser.</a:t>
             </a:r>
             <a:r>
               <a:rPr lang="en-US" dirty="0">
-                <a:latin typeface="Palatino Linotype" panose="02040502050505030304" pitchFamily="18" charset="0"/>
+                <a:latin typeface="Aptos" panose="020B0004020202020204" pitchFamily="34" charset="0"/>
               </a:rPr>
               <a:t> </a:t>
             </a:r>
@@ -9490,7 +9879,7 @@
             </a:pPr>
             <a:r>
               <a:rPr lang="en-US" dirty="0">
-                <a:latin typeface="Palatino Linotype" panose="02040502050505030304" pitchFamily="18" charset="0"/>
+                <a:latin typeface="Aptos" panose="020B0004020202020204" pitchFamily="34" charset="0"/>
               </a:rPr>
               <a:t>Web applications access data that are stored in databases in the server and use Web protocols (e.g., HTTP) to exchange data with the client. They use the Web browser to display a user interface by which the user can use the app (making queries, inserting data, view retrieved data, etc.).</a:t>
             </a:r>
@@ -9511,13 +9900,13 @@
             </a:pPr>
             <a:r>
               <a:rPr lang="en-US" u="sng" dirty="0">
-                <a:latin typeface="Palatino Linotype" panose="02040502050505030304" pitchFamily="18" charset="0"/>
+                <a:latin typeface="Aptos" panose="020B0004020202020204" pitchFamily="34" charset="0"/>
               </a:rPr>
               <a:t>Advantage of Web applications</a:t>
             </a:r>
             <a:r>
               <a:rPr lang="en-US" dirty="0">
-                <a:latin typeface="Palatino Linotype" panose="02040502050505030304" pitchFamily="18" charset="0"/>
+                <a:latin typeface="Aptos" panose="020B0004020202020204" pitchFamily="34" charset="0"/>
               </a:rPr>
               <a:t>: The users do not need to install separate application programs, and data can be accessed from different computers and backed up by the service operator.</a:t>
             </a:r>
@@ -9538,7 +9927,7 @@
             </a:pPr>
             <a:r>
               <a:rPr lang="en-US" dirty="0">
-                <a:latin typeface="Palatino Linotype" panose="02040502050505030304" pitchFamily="18" charset="0"/>
+                <a:latin typeface="Aptos" panose="020B0004020202020204" pitchFamily="34" charset="0"/>
               </a:rPr>
               <a:t>Examples of Web apps: Gmail, Google Docs, Trello, online banking apps, online retail sales apps, …</a:t>
             </a:r>
@@ -9584,19 +9973,19 @@
             </a:pPr>
             <a:r>
               <a:rPr lang="en-GB" dirty="0">
-                <a:latin typeface="Palatino Linotype" panose="02040502050505030304" pitchFamily="18" charset="0"/>
+                <a:latin typeface="Aptos" panose="020B0004020202020204" pitchFamily="34" charset="0"/>
               </a:rPr>
               <a:t>To act as applications, Web pages can no longer be static, but they need to generate </a:t>
             </a:r>
             <a:r>
               <a:rPr lang="en-GB" b="1" dirty="0">
-                <a:latin typeface="Palatino Linotype" panose="02040502050505030304" pitchFamily="18" charset="0"/>
+                <a:latin typeface="Aptos" panose="020B0004020202020204" pitchFamily="34" charset="0"/>
               </a:rPr>
               <a:t>dynamic content</a:t>
             </a:r>
             <a:r>
               <a:rPr lang="en-GB" dirty="0">
-                <a:latin typeface="Palatino Linotype" panose="02040502050505030304" pitchFamily="18" charset="0"/>
+                <a:latin typeface="Aptos" panose="020B0004020202020204" pitchFamily="34" charset="0"/>
               </a:rPr>
               <a:t>. </a:t>
             </a:r>
@@ -9620,7 +10009,7 @@
           <a:p>
             <a:fld id="{31DE2C5B-556E-47B8-A792-024C2FCA4ACC}" type="slidenum">
               <a:rPr lang="en-GB" smtClean="0"/>
-              <a:t>21</a:t>
+              <a:t>22</a:t>
             </a:fld>
             <a:endParaRPr lang="en-GB"/>
           </a:p>
@@ -9639,7 +10028,7 @@
 </p:sld>
 </file>
 
-<file path=ppt/slides/slide22.xml><?xml version="1.0" encoding="utf-8"?>
+<file path=ppt/slides/slide23.xml><?xml version="1.0" encoding="utf-8"?>
 <p:sld xmlns:a="http://schemas.openxmlformats.org/drawingml/2006/main" xmlns:r="http://schemas.openxmlformats.org/officeDocument/2006/relationships" xmlns:p="http://schemas.openxmlformats.org/presentationml/2006/main">
   <p:cSld>
     <p:spTree>
@@ -9760,7 +10149,7 @@
         </p:spPr>
         <p:txBody>
           <a:bodyPr vert="horz" lIns="91440" tIns="45720" rIns="91440" bIns="45720" rtlCol="0">
-            <a:normAutofit fontScale="92500" lnSpcReduction="20000"/>
+            <a:normAutofit fontScale="92500" lnSpcReduction="10000"/>
           </a:bodyPr>
           <a:lstStyle>
             <a:lvl1pPr marL="342900" indent="-342900" algn="l" defTabSz="914400" rtl="0" eaLnBrk="1" latinLnBrk="0" hangingPunct="1">
@@ -9943,47 +10332,65 @@
           </a:lstStyle>
           <a:p>
             <a:r>
-              <a:rPr lang="en-US" dirty="0"/>
+              <a:rPr lang="en-US" dirty="0">
+                <a:latin typeface="Aptos" panose="020B0004020202020204" pitchFamily="34" charset="0"/>
+              </a:rPr>
               <a:t>When the user compiles the form and click ‘Submit order’, the client sends a </a:t>
             </a:r>
             <a:r>
-              <a:rPr lang="en-US" b="1" dirty="0"/>
+              <a:rPr lang="en-US" b="1" dirty="0">
+                <a:latin typeface="Aptos" panose="020B0004020202020204" pitchFamily="34" charset="0"/>
+              </a:rPr>
               <a:t>POST request </a:t>
             </a:r>
             <a:r>
-              <a:rPr lang="en-US" dirty="0"/>
+              <a:rPr lang="en-US" dirty="0">
+                <a:latin typeface="Aptos" panose="020B0004020202020204" pitchFamily="34" charset="0"/>
+              </a:rPr>
               <a:t>to a specific URL pointing to a </a:t>
             </a:r>
             <a:r>
-              <a:rPr lang="en-US" b="1" dirty="0"/>
+              <a:rPr lang="en-US" b="1" dirty="0">
+                <a:latin typeface="Aptos" panose="020B0004020202020204" pitchFamily="34" charset="0"/>
+              </a:rPr>
               <a:t>program</a:t>
             </a:r>
             <a:r>
-              <a:rPr lang="en-US" dirty="0"/>
+              <a:rPr lang="en-US" dirty="0">
+                <a:latin typeface="Aptos" panose="020B0004020202020204" pitchFamily="34" charset="0"/>
+              </a:rPr>
               <a:t> in the Web server.</a:t>
             </a:r>
           </a:p>
           <a:p>
             <a:r>
-              <a:rPr lang="en-US" dirty="0"/>
+              <a:rPr lang="en-US" dirty="0">
+                <a:latin typeface="Aptos" panose="020B0004020202020204" pitchFamily="34" charset="0"/>
+              </a:rPr>
               <a:t>The POST request will include the input data of the form, properly formatted, in the request body.  </a:t>
             </a:r>
           </a:p>
           <a:p>
             <a:r>
-              <a:rPr lang="en-US" dirty="0"/>
+              <a:rPr lang="en-US" dirty="0">
+                <a:latin typeface="Aptos" panose="020B0004020202020204" pitchFamily="34" charset="0"/>
+              </a:rPr>
               <a:t>The server receives the data and passes them to the program. </a:t>
             </a:r>
           </a:p>
           <a:p>
             <a:r>
-              <a:rPr lang="en-US" dirty="0"/>
+              <a:rPr lang="en-US" dirty="0">
+                <a:latin typeface="Aptos" panose="020B0004020202020204" pitchFamily="34" charset="0"/>
+              </a:rPr>
               <a:t>The program process the data and generates an HTML page, whose content depends on the inserted data. </a:t>
             </a:r>
           </a:p>
           <a:p>
             <a:r>
-              <a:rPr lang="en-US" dirty="0"/>
+              <a:rPr lang="en-US" dirty="0">
+                <a:latin typeface="Aptos" panose="020B0004020202020204" pitchFamily="34" charset="0"/>
+              </a:rPr>
               <a:t>The server returns the HTML page to the client’s browser, in the body of the POST response. </a:t>
             </a:r>
           </a:p>
@@ -10028,7 +10435,7 @@
             </a:pPr>
             <a:r>
               <a:rPr lang="en-US" sz="2200" dirty="0">
-                <a:latin typeface="Palatino Linotype" panose="02040502050505030304" pitchFamily="18" charset="0"/>
+                <a:latin typeface="Aptos" panose="020B0004020202020204" pitchFamily="34" charset="0"/>
               </a:rPr>
               <a:t>How can the server invoke the program? </a:t>
             </a:r>
@@ -10047,7 +10454,7 @@
             </a:pPr>
             <a:r>
               <a:rPr lang="en-US" sz="2200" dirty="0">
-                <a:latin typeface="Palatino Linotype" panose="02040502050505030304" pitchFamily="18" charset="0"/>
+                <a:latin typeface="Aptos" panose="020B0004020202020204" pitchFamily="34" charset="0"/>
               </a:rPr>
               <a:t>Using specific APIs (Application Programming Interfaces)</a:t>
             </a:r>
@@ -10071,7 +10478,7 @@
           <a:p>
             <a:fld id="{31DE2C5B-556E-47B8-A792-024C2FCA4ACC}" type="slidenum">
               <a:rPr lang="en-GB" smtClean="0"/>
-              <a:t>22</a:t>
+              <a:t>23</a:t>
             </a:fld>
             <a:endParaRPr lang="en-GB"/>
           </a:p>
@@ -10090,7 +10497,7 @@
 </p:sld>
 </file>
 
-<file path=ppt/slides/slide23.xml><?xml version="1.0" encoding="utf-8"?>
+<file path=ppt/slides/slide24.xml><?xml version="1.0" encoding="utf-8"?>
 <p:sld xmlns:a="http://schemas.openxmlformats.org/drawingml/2006/main" xmlns:r="http://schemas.openxmlformats.org/officeDocument/2006/relationships" xmlns:p="http://schemas.openxmlformats.org/presentationml/2006/main">
   <p:cSld>
     <p:spTree>
@@ -10117,7 +10524,12 @@
             <p:ph type="title"/>
           </p:nvPr>
         </p:nvSpPr>
-        <p:spPr/>
+        <p:spPr>
+          <a:xfrm>
+            <a:off x="428172" y="161927"/>
+            <a:ext cx="11368314" cy="794152"/>
+          </a:xfrm>
+        </p:spPr>
         <p:txBody>
           <a:bodyPr/>
           <a:lstStyle/>
@@ -10142,12 +10554,12 @@
         <p:spPr>
           <a:xfrm>
             <a:off x="215521" y="1435594"/>
-            <a:ext cx="6185279" cy="5422406"/>
+            <a:ext cx="6185279" cy="5005813"/>
           </a:xfrm>
         </p:spPr>
         <p:txBody>
           <a:bodyPr>
-            <a:normAutofit/>
+            <a:normAutofit lnSpcReduction="10000"/>
           </a:bodyPr>
           <a:lstStyle/>
           <a:p>
@@ -10198,7 +10610,7 @@
         <p:spPr>
           <a:xfrm>
             <a:off x="6665545" y="1371353"/>
-            <a:ext cx="5264186" cy="5262979"/>
+            <a:ext cx="5264186" cy="5047536"/>
           </a:xfrm>
           <a:prstGeom prst="rect">
             <a:avLst/>
@@ -10217,7 +10629,7 @@
           <a:p>
             <a:r>
               <a:rPr lang="en-GB" sz="1400" dirty="0">
-                <a:latin typeface="Palatino Linotype" panose="02040502050505030304" pitchFamily="18" charset="0"/>
+                <a:latin typeface="Aptos" panose="020B0004020202020204" pitchFamily="34" charset="0"/>
               </a:rPr>
               <a:t>&lt;html&gt;</a:t>
             </a:r>
@@ -10225,7 +10637,7 @@
           <a:p>
             <a:r>
               <a:rPr lang="en-GB" sz="1400" dirty="0">
-                <a:latin typeface="Palatino Linotype" panose="02040502050505030304" pitchFamily="18" charset="0"/>
+                <a:latin typeface="Aptos" panose="020B0004020202020204" pitchFamily="34" charset="0"/>
               </a:rPr>
               <a:t>&lt;head&gt;</a:t>
             </a:r>
@@ -10233,31 +10645,31 @@
           <a:p>
             <a:r>
               <a:rPr lang="en-GB" sz="1400" dirty="0">
-                <a:latin typeface="Palatino Linotype" panose="02040502050505030304" pitchFamily="18" charset="0"/>
+                <a:latin typeface="Aptos" panose="020B0004020202020204" pitchFamily="34" charset="0"/>
               </a:rPr>
               <a:t>&lt;script language="</a:t>
             </a:r>
             <a:r>
               <a:rPr lang="en-GB" sz="1400" dirty="0" err="1">
-                <a:latin typeface="Palatino Linotype" panose="02040502050505030304" pitchFamily="18" charset="0"/>
+                <a:latin typeface="Aptos" panose="020B0004020202020204" pitchFamily="34" charset="0"/>
               </a:rPr>
               <a:t>javascript</a:t>
             </a:r>
             <a:r>
               <a:rPr lang="en-GB" sz="1400" dirty="0">
-                <a:latin typeface="Palatino Linotype" panose="02040502050505030304" pitchFamily="18" charset="0"/>
+                <a:latin typeface="Aptos" panose="020B0004020202020204" pitchFamily="34" charset="0"/>
               </a:rPr>
               <a:t>" type="text/</a:t>
             </a:r>
             <a:r>
               <a:rPr lang="en-GB" sz="1400" dirty="0" err="1">
-                <a:latin typeface="Palatino Linotype" panose="02040502050505030304" pitchFamily="18" charset="0"/>
+                <a:latin typeface="Aptos" panose="020B0004020202020204" pitchFamily="34" charset="0"/>
               </a:rPr>
               <a:t>javascript</a:t>
             </a:r>
             <a:r>
               <a:rPr lang="en-GB" sz="1400" dirty="0">
-                <a:latin typeface="Palatino Linotype" panose="02040502050505030304" pitchFamily="18" charset="0"/>
+                <a:latin typeface="Aptos" panose="020B0004020202020204" pitchFamily="34" charset="0"/>
               </a:rPr>
               <a:t>"&gt;</a:t>
             </a:r>
@@ -10265,7 +10677,7 @@
           <a:p>
             <a:r>
               <a:rPr lang="en-GB" sz="1400" dirty="0">
-                <a:latin typeface="Palatino Linotype" panose="02040502050505030304" pitchFamily="18" charset="0"/>
+                <a:latin typeface="Aptos" panose="020B0004020202020204" pitchFamily="34" charset="0"/>
               </a:rPr>
               <a:t>function response(test form) {</a:t>
             </a:r>
@@ -10273,25 +10685,25 @@
           <a:p>
             <a:r>
               <a:rPr lang="en-GB" sz="1400" dirty="0" err="1">
-                <a:latin typeface="Palatino Linotype" panose="02040502050505030304" pitchFamily="18" charset="0"/>
+                <a:latin typeface="Aptos" panose="020B0004020202020204" pitchFamily="34" charset="0"/>
               </a:rPr>
               <a:t>var</a:t>
             </a:r>
             <a:r>
               <a:rPr lang="en-GB" sz="1400" dirty="0">
-                <a:latin typeface="Palatino Linotype" panose="02040502050505030304" pitchFamily="18" charset="0"/>
+                <a:latin typeface="Aptos" panose="020B0004020202020204" pitchFamily="34" charset="0"/>
               </a:rPr>
               <a:t> person = test </a:t>
             </a:r>
             <a:r>
               <a:rPr lang="en-GB" sz="1400" dirty="0" err="1">
-                <a:latin typeface="Palatino Linotype" panose="02040502050505030304" pitchFamily="18" charset="0"/>
+                <a:latin typeface="Aptos" panose="020B0004020202020204" pitchFamily="34" charset="0"/>
               </a:rPr>
               <a:t>form.name.value</a:t>
             </a:r>
             <a:r>
               <a:rPr lang="en-GB" sz="1400" dirty="0">
-                <a:latin typeface="Palatino Linotype" panose="02040502050505030304" pitchFamily="18" charset="0"/>
+                <a:latin typeface="Aptos" panose="020B0004020202020204" pitchFamily="34" charset="0"/>
               </a:rPr>
               <a:t>;</a:t>
             </a:r>
@@ -10299,37 +10711,37 @@
           <a:p>
             <a:r>
               <a:rPr lang="en-GB" sz="1400" dirty="0" err="1">
-                <a:latin typeface="Palatino Linotype" panose="02040502050505030304" pitchFamily="18" charset="0"/>
+                <a:latin typeface="Aptos" panose="020B0004020202020204" pitchFamily="34" charset="0"/>
               </a:rPr>
               <a:t>var</a:t>
             </a:r>
             <a:r>
               <a:rPr lang="en-GB" sz="1400" dirty="0">
-                <a:latin typeface="Palatino Linotype" panose="02040502050505030304" pitchFamily="18" charset="0"/>
+                <a:latin typeface="Aptos" panose="020B0004020202020204" pitchFamily="34" charset="0"/>
               </a:rPr>
               <a:t> years = </a:t>
             </a:r>
             <a:r>
               <a:rPr lang="en-GB" sz="1400" dirty="0" err="1">
-                <a:latin typeface="Palatino Linotype" panose="02040502050505030304" pitchFamily="18" charset="0"/>
+                <a:latin typeface="Aptos" panose="020B0004020202020204" pitchFamily="34" charset="0"/>
               </a:rPr>
               <a:t>eval</a:t>
             </a:r>
             <a:r>
               <a:rPr lang="en-GB" sz="1400" dirty="0">
-                <a:latin typeface="Palatino Linotype" panose="02040502050505030304" pitchFamily="18" charset="0"/>
+                <a:latin typeface="Aptos" panose="020B0004020202020204" pitchFamily="34" charset="0"/>
               </a:rPr>
               <a:t>(test </a:t>
             </a:r>
             <a:r>
               <a:rPr lang="en-GB" sz="1400" dirty="0" err="1">
-                <a:latin typeface="Palatino Linotype" panose="02040502050505030304" pitchFamily="18" charset="0"/>
+                <a:latin typeface="Aptos" panose="020B0004020202020204" pitchFamily="34" charset="0"/>
               </a:rPr>
               <a:t>form.age.value</a:t>
             </a:r>
             <a:r>
               <a:rPr lang="en-GB" sz="1400" dirty="0">
-                <a:latin typeface="Palatino Linotype" panose="02040502050505030304" pitchFamily="18" charset="0"/>
+                <a:latin typeface="Aptos" panose="020B0004020202020204" pitchFamily="34" charset="0"/>
               </a:rPr>
               <a:t>) + 1;</a:t>
             </a:r>
@@ -10337,13 +10749,13 @@
           <a:p>
             <a:r>
               <a:rPr lang="en-GB" sz="1400" dirty="0" err="1">
-                <a:latin typeface="Palatino Linotype" panose="02040502050505030304" pitchFamily="18" charset="0"/>
+                <a:latin typeface="Aptos" panose="020B0004020202020204" pitchFamily="34" charset="0"/>
               </a:rPr>
               <a:t>document.open</a:t>
             </a:r>
             <a:r>
               <a:rPr lang="en-GB" sz="1400" dirty="0">
-                <a:latin typeface="Palatino Linotype" panose="02040502050505030304" pitchFamily="18" charset="0"/>
+                <a:latin typeface="Aptos" panose="020B0004020202020204" pitchFamily="34" charset="0"/>
               </a:rPr>
               <a:t>();</a:t>
             </a:r>
@@ -10351,13 +10763,13 @@
           <a:p>
             <a:r>
               <a:rPr lang="en-GB" sz="1400" dirty="0" err="1">
-                <a:latin typeface="Palatino Linotype" panose="02040502050505030304" pitchFamily="18" charset="0"/>
+                <a:latin typeface="Aptos" panose="020B0004020202020204" pitchFamily="34" charset="0"/>
               </a:rPr>
               <a:t>document.writeln</a:t>
             </a:r>
             <a:r>
               <a:rPr lang="en-GB" sz="1400" dirty="0">
-                <a:latin typeface="Palatino Linotype" panose="02040502050505030304" pitchFamily="18" charset="0"/>
+                <a:latin typeface="Aptos" panose="020B0004020202020204" pitchFamily="34" charset="0"/>
               </a:rPr>
               <a:t>("&lt;html&gt; &lt;body&gt;");</a:t>
             </a:r>
@@ -10365,25 +10777,25 @@
           <a:p>
             <a:r>
               <a:rPr lang="en-GB" sz="1400" dirty="0" err="1">
-                <a:latin typeface="Palatino Linotype" panose="02040502050505030304" pitchFamily="18" charset="0"/>
+                <a:latin typeface="Aptos" panose="020B0004020202020204" pitchFamily="34" charset="0"/>
               </a:rPr>
               <a:t>document.writeln</a:t>
             </a:r>
             <a:r>
               <a:rPr lang="en-GB" sz="1400" dirty="0">
-                <a:latin typeface="Palatino Linotype" panose="02040502050505030304" pitchFamily="18" charset="0"/>
+                <a:latin typeface="Aptos" panose="020B0004020202020204" pitchFamily="34" charset="0"/>
               </a:rPr>
               <a:t>("Hello " + person + ".&lt;</a:t>
             </a:r>
             <a:r>
               <a:rPr lang="en-GB" sz="1400" dirty="0" err="1">
-                <a:latin typeface="Palatino Linotype" panose="02040502050505030304" pitchFamily="18" charset="0"/>
+                <a:latin typeface="Aptos" panose="020B0004020202020204" pitchFamily="34" charset="0"/>
               </a:rPr>
               <a:t>br</a:t>
             </a:r>
             <a:r>
               <a:rPr lang="en-GB" sz="1400" dirty="0">
-                <a:latin typeface="Palatino Linotype" panose="02040502050505030304" pitchFamily="18" charset="0"/>
+                <a:latin typeface="Aptos" panose="020B0004020202020204" pitchFamily="34" charset="0"/>
               </a:rPr>
               <a:t>&gt;");</a:t>
             </a:r>
@@ -10391,13 +10803,13 @@
           <a:p>
             <a:r>
               <a:rPr lang="en-GB" sz="1400" dirty="0" err="1">
-                <a:latin typeface="Palatino Linotype" panose="02040502050505030304" pitchFamily="18" charset="0"/>
+                <a:latin typeface="Aptos" panose="020B0004020202020204" pitchFamily="34" charset="0"/>
               </a:rPr>
               <a:t>document.writeln</a:t>
             </a:r>
             <a:r>
               <a:rPr lang="en-GB" sz="1400" dirty="0">
-                <a:latin typeface="Palatino Linotype" panose="02040502050505030304" pitchFamily="18" charset="0"/>
+                <a:latin typeface="Aptos" panose="020B0004020202020204" pitchFamily="34" charset="0"/>
               </a:rPr>
               <a:t>("Prediction: next year you will be " + years + ".");</a:t>
             </a:r>
@@ -10405,13 +10817,13 @@
           <a:p>
             <a:r>
               <a:rPr lang="en-GB" sz="1400" dirty="0" err="1">
-                <a:latin typeface="Palatino Linotype" panose="02040502050505030304" pitchFamily="18" charset="0"/>
+                <a:latin typeface="Aptos" panose="020B0004020202020204" pitchFamily="34" charset="0"/>
               </a:rPr>
               <a:t>document.writeln</a:t>
             </a:r>
             <a:r>
               <a:rPr lang="en-GB" sz="1400" dirty="0">
-                <a:latin typeface="Palatino Linotype" panose="02040502050505030304" pitchFamily="18" charset="0"/>
+                <a:latin typeface="Aptos" panose="020B0004020202020204" pitchFamily="34" charset="0"/>
               </a:rPr>
               <a:t>("&lt;/body&gt; &lt;/html&gt;");</a:t>
             </a:r>
@@ -10419,13 +10831,13 @@
           <a:p>
             <a:r>
               <a:rPr lang="en-GB" sz="1400" dirty="0" err="1">
-                <a:latin typeface="Palatino Linotype" panose="02040502050505030304" pitchFamily="18" charset="0"/>
+                <a:latin typeface="Aptos" panose="020B0004020202020204" pitchFamily="34" charset="0"/>
               </a:rPr>
               <a:t>document.close</a:t>
             </a:r>
             <a:r>
               <a:rPr lang="en-GB" sz="1400" dirty="0">
-                <a:latin typeface="Palatino Linotype" panose="02040502050505030304" pitchFamily="18" charset="0"/>
+                <a:latin typeface="Aptos" panose="020B0004020202020204" pitchFamily="34" charset="0"/>
               </a:rPr>
               <a:t>(); }</a:t>
             </a:r>
@@ -10433,7 +10845,7 @@
           <a:p>
             <a:r>
               <a:rPr lang="en-GB" sz="1400" dirty="0">
-                <a:latin typeface="Palatino Linotype" panose="02040502050505030304" pitchFamily="18" charset="0"/>
+                <a:latin typeface="Aptos" panose="020B0004020202020204" pitchFamily="34" charset="0"/>
               </a:rPr>
               <a:t>&lt;/script&gt;</a:t>
             </a:r>
@@ -10441,7 +10853,7 @@
           <a:p>
             <a:r>
               <a:rPr lang="en-GB" sz="1400" dirty="0">
-                <a:latin typeface="Palatino Linotype" panose="02040502050505030304" pitchFamily="18" charset="0"/>
+                <a:latin typeface="Aptos" panose="020B0004020202020204" pitchFamily="34" charset="0"/>
               </a:rPr>
               <a:t>&lt;/head&gt;</a:t>
             </a:r>
@@ -10449,7 +10861,7 @@
           <a:p>
             <a:r>
               <a:rPr lang="en-GB" sz="1400" dirty="0">
-                <a:latin typeface="Palatino Linotype" panose="02040502050505030304" pitchFamily="18" charset="0"/>
+                <a:latin typeface="Aptos" panose="020B0004020202020204" pitchFamily="34" charset="0"/>
               </a:rPr>
               <a:t>&lt;body&gt;</a:t>
             </a:r>
@@ -10457,7 +10869,7 @@
           <a:p>
             <a:r>
               <a:rPr lang="en-GB" sz="1400" dirty="0">
-                <a:latin typeface="Palatino Linotype" panose="02040502050505030304" pitchFamily="18" charset="0"/>
+                <a:latin typeface="Aptos" panose="020B0004020202020204" pitchFamily="34" charset="0"/>
               </a:rPr>
               <a:t>&lt;form&gt;</a:t>
             </a:r>
@@ -10465,7 +10877,7 @@
           <a:p>
             <a:r>
               <a:rPr lang="en-GB" sz="1400" dirty="0">
-                <a:latin typeface="Palatino Linotype" panose="02040502050505030304" pitchFamily="18" charset="0"/>
+                <a:latin typeface="Aptos" panose="020B0004020202020204" pitchFamily="34" charset="0"/>
               </a:rPr>
               <a:t>Please enter your name: &lt;input type="text" name="name"&gt;</a:t>
             </a:r>
@@ -10473,7 +10885,7 @@
           <a:p>
             <a:r>
               <a:rPr lang="en-GB" sz="1400" dirty="0">
-                <a:latin typeface="Palatino Linotype" panose="02040502050505030304" pitchFamily="18" charset="0"/>
+                <a:latin typeface="Aptos" panose="020B0004020202020204" pitchFamily="34" charset="0"/>
               </a:rPr>
               <a:t>&lt;p&gt;Please enter your age: &lt;input type="text" name="age"&gt;&lt;p&gt;</a:t>
             </a:r>
@@ -10481,31 +10893,31 @@
           <a:p>
             <a:r>
               <a:rPr lang="en-GB" sz="1400" dirty="0">
-                <a:latin typeface="Palatino Linotype" panose="02040502050505030304" pitchFamily="18" charset="0"/>
+                <a:latin typeface="Aptos" panose="020B0004020202020204" pitchFamily="34" charset="0"/>
               </a:rPr>
               <a:t>&lt;input type="button" value="submit" </a:t>
             </a:r>
             <a:r>
               <a:rPr lang="en-GB" sz="1400" dirty="0" err="1">
-                <a:latin typeface="Palatino Linotype" panose="02040502050505030304" pitchFamily="18" charset="0"/>
+                <a:latin typeface="Aptos" panose="020B0004020202020204" pitchFamily="34" charset="0"/>
               </a:rPr>
               <a:t>onclick</a:t>
             </a:r>
             <a:r>
               <a:rPr lang="en-GB" sz="1400" dirty="0">
-                <a:latin typeface="Palatino Linotype" panose="02040502050505030304" pitchFamily="18" charset="0"/>
+                <a:latin typeface="Aptos" panose="020B0004020202020204" pitchFamily="34" charset="0"/>
               </a:rPr>
               <a:t>="response(</a:t>
             </a:r>
             <a:r>
               <a:rPr lang="en-GB" sz="1400" dirty="0" err="1">
-                <a:latin typeface="Palatino Linotype" panose="02040502050505030304" pitchFamily="18" charset="0"/>
+                <a:latin typeface="Aptos" panose="020B0004020202020204" pitchFamily="34" charset="0"/>
               </a:rPr>
               <a:t>this.form</a:t>
             </a:r>
             <a:r>
               <a:rPr lang="en-GB" sz="1400" dirty="0">
-                <a:latin typeface="Palatino Linotype" panose="02040502050505030304" pitchFamily="18" charset="0"/>
+                <a:latin typeface="Aptos" panose="020B0004020202020204" pitchFamily="34" charset="0"/>
               </a:rPr>
               <a:t>)"&gt;</a:t>
             </a:r>
@@ -10513,7 +10925,7 @@
           <a:p>
             <a:r>
               <a:rPr lang="en-GB" sz="1400" dirty="0">
-                <a:latin typeface="Palatino Linotype" panose="02040502050505030304" pitchFamily="18" charset="0"/>
+                <a:latin typeface="Aptos" panose="020B0004020202020204" pitchFamily="34" charset="0"/>
               </a:rPr>
               <a:t>&lt;/form&gt;</a:t>
             </a:r>
@@ -10521,7 +10933,7 @@
           <a:p>
             <a:r>
               <a:rPr lang="en-GB" sz="1400" dirty="0">
-                <a:latin typeface="Palatino Linotype" panose="02040502050505030304" pitchFamily="18" charset="0"/>
+                <a:latin typeface="Aptos" panose="020B0004020202020204" pitchFamily="34" charset="0"/>
               </a:rPr>
               <a:t>&lt;/body&gt;</a:t>
             </a:r>
@@ -10529,12 +10941,12 @@
           <a:p>
             <a:r>
               <a:rPr lang="en-GB" sz="1400" dirty="0">
-                <a:latin typeface="Palatino Linotype" panose="02040502050505030304" pitchFamily="18" charset="0"/>
+                <a:latin typeface="Aptos" panose="020B0004020202020204" pitchFamily="34" charset="0"/>
               </a:rPr>
               <a:t>&lt;/html&gt;</a:t>
             </a:r>
             <a:endParaRPr lang="en-US" sz="4400" dirty="0">
-              <a:latin typeface="Palatino Linotype" panose="02040502050505030304" pitchFamily="18" charset="0"/>
+              <a:latin typeface="Aptos" panose="020B0004020202020204" pitchFamily="34" charset="0"/>
             </a:endParaRPr>
           </a:p>
         </p:txBody>
@@ -10548,7 +10960,7 @@
         <p:spPr>
           <a:xfrm>
             <a:off x="6613451" y="1814623"/>
-            <a:ext cx="5372986" cy="2636875"/>
+            <a:ext cx="5372986" cy="2434289"/>
           </a:xfrm>
           <a:prstGeom prst="frame">
             <a:avLst>
@@ -10589,6 +11001,7 @@
               <a:solidFill>
                 <a:schemeClr val="tx1"/>
               </a:solidFill>
+              <a:latin typeface="Aptos" panose="020B0004020202020204" pitchFamily="34" charset="0"/>
             </a:endParaRPr>
           </a:p>
         </p:txBody>
@@ -10603,14 +11016,19 @@
             <p:ph type="sldNum" sz="quarter" idx="12"/>
           </p:nvPr>
         </p:nvSpPr>
-        <p:spPr/>
+        <p:spPr>
+          <a:xfrm>
+            <a:off x="8610600" y="6356350"/>
+            <a:ext cx="3185886" cy="337073"/>
+          </a:xfrm>
+        </p:spPr>
         <p:txBody>
           <a:bodyPr/>
           <a:lstStyle/>
           <a:p>
             <a:fld id="{31DE2C5B-556E-47B8-A792-024C2FCA4ACC}" type="slidenum">
               <a:rPr lang="en-GB" smtClean="0"/>
-              <a:t>23</a:t>
+              <a:t>24</a:t>
             </a:fld>
             <a:endParaRPr lang="en-GB"/>
           </a:p>
@@ -10629,7 +11047,7 @@
 </p:sld>
 </file>
 
-<file path=ppt/slides/slide24.xml><?xml version="1.0" encoding="utf-8"?>
+<file path=ppt/slides/slide25.xml><?xml version="1.0" encoding="utf-8"?>
 <p:sld xmlns:a="http://schemas.openxmlformats.org/drawingml/2006/main" xmlns:r="http://schemas.openxmlformats.org/officeDocument/2006/relationships" xmlns:p="http://schemas.openxmlformats.org/presentationml/2006/main">
   <p:cSld>
     <p:spTree>
@@ -10693,7 +11111,7 @@
         </p:nvSpPr>
         <p:spPr>
           <a:xfrm>
-            <a:off x="891363" y="1775633"/>
+            <a:off x="1062051" y="2293793"/>
             <a:ext cx="3565451" cy="3586969"/>
           </a:xfrm>
           <a:prstGeom prst="rect">
@@ -10724,7 +11142,9 @@
           <a:lstStyle/>
           <a:p>
             <a:pPr algn="ctr"/>
-            <a:endParaRPr lang="en-GB" dirty="0"/>
+            <a:endParaRPr lang="en-GB" dirty="0">
+              <a:latin typeface="Aptos" panose="020B0004020202020204" pitchFamily="34" charset="0"/>
+            </a:endParaRPr>
           </a:p>
         </p:txBody>
       </p:sp>
@@ -10736,7 +11156,7 @@
         </p:nvSpPr>
         <p:spPr>
           <a:xfrm>
-            <a:off x="6596306" y="1770319"/>
+            <a:off x="6766994" y="2288479"/>
             <a:ext cx="4624587" cy="3264197"/>
           </a:xfrm>
           <a:prstGeom prst="rect">
@@ -10767,7 +11187,9 @@
           <a:lstStyle/>
           <a:p>
             <a:pPr algn="ctr"/>
-            <a:endParaRPr lang="en-GB"/>
+            <a:endParaRPr lang="en-GB">
+              <a:latin typeface="Aptos" panose="020B0004020202020204" pitchFamily="34" charset="0"/>
+            </a:endParaRPr>
           </a:p>
         </p:txBody>
       </p:sp>
@@ -10779,7 +11201,7 @@
         </p:nvSpPr>
         <p:spPr>
           <a:xfrm>
-            <a:off x="1738423" y="1248614"/>
+            <a:off x="1909111" y="1766774"/>
             <a:ext cx="1871330" cy="461665"/>
           </a:xfrm>
           <a:prstGeom prst="rect">
@@ -10796,12 +11218,12 @@
             <a:pPr algn="ctr"/>
             <a:r>
               <a:rPr lang="it-IT" sz="2400" dirty="0">
-                <a:latin typeface="Palatino Linotype" panose="02040502050505030304" pitchFamily="18" charset="0"/>
+                <a:latin typeface="Aptos" panose="020B0004020202020204" pitchFamily="34" charset="0"/>
               </a:rPr>
               <a:t>Client</a:t>
             </a:r>
             <a:endParaRPr lang="en-GB" sz="2400" dirty="0">
-              <a:latin typeface="Palatino Linotype" panose="02040502050505030304" pitchFamily="18" charset="0"/>
+              <a:latin typeface="Aptos" panose="020B0004020202020204" pitchFamily="34" charset="0"/>
             </a:endParaRPr>
           </a:p>
         </p:txBody>
@@ -10814,7 +11236,7 @@
         </p:nvSpPr>
         <p:spPr>
           <a:xfrm>
-            <a:off x="7742274" y="1308654"/>
+            <a:off x="7912962" y="1826814"/>
             <a:ext cx="1871330" cy="461665"/>
           </a:xfrm>
           <a:prstGeom prst="rect">
@@ -10831,12 +11253,12 @@
             <a:pPr algn="ctr"/>
             <a:r>
               <a:rPr lang="it-IT" sz="2400" dirty="0">
-                <a:latin typeface="Palatino Linotype" panose="02040502050505030304" pitchFamily="18" charset="0"/>
+                <a:latin typeface="Aptos" panose="020B0004020202020204" pitchFamily="34" charset="0"/>
               </a:rPr>
               <a:t>Server</a:t>
             </a:r>
             <a:endParaRPr lang="en-GB" sz="2400" dirty="0">
-              <a:latin typeface="Palatino Linotype" panose="02040502050505030304" pitchFamily="18" charset="0"/>
+              <a:latin typeface="Aptos" panose="020B0004020202020204" pitchFamily="34" charset="0"/>
             </a:endParaRPr>
           </a:p>
         </p:txBody>
@@ -10849,7 +11271,7 @@
         </p:nvSpPr>
         <p:spPr>
           <a:xfrm>
-            <a:off x="1306032" y="2414124"/>
+            <a:off x="1476720" y="2932284"/>
             <a:ext cx="2736112" cy="2620392"/>
           </a:xfrm>
           <a:prstGeom prst="rect">
@@ -10880,7 +11302,9 @@
           <a:lstStyle/>
           <a:p>
             <a:pPr algn="ctr"/>
-            <a:endParaRPr lang="en-GB" dirty="0"/>
+            <a:endParaRPr lang="en-GB" dirty="0">
+              <a:latin typeface="Aptos" panose="020B0004020202020204" pitchFamily="34" charset="0"/>
+            </a:endParaRPr>
           </a:p>
         </p:txBody>
       </p:sp>
@@ -10892,7 +11316,7 @@
         </p:nvSpPr>
         <p:spPr>
           <a:xfrm>
-            <a:off x="1738423" y="2026797"/>
+            <a:off x="1909111" y="2544957"/>
             <a:ext cx="1871330" cy="400110"/>
           </a:xfrm>
           <a:prstGeom prst="rect">
@@ -10909,12 +11333,12 @@
             <a:pPr algn="ctr"/>
             <a:r>
               <a:rPr lang="it-IT" sz="2000" dirty="0">
-                <a:latin typeface="Palatino Linotype" panose="02040502050505030304" pitchFamily="18" charset="0"/>
+                <a:latin typeface="Aptos" panose="020B0004020202020204" pitchFamily="34" charset="0"/>
               </a:rPr>
               <a:t>Web browser</a:t>
             </a:r>
             <a:endParaRPr lang="en-GB" sz="2000" dirty="0">
-              <a:latin typeface="Palatino Linotype" panose="02040502050505030304" pitchFamily="18" charset="0"/>
+              <a:latin typeface="Aptos" panose="020B0004020202020204" pitchFamily="34" charset="0"/>
             </a:endParaRPr>
           </a:p>
         </p:txBody>
@@ -10927,7 +11351,7 @@
         </p:nvSpPr>
         <p:spPr>
           <a:xfrm>
-            <a:off x="1469066" y="2590950"/>
+            <a:off x="1639754" y="3109110"/>
             <a:ext cx="2417134" cy="446567"/>
           </a:xfrm>
           <a:prstGeom prst="rect">
@@ -10955,18 +11379,18 @@
             <a:pPr algn="ctr"/>
             <a:r>
               <a:rPr lang="it-IT" dirty="0">
-                <a:latin typeface="Palatino Linotype" panose="02040502050505030304" pitchFamily="18" charset="0"/>
+                <a:latin typeface="Aptos" panose="020B0004020202020204" pitchFamily="34" charset="0"/>
               </a:rPr>
               <a:t>HTML </a:t>
             </a:r>
             <a:r>
               <a:rPr lang="it-IT" dirty="0" err="1">
-                <a:latin typeface="Palatino Linotype" panose="02040502050505030304" pitchFamily="18" charset="0"/>
+                <a:latin typeface="Aptos" panose="020B0004020202020204" pitchFamily="34" charset="0"/>
               </a:rPr>
               <a:t>interpreter</a:t>
             </a:r>
             <a:endParaRPr lang="en-GB" dirty="0">
-              <a:latin typeface="Palatino Linotype" panose="02040502050505030304" pitchFamily="18" charset="0"/>
+              <a:latin typeface="Aptos" panose="020B0004020202020204" pitchFamily="34" charset="0"/>
             </a:endParaRPr>
           </a:p>
         </p:txBody>
@@ -10979,7 +11403,7 @@
         </p:nvSpPr>
         <p:spPr>
           <a:xfrm>
-            <a:off x="1469066" y="3185506"/>
+            <a:off x="1639754" y="3703666"/>
             <a:ext cx="2417134" cy="634978"/>
           </a:xfrm>
           <a:prstGeom prst="rect">
@@ -11007,30 +11431,30 @@
             <a:pPr algn="ctr"/>
             <a:r>
               <a:rPr lang="it-IT" dirty="0">
-                <a:latin typeface="Palatino Linotype" panose="02040502050505030304" pitchFamily="18" charset="0"/>
+                <a:latin typeface="Aptos" panose="020B0004020202020204" pitchFamily="34" charset="0"/>
               </a:rPr>
               <a:t>Client-side </a:t>
             </a:r>
             <a:r>
               <a:rPr lang="it-IT" dirty="0" err="1">
-                <a:latin typeface="Palatino Linotype" panose="02040502050505030304" pitchFamily="18" charset="0"/>
+                <a:latin typeface="Aptos" panose="020B0004020202020204" pitchFamily="34" charset="0"/>
               </a:rPr>
               <a:t>language</a:t>
             </a:r>
             <a:r>
               <a:rPr lang="it-IT" dirty="0">
-                <a:latin typeface="Palatino Linotype" panose="02040502050505030304" pitchFamily="18" charset="0"/>
+                <a:latin typeface="Aptos" panose="020B0004020202020204" pitchFamily="34" charset="0"/>
               </a:rPr>
               <a:t> </a:t>
             </a:r>
             <a:r>
               <a:rPr lang="it-IT" dirty="0" err="1">
-                <a:latin typeface="Palatino Linotype" panose="02040502050505030304" pitchFamily="18" charset="0"/>
+                <a:latin typeface="Aptos" panose="020B0004020202020204" pitchFamily="34" charset="0"/>
               </a:rPr>
               <a:t>interpreter</a:t>
             </a:r>
             <a:endParaRPr lang="en-GB" dirty="0">
-              <a:latin typeface="Palatino Linotype" panose="02040502050505030304" pitchFamily="18" charset="0"/>
+              <a:latin typeface="Aptos" panose="020B0004020202020204" pitchFamily="34" charset="0"/>
             </a:endParaRPr>
           </a:p>
         </p:txBody>
@@ -11043,7 +11467,7 @@
         </p:nvSpPr>
         <p:spPr>
           <a:xfrm>
-            <a:off x="1469066" y="4006434"/>
+            <a:off x="1639754" y="4524594"/>
             <a:ext cx="1049078" cy="446567"/>
           </a:xfrm>
           <a:prstGeom prst="rect">
@@ -11071,12 +11495,12 @@
             <a:pPr algn="ctr"/>
             <a:r>
               <a:rPr lang="it-IT" dirty="0" err="1">
-                <a:latin typeface="Palatino Linotype" panose="02040502050505030304" pitchFamily="18" charset="0"/>
+                <a:latin typeface="Aptos" panose="020B0004020202020204" pitchFamily="34" charset="0"/>
               </a:rPr>
               <a:t>Plugs-in</a:t>
             </a:r>
             <a:endParaRPr lang="en-GB" dirty="0">
-              <a:latin typeface="Palatino Linotype" panose="02040502050505030304" pitchFamily="18" charset="0"/>
+              <a:latin typeface="Aptos" panose="020B0004020202020204" pitchFamily="34" charset="0"/>
             </a:endParaRPr>
           </a:p>
         </p:txBody>
@@ -11089,7 +11513,7 @@
         </p:nvSpPr>
         <p:spPr>
           <a:xfrm>
-            <a:off x="1843412" y="4420997"/>
+            <a:off x="2014100" y="4939157"/>
             <a:ext cx="1871330" cy="400110"/>
           </a:xfrm>
           <a:prstGeom prst="rect">
@@ -11106,12 +11530,12 @@
             <a:pPr algn="ctr"/>
             <a:r>
               <a:rPr lang="it-IT" sz="2000" dirty="0">
-                <a:latin typeface="Palatino Linotype" panose="02040502050505030304" pitchFamily="18" charset="0"/>
+                <a:latin typeface="Aptos" panose="020B0004020202020204" pitchFamily="34" charset="0"/>
               </a:rPr>
               <a:t>…</a:t>
             </a:r>
             <a:endParaRPr lang="en-GB" sz="2000" dirty="0">
-              <a:latin typeface="Palatino Linotype" panose="02040502050505030304" pitchFamily="18" charset="0"/>
+              <a:latin typeface="Aptos" panose="020B0004020202020204" pitchFamily="34" charset="0"/>
             </a:endParaRPr>
           </a:p>
         </p:txBody>
@@ -11124,7 +11548,7 @@
         </p:nvSpPr>
         <p:spPr>
           <a:xfrm>
-            <a:off x="7129469" y="2027702"/>
+            <a:off x="7300157" y="2545862"/>
             <a:ext cx="1933354" cy="1033177"/>
           </a:xfrm>
           <a:prstGeom prst="rect">
@@ -11152,30 +11576,30 @@
             <a:pPr algn="ctr"/>
             <a:r>
               <a:rPr lang="it-IT" dirty="0">
-                <a:latin typeface="Palatino Linotype" panose="02040502050505030304" pitchFamily="18" charset="0"/>
+                <a:latin typeface="Aptos" panose="020B0004020202020204" pitchFamily="34" charset="0"/>
               </a:rPr>
               <a:t>Server-side </a:t>
             </a:r>
             <a:r>
               <a:rPr lang="it-IT" dirty="0" err="1">
-                <a:latin typeface="Palatino Linotype" panose="02040502050505030304" pitchFamily="18" charset="0"/>
+                <a:latin typeface="Aptos" panose="020B0004020202020204" pitchFamily="34" charset="0"/>
               </a:rPr>
               <a:t>language</a:t>
             </a:r>
             <a:r>
               <a:rPr lang="it-IT" dirty="0">
-                <a:latin typeface="Palatino Linotype" panose="02040502050505030304" pitchFamily="18" charset="0"/>
+                <a:latin typeface="Aptos" panose="020B0004020202020204" pitchFamily="34" charset="0"/>
               </a:rPr>
               <a:t>  </a:t>
             </a:r>
             <a:r>
               <a:rPr lang="it-IT" dirty="0" err="1">
-                <a:latin typeface="Palatino Linotype" panose="02040502050505030304" pitchFamily="18" charset="0"/>
+                <a:latin typeface="Aptos" panose="020B0004020202020204" pitchFamily="34" charset="0"/>
               </a:rPr>
               <a:t>interpreter</a:t>
             </a:r>
             <a:endParaRPr lang="en-GB" dirty="0">
-              <a:latin typeface="Palatino Linotype" panose="02040502050505030304" pitchFamily="18" charset="0"/>
+              <a:latin typeface="Aptos" panose="020B0004020202020204" pitchFamily="34" charset="0"/>
             </a:endParaRPr>
           </a:p>
         </p:txBody>
@@ -11188,7 +11612,7 @@
         </p:nvSpPr>
         <p:spPr>
           <a:xfrm>
-            <a:off x="8865781" y="4182616"/>
+            <a:off x="9036469" y="4700776"/>
             <a:ext cx="1625011" cy="613860"/>
           </a:xfrm>
           <a:prstGeom prst="rect">
@@ -11216,24 +11640,24 @@
             <a:pPr algn="ctr"/>
             <a:r>
               <a:rPr lang="it-IT" dirty="0">
-                <a:latin typeface="Palatino Linotype" panose="02040502050505030304" pitchFamily="18" charset="0"/>
+                <a:latin typeface="Aptos" panose="020B0004020202020204" pitchFamily="34" charset="0"/>
               </a:rPr>
               <a:t>Back-end </a:t>
             </a:r>
             <a:r>
               <a:rPr lang="it-IT" dirty="0" err="1">
-                <a:latin typeface="Palatino Linotype" panose="02040502050505030304" pitchFamily="18" charset="0"/>
+                <a:latin typeface="Aptos" panose="020B0004020202020204" pitchFamily="34" charset="0"/>
               </a:rPr>
               <a:t>programs</a:t>
             </a:r>
             <a:r>
               <a:rPr lang="it-IT" dirty="0">
-                <a:latin typeface="Palatino Linotype" panose="02040502050505030304" pitchFamily="18" charset="0"/>
+                <a:latin typeface="Aptos" panose="020B0004020202020204" pitchFamily="34" charset="0"/>
               </a:rPr>
               <a:t> # 2</a:t>
             </a:r>
             <a:endParaRPr lang="en-GB" dirty="0">
-              <a:latin typeface="Palatino Linotype" panose="02040502050505030304" pitchFamily="18" charset="0"/>
+              <a:latin typeface="Aptos" panose="020B0004020202020204" pitchFamily="34" charset="0"/>
             </a:endParaRPr>
           </a:p>
         </p:txBody>
@@ -11246,7 +11670,7 @@
         </p:nvSpPr>
         <p:spPr>
           <a:xfrm>
-            <a:off x="9707525" y="2747033"/>
+            <a:off x="9878213" y="3265193"/>
             <a:ext cx="1247553" cy="876945"/>
           </a:xfrm>
           <a:prstGeom prst="can">
@@ -11274,12 +11698,12 @@
             <a:pPr algn="ctr"/>
             <a:r>
               <a:rPr lang="it-IT" dirty="0">
-                <a:latin typeface="Palatino Linotype" panose="02040502050505030304" pitchFamily="18" charset="0"/>
+                <a:latin typeface="Aptos" panose="020B0004020202020204" pitchFamily="34" charset="0"/>
               </a:rPr>
               <a:t>Database</a:t>
             </a:r>
             <a:endParaRPr lang="en-GB" dirty="0">
-              <a:latin typeface="Palatino Linotype" panose="02040502050505030304" pitchFamily="18" charset="0"/>
+              <a:latin typeface="Aptos" panose="020B0004020202020204" pitchFamily="34" charset="0"/>
             </a:endParaRPr>
           </a:p>
         </p:txBody>
@@ -11292,7 +11716,7 @@
         </p:nvCxnSpPr>
         <p:spPr>
           <a:xfrm>
-            <a:off x="4564913" y="2637360"/>
+            <a:off x="4735601" y="3155520"/>
             <a:ext cx="1980000" cy="0"/>
           </a:xfrm>
           <a:prstGeom prst="straightConnector1">
@@ -11328,7 +11752,7 @@
         </p:nvSpPr>
         <p:spPr>
           <a:xfrm>
-            <a:off x="4867341" y="2050333"/>
+            <a:off x="5038029" y="2568493"/>
             <a:ext cx="1375144" cy="461665"/>
           </a:xfrm>
           <a:prstGeom prst="rect">
@@ -11345,12 +11769,12 @@
             <a:pPr algn="ctr"/>
             <a:r>
               <a:rPr lang="it-IT" sz="2400" dirty="0">
-                <a:latin typeface="Palatino Linotype" panose="02040502050505030304" pitchFamily="18" charset="0"/>
+                <a:latin typeface="Aptos" panose="020B0004020202020204" pitchFamily="34" charset="0"/>
               </a:rPr>
               <a:t>HTTP</a:t>
             </a:r>
             <a:endParaRPr lang="en-GB" sz="2400" dirty="0">
-              <a:latin typeface="Palatino Linotype" panose="02040502050505030304" pitchFamily="18" charset="0"/>
+              <a:latin typeface="Aptos" panose="020B0004020202020204" pitchFamily="34" charset="0"/>
             </a:endParaRPr>
           </a:p>
         </p:txBody>
@@ -11363,7 +11787,7 @@
         </p:nvCxnSpPr>
         <p:spPr>
           <a:xfrm>
-            <a:off x="9202480" y="2693582"/>
+            <a:off x="9373168" y="3211742"/>
             <a:ext cx="411124" cy="198474"/>
           </a:xfrm>
           <a:prstGeom prst="straightConnector1">
@@ -11400,7 +11824,7 @@
         </p:nvCxnSpPr>
         <p:spPr>
           <a:xfrm flipH="1">
-            <a:off x="10223202" y="3669334"/>
+            <a:off x="10393890" y="4187494"/>
             <a:ext cx="0" cy="463616"/>
           </a:xfrm>
           <a:prstGeom prst="straightConnector1">
@@ -11437,7 +11861,7 @@
         </p:nvCxnSpPr>
         <p:spPr>
           <a:xfrm>
-            <a:off x="6673125" y="2637360"/>
+            <a:off x="6843813" y="3155520"/>
             <a:ext cx="411124" cy="0"/>
           </a:xfrm>
           <a:prstGeom prst="straightConnector1">
@@ -11468,222 +11892,6 @@
       </p:cxnSp>
       <p:sp>
         <p:nvSpPr>
-          <p:cNvPr id="35" name="Segnaposto contenuto 2"/>
-          <p:cNvSpPr txBox="1">
-            <a:spLocks/>
-          </p:cNvSpPr>
-          <p:nvPr/>
-        </p:nvSpPr>
-        <p:spPr>
-          <a:xfrm>
-            <a:off x="6257379" y="5362602"/>
-            <a:ext cx="5430032" cy="673671"/>
-          </a:xfrm>
-          <a:prstGeom prst="rect">
-            <a:avLst/>
-          </a:prstGeom>
-        </p:spPr>
-        <p:txBody>
-          <a:bodyPr vert="horz" lIns="91440" tIns="45720" rIns="91440" bIns="45720" rtlCol="0">
-            <a:noAutofit/>
-          </a:bodyPr>
-          <a:lstStyle>
-            <a:lvl1pPr marL="342900" indent="-342900" algn="l" defTabSz="914400" rtl="0" eaLnBrk="1" latinLnBrk="0" hangingPunct="1">
-              <a:lnSpc>
-                <a:spcPct val="90000"/>
-              </a:lnSpc>
-              <a:spcBef>
-                <a:spcPts val="1000"/>
-              </a:spcBef>
-              <a:buClr>
-                <a:srgbClr val="00B050"/>
-              </a:buClr>
-              <a:buFont typeface="Wingdings" panose="05000000000000000000" pitchFamily="2" charset="2"/>
-              <a:buChar char="Ø"/>
-              <a:defRPr sz="2400" kern="1200">
-                <a:solidFill>
-                  <a:schemeClr val="tx1"/>
-                </a:solidFill>
-                <a:latin typeface="Palatino Linotype" panose="02040502050505030304" pitchFamily="18" charset="0"/>
-                <a:ea typeface="+mn-ea"/>
-                <a:cs typeface="+mn-cs"/>
-              </a:defRPr>
-            </a:lvl1pPr>
-            <a:lvl2pPr marL="685800" indent="-228600" algn="l" defTabSz="914400" rtl="0" eaLnBrk="1" latinLnBrk="0" hangingPunct="1">
-              <a:lnSpc>
-                <a:spcPct val="90000"/>
-              </a:lnSpc>
-              <a:spcBef>
-                <a:spcPts val="500"/>
-              </a:spcBef>
-              <a:buClr>
-                <a:srgbClr val="00B050"/>
-              </a:buClr>
-              <a:buFont typeface="Wingdings" panose="05000000000000000000" pitchFamily="2" charset="2"/>
-              <a:buChar char="§"/>
-              <a:defRPr sz="2000" kern="1200">
-                <a:solidFill>
-                  <a:schemeClr val="tx1"/>
-                </a:solidFill>
-                <a:latin typeface="Palatino Linotype" panose="02040502050505030304" pitchFamily="18" charset="0"/>
-                <a:ea typeface="+mn-ea"/>
-                <a:cs typeface="+mn-cs"/>
-              </a:defRPr>
-            </a:lvl2pPr>
-            <a:lvl3pPr marL="1143000" indent="-228600" algn="l" defTabSz="914400" rtl="0" eaLnBrk="1" latinLnBrk="0" hangingPunct="1">
-              <a:lnSpc>
-                <a:spcPct val="90000"/>
-              </a:lnSpc>
-              <a:spcBef>
-                <a:spcPts val="500"/>
-              </a:spcBef>
-              <a:buClr>
-                <a:srgbClr val="00B050"/>
-              </a:buClr>
-              <a:buFont typeface="Arial" panose="020B0604020202020204" pitchFamily="34" charset="0"/>
-              <a:buChar char="•"/>
-              <a:defRPr sz="1800" kern="1200">
-                <a:solidFill>
-                  <a:schemeClr val="tx1"/>
-                </a:solidFill>
-                <a:latin typeface="Palatino Linotype" panose="02040502050505030304" pitchFamily="18" charset="0"/>
-                <a:ea typeface="+mn-ea"/>
-                <a:cs typeface="+mn-cs"/>
-              </a:defRPr>
-            </a:lvl3pPr>
-            <a:lvl4pPr marL="1600200" indent="-228600" algn="l" defTabSz="914400" rtl="0" eaLnBrk="1" latinLnBrk="0" hangingPunct="1">
-              <a:lnSpc>
-                <a:spcPct val="90000"/>
-              </a:lnSpc>
-              <a:spcBef>
-                <a:spcPts val="500"/>
-              </a:spcBef>
-              <a:buClr>
-                <a:srgbClr val="00B050"/>
-              </a:buClr>
-              <a:buFont typeface="Courier New" panose="02070309020205020404" pitchFamily="49" charset="0"/>
-              <a:buChar char="o"/>
-              <a:defRPr sz="1600" kern="1200">
-                <a:solidFill>
-                  <a:schemeClr val="tx1"/>
-                </a:solidFill>
-                <a:latin typeface="Palatino Linotype" panose="02040502050505030304" pitchFamily="18" charset="0"/>
-                <a:ea typeface="+mn-ea"/>
-                <a:cs typeface="+mn-cs"/>
-              </a:defRPr>
-            </a:lvl4pPr>
-            <a:lvl5pPr marL="2057400" indent="-228600" algn="l" defTabSz="914400" rtl="0" eaLnBrk="1" latinLnBrk="0" hangingPunct="1">
-              <a:lnSpc>
-                <a:spcPct val="90000"/>
-              </a:lnSpc>
-              <a:spcBef>
-                <a:spcPts val="500"/>
-              </a:spcBef>
-              <a:buClr>
-                <a:srgbClr val="00B050"/>
-              </a:buClr>
-              <a:buFont typeface="Times New Roman" panose="02020603050405020304" pitchFamily="18" charset="0"/>
-              <a:buChar char="̶"/>
-              <a:defRPr sz="1600" kern="1200">
-                <a:solidFill>
-                  <a:schemeClr val="tx1"/>
-                </a:solidFill>
-                <a:latin typeface="Palatino Linotype" panose="02040502050505030304" pitchFamily="18" charset="0"/>
-                <a:ea typeface="+mn-ea"/>
-                <a:cs typeface="+mn-cs"/>
-              </a:defRPr>
-            </a:lvl5pPr>
-            <a:lvl6pPr marL="2514600" indent="-228600" algn="l" defTabSz="914400" rtl="0" eaLnBrk="1" latinLnBrk="0" hangingPunct="1">
-              <a:lnSpc>
-                <a:spcPct val="90000"/>
-              </a:lnSpc>
-              <a:spcBef>
-                <a:spcPts val="500"/>
-              </a:spcBef>
-              <a:buFont typeface="Arial" panose="020B0604020202020204" pitchFamily="34" charset="0"/>
-              <a:buChar char="•"/>
-              <a:defRPr sz="1800" kern="1200">
-                <a:solidFill>
-                  <a:schemeClr val="tx1"/>
-                </a:solidFill>
-                <a:latin typeface="+mn-lt"/>
-                <a:ea typeface="+mn-ea"/>
-                <a:cs typeface="+mn-cs"/>
-              </a:defRPr>
-            </a:lvl6pPr>
-            <a:lvl7pPr marL="2971800" indent="-228600" algn="l" defTabSz="914400" rtl="0" eaLnBrk="1" latinLnBrk="0" hangingPunct="1">
-              <a:lnSpc>
-                <a:spcPct val="90000"/>
-              </a:lnSpc>
-              <a:spcBef>
-                <a:spcPts val="500"/>
-              </a:spcBef>
-              <a:buFont typeface="Arial" panose="020B0604020202020204" pitchFamily="34" charset="0"/>
-              <a:buChar char="•"/>
-              <a:defRPr sz="1800" kern="1200">
-                <a:solidFill>
-                  <a:schemeClr val="tx1"/>
-                </a:solidFill>
-                <a:latin typeface="+mn-lt"/>
-                <a:ea typeface="+mn-ea"/>
-                <a:cs typeface="+mn-cs"/>
-              </a:defRPr>
-            </a:lvl7pPr>
-            <a:lvl8pPr marL="3429000" indent="-228600" algn="l" defTabSz="914400" rtl="0" eaLnBrk="1" latinLnBrk="0" hangingPunct="1">
-              <a:lnSpc>
-                <a:spcPct val="90000"/>
-              </a:lnSpc>
-              <a:spcBef>
-                <a:spcPts val="500"/>
-              </a:spcBef>
-              <a:buFont typeface="Arial" panose="020B0604020202020204" pitchFamily="34" charset="0"/>
-              <a:buChar char="•"/>
-              <a:defRPr sz="1800" kern="1200">
-                <a:solidFill>
-                  <a:schemeClr val="tx1"/>
-                </a:solidFill>
-                <a:latin typeface="+mn-lt"/>
-                <a:ea typeface="+mn-ea"/>
-                <a:cs typeface="+mn-cs"/>
-              </a:defRPr>
-            </a:lvl8pPr>
-            <a:lvl9pPr marL="3886200" indent="-228600" algn="l" defTabSz="914400" rtl="0" eaLnBrk="1" latinLnBrk="0" hangingPunct="1">
-              <a:lnSpc>
-                <a:spcPct val="90000"/>
-              </a:lnSpc>
-              <a:spcBef>
-                <a:spcPts val="500"/>
-              </a:spcBef>
-              <a:buFont typeface="Arial" panose="020B0604020202020204" pitchFamily="34" charset="0"/>
-              <a:buChar char="•"/>
-              <a:defRPr sz="1800" kern="1200">
-                <a:solidFill>
-                  <a:schemeClr val="tx1"/>
-                </a:solidFill>
-                <a:latin typeface="+mn-lt"/>
-                <a:ea typeface="+mn-ea"/>
-                <a:cs typeface="+mn-cs"/>
-              </a:defRPr>
-            </a:lvl9pPr>
-          </a:lstStyle>
-          <a:p>
-            <a:r>
-              <a:rPr lang="en-US" sz="1800" dirty="0"/>
-              <a:t>Common server-side languages: </a:t>
-            </a:r>
-            <a:r>
-              <a:rPr lang="en-US" sz="1800" dirty="0" err="1"/>
-              <a:t>Javascript</a:t>
-            </a:r>
-            <a:r>
-              <a:rPr lang="en-US" sz="1800" dirty="0"/>
-              <a:t>, Python, PHP</a:t>
-            </a:r>
-          </a:p>
-        </p:txBody>
-      </p:sp>
-      <p:sp>
-        <p:nvSpPr>
           <p:cNvPr id="3" name="Segnaposto numero diapositiva 2"/>
           <p:cNvSpPr>
             <a:spLocks noGrp="1"/>
@@ -11699,7 +11907,7 @@
           <a:p>
             <a:fld id="{31DE2C5B-556E-47B8-A792-024C2FCA4ACC}" type="slidenum">
               <a:rPr lang="en-GB" smtClean="0"/>
-              <a:t>24</a:t>
+              <a:t>25</a:t>
             </a:fld>
             <a:endParaRPr lang="en-GB"/>
           </a:p>
@@ -11719,7 +11927,7 @@
         </p:nvSpPr>
         <p:spPr>
           <a:xfrm>
-            <a:off x="7044069" y="3927920"/>
+            <a:off x="7214757" y="4446080"/>
             <a:ext cx="1625011" cy="613860"/>
           </a:xfrm>
           <a:prstGeom prst="rect">
@@ -11747,24 +11955,24 @@
             <a:pPr algn="ctr"/>
             <a:r>
               <a:rPr lang="it-IT" dirty="0">
-                <a:latin typeface="Palatino Linotype" panose="02040502050505030304" pitchFamily="18" charset="0"/>
+                <a:latin typeface="Aptos" panose="020B0004020202020204" pitchFamily="34" charset="0"/>
               </a:rPr>
               <a:t>Back-end </a:t>
             </a:r>
             <a:r>
               <a:rPr lang="it-IT" dirty="0" err="1">
-                <a:latin typeface="Palatino Linotype" panose="02040502050505030304" pitchFamily="18" charset="0"/>
+                <a:latin typeface="Aptos" panose="020B0004020202020204" pitchFamily="34" charset="0"/>
               </a:rPr>
               <a:t>program</a:t>
             </a:r>
             <a:r>
               <a:rPr lang="it-IT" dirty="0">
-                <a:latin typeface="Palatino Linotype" panose="02040502050505030304" pitchFamily="18" charset="0"/>
+                <a:latin typeface="Aptos" panose="020B0004020202020204" pitchFamily="34" charset="0"/>
               </a:rPr>
               <a:t> # 1</a:t>
             </a:r>
             <a:endParaRPr lang="en-GB" dirty="0">
-              <a:latin typeface="Palatino Linotype" panose="02040502050505030304" pitchFamily="18" charset="0"/>
+              <a:latin typeface="Aptos" panose="020B0004020202020204" pitchFamily="34" charset="0"/>
             </a:endParaRPr>
           </a:p>
         </p:txBody>
@@ -11785,7 +11993,7 @@
         </p:nvCxnSpPr>
         <p:spPr>
           <a:xfrm>
-            <a:off x="7979243" y="3105501"/>
+            <a:off x="8149931" y="3623661"/>
             <a:ext cx="0" cy="714983"/>
           </a:xfrm>
           <a:prstGeom prst="straightConnector1">
@@ -11828,7 +12036,7 @@
         </p:nvSpPr>
         <p:spPr>
           <a:xfrm>
-            <a:off x="7331150" y="4560410"/>
+            <a:off x="7501838" y="5078570"/>
             <a:ext cx="1871330" cy="400110"/>
           </a:xfrm>
           <a:prstGeom prst="rect">
@@ -11845,235 +12053,13 @@
             <a:pPr algn="ctr"/>
             <a:r>
               <a:rPr lang="it-IT" sz="2000" dirty="0">
-                <a:latin typeface="Palatino Linotype" panose="02040502050505030304" pitchFamily="18" charset="0"/>
+                <a:latin typeface="Aptos" panose="020B0004020202020204" pitchFamily="34" charset="0"/>
               </a:rPr>
               <a:t>…</a:t>
             </a:r>
             <a:endParaRPr lang="en-GB" sz="2000" dirty="0">
-              <a:latin typeface="Palatino Linotype" panose="02040502050505030304" pitchFamily="18" charset="0"/>
+              <a:latin typeface="Aptos" panose="020B0004020202020204" pitchFamily="34" charset="0"/>
             </a:endParaRPr>
-          </a:p>
-        </p:txBody>
-      </p:sp>
-      <p:sp>
-        <p:nvSpPr>
-          <p:cNvPr id="26" name="Segnaposto contenuto 2">
-            <a:extLst>
-              <a:ext uri="{FF2B5EF4-FFF2-40B4-BE49-F238E27FC236}">
-                <a16:creationId xmlns:a16="http://schemas.microsoft.com/office/drawing/2014/main" id="{F1ED357C-D488-F47D-3AE5-38C07E0E39F5}"/>
-              </a:ext>
-            </a:extLst>
-          </p:cNvPr>
-          <p:cNvSpPr txBox="1">
-            <a:spLocks/>
-          </p:cNvSpPr>
-          <p:nvPr/>
-        </p:nvSpPr>
-        <p:spPr>
-          <a:xfrm>
-            <a:off x="682297" y="5487964"/>
-            <a:ext cx="5430032" cy="673671"/>
-          </a:xfrm>
-          <a:prstGeom prst="rect">
-            <a:avLst/>
-          </a:prstGeom>
-        </p:spPr>
-        <p:txBody>
-          <a:bodyPr vert="horz" lIns="91440" tIns="45720" rIns="91440" bIns="45720" rtlCol="0">
-            <a:noAutofit/>
-          </a:bodyPr>
-          <a:lstStyle>
-            <a:lvl1pPr marL="342900" indent="-342900" algn="l" defTabSz="914400" rtl="0" eaLnBrk="1" latinLnBrk="0" hangingPunct="1">
-              <a:lnSpc>
-                <a:spcPct val="90000"/>
-              </a:lnSpc>
-              <a:spcBef>
-                <a:spcPts val="1000"/>
-              </a:spcBef>
-              <a:buClr>
-                <a:srgbClr val="00B050"/>
-              </a:buClr>
-              <a:buFont typeface="Wingdings" panose="05000000000000000000" pitchFamily="2" charset="2"/>
-              <a:buChar char="Ø"/>
-              <a:defRPr sz="2400" kern="1200">
-                <a:solidFill>
-                  <a:schemeClr val="tx1"/>
-                </a:solidFill>
-                <a:latin typeface="Palatino Linotype" panose="02040502050505030304" pitchFamily="18" charset="0"/>
-                <a:ea typeface="+mn-ea"/>
-                <a:cs typeface="+mn-cs"/>
-              </a:defRPr>
-            </a:lvl1pPr>
-            <a:lvl2pPr marL="685800" indent="-228600" algn="l" defTabSz="914400" rtl="0" eaLnBrk="1" latinLnBrk="0" hangingPunct="1">
-              <a:lnSpc>
-                <a:spcPct val="90000"/>
-              </a:lnSpc>
-              <a:spcBef>
-                <a:spcPts val="500"/>
-              </a:spcBef>
-              <a:buClr>
-                <a:srgbClr val="00B050"/>
-              </a:buClr>
-              <a:buFont typeface="Wingdings" panose="05000000000000000000" pitchFamily="2" charset="2"/>
-              <a:buChar char="§"/>
-              <a:defRPr sz="2000" kern="1200">
-                <a:solidFill>
-                  <a:schemeClr val="tx1"/>
-                </a:solidFill>
-                <a:latin typeface="Palatino Linotype" panose="02040502050505030304" pitchFamily="18" charset="0"/>
-                <a:ea typeface="+mn-ea"/>
-                <a:cs typeface="+mn-cs"/>
-              </a:defRPr>
-            </a:lvl2pPr>
-            <a:lvl3pPr marL="1143000" indent="-228600" algn="l" defTabSz="914400" rtl="0" eaLnBrk="1" latinLnBrk="0" hangingPunct="1">
-              <a:lnSpc>
-                <a:spcPct val="90000"/>
-              </a:lnSpc>
-              <a:spcBef>
-                <a:spcPts val="500"/>
-              </a:spcBef>
-              <a:buClr>
-                <a:srgbClr val="00B050"/>
-              </a:buClr>
-              <a:buFont typeface="Arial" panose="020B0604020202020204" pitchFamily="34" charset="0"/>
-              <a:buChar char="•"/>
-              <a:defRPr sz="1800" kern="1200">
-                <a:solidFill>
-                  <a:schemeClr val="tx1"/>
-                </a:solidFill>
-                <a:latin typeface="Palatino Linotype" panose="02040502050505030304" pitchFamily="18" charset="0"/>
-                <a:ea typeface="+mn-ea"/>
-                <a:cs typeface="+mn-cs"/>
-              </a:defRPr>
-            </a:lvl3pPr>
-            <a:lvl4pPr marL="1600200" indent="-228600" algn="l" defTabSz="914400" rtl="0" eaLnBrk="1" latinLnBrk="0" hangingPunct="1">
-              <a:lnSpc>
-                <a:spcPct val="90000"/>
-              </a:lnSpc>
-              <a:spcBef>
-                <a:spcPts val="500"/>
-              </a:spcBef>
-              <a:buClr>
-                <a:srgbClr val="00B050"/>
-              </a:buClr>
-              <a:buFont typeface="Courier New" panose="02070309020205020404" pitchFamily="49" charset="0"/>
-              <a:buChar char="o"/>
-              <a:defRPr sz="1600" kern="1200">
-                <a:solidFill>
-                  <a:schemeClr val="tx1"/>
-                </a:solidFill>
-                <a:latin typeface="Palatino Linotype" panose="02040502050505030304" pitchFamily="18" charset="0"/>
-                <a:ea typeface="+mn-ea"/>
-                <a:cs typeface="+mn-cs"/>
-              </a:defRPr>
-            </a:lvl4pPr>
-            <a:lvl5pPr marL="2057400" indent="-228600" algn="l" defTabSz="914400" rtl="0" eaLnBrk="1" latinLnBrk="0" hangingPunct="1">
-              <a:lnSpc>
-                <a:spcPct val="90000"/>
-              </a:lnSpc>
-              <a:spcBef>
-                <a:spcPts val="500"/>
-              </a:spcBef>
-              <a:buClr>
-                <a:srgbClr val="00B050"/>
-              </a:buClr>
-              <a:buFont typeface="Times New Roman" panose="02020603050405020304" pitchFamily="18" charset="0"/>
-              <a:buChar char="̶"/>
-              <a:defRPr sz="1600" kern="1200">
-                <a:solidFill>
-                  <a:schemeClr val="tx1"/>
-                </a:solidFill>
-                <a:latin typeface="Palatino Linotype" panose="02040502050505030304" pitchFamily="18" charset="0"/>
-                <a:ea typeface="+mn-ea"/>
-                <a:cs typeface="+mn-cs"/>
-              </a:defRPr>
-            </a:lvl5pPr>
-            <a:lvl6pPr marL="2514600" indent="-228600" algn="l" defTabSz="914400" rtl="0" eaLnBrk="1" latinLnBrk="0" hangingPunct="1">
-              <a:lnSpc>
-                <a:spcPct val="90000"/>
-              </a:lnSpc>
-              <a:spcBef>
-                <a:spcPts val="500"/>
-              </a:spcBef>
-              <a:buFont typeface="Arial" panose="020B0604020202020204" pitchFamily="34" charset="0"/>
-              <a:buChar char="•"/>
-              <a:defRPr sz="1800" kern="1200">
-                <a:solidFill>
-                  <a:schemeClr val="tx1"/>
-                </a:solidFill>
-                <a:latin typeface="+mn-lt"/>
-                <a:ea typeface="+mn-ea"/>
-                <a:cs typeface="+mn-cs"/>
-              </a:defRPr>
-            </a:lvl6pPr>
-            <a:lvl7pPr marL="2971800" indent="-228600" algn="l" defTabSz="914400" rtl="0" eaLnBrk="1" latinLnBrk="0" hangingPunct="1">
-              <a:lnSpc>
-                <a:spcPct val="90000"/>
-              </a:lnSpc>
-              <a:spcBef>
-                <a:spcPts val="500"/>
-              </a:spcBef>
-              <a:buFont typeface="Arial" panose="020B0604020202020204" pitchFamily="34" charset="0"/>
-              <a:buChar char="•"/>
-              <a:defRPr sz="1800" kern="1200">
-                <a:solidFill>
-                  <a:schemeClr val="tx1"/>
-                </a:solidFill>
-                <a:latin typeface="+mn-lt"/>
-                <a:ea typeface="+mn-ea"/>
-                <a:cs typeface="+mn-cs"/>
-              </a:defRPr>
-            </a:lvl7pPr>
-            <a:lvl8pPr marL="3429000" indent="-228600" algn="l" defTabSz="914400" rtl="0" eaLnBrk="1" latinLnBrk="0" hangingPunct="1">
-              <a:lnSpc>
-                <a:spcPct val="90000"/>
-              </a:lnSpc>
-              <a:spcBef>
-                <a:spcPts val="500"/>
-              </a:spcBef>
-              <a:buFont typeface="Arial" panose="020B0604020202020204" pitchFamily="34" charset="0"/>
-              <a:buChar char="•"/>
-              <a:defRPr sz="1800" kern="1200">
-                <a:solidFill>
-                  <a:schemeClr val="tx1"/>
-                </a:solidFill>
-                <a:latin typeface="+mn-lt"/>
-                <a:ea typeface="+mn-ea"/>
-                <a:cs typeface="+mn-cs"/>
-              </a:defRPr>
-            </a:lvl8pPr>
-            <a:lvl9pPr marL="3886200" indent="-228600" algn="l" defTabSz="914400" rtl="0" eaLnBrk="1" latinLnBrk="0" hangingPunct="1">
-              <a:lnSpc>
-                <a:spcPct val="90000"/>
-              </a:lnSpc>
-              <a:spcBef>
-                <a:spcPts val="500"/>
-              </a:spcBef>
-              <a:buFont typeface="Arial" panose="020B0604020202020204" pitchFamily="34" charset="0"/>
-              <a:buChar char="•"/>
-              <a:defRPr sz="1800" kern="1200">
-                <a:solidFill>
-                  <a:schemeClr val="tx1"/>
-                </a:solidFill>
-                <a:latin typeface="+mn-lt"/>
-                <a:ea typeface="+mn-ea"/>
-                <a:cs typeface="+mn-cs"/>
-              </a:defRPr>
-            </a:lvl9pPr>
-          </a:lstStyle>
-          <a:p>
-            <a:r>
-              <a:rPr lang="en-US" sz="1800" dirty="0"/>
-              <a:t>Common client-side languages: </a:t>
-            </a:r>
-            <a:r>
-              <a:rPr lang="en-US" sz="1800" dirty="0" err="1"/>
-              <a:t>Javascript</a:t>
-            </a:r>
-            <a:r>
-              <a:rPr lang="en-US" sz="1800" dirty="0"/>
-              <a:t>, Java</a:t>
-            </a:r>
           </a:p>
         </p:txBody>
       </p:sp>
@@ -12081,324 +12067,6 @@
     <p:extLst>
       <p:ext uri="{BB962C8B-B14F-4D97-AF65-F5344CB8AC3E}">
         <p14:creationId xmlns:p14="http://schemas.microsoft.com/office/powerpoint/2010/main" val="839182642"/>
-      </p:ext>
-    </p:extLst>
-  </p:cSld>
-  <p:clrMapOvr>
-    <a:masterClrMapping/>
-  </p:clrMapOvr>
-</p:sld>
-</file>
-
-<file path=ppt/slides/slide25.xml><?xml version="1.0" encoding="utf-8"?>
-<p:sld xmlns:a="http://schemas.openxmlformats.org/drawingml/2006/main" xmlns:r="http://schemas.openxmlformats.org/officeDocument/2006/relationships" xmlns:p="http://schemas.openxmlformats.org/presentationml/2006/main">
-  <p:cSld>
-    <p:spTree>
-      <p:nvGrpSpPr>
-        <p:cNvPr id="1" name=""/>
-        <p:cNvGrpSpPr/>
-        <p:nvPr/>
-      </p:nvGrpSpPr>
-      <p:grpSpPr>
-        <a:xfrm>
-          <a:off x="0" y="0"/>
-          <a:ext cx="0" cy="0"/>
-          <a:chOff x="0" y="0"/>
-          <a:chExt cx="0" cy="0"/>
-        </a:xfrm>
-      </p:grpSpPr>
-      <p:sp>
-        <p:nvSpPr>
-          <p:cNvPr id="2" name="Titolo 1"/>
-          <p:cNvSpPr>
-            <a:spLocks noGrp="1"/>
-          </p:cNvSpPr>
-          <p:nvPr>
-            <p:ph type="title"/>
-          </p:nvPr>
-        </p:nvSpPr>
-        <p:spPr/>
-        <p:txBody>
-          <a:bodyPr>
-            <a:normAutofit fontScale="90000"/>
-          </a:bodyPr>
-          <a:lstStyle/>
-          <a:p>
-            <a:r>
-              <a:rPr lang="en-US" dirty="0"/>
-              <a:t>Limitation of classic Web application model (synchronous)</a:t>
-            </a:r>
-            <a:endParaRPr lang="en-GB" dirty="0"/>
-          </a:p>
-        </p:txBody>
-      </p:sp>
-      <p:sp>
-        <p:nvSpPr>
-          <p:cNvPr id="4" name="Segnaposto contenuto 2"/>
-          <p:cNvSpPr txBox="1">
-            <a:spLocks/>
-          </p:cNvSpPr>
-          <p:nvPr/>
-        </p:nvSpPr>
-        <p:spPr>
-          <a:xfrm>
-            <a:off x="428172" y="1431851"/>
-            <a:ext cx="11368314" cy="4919330"/>
-          </a:xfrm>
-          <a:prstGeom prst="rect">
-            <a:avLst/>
-          </a:prstGeom>
-        </p:spPr>
-        <p:txBody>
-          <a:bodyPr vert="horz" lIns="91440" tIns="45720" rIns="91440" bIns="45720" rtlCol="0">
-            <a:noAutofit/>
-          </a:bodyPr>
-          <a:lstStyle>
-            <a:lvl1pPr marL="342900" indent="-342900" algn="l" defTabSz="914400" rtl="0" eaLnBrk="1" latinLnBrk="0" hangingPunct="1">
-              <a:lnSpc>
-                <a:spcPct val="90000"/>
-              </a:lnSpc>
-              <a:spcBef>
-                <a:spcPts val="1000"/>
-              </a:spcBef>
-              <a:buClr>
-                <a:srgbClr val="00B050"/>
-              </a:buClr>
-              <a:buFont typeface="Wingdings" panose="05000000000000000000" pitchFamily="2" charset="2"/>
-              <a:buChar char="Ø"/>
-              <a:defRPr sz="2400" kern="1200">
-                <a:solidFill>
-                  <a:schemeClr val="tx1"/>
-                </a:solidFill>
-                <a:latin typeface="Palatino Linotype" panose="02040502050505030304" pitchFamily="18" charset="0"/>
-                <a:ea typeface="+mn-ea"/>
-                <a:cs typeface="+mn-cs"/>
-              </a:defRPr>
-            </a:lvl1pPr>
-            <a:lvl2pPr marL="685800" indent="-228600" algn="l" defTabSz="914400" rtl="0" eaLnBrk="1" latinLnBrk="0" hangingPunct="1">
-              <a:lnSpc>
-                <a:spcPct val="90000"/>
-              </a:lnSpc>
-              <a:spcBef>
-                <a:spcPts val="500"/>
-              </a:spcBef>
-              <a:buClr>
-                <a:srgbClr val="00B050"/>
-              </a:buClr>
-              <a:buFont typeface="Wingdings" panose="05000000000000000000" pitchFamily="2" charset="2"/>
-              <a:buChar char="§"/>
-              <a:defRPr sz="2000" kern="1200">
-                <a:solidFill>
-                  <a:schemeClr val="tx1"/>
-                </a:solidFill>
-                <a:latin typeface="Palatino Linotype" panose="02040502050505030304" pitchFamily="18" charset="0"/>
-                <a:ea typeface="+mn-ea"/>
-                <a:cs typeface="+mn-cs"/>
-              </a:defRPr>
-            </a:lvl2pPr>
-            <a:lvl3pPr marL="1143000" indent="-228600" algn="l" defTabSz="914400" rtl="0" eaLnBrk="1" latinLnBrk="0" hangingPunct="1">
-              <a:lnSpc>
-                <a:spcPct val="90000"/>
-              </a:lnSpc>
-              <a:spcBef>
-                <a:spcPts val="500"/>
-              </a:spcBef>
-              <a:buClr>
-                <a:srgbClr val="00B050"/>
-              </a:buClr>
-              <a:buFont typeface="Arial" panose="020B0604020202020204" pitchFamily="34" charset="0"/>
-              <a:buChar char="•"/>
-              <a:defRPr sz="1800" kern="1200">
-                <a:solidFill>
-                  <a:schemeClr val="tx1"/>
-                </a:solidFill>
-                <a:latin typeface="Palatino Linotype" panose="02040502050505030304" pitchFamily="18" charset="0"/>
-                <a:ea typeface="+mn-ea"/>
-                <a:cs typeface="+mn-cs"/>
-              </a:defRPr>
-            </a:lvl3pPr>
-            <a:lvl4pPr marL="1600200" indent="-228600" algn="l" defTabSz="914400" rtl="0" eaLnBrk="1" latinLnBrk="0" hangingPunct="1">
-              <a:lnSpc>
-                <a:spcPct val="90000"/>
-              </a:lnSpc>
-              <a:spcBef>
-                <a:spcPts val="500"/>
-              </a:spcBef>
-              <a:buClr>
-                <a:srgbClr val="00B050"/>
-              </a:buClr>
-              <a:buFont typeface="Courier New" panose="02070309020205020404" pitchFamily="49" charset="0"/>
-              <a:buChar char="o"/>
-              <a:defRPr sz="1600" kern="1200">
-                <a:solidFill>
-                  <a:schemeClr val="tx1"/>
-                </a:solidFill>
-                <a:latin typeface="Palatino Linotype" panose="02040502050505030304" pitchFamily="18" charset="0"/>
-                <a:ea typeface="+mn-ea"/>
-                <a:cs typeface="+mn-cs"/>
-              </a:defRPr>
-            </a:lvl4pPr>
-            <a:lvl5pPr marL="2057400" indent="-228600" algn="l" defTabSz="914400" rtl="0" eaLnBrk="1" latinLnBrk="0" hangingPunct="1">
-              <a:lnSpc>
-                <a:spcPct val="90000"/>
-              </a:lnSpc>
-              <a:spcBef>
-                <a:spcPts val="500"/>
-              </a:spcBef>
-              <a:buClr>
-                <a:srgbClr val="00B050"/>
-              </a:buClr>
-              <a:buFont typeface="Times New Roman" panose="02020603050405020304" pitchFamily="18" charset="0"/>
-              <a:buChar char="̶"/>
-              <a:defRPr sz="1600" kern="1200">
-                <a:solidFill>
-                  <a:schemeClr val="tx1"/>
-                </a:solidFill>
-                <a:latin typeface="Palatino Linotype" panose="02040502050505030304" pitchFamily="18" charset="0"/>
-                <a:ea typeface="+mn-ea"/>
-                <a:cs typeface="+mn-cs"/>
-              </a:defRPr>
-            </a:lvl5pPr>
-            <a:lvl6pPr marL="2514600" indent="-228600" algn="l" defTabSz="914400" rtl="0" eaLnBrk="1" latinLnBrk="0" hangingPunct="1">
-              <a:lnSpc>
-                <a:spcPct val="90000"/>
-              </a:lnSpc>
-              <a:spcBef>
-                <a:spcPts val="500"/>
-              </a:spcBef>
-              <a:buFont typeface="Arial" panose="020B0604020202020204" pitchFamily="34" charset="0"/>
-              <a:buChar char="•"/>
-              <a:defRPr sz="1800" kern="1200">
-                <a:solidFill>
-                  <a:schemeClr val="tx1"/>
-                </a:solidFill>
-                <a:latin typeface="+mn-lt"/>
-                <a:ea typeface="+mn-ea"/>
-                <a:cs typeface="+mn-cs"/>
-              </a:defRPr>
-            </a:lvl6pPr>
-            <a:lvl7pPr marL="2971800" indent="-228600" algn="l" defTabSz="914400" rtl="0" eaLnBrk="1" latinLnBrk="0" hangingPunct="1">
-              <a:lnSpc>
-                <a:spcPct val="90000"/>
-              </a:lnSpc>
-              <a:spcBef>
-                <a:spcPts val="500"/>
-              </a:spcBef>
-              <a:buFont typeface="Arial" panose="020B0604020202020204" pitchFamily="34" charset="0"/>
-              <a:buChar char="•"/>
-              <a:defRPr sz="1800" kern="1200">
-                <a:solidFill>
-                  <a:schemeClr val="tx1"/>
-                </a:solidFill>
-                <a:latin typeface="+mn-lt"/>
-                <a:ea typeface="+mn-ea"/>
-                <a:cs typeface="+mn-cs"/>
-              </a:defRPr>
-            </a:lvl7pPr>
-            <a:lvl8pPr marL="3429000" indent="-228600" algn="l" defTabSz="914400" rtl="0" eaLnBrk="1" latinLnBrk="0" hangingPunct="1">
-              <a:lnSpc>
-                <a:spcPct val="90000"/>
-              </a:lnSpc>
-              <a:spcBef>
-                <a:spcPts val="500"/>
-              </a:spcBef>
-              <a:buFont typeface="Arial" panose="020B0604020202020204" pitchFamily="34" charset="0"/>
-              <a:buChar char="•"/>
-              <a:defRPr sz="1800" kern="1200">
-                <a:solidFill>
-                  <a:schemeClr val="tx1"/>
-                </a:solidFill>
-                <a:latin typeface="+mn-lt"/>
-                <a:ea typeface="+mn-ea"/>
-                <a:cs typeface="+mn-cs"/>
-              </a:defRPr>
-            </a:lvl8pPr>
-            <a:lvl9pPr marL="3886200" indent="-228600" algn="l" defTabSz="914400" rtl="0" eaLnBrk="1" latinLnBrk="0" hangingPunct="1">
-              <a:lnSpc>
-                <a:spcPct val="90000"/>
-              </a:lnSpc>
-              <a:spcBef>
-                <a:spcPts val="500"/>
-              </a:spcBef>
-              <a:buFont typeface="Arial" panose="020B0604020202020204" pitchFamily="34" charset="0"/>
-              <a:buChar char="•"/>
-              <a:defRPr sz="1800" kern="1200">
-                <a:solidFill>
-                  <a:schemeClr val="tx1"/>
-                </a:solidFill>
-                <a:latin typeface="+mn-lt"/>
-                <a:ea typeface="+mn-ea"/>
-                <a:cs typeface="+mn-cs"/>
-              </a:defRPr>
-            </a:lvl9pPr>
-          </a:lstStyle>
-          <a:p>
-            <a:r>
-              <a:rPr lang="en-US" dirty="0"/>
-              <a:t>Every update of the Web page requiring server-side processing, requires the re-load of the entire Web page (by HTTP request/response), even if only a small part of the page has to be updated. </a:t>
-            </a:r>
-          </a:p>
-          <a:p>
-            <a:endParaRPr lang="en-US" sz="2000" dirty="0"/>
-          </a:p>
-        </p:txBody>
-      </p:sp>
-      <p:pic>
-        <p:nvPicPr>
-          <p:cNvPr id="5" name="Immagine 4"/>
-          <p:cNvPicPr>
-            <a:picLocks noChangeAspect="1"/>
-          </p:cNvPicPr>
-          <p:nvPr/>
-        </p:nvPicPr>
-        <p:blipFill rotWithShape="1">
-          <a:blip r:embed="rId3">
-            <a:extLst>
-              <a:ext uri="{28A0092B-C50C-407E-A947-70E740481C1C}">
-                <a14:useLocalDpi xmlns:a14="http://schemas.microsoft.com/office/drawing/2010/main" val="0"/>
-              </a:ext>
-            </a:extLst>
-          </a:blip>
-          <a:srcRect b="57519"/>
-          <a:stretch/>
-        </p:blipFill>
-        <p:spPr>
-          <a:xfrm>
-            <a:off x="2342032" y="2906233"/>
-            <a:ext cx="7039210" cy="3154324"/>
-          </a:xfrm>
-          <a:prstGeom prst="rect">
-            <a:avLst/>
-          </a:prstGeom>
-        </p:spPr>
-      </p:pic>
-      <p:sp>
-        <p:nvSpPr>
-          <p:cNvPr id="3" name="Segnaposto numero diapositiva 2"/>
-          <p:cNvSpPr>
-            <a:spLocks noGrp="1"/>
-          </p:cNvSpPr>
-          <p:nvPr>
-            <p:ph type="sldNum" sz="quarter" idx="12"/>
-          </p:nvPr>
-        </p:nvSpPr>
-        <p:spPr/>
-        <p:txBody>
-          <a:bodyPr/>
-          <a:lstStyle/>
-          <a:p>
-            <a:fld id="{31DE2C5B-556E-47B8-A792-024C2FCA4ACC}" type="slidenum">
-              <a:rPr lang="en-GB" smtClean="0"/>
-              <a:t>25</a:t>
-            </a:fld>
-            <a:endParaRPr lang="en-GB"/>
-          </a:p>
-        </p:txBody>
-      </p:sp>
-    </p:spTree>
-    <p:extLst>
-      <p:ext uri="{BB962C8B-B14F-4D97-AF65-F5344CB8AC3E}">
-        <p14:creationId xmlns:p14="http://schemas.microsoft.com/office/powerpoint/2010/main" val="2743722418"/>
       </p:ext>
     </p:extLst>
   </p:cSld>
@@ -12441,396 +12109,98 @@
           <a:lstStyle/>
           <a:p>
             <a:r>
-              <a:rPr lang="en-GB" dirty="0"/>
-              <a:t>Asynchronous JavaScript and XML (AJAX)</a:t>
-            </a:r>
-          </a:p>
-        </p:txBody>
-      </p:sp>
-      <p:sp>
-        <p:nvSpPr>
-          <p:cNvPr id="4" name="Segnaposto contenuto 2"/>
-          <p:cNvSpPr txBox="1">
-            <a:spLocks/>
+              <a:rPr lang="en-US" dirty="0"/>
+              <a:t>Structured data formats</a:t>
+            </a:r>
+          </a:p>
+        </p:txBody>
+      </p:sp>
+      <p:sp>
+        <p:nvSpPr>
+          <p:cNvPr id="3" name="Segnaposto contenuto 2"/>
+          <p:cNvSpPr>
+            <a:spLocks noGrp="1"/>
           </p:cNvSpPr>
-          <p:nvPr/>
+          <p:nvPr>
+            <p:ph idx="1"/>
+          </p:nvPr>
         </p:nvSpPr>
         <p:spPr>
           <a:xfrm>
-            <a:off x="428172" y="1431851"/>
-            <a:ext cx="11368314" cy="4919330"/>
+            <a:off x="666306" y="1361167"/>
+            <a:ext cx="10866475" cy="3069066"/>
           </a:xfrm>
-          <a:prstGeom prst="rect">
-            <a:avLst/>
-          </a:prstGeom>
         </p:spPr>
         <p:txBody>
-          <a:bodyPr vert="horz" lIns="91440" tIns="45720" rIns="91440" bIns="45720" rtlCol="0">
-            <a:noAutofit/>
+          <a:bodyPr>
+            <a:normAutofit lnSpcReduction="10000"/>
           </a:bodyPr>
-          <a:lstStyle>
-            <a:lvl1pPr marL="342900" indent="-342900" algn="l" defTabSz="914400" rtl="0" eaLnBrk="1" latinLnBrk="0" hangingPunct="1">
-              <a:lnSpc>
-                <a:spcPct val="90000"/>
-              </a:lnSpc>
-              <a:spcBef>
-                <a:spcPts val="1000"/>
-              </a:spcBef>
-              <a:buClr>
-                <a:srgbClr val="00B050"/>
-              </a:buClr>
-              <a:buFont typeface="Wingdings" panose="05000000000000000000" pitchFamily="2" charset="2"/>
-              <a:buChar char="Ø"/>
-              <a:defRPr sz="2400" kern="1200">
-                <a:solidFill>
-                  <a:schemeClr val="tx1"/>
-                </a:solidFill>
-                <a:latin typeface="Palatino Linotype" panose="02040502050505030304" pitchFamily="18" charset="0"/>
-                <a:ea typeface="+mn-ea"/>
-                <a:cs typeface="+mn-cs"/>
-              </a:defRPr>
-            </a:lvl1pPr>
-            <a:lvl2pPr marL="685800" indent="-228600" algn="l" defTabSz="914400" rtl="0" eaLnBrk="1" latinLnBrk="0" hangingPunct="1">
-              <a:lnSpc>
-                <a:spcPct val="90000"/>
-              </a:lnSpc>
-              <a:spcBef>
-                <a:spcPts val="500"/>
-              </a:spcBef>
-              <a:buClr>
-                <a:srgbClr val="00B050"/>
-              </a:buClr>
-              <a:buFont typeface="Wingdings" panose="05000000000000000000" pitchFamily="2" charset="2"/>
-              <a:buChar char="§"/>
-              <a:defRPr sz="2000" kern="1200">
-                <a:solidFill>
-                  <a:schemeClr val="tx1"/>
-                </a:solidFill>
-                <a:latin typeface="Palatino Linotype" panose="02040502050505030304" pitchFamily="18" charset="0"/>
-                <a:ea typeface="+mn-ea"/>
-                <a:cs typeface="+mn-cs"/>
-              </a:defRPr>
-            </a:lvl2pPr>
-            <a:lvl3pPr marL="1143000" indent="-228600" algn="l" defTabSz="914400" rtl="0" eaLnBrk="1" latinLnBrk="0" hangingPunct="1">
-              <a:lnSpc>
-                <a:spcPct val="90000"/>
-              </a:lnSpc>
-              <a:spcBef>
-                <a:spcPts val="500"/>
-              </a:spcBef>
-              <a:buClr>
-                <a:srgbClr val="00B050"/>
-              </a:buClr>
-              <a:buFont typeface="Arial" panose="020B0604020202020204" pitchFamily="34" charset="0"/>
-              <a:buChar char="•"/>
-              <a:defRPr sz="1800" kern="1200">
-                <a:solidFill>
-                  <a:schemeClr val="tx1"/>
-                </a:solidFill>
-                <a:latin typeface="Palatino Linotype" panose="02040502050505030304" pitchFamily="18" charset="0"/>
-                <a:ea typeface="+mn-ea"/>
-                <a:cs typeface="+mn-cs"/>
-              </a:defRPr>
-            </a:lvl3pPr>
-            <a:lvl4pPr marL="1600200" indent="-228600" algn="l" defTabSz="914400" rtl="0" eaLnBrk="1" latinLnBrk="0" hangingPunct="1">
-              <a:lnSpc>
-                <a:spcPct val="90000"/>
-              </a:lnSpc>
-              <a:spcBef>
-                <a:spcPts val="500"/>
-              </a:spcBef>
-              <a:buClr>
-                <a:srgbClr val="00B050"/>
-              </a:buClr>
-              <a:buFont typeface="Courier New" panose="02070309020205020404" pitchFamily="49" charset="0"/>
-              <a:buChar char="o"/>
-              <a:defRPr sz="1600" kern="1200">
-                <a:solidFill>
-                  <a:schemeClr val="tx1"/>
-                </a:solidFill>
-                <a:latin typeface="Palatino Linotype" panose="02040502050505030304" pitchFamily="18" charset="0"/>
-                <a:ea typeface="+mn-ea"/>
-                <a:cs typeface="+mn-cs"/>
-              </a:defRPr>
-            </a:lvl4pPr>
-            <a:lvl5pPr marL="2057400" indent="-228600" algn="l" defTabSz="914400" rtl="0" eaLnBrk="1" latinLnBrk="0" hangingPunct="1">
-              <a:lnSpc>
-                <a:spcPct val="90000"/>
-              </a:lnSpc>
-              <a:spcBef>
-                <a:spcPts val="500"/>
-              </a:spcBef>
-              <a:buClr>
-                <a:srgbClr val="00B050"/>
-              </a:buClr>
-              <a:buFont typeface="Times New Roman" panose="02020603050405020304" pitchFamily="18" charset="0"/>
-              <a:buChar char="̶"/>
-              <a:defRPr sz="1600" kern="1200">
-                <a:solidFill>
-                  <a:schemeClr val="tx1"/>
-                </a:solidFill>
-                <a:latin typeface="Palatino Linotype" panose="02040502050505030304" pitchFamily="18" charset="0"/>
-                <a:ea typeface="+mn-ea"/>
-                <a:cs typeface="+mn-cs"/>
-              </a:defRPr>
-            </a:lvl5pPr>
-            <a:lvl6pPr marL="2514600" indent="-228600" algn="l" defTabSz="914400" rtl="0" eaLnBrk="1" latinLnBrk="0" hangingPunct="1">
-              <a:lnSpc>
-                <a:spcPct val="90000"/>
-              </a:lnSpc>
-              <a:spcBef>
-                <a:spcPts val="500"/>
-              </a:spcBef>
-              <a:buFont typeface="Arial" panose="020B0604020202020204" pitchFamily="34" charset="0"/>
-              <a:buChar char="•"/>
-              <a:defRPr sz="1800" kern="1200">
-                <a:solidFill>
-                  <a:schemeClr val="tx1"/>
-                </a:solidFill>
-                <a:latin typeface="+mn-lt"/>
-                <a:ea typeface="+mn-ea"/>
-                <a:cs typeface="+mn-cs"/>
-              </a:defRPr>
-            </a:lvl6pPr>
-            <a:lvl7pPr marL="2971800" indent="-228600" algn="l" defTabSz="914400" rtl="0" eaLnBrk="1" latinLnBrk="0" hangingPunct="1">
-              <a:lnSpc>
-                <a:spcPct val="90000"/>
-              </a:lnSpc>
-              <a:spcBef>
-                <a:spcPts val="500"/>
-              </a:spcBef>
-              <a:buFont typeface="Arial" panose="020B0604020202020204" pitchFamily="34" charset="0"/>
-              <a:buChar char="•"/>
-              <a:defRPr sz="1800" kern="1200">
-                <a:solidFill>
-                  <a:schemeClr val="tx1"/>
-                </a:solidFill>
-                <a:latin typeface="+mn-lt"/>
-                <a:ea typeface="+mn-ea"/>
-                <a:cs typeface="+mn-cs"/>
-              </a:defRPr>
-            </a:lvl7pPr>
-            <a:lvl8pPr marL="3429000" indent="-228600" algn="l" defTabSz="914400" rtl="0" eaLnBrk="1" latinLnBrk="0" hangingPunct="1">
-              <a:lnSpc>
-                <a:spcPct val="90000"/>
-              </a:lnSpc>
-              <a:spcBef>
-                <a:spcPts val="500"/>
-              </a:spcBef>
-              <a:buFont typeface="Arial" panose="020B0604020202020204" pitchFamily="34" charset="0"/>
-              <a:buChar char="•"/>
-              <a:defRPr sz="1800" kern="1200">
-                <a:solidFill>
-                  <a:schemeClr val="tx1"/>
-                </a:solidFill>
-                <a:latin typeface="+mn-lt"/>
-                <a:ea typeface="+mn-ea"/>
-                <a:cs typeface="+mn-cs"/>
-              </a:defRPr>
-            </a:lvl8pPr>
-            <a:lvl9pPr marL="3886200" indent="-228600" algn="l" defTabSz="914400" rtl="0" eaLnBrk="1" latinLnBrk="0" hangingPunct="1">
-              <a:lnSpc>
-                <a:spcPct val="90000"/>
-              </a:lnSpc>
-              <a:spcBef>
-                <a:spcPts val="500"/>
-              </a:spcBef>
-              <a:buFont typeface="Arial" panose="020B0604020202020204" pitchFamily="34" charset="0"/>
-              <a:buChar char="•"/>
-              <a:defRPr sz="1800" kern="1200">
-                <a:solidFill>
-                  <a:schemeClr val="tx1"/>
-                </a:solidFill>
-                <a:latin typeface="+mn-lt"/>
-                <a:ea typeface="+mn-ea"/>
-                <a:cs typeface="+mn-cs"/>
-              </a:defRPr>
-            </a:lvl9pPr>
-          </a:lstStyle>
-          <a:p>
-            <a:r>
-              <a:rPr lang="en-US" sz="2000" dirty="0"/>
-              <a:t>This limitation is overcome by </a:t>
-            </a:r>
-            <a:r>
-              <a:rPr lang="en-GB" sz="2000" b="1" dirty="0"/>
-              <a:t>Asynchronous JavaScript and XML (AJAX)</a:t>
-            </a:r>
-            <a:r>
-              <a:rPr lang="en-GB" sz="2000" dirty="0"/>
-              <a:t>, a set of techniques for Web application development that decouples the server-client interchange of data from the interchange of Web pages.</a:t>
-            </a:r>
-          </a:p>
-          <a:p>
-            <a:r>
-              <a:rPr lang="en-GB" sz="2000" dirty="0"/>
-              <a:t>Asynchronous applications: applications that can send and retrieve data from a server asynchronously (i.e., in the background) without interfering with the display of the existing page.</a:t>
-            </a:r>
-          </a:p>
-          <a:p>
-            <a:endParaRPr lang="en-US" sz="2000" dirty="0"/>
-          </a:p>
-        </p:txBody>
-      </p:sp>
-      <p:pic>
-        <p:nvPicPr>
-          <p:cNvPr id="5" name="Immagine 4"/>
-          <p:cNvPicPr>
-            <a:picLocks noChangeAspect="1"/>
-          </p:cNvPicPr>
-          <p:nvPr/>
-        </p:nvPicPr>
-        <p:blipFill rotWithShape="1">
-          <a:blip r:embed="rId3">
-            <a:extLst>
-              <a:ext uri="{28A0092B-C50C-407E-A947-70E740481C1C}">
-                <a14:useLocalDpi xmlns:a14="http://schemas.microsoft.com/office/drawing/2010/main" val="0"/>
-              </a:ext>
-            </a:extLst>
-          </a:blip>
-          <a:srcRect t="45478"/>
-          <a:stretch/>
-        </p:blipFill>
-        <p:spPr>
-          <a:xfrm>
-            <a:off x="5690616" y="3021746"/>
-            <a:ext cx="6501384" cy="3739117"/>
-          </a:xfrm>
-          <a:prstGeom prst="rect">
-            <a:avLst/>
-          </a:prstGeom>
-        </p:spPr>
-      </p:pic>
-      <p:sp>
-        <p:nvSpPr>
-          <p:cNvPr id="3" name="Rettangolo 2"/>
-          <p:cNvSpPr/>
-          <p:nvPr/>
-        </p:nvSpPr>
-        <p:spPr>
-          <a:xfrm>
-            <a:off x="428172" y="3347421"/>
-            <a:ext cx="5837949" cy="3098284"/>
-          </a:xfrm>
-          <a:prstGeom prst="rect">
-            <a:avLst/>
-          </a:prstGeom>
-        </p:spPr>
-        <p:txBody>
-          <a:bodyPr wrap="square">
-            <a:spAutoFit/>
-          </a:bodyPr>
-          <a:lstStyle/>
-          <a:p>
-            <a:pPr marL="342900" indent="-342900">
-              <a:lnSpc>
-                <a:spcPct val="90000"/>
-              </a:lnSpc>
-              <a:spcBef>
-                <a:spcPts val="1000"/>
-              </a:spcBef>
-              <a:buClr>
-                <a:srgbClr val="00B050"/>
-              </a:buClr>
-              <a:buFont typeface="Wingdings" panose="05000000000000000000" pitchFamily="2" charset="2"/>
-              <a:buChar char="Ø"/>
-            </a:pPr>
-            <a:r>
-              <a:rPr lang="en-US" sz="2000" dirty="0">
-                <a:latin typeface="Palatino Linotype" panose="02040502050505030304" pitchFamily="18" charset="0"/>
-              </a:rPr>
-              <a:t>AJAX allows Web applications to change content dynamically without the need to reload the entire page.</a:t>
-            </a:r>
-          </a:p>
-          <a:p>
-            <a:pPr marL="342900" indent="-342900">
-              <a:lnSpc>
-                <a:spcPct val="90000"/>
-              </a:lnSpc>
-              <a:spcBef>
-                <a:spcPts val="1000"/>
-              </a:spcBef>
-              <a:buClr>
-                <a:srgbClr val="00B050"/>
-              </a:buClr>
-              <a:buFont typeface="Wingdings" panose="05000000000000000000" pitchFamily="2" charset="2"/>
-              <a:buChar char="Ø"/>
-            </a:pPr>
-            <a:r>
-              <a:rPr lang="en-US" sz="2000" dirty="0">
-                <a:latin typeface="Palatino Linotype" panose="02040502050505030304" pitchFamily="18" charset="0"/>
-              </a:rPr>
-              <a:t>The data are exchanged with the server in a structured data format such as XML or JSON. </a:t>
-            </a:r>
-          </a:p>
-          <a:p>
-            <a:pPr marL="342900" indent="-342900">
-              <a:lnSpc>
-                <a:spcPct val="90000"/>
-              </a:lnSpc>
-              <a:spcBef>
-                <a:spcPts val="1000"/>
-              </a:spcBef>
-              <a:buClr>
-                <a:srgbClr val="00B050"/>
-              </a:buClr>
-              <a:buFont typeface="Wingdings" panose="05000000000000000000" pitchFamily="2" charset="2"/>
-              <a:buChar char="Ø"/>
-            </a:pPr>
-            <a:r>
-              <a:rPr lang="en-US" sz="2000" dirty="0">
-                <a:latin typeface="Palatino Linotype" panose="02040502050505030304" pitchFamily="18" charset="0"/>
-              </a:rPr>
-              <a:t>Advantages of AJAX: </a:t>
-            </a:r>
-          </a:p>
-          <a:p>
-            <a:pPr marL="800100" lvl="2" indent="-342900">
-              <a:lnSpc>
-                <a:spcPct val="90000"/>
-              </a:lnSpc>
-              <a:spcBef>
-                <a:spcPts val="1000"/>
-              </a:spcBef>
-              <a:buClr>
-                <a:srgbClr val="00B050"/>
-              </a:buClr>
-              <a:buFont typeface="Wingdings" panose="05000000000000000000" pitchFamily="2" charset="2"/>
-              <a:buChar char="Ø"/>
-            </a:pPr>
-            <a:r>
-              <a:rPr lang="en-US" sz="2000" dirty="0">
-                <a:latin typeface="Palatino Linotype" panose="02040502050505030304" pitchFamily="18" charset="0"/>
-              </a:rPr>
-              <a:t>It increases the responsiveness of Web applications</a:t>
-            </a:r>
-          </a:p>
-          <a:p>
-            <a:pPr marL="800100" lvl="2" indent="-342900">
-              <a:lnSpc>
-                <a:spcPct val="90000"/>
-              </a:lnSpc>
-              <a:spcBef>
-                <a:spcPts val="1000"/>
-              </a:spcBef>
-              <a:buClr>
-                <a:srgbClr val="00B050"/>
-              </a:buClr>
-              <a:buFont typeface="Wingdings" panose="05000000000000000000" pitchFamily="2" charset="2"/>
-              <a:buChar char="Ø"/>
-            </a:pPr>
-            <a:r>
-              <a:rPr lang="en-US" sz="2000" dirty="0">
-                <a:latin typeface="Palatino Linotype" panose="02040502050505030304" pitchFamily="18" charset="0"/>
-              </a:rPr>
-              <a:t>It decreases network traffic</a:t>
-            </a:r>
-          </a:p>
-        </p:txBody>
-      </p:sp>
-      <p:sp>
-        <p:nvSpPr>
-          <p:cNvPr id="6" name="Segnaposto numero diapositiva 5"/>
+          <a:lstStyle/>
+          <a:p>
+            <a:r>
+              <a:rPr lang="en-US" dirty="0"/>
+              <a:t>Web applications need to exchange data with the server.</a:t>
+            </a:r>
+          </a:p>
+          <a:p>
+            <a:r>
+              <a:rPr lang="en-US" dirty="0"/>
+              <a:t>HTML is not suitable for representing data because it mixes content with formatting. It is indeed concerned about the presentation of the content. </a:t>
+            </a:r>
+          </a:p>
+          <a:p>
+            <a:pPr lvl="1"/>
+            <a:r>
+              <a:rPr lang="en-US" sz="2400" dirty="0"/>
+              <a:t>It is difficult to automatically retrieve data within an HTML file</a:t>
+            </a:r>
+          </a:p>
+          <a:p>
+            <a:r>
+              <a:rPr lang="en-US" dirty="0"/>
+              <a:t>Two popular structured data formats that facilitate the automatic structured data processing: </a:t>
+            </a:r>
+          </a:p>
+          <a:p>
+            <a:pPr lvl="1"/>
+            <a:r>
+              <a:rPr lang="en-GB" sz="2400" dirty="0"/>
+              <a:t>Extensible </a:t>
+            </a:r>
+            <a:r>
+              <a:rPr lang="en-GB" sz="2400" dirty="0" err="1"/>
+              <a:t>Markup</a:t>
+            </a:r>
+            <a:r>
+              <a:rPr lang="en-GB" sz="2400" dirty="0"/>
+              <a:t> Language (XML)</a:t>
+            </a:r>
+          </a:p>
+          <a:p>
+            <a:pPr lvl="1"/>
+            <a:r>
+              <a:rPr lang="it-IT" sz="2400" dirty="0"/>
+              <a:t>JavaScript Object </a:t>
+            </a:r>
+            <a:r>
+              <a:rPr lang="it-IT" sz="2400" dirty="0" err="1"/>
+              <a:t>Notation</a:t>
+            </a:r>
+            <a:r>
+              <a:rPr lang="it-IT" sz="2400" dirty="0"/>
+              <a:t> (JSON)</a:t>
+            </a:r>
+            <a:endParaRPr lang="en-GB" sz="2400" dirty="0"/>
+          </a:p>
+          <a:p>
+            <a:pPr lvl="1"/>
+            <a:endParaRPr lang="en-US" dirty="0"/>
+          </a:p>
+        </p:txBody>
+      </p:sp>
+      <p:sp>
+        <p:nvSpPr>
+          <p:cNvPr id="4" name="Segnaposto numero diapositiva 3"/>
           <p:cNvSpPr>
             <a:spLocks noGrp="1"/>
           </p:cNvSpPr>
@@ -12854,7 +12224,7 @@
     </p:spTree>
     <p:extLst>
       <p:ext uri="{BB962C8B-B14F-4D97-AF65-F5344CB8AC3E}">
-        <p14:creationId xmlns:p14="http://schemas.microsoft.com/office/powerpoint/2010/main" val="2782851166"/>
+        <p14:creationId xmlns:p14="http://schemas.microsoft.com/office/powerpoint/2010/main" val="2108416613"/>
       </p:ext>
     </p:extLst>
   </p:cSld>
@@ -12897,8 +12267,16 @@
           <a:lstStyle/>
           <a:p>
             <a:r>
-              <a:rPr lang="en-US" dirty="0"/>
-              <a:t>Structured data formats</a:t>
+              <a:rPr lang="en-GB" dirty="0"/>
+              <a:t>Extensible </a:t>
+            </a:r>
+            <a:r>
+              <a:rPr lang="en-GB" dirty="0" err="1"/>
+              <a:t>Markup</a:t>
+            </a:r>
+            <a:r>
+              <a:rPr lang="en-GB" dirty="0"/>
+              <a:t> Language (XML)</a:t>
             </a:r>
           </a:p>
         </p:txBody>
@@ -12915,80 +12293,320 @@
         </p:nvSpPr>
         <p:spPr>
           <a:xfrm>
-            <a:off x="666306" y="1361167"/>
-            <a:ext cx="10866475" cy="3069066"/>
+            <a:off x="428172" y="1679189"/>
+            <a:ext cx="5830861" cy="4303397"/>
           </a:xfrm>
         </p:spPr>
         <p:txBody>
           <a:bodyPr>
-            <a:normAutofit lnSpcReduction="10000"/>
+            <a:normAutofit/>
           </a:bodyPr>
           <a:lstStyle/>
           <a:p>
             <a:r>
               <a:rPr lang="en-US" dirty="0"/>
-              <a:t>Asynchronous Web applications need to exchange data with the server.</a:t>
+              <a:t>A language for specifying structured content.</a:t>
             </a:r>
           </a:p>
           <a:p>
             <a:r>
               <a:rPr lang="en-US" dirty="0"/>
-              <a:t>HTML is not suitable for representing data because it mixes content with formatting. It is indeed concerned about the presentation of the content. </a:t>
-            </a:r>
-          </a:p>
-          <a:p>
-            <a:pPr lvl="1"/>
-            <a:r>
-              <a:rPr lang="en-US" sz="2400" dirty="0"/>
-              <a:t>It is difficult to automatically retrieve data within an HTML file</a:t>
+              <a:t>Introduced in 1998.</a:t>
             </a:r>
           </a:p>
           <a:p>
             <a:r>
               <a:rPr lang="en-US" dirty="0"/>
-              <a:t>Two popular structured data formats that facilitate the automatic structured data processing: </a:t>
-            </a:r>
-          </a:p>
-          <a:p>
-            <a:pPr lvl="1"/>
-            <a:r>
-              <a:rPr lang="en-GB" sz="2400" dirty="0"/>
-              <a:t>Extensible </a:t>
-            </a:r>
-            <a:r>
-              <a:rPr lang="en-GB" sz="2400" dirty="0" err="1"/>
-              <a:t>Markup</a:t>
-            </a:r>
-            <a:r>
-              <a:rPr lang="en-GB" sz="2400" dirty="0"/>
-              <a:t> Language (XML)</a:t>
-            </a:r>
-          </a:p>
-          <a:p>
-            <a:pPr lvl="1"/>
-            <a:r>
-              <a:rPr lang="it-IT" sz="2400" dirty="0"/>
-              <a:t>JavaScript Object </a:t>
-            </a:r>
-            <a:r>
-              <a:rPr lang="it-IT" sz="2400" dirty="0" err="1"/>
-              <a:t>Notation</a:t>
-            </a:r>
-            <a:r>
-              <a:rPr lang="it-IT" sz="2400" dirty="0"/>
-              <a:t> (JSON)</a:t>
-            </a:r>
-            <a:endParaRPr lang="en-GB" sz="2400" dirty="0"/>
-          </a:p>
-          <a:p>
-            <a:pPr lvl="1"/>
-            <a:endParaRPr lang="en-US" dirty="0"/>
-          </a:p>
-        </p:txBody>
-      </p:sp>
-      <p:sp>
-        <p:nvSpPr>
-          <p:cNvPr id="4" name="Segnaposto numero diapositiva 3"/>
+              <a:t>It defines a set of rules for encoding documents in a format that is both human-readable and machine-readable.</a:t>
+            </a:r>
+          </a:p>
+          <a:p>
+            <a:r>
+              <a:rPr lang="en-US" dirty="0"/>
+              <a:t>Unlike HTML, there are no defined tags for XML. Each user can define their own tags.</a:t>
+            </a:r>
+          </a:p>
+          <a:p>
+            <a:r>
+              <a:rPr lang="en-US" dirty="0"/>
+              <a:t>Extension .xml</a:t>
+            </a:r>
+          </a:p>
+          <a:p>
+            <a:endParaRPr lang="en-GB" dirty="0"/>
+          </a:p>
+        </p:txBody>
+      </p:sp>
+      <p:sp>
+        <p:nvSpPr>
+          <p:cNvPr id="4" name="Rettangolo 3"/>
+          <p:cNvSpPr/>
+          <p:nvPr/>
+        </p:nvSpPr>
+        <p:spPr>
+          <a:xfrm>
+            <a:off x="6457507" y="1955637"/>
+            <a:ext cx="5174511" cy="4185761"/>
+          </a:xfrm>
+          <a:prstGeom prst="rect">
+            <a:avLst/>
+          </a:prstGeom>
+          <a:ln w="19050">
+            <a:solidFill>
+              <a:srgbClr val="00B050"/>
+            </a:solidFill>
+          </a:ln>
+        </p:spPr>
+        <p:txBody>
+          <a:bodyPr wrap="square">
+            <a:spAutoFit/>
+          </a:bodyPr>
+          <a:lstStyle/>
+          <a:p>
+            <a:r>
+              <a:rPr lang="en-GB" sz="1400" dirty="0">
+                <a:latin typeface="Aptos" panose="020B0004020202020204" pitchFamily="34" charset="0"/>
+              </a:rPr>
+              <a:t>&lt;?xml version="1.0" ?&gt;</a:t>
+            </a:r>
+          </a:p>
+          <a:p>
+            <a:r>
+              <a:rPr lang="en-GB" sz="1400" dirty="0">
+                <a:latin typeface="Aptos" panose="020B0004020202020204" pitchFamily="34" charset="0"/>
+              </a:rPr>
+              <a:t>&lt;book list&gt;</a:t>
+            </a:r>
+          </a:p>
+          <a:p>
+            <a:r>
+              <a:rPr lang="en-GB" sz="1400" dirty="0">
+                <a:latin typeface="Aptos" panose="020B0004020202020204" pitchFamily="34" charset="0"/>
+              </a:rPr>
+              <a:t>&lt;book&gt;</a:t>
+            </a:r>
+          </a:p>
+          <a:p>
+            <a:r>
+              <a:rPr lang="en-GB" sz="1400" dirty="0">
+                <a:latin typeface="Aptos" panose="020B0004020202020204" pitchFamily="34" charset="0"/>
+              </a:rPr>
+              <a:t>&lt;title&gt; Human </a:t>
+            </a:r>
+            <a:r>
+              <a:rPr lang="en-GB" sz="1400" dirty="0" err="1">
+                <a:latin typeface="Aptos" panose="020B0004020202020204" pitchFamily="34" charset="0"/>
+              </a:rPr>
+              <a:t>Behavior</a:t>
+            </a:r>
+            <a:r>
+              <a:rPr lang="en-GB" sz="1400" dirty="0">
+                <a:latin typeface="Aptos" panose="020B0004020202020204" pitchFamily="34" charset="0"/>
+              </a:rPr>
+              <a:t> and the Principle of Least Effort &lt;/title&gt;</a:t>
+            </a:r>
+          </a:p>
+          <a:p>
+            <a:r>
+              <a:rPr lang="en-GB" sz="1400" dirty="0">
+                <a:latin typeface="Aptos" panose="020B0004020202020204" pitchFamily="34" charset="0"/>
+              </a:rPr>
+              <a:t>&lt;author&gt; George </a:t>
+            </a:r>
+            <a:r>
+              <a:rPr lang="en-GB" sz="1400" dirty="0" err="1">
+                <a:latin typeface="Aptos" panose="020B0004020202020204" pitchFamily="34" charset="0"/>
+              </a:rPr>
+              <a:t>Zipf</a:t>
+            </a:r>
+            <a:r>
+              <a:rPr lang="en-GB" sz="1400" dirty="0">
+                <a:latin typeface="Aptos" panose="020B0004020202020204" pitchFamily="34" charset="0"/>
+              </a:rPr>
+              <a:t> &lt;/author&gt;</a:t>
+            </a:r>
+          </a:p>
+          <a:p>
+            <a:r>
+              <a:rPr lang="en-GB" sz="1400" dirty="0">
+                <a:latin typeface="Aptos" panose="020B0004020202020204" pitchFamily="34" charset="0"/>
+              </a:rPr>
+              <a:t>&lt;year&gt; 1949 &lt;/year&gt;</a:t>
+            </a:r>
+          </a:p>
+          <a:p>
+            <a:r>
+              <a:rPr lang="en-GB" sz="1400" dirty="0">
+                <a:latin typeface="Aptos" panose="020B0004020202020204" pitchFamily="34" charset="0"/>
+              </a:rPr>
+              <a:t>&lt;/book&gt;</a:t>
+            </a:r>
+          </a:p>
+          <a:p>
+            <a:r>
+              <a:rPr lang="en-GB" sz="1400" dirty="0">
+                <a:latin typeface="Aptos" panose="020B0004020202020204" pitchFamily="34" charset="0"/>
+              </a:rPr>
+              <a:t>&lt;book&gt;</a:t>
+            </a:r>
+          </a:p>
+          <a:p>
+            <a:r>
+              <a:rPr lang="en-GB" sz="1400" dirty="0">
+                <a:latin typeface="Aptos" panose="020B0004020202020204" pitchFamily="34" charset="0"/>
+              </a:rPr>
+              <a:t>&lt;title&gt; The Mathematical Theory of Communication &lt;/title&gt;</a:t>
+            </a:r>
+          </a:p>
+          <a:p>
+            <a:r>
+              <a:rPr lang="en-GB" sz="1400" dirty="0">
+                <a:latin typeface="Aptos" panose="020B0004020202020204" pitchFamily="34" charset="0"/>
+              </a:rPr>
+              <a:t>&lt;author&gt; Claude E. Shannon &lt;/author&gt;</a:t>
+            </a:r>
+          </a:p>
+          <a:p>
+            <a:r>
+              <a:rPr lang="en-GB" sz="1400" dirty="0">
+                <a:latin typeface="Aptos" panose="020B0004020202020204" pitchFamily="34" charset="0"/>
+              </a:rPr>
+              <a:t>&lt;author&gt; Warren Weaver &lt;/author&gt;</a:t>
+            </a:r>
+          </a:p>
+          <a:p>
+            <a:r>
+              <a:rPr lang="en-GB" sz="1400" dirty="0">
+                <a:latin typeface="Aptos" panose="020B0004020202020204" pitchFamily="34" charset="0"/>
+              </a:rPr>
+              <a:t>&lt;year&gt; 1949 &lt;/year&gt;</a:t>
+            </a:r>
+          </a:p>
+          <a:p>
+            <a:r>
+              <a:rPr lang="en-GB" sz="1400" dirty="0">
+                <a:latin typeface="Aptos" panose="020B0004020202020204" pitchFamily="34" charset="0"/>
+              </a:rPr>
+              <a:t>&lt;/book&gt;</a:t>
+            </a:r>
+          </a:p>
+          <a:p>
+            <a:r>
+              <a:rPr lang="en-GB" sz="1400" dirty="0">
+                <a:latin typeface="Aptos" panose="020B0004020202020204" pitchFamily="34" charset="0"/>
+              </a:rPr>
+              <a:t>&lt;book&gt;</a:t>
+            </a:r>
+          </a:p>
+          <a:p>
+            <a:r>
+              <a:rPr lang="en-GB" sz="1400" dirty="0">
+                <a:latin typeface="Aptos" panose="020B0004020202020204" pitchFamily="34" charset="0"/>
+              </a:rPr>
+              <a:t>&lt;title&gt; Nineteen Eighty-Four &lt;/title&gt;</a:t>
+            </a:r>
+          </a:p>
+          <a:p>
+            <a:r>
+              <a:rPr lang="en-GB" sz="1400" dirty="0">
+                <a:latin typeface="Aptos" panose="020B0004020202020204" pitchFamily="34" charset="0"/>
+              </a:rPr>
+              <a:t>&lt;author&gt; George Orwell &lt;/author&gt;</a:t>
+            </a:r>
+          </a:p>
+          <a:p>
+            <a:r>
+              <a:rPr lang="en-GB" sz="1400" dirty="0">
+                <a:latin typeface="Aptos" panose="020B0004020202020204" pitchFamily="34" charset="0"/>
+              </a:rPr>
+              <a:t>&lt;year&gt; 1949 &lt;/year&gt;</a:t>
+            </a:r>
+          </a:p>
+          <a:p>
+            <a:r>
+              <a:rPr lang="en-GB" sz="1400" dirty="0">
+                <a:latin typeface="Aptos" panose="020B0004020202020204" pitchFamily="34" charset="0"/>
+              </a:rPr>
+              <a:t>&lt;/book&gt;</a:t>
+            </a:r>
+          </a:p>
+          <a:p>
+            <a:r>
+              <a:rPr lang="en-GB" sz="1400" dirty="0">
+                <a:latin typeface="Aptos" panose="020B0004020202020204" pitchFamily="34" charset="0"/>
+              </a:rPr>
+              <a:t>&lt;/book list&gt;</a:t>
+            </a:r>
+          </a:p>
+        </p:txBody>
+      </p:sp>
+      <p:sp>
+        <p:nvSpPr>
+          <p:cNvPr id="5" name="CasellaDiTesto 4"/>
+          <p:cNvSpPr txBox="1"/>
+          <p:nvPr/>
+        </p:nvSpPr>
+        <p:spPr>
+          <a:xfrm>
+            <a:off x="6712689" y="1494524"/>
+            <a:ext cx="4798828" cy="369332"/>
+          </a:xfrm>
+          <a:prstGeom prst="rect">
+            <a:avLst/>
+          </a:prstGeom>
+          <a:noFill/>
+        </p:spPr>
+        <p:txBody>
+          <a:bodyPr wrap="square" rtlCol="0">
+            <a:spAutoFit/>
+          </a:bodyPr>
+          <a:lstStyle/>
+          <a:p>
+            <a:r>
+              <a:rPr lang="it-IT" dirty="0" err="1">
+                <a:latin typeface="Aptos" panose="020B0004020202020204" pitchFamily="34" charset="0"/>
+              </a:rPr>
+              <a:t>Example</a:t>
+            </a:r>
+            <a:r>
+              <a:rPr lang="it-IT" dirty="0">
+                <a:latin typeface="Aptos" panose="020B0004020202020204" pitchFamily="34" charset="0"/>
+              </a:rPr>
+              <a:t> of XML code </a:t>
+            </a:r>
+            <a:r>
+              <a:rPr lang="it-IT" dirty="0" err="1">
+                <a:latin typeface="Aptos" panose="020B0004020202020204" pitchFamily="34" charset="0"/>
+              </a:rPr>
+              <a:t>that</a:t>
+            </a:r>
+            <a:r>
+              <a:rPr lang="it-IT" dirty="0">
+                <a:latin typeface="Aptos" panose="020B0004020202020204" pitchFamily="34" charset="0"/>
+              </a:rPr>
+              <a:t> </a:t>
+            </a:r>
+            <a:r>
+              <a:rPr lang="it-IT" dirty="0" err="1">
+                <a:latin typeface="Aptos" panose="020B0004020202020204" pitchFamily="34" charset="0"/>
+              </a:rPr>
+              <a:t>define</a:t>
+            </a:r>
+            <a:r>
+              <a:rPr lang="it-IT" dirty="0">
+                <a:latin typeface="Aptos" panose="020B0004020202020204" pitchFamily="34" charset="0"/>
+              </a:rPr>
+              <a:t> a book list</a:t>
+            </a:r>
+            <a:endParaRPr lang="en-GB" dirty="0">
+              <a:latin typeface="Aptos" panose="020B0004020202020204" pitchFamily="34" charset="0"/>
+            </a:endParaRPr>
+          </a:p>
+        </p:txBody>
+      </p:sp>
+      <p:sp>
+        <p:nvSpPr>
+          <p:cNvPr id="6" name="Segnaposto numero diapositiva 5"/>
           <p:cNvSpPr>
             <a:spLocks noGrp="1"/>
           </p:cNvSpPr>
@@ -13012,7 +12630,7 @@
     </p:spTree>
     <p:extLst>
       <p:ext uri="{BB962C8B-B14F-4D97-AF65-F5344CB8AC3E}">
-        <p14:creationId xmlns:p14="http://schemas.microsoft.com/office/powerpoint/2010/main" val="2108416613"/>
+        <p14:creationId xmlns:p14="http://schemas.microsoft.com/office/powerpoint/2010/main" val="341176474"/>
       </p:ext>
     </p:extLst>
   </p:cSld>
@@ -13055,17 +12673,18 @@
           <a:lstStyle/>
           <a:p>
             <a:r>
-              <a:rPr lang="en-GB" dirty="0"/>
-              <a:t>Extensible </a:t>
-            </a:r>
-            <a:r>
-              <a:rPr lang="en-GB" dirty="0" err="1"/>
-              <a:t>Markup</a:t>
-            </a:r>
-            <a:r>
-              <a:rPr lang="en-GB" dirty="0"/>
-              <a:t> Language (XML)</a:t>
-            </a:r>
+              <a:rPr lang="it-IT" dirty="0"/>
+              <a:t>JavaScript Object </a:t>
+            </a:r>
+            <a:r>
+              <a:rPr lang="it-IT" dirty="0" err="1"/>
+              <a:t>Notation</a:t>
+            </a:r>
+            <a:r>
+              <a:rPr lang="it-IT" dirty="0"/>
+              <a:t> (JSON)</a:t>
+            </a:r>
+            <a:endParaRPr lang="en-GB" dirty="0"/>
           </a:p>
         </p:txBody>
       </p:sp>
@@ -13079,12 +12698,7 @@
             <p:ph idx="1"/>
           </p:nvPr>
         </p:nvSpPr>
-        <p:spPr>
-          <a:xfrm>
-            <a:off x="428172" y="1679189"/>
-            <a:ext cx="5830861" cy="4303397"/>
-          </a:xfrm>
-        </p:spPr>
+        <p:spPr/>
         <p:txBody>
           <a:bodyPr>
             <a:normAutofit/>
@@ -13093,32 +12707,61 @@
           <a:p>
             <a:r>
               <a:rPr lang="en-US" dirty="0"/>
-              <a:t>A language for specifying structured content.</a:t>
+              <a:t>A format that uses human-readable text to store and transmit data objects consisting of attribute–value pairs and arrays.</a:t>
             </a:r>
           </a:p>
           <a:p>
             <a:r>
               <a:rPr lang="en-US" dirty="0"/>
-              <a:t>Introduced in 1998.</a:t>
+              <a:t>Introduced in 2001.</a:t>
             </a:r>
           </a:p>
           <a:p>
             <a:r>
               <a:rPr lang="en-US" dirty="0"/>
-              <a:t>It defines a set of rules for encoding documents in a format that is both human-readable and machine-readable.</a:t>
+              <a:t>JSON is language-independent. It was derived from JavaScript, but many modern programming languages include code to generate and parse JSON-format data.</a:t>
             </a:r>
           </a:p>
           <a:p>
             <a:r>
               <a:rPr lang="en-US" dirty="0"/>
-              <a:t>Unlike HTML, there are no defined tags for XML. Each user can define their own tags.</a:t>
-            </a:r>
+              <a:t>Extension .</a:t>
+            </a:r>
+            <a:r>
+              <a:rPr lang="en-US" dirty="0" err="1"/>
+              <a:t>json</a:t>
+            </a:r>
+            <a:endParaRPr lang="en-US" dirty="0"/>
           </a:p>
           <a:p>
             <a:r>
               <a:rPr lang="en-US" dirty="0"/>
-              <a:t>Extension .xml</a:t>
-            </a:r>
+              <a:t>JSON data types: number, string, Boolean, null (empty value)</a:t>
+            </a:r>
+          </a:p>
+          <a:p>
+            <a:r>
+              <a:rPr lang="en-US" dirty="0"/>
+              <a:t>JSON data structures</a:t>
+            </a:r>
+          </a:p>
+          <a:p>
+            <a:pPr lvl="1"/>
+            <a:r>
+              <a:rPr lang="en-US" sz="2400" dirty="0"/>
+              <a:t>Object</a:t>
+            </a:r>
+          </a:p>
+          <a:p>
+            <a:pPr lvl="1"/>
+            <a:r>
+              <a:rPr lang="en-US" sz="2400" dirty="0"/>
+              <a:t>Array</a:t>
+            </a:r>
+          </a:p>
+          <a:p>
+            <a:pPr lvl="1"/>
+            <a:endParaRPr lang="it-IT" dirty="0"/>
           </a:p>
           <a:p>
             <a:endParaRPr lang="en-GB" dirty="0"/>
@@ -13127,274 +12770,7 @@
       </p:sp>
       <p:sp>
         <p:nvSpPr>
-          <p:cNvPr id="4" name="Rettangolo 3"/>
-          <p:cNvSpPr/>
-          <p:nvPr/>
-        </p:nvSpPr>
-        <p:spPr>
-          <a:xfrm>
-            <a:off x="6457507" y="1955637"/>
-            <a:ext cx="5174511" cy="4401205"/>
-          </a:xfrm>
-          <a:prstGeom prst="rect">
-            <a:avLst/>
-          </a:prstGeom>
-          <a:ln w="19050">
-            <a:solidFill>
-              <a:srgbClr val="00B050"/>
-            </a:solidFill>
-          </a:ln>
-        </p:spPr>
-        <p:txBody>
-          <a:bodyPr wrap="square">
-            <a:spAutoFit/>
-          </a:bodyPr>
-          <a:lstStyle/>
-          <a:p>
-            <a:r>
-              <a:rPr lang="en-GB" sz="1400" dirty="0">
-                <a:latin typeface="Palatino Linotype" panose="02040502050505030304" pitchFamily="18" charset="0"/>
-              </a:rPr>
-              <a:t>&lt;?xml version="1.0" ?&gt;</a:t>
-            </a:r>
-          </a:p>
-          <a:p>
-            <a:r>
-              <a:rPr lang="en-GB" sz="1400" dirty="0">
-                <a:latin typeface="Palatino Linotype" panose="02040502050505030304" pitchFamily="18" charset="0"/>
-              </a:rPr>
-              <a:t>&lt;book list&gt;</a:t>
-            </a:r>
-          </a:p>
-          <a:p>
-            <a:r>
-              <a:rPr lang="en-GB" sz="1400" dirty="0">
-                <a:latin typeface="Palatino Linotype" panose="02040502050505030304" pitchFamily="18" charset="0"/>
-              </a:rPr>
-              <a:t>&lt;book&gt;</a:t>
-            </a:r>
-          </a:p>
-          <a:p>
-            <a:r>
-              <a:rPr lang="en-GB" sz="1400" dirty="0">
-                <a:latin typeface="Palatino Linotype" panose="02040502050505030304" pitchFamily="18" charset="0"/>
-              </a:rPr>
-              <a:t>&lt;title&gt; Human </a:t>
-            </a:r>
-            <a:r>
-              <a:rPr lang="en-GB" sz="1400" dirty="0" err="1">
-                <a:latin typeface="Palatino Linotype" panose="02040502050505030304" pitchFamily="18" charset="0"/>
-              </a:rPr>
-              <a:t>Behavior</a:t>
-            </a:r>
-            <a:r>
-              <a:rPr lang="en-GB" sz="1400" dirty="0">
-                <a:latin typeface="Palatino Linotype" panose="02040502050505030304" pitchFamily="18" charset="0"/>
-              </a:rPr>
-              <a:t> and the Principle of Least Effort &lt;/title&gt;</a:t>
-            </a:r>
-          </a:p>
-          <a:p>
-            <a:r>
-              <a:rPr lang="en-GB" sz="1400" dirty="0">
-                <a:latin typeface="Palatino Linotype" panose="02040502050505030304" pitchFamily="18" charset="0"/>
-              </a:rPr>
-              <a:t>&lt;author&gt; George </a:t>
-            </a:r>
-            <a:r>
-              <a:rPr lang="en-GB" sz="1400" dirty="0" err="1">
-                <a:latin typeface="Palatino Linotype" panose="02040502050505030304" pitchFamily="18" charset="0"/>
-              </a:rPr>
-              <a:t>Zipf</a:t>
-            </a:r>
-            <a:r>
-              <a:rPr lang="en-GB" sz="1400" dirty="0">
-                <a:latin typeface="Palatino Linotype" panose="02040502050505030304" pitchFamily="18" charset="0"/>
-              </a:rPr>
-              <a:t> &lt;/author&gt;</a:t>
-            </a:r>
-          </a:p>
-          <a:p>
-            <a:r>
-              <a:rPr lang="en-GB" sz="1400" dirty="0">
-                <a:latin typeface="Palatino Linotype" panose="02040502050505030304" pitchFamily="18" charset="0"/>
-              </a:rPr>
-              <a:t>&lt;year&gt; 1949 &lt;/year&gt;</a:t>
-            </a:r>
-          </a:p>
-          <a:p>
-            <a:r>
-              <a:rPr lang="en-GB" sz="1400" dirty="0">
-                <a:latin typeface="Palatino Linotype" panose="02040502050505030304" pitchFamily="18" charset="0"/>
-              </a:rPr>
-              <a:t>&lt;/book&gt;</a:t>
-            </a:r>
-          </a:p>
-          <a:p>
-            <a:r>
-              <a:rPr lang="en-GB" sz="1400" dirty="0">
-                <a:latin typeface="Palatino Linotype" panose="02040502050505030304" pitchFamily="18" charset="0"/>
-              </a:rPr>
-              <a:t>&lt;book&gt;</a:t>
-            </a:r>
-          </a:p>
-          <a:p>
-            <a:r>
-              <a:rPr lang="en-GB" sz="1400" dirty="0">
-                <a:latin typeface="Palatino Linotype" panose="02040502050505030304" pitchFamily="18" charset="0"/>
-              </a:rPr>
-              <a:t>&lt;title&gt; The Mathematical Theory of Communication &lt;/title&gt;</a:t>
-            </a:r>
-          </a:p>
-          <a:p>
-            <a:r>
-              <a:rPr lang="en-GB" sz="1400" dirty="0">
-                <a:latin typeface="Palatino Linotype" panose="02040502050505030304" pitchFamily="18" charset="0"/>
-              </a:rPr>
-              <a:t>&lt;author&gt; Claude E. Shannon &lt;/author&gt;</a:t>
-            </a:r>
-          </a:p>
-          <a:p>
-            <a:r>
-              <a:rPr lang="en-GB" sz="1400" dirty="0">
-                <a:latin typeface="Palatino Linotype" panose="02040502050505030304" pitchFamily="18" charset="0"/>
-              </a:rPr>
-              <a:t>&lt;author&gt; Warren Weaver &lt;/author&gt;</a:t>
-            </a:r>
-          </a:p>
-          <a:p>
-            <a:r>
-              <a:rPr lang="en-GB" sz="1400" dirty="0">
-                <a:latin typeface="Palatino Linotype" panose="02040502050505030304" pitchFamily="18" charset="0"/>
-              </a:rPr>
-              <a:t>&lt;year&gt; 1949 &lt;/year&gt;</a:t>
-            </a:r>
-          </a:p>
-          <a:p>
-            <a:r>
-              <a:rPr lang="en-GB" sz="1400" dirty="0">
-                <a:latin typeface="Palatino Linotype" panose="02040502050505030304" pitchFamily="18" charset="0"/>
-              </a:rPr>
-              <a:t>&lt;/book&gt;</a:t>
-            </a:r>
-          </a:p>
-          <a:p>
-            <a:r>
-              <a:rPr lang="en-GB" sz="1400" dirty="0">
-                <a:latin typeface="Palatino Linotype" panose="02040502050505030304" pitchFamily="18" charset="0"/>
-              </a:rPr>
-              <a:t>&lt;book&gt;</a:t>
-            </a:r>
-          </a:p>
-          <a:p>
-            <a:r>
-              <a:rPr lang="en-GB" sz="1400" dirty="0">
-                <a:latin typeface="Palatino Linotype" panose="02040502050505030304" pitchFamily="18" charset="0"/>
-              </a:rPr>
-              <a:t>&lt;title&gt; Nineteen Eighty-Four &lt;/title&gt;</a:t>
-            </a:r>
-          </a:p>
-          <a:p>
-            <a:r>
-              <a:rPr lang="en-GB" sz="1400" dirty="0">
-                <a:latin typeface="Palatino Linotype" panose="02040502050505030304" pitchFamily="18" charset="0"/>
-              </a:rPr>
-              <a:t>&lt;author&gt; George Orwell &lt;/author&gt;</a:t>
-            </a:r>
-          </a:p>
-          <a:p>
-            <a:r>
-              <a:rPr lang="en-GB" sz="1400" dirty="0">
-                <a:latin typeface="Palatino Linotype" panose="02040502050505030304" pitchFamily="18" charset="0"/>
-              </a:rPr>
-              <a:t>&lt;year&gt; 1949 &lt;/year&gt;</a:t>
-            </a:r>
-          </a:p>
-          <a:p>
-            <a:r>
-              <a:rPr lang="en-GB" sz="1400" dirty="0">
-                <a:latin typeface="Palatino Linotype" panose="02040502050505030304" pitchFamily="18" charset="0"/>
-              </a:rPr>
-              <a:t>&lt;/book&gt;</a:t>
-            </a:r>
-          </a:p>
-          <a:p>
-            <a:r>
-              <a:rPr lang="en-GB" sz="1400" dirty="0">
-                <a:latin typeface="Palatino Linotype" panose="02040502050505030304" pitchFamily="18" charset="0"/>
-              </a:rPr>
-              <a:t>&lt;/book list&gt;</a:t>
-            </a:r>
-          </a:p>
-        </p:txBody>
-      </p:sp>
-      <p:sp>
-        <p:nvSpPr>
-          <p:cNvPr id="5" name="CasellaDiTesto 4"/>
-          <p:cNvSpPr txBox="1"/>
-          <p:nvPr/>
-        </p:nvSpPr>
-        <p:spPr>
-          <a:xfrm>
-            <a:off x="6712689" y="1494524"/>
-            <a:ext cx="4798828" cy="369332"/>
-          </a:xfrm>
-          <a:prstGeom prst="rect">
-            <a:avLst/>
-          </a:prstGeom>
-          <a:noFill/>
-        </p:spPr>
-        <p:txBody>
-          <a:bodyPr wrap="square" rtlCol="0">
-            <a:spAutoFit/>
-          </a:bodyPr>
-          <a:lstStyle/>
-          <a:p>
-            <a:r>
-              <a:rPr lang="it-IT" dirty="0" err="1">
-                <a:latin typeface="Palatino Linotype" panose="02040502050505030304" pitchFamily="18" charset="0"/>
-              </a:rPr>
-              <a:t>Example</a:t>
-            </a:r>
-            <a:r>
-              <a:rPr lang="it-IT" dirty="0">
-                <a:latin typeface="Palatino Linotype" panose="02040502050505030304" pitchFamily="18" charset="0"/>
-              </a:rPr>
-              <a:t> of XML code </a:t>
-            </a:r>
-            <a:r>
-              <a:rPr lang="it-IT" dirty="0" err="1">
-                <a:latin typeface="Palatino Linotype" panose="02040502050505030304" pitchFamily="18" charset="0"/>
-              </a:rPr>
-              <a:t>that</a:t>
-            </a:r>
-            <a:r>
-              <a:rPr lang="it-IT" dirty="0">
-                <a:latin typeface="Palatino Linotype" panose="02040502050505030304" pitchFamily="18" charset="0"/>
-              </a:rPr>
-              <a:t> </a:t>
-            </a:r>
-            <a:r>
-              <a:rPr lang="it-IT" dirty="0" err="1">
-                <a:latin typeface="Palatino Linotype" panose="02040502050505030304" pitchFamily="18" charset="0"/>
-              </a:rPr>
-              <a:t>define</a:t>
-            </a:r>
-            <a:r>
-              <a:rPr lang="it-IT" dirty="0">
-                <a:latin typeface="Palatino Linotype" panose="02040502050505030304" pitchFamily="18" charset="0"/>
-              </a:rPr>
-              <a:t> a book list</a:t>
-            </a:r>
-            <a:endParaRPr lang="en-GB" dirty="0">
-              <a:latin typeface="Palatino Linotype" panose="02040502050505030304" pitchFamily="18" charset="0"/>
-            </a:endParaRPr>
-          </a:p>
-        </p:txBody>
-      </p:sp>
-      <p:sp>
-        <p:nvSpPr>
-          <p:cNvPr id="6" name="Segnaposto numero diapositiva 5"/>
+          <p:cNvPr id="4" name="Segnaposto numero diapositiva 3"/>
           <p:cNvSpPr>
             <a:spLocks noGrp="1"/>
           </p:cNvSpPr>
@@ -13418,7 +12794,7 @@
     </p:spTree>
     <p:extLst>
       <p:ext uri="{BB962C8B-B14F-4D97-AF65-F5344CB8AC3E}">
-        <p14:creationId xmlns:p14="http://schemas.microsoft.com/office/powerpoint/2010/main" val="341176474"/>
+        <p14:creationId xmlns:p14="http://schemas.microsoft.com/office/powerpoint/2010/main" val="3144760395"/>
       </p:ext>
     </p:extLst>
   </p:cSld>
@@ -13462,103 +12838,230 @@
           <a:p>
             <a:r>
               <a:rPr lang="it-IT" dirty="0"/>
-              <a:t>JavaScript Object </a:t>
+              <a:t>JSON data </a:t>
             </a:r>
             <a:r>
               <a:rPr lang="it-IT" dirty="0" err="1"/>
-              <a:t>Notation</a:t>
-            </a:r>
-            <a:r>
-              <a:rPr lang="it-IT" dirty="0"/>
-              <a:t> (JSON)</a:t>
+              <a:t>structures</a:t>
             </a:r>
             <a:endParaRPr lang="en-GB" dirty="0"/>
           </a:p>
         </p:txBody>
       </p:sp>
-      <p:sp>
-        <p:nvSpPr>
-          <p:cNvPr id="3" name="Segnaposto contenuto 2"/>
-          <p:cNvSpPr>
-            <a:spLocks noGrp="1"/>
-          </p:cNvSpPr>
+      <p:pic>
+        <p:nvPicPr>
+          <p:cNvPr id="5" name="Segnaposto contenuto 4"/>
+          <p:cNvPicPr>
+            <a:picLocks noGrp="1" noChangeAspect="1"/>
+          </p:cNvPicPr>
           <p:nvPr>
             <p:ph idx="1"/>
           </p:nvPr>
-        </p:nvSpPr>
-        <p:spPr/>
-        <p:txBody>
-          <a:bodyPr>
-            <a:normAutofit/>
+        </p:nvPicPr>
+        <p:blipFill rotWithShape="1">
+          <a:blip r:embed="rId2">
+            <a:extLst>
+              <a:ext uri="{28A0092B-C50C-407E-A947-70E740481C1C}">
+                <a14:useLocalDpi xmlns:a14="http://schemas.microsoft.com/office/drawing/2010/main" val="0"/>
+              </a:ext>
+            </a:extLst>
+          </a:blip>
+          <a:srcRect t="37061"/>
+          <a:stretch/>
+        </p:blipFill>
+        <p:spPr>
+          <a:xfrm>
+            <a:off x="8164878" y="2636875"/>
+            <a:ext cx="2595271" cy="4043695"/>
+          </a:xfrm>
+        </p:spPr>
+      </p:pic>
+      <p:pic>
+        <p:nvPicPr>
+          <p:cNvPr id="6" name="Segnaposto contenuto 4"/>
+          <p:cNvPicPr>
+            <a:picLocks noChangeAspect="1"/>
+          </p:cNvPicPr>
+          <p:nvPr/>
+        </p:nvPicPr>
+        <p:blipFill rotWithShape="1">
+          <a:blip r:embed="rId2">
+            <a:extLst>
+              <a:ext uri="{28A0092B-C50C-407E-A947-70E740481C1C}">
+                <a14:useLocalDpi xmlns:a14="http://schemas.microsoft.com/office/drawing/2010/main" val="0"/>
+              </a:ext>
+            </a:extLst>
+          </a:blip>
+          <a:srcRect t="5772" b="68846"/>
+          <a:stretch/>
+        </p:blipFill>
+        <p:spPr>
+          <a:xfrm>
+            <a:off x="1201116" y="2721934"/>
+            <a:ext cx="3801725" cy="2388781"/>
+          </a:xfrm>
+          <a:prstGeom prst="rect">
+            <a:avLst/>
+          </a:prstGeom>
+        </p:spPr>
+      </p:pic>
+      <p:sp>
+        <p:nvSpPr>
+          <p:cNvPr id="7" name="CasellaDiTesto 6"/>
+          <p:cNvSpPr txBox="1"/>
+          <p:nvPr/>
+        </p:nvSpPr>
+        <p:spPr>
+          <a:xfrm>
+            <a:off x="0" y="1350708"/>
+            <a:ext cx="6203959" cy="1514261"/>
+          </a:xfrm>
+          <a:prstGeom prst="rect">
+            <a:avLst/>
+          </a:prstGeom>
+          <a:noFill/>
+        </p:spPr>
+        <p:txBody>
+          <a:bodyPr wrap="square" rtlCol="0">
+            <a:spAutoFit/>
           </a:bodyPr>
           <a:lstStyle/>
           <a:p>
-            <a:r>
-              <a:rPr lang="en-US" dirty="0"/>
-              <a:t>A format that uses human-readable text to store and transmit data objects consisting of attribute–value pairs and arrays.</a:t>
-            </a:r>
-          </a:p>
-          <a:p>
-            <a:r>
-              <a:rPr lang="en-US" dirty="0"/>
-              <a:t>Introduced in 2001.</a:t>
-            </a:r>
-          </a:p>
-          <a:p>
-            <a:r>
-              <a:rPr lang="en-US" dirty="0"/>
-              <a:t>JSON is language-independent. It was derived from JavaScript, but many modern programming languages include code to generate and parse JSON-format data.</a:t>
-            </a:r>
-          </a:p>
-          <a:p>
-            <a:r>
-              <a:rPr lang="en-US" dirty="0"/>
-              <a:t>Extension .</a:t>
-            </a:r>
-            <a:r>
-              <a:rPr lang="en-US" dirty="0" err="1"/>
-              <a:t>json</a:t>
-            </a:r>
-            <a:endParaRPr lang="en-US" dirty="0"/>
-          </a:p>
-          <a:p>
-            <a:r>
-              <a:rPr lang="en-US" dirty="0"/>
-              <a:t>JSON data types: number, string, Boolean, null (empty value)</a:t>
-            </a:r>
-          </a:p>
-          <a:p>
-            <a:r>
-              <a:rPr lang="en-US" dirty="0"/>
-              <a:t>JSON data structures</a:t>
-            </a:r>
-          </a:p>
-          <a:p>
-            <a:pPr lvl="1"/>
-            <a:r>
-              <a:rPr lang="en-US" sz="2400" dirty="0"/>
-              <a:t>Object</a:t>
-            </a:r>
-          </a:p>
-          <a:p>
-            <a:pPr lvl="1"/>
-            <a:r>
-              <a:rPr lang="en-US" sz="2400" dirty="0"/>
-              <a:t>Array</a:t>
-            </a:r>
-          </a:p>
-          <a:p>
-            <a:pPr lvl="1"/>
-            <a:endParaRPr lang="it-IT" dirty="0"/>
-          </a:p>
-          <a:p>
-            <a:endParaRPr lang="en-GB" dirty="0"/>
-          </a:p>
-        </p:txBody>
-      </p:sp>
-      <p:sp>
-        <p:nvSpPr>
-          <p:cNvPr id="4" name="Segnaposto numero diapositiva 3"/>
+            <a:pPr marL="800100" lvl="1" indent="-342900">
+              <a:lnSpc>
+                <a:spcPct val="90000"/>
+              </a:lnSpc>
+              <a:spcBef>
+                <a:spcPts val="500"/>
+              </a:spcBef>
+              <a:buClr>
+                <a:srgbClr val="00B050"/>
+              </a:buClr>
+              <a:buFont typeface="Wingdings" panose="05000000000000000000" pitchFamily="2" charset="2"/>
+              <a:buChar char="Ø"/>
+            </a:pPr>
+            <a:r>
+              <a:rPr lang="it-IT" sz="1900" b="1" dirty="0">
+                <a:latin typeface="Aptos" panose="020B0004020202020204" pitchFamily="34" charset="0"/>
+              </a:rPr>
+              <a:t>JSON </a:t>
+            </a:r>
+            <a:r>
+              <a:rPr lang="it-IT" sz="1900" b="1" dirty="0" err="1">
+                <a:latin typeface="Aptos" panose="020B0004020202020204" pitchFamily="34" charset="0"/>
+              </a:rPr>
+              <a:t>object</a:t>
+            </a:r>
+            <a:r>
+              <a:rPr lang="it-IT" sz="1900" dirty="0">
+                <a:latin typeface="Aptos" panose="020B0004020202020204" pitchFamily="34" charset="0"/>
+              </a:rPr>
+              <a:t>: </a:t>
+            </a:r>
+            <a:r>
+              <a:rPr lang="en-US" sz="1900" dirty="0">
+                <a:solidFill>
+                  <a:prstClr val="black"/>
+                </a:solidFill>
+                <a:latin typeface="Aptos" panose="020B0004020202020204" pitchFamily="34" charset="0"/>
+              </a:rPr>
+              <a:t>a collection of name–value pairs where the names (also called keys) are strings. The order of pairs is not relevant. The object is surrounded by curly braces. </a:t>
+            </a:r>
+          </a:p>
+          <a:p>
+            <a:pPr algn="ctr"/>
+            <a:endParaRPr lang="en-GB" sz="2400" dirty="0">
+              <a:latin typeface="Aptos" panose="020B0004020202020204" pitchFamily="34" charset="0"/>
+            </a:endParaRPr>
+          </a:p>
+        </p:txBody>
+      </p:sp>
+      <p:sp>
+        <p:nvSpPr>
+          <p:cNvPr id="8" name="CasellaDiTesto 7"/>
+          <p:cNvSpPr txBox="1"/>
+          <p:nvPr/>
+        </p:nvSpPr>
+        <p:spPr>
+          <a:xfrm>
+            <a:off x="6203959" y="1350708"/>
+            <a:ext cx="5654609" cy="1144929"/>
+          </a:xfrm>
+          <a:prstGeom prst="rect">
+            <a:avLst/>
+          </a:prstGeom>
+          <a:noFill/>
+        </p:spPr>
+        <p:txBody>
+          <a:bodyPr wrap="square" rtlCol="0">
+            <a:spAutoFit/>
+          </a:bodyPr>
+          <a:lstStyle/>
+          <a:p>
+            <a:pPr marL="800100" lvl="1" indent="-342900">
+              <a:lnSpc>
+                <a:spcPct val="90000"/>
+              </a:lnSpc>
+              <a:spcBef>
+                <a:spcPts val="500"/>
+              </a:spcBef>
+              <a:buClr>
+                <a:srgbClr val="00B050"/>
+              </a:buClr>
+              <a:buFont typeface="Wingdings" panose="05000000000000000000" pitchFamily="2" charset="2"/>
+              <a:buChar char="Ø"/>
+            </a:pPr>
+            <a:r>
+              <a:rPr lang="it-IT" sz="1900" b="1" dirty="0">
+                <a:latin typeface="Aptos" panose="020B0004020202020204" pitchFamily="34" charset="0"/>
+              </a:rPr>
+              <a:t>JSON array: </a:t>
+            </a:r>
+            <a:r>
+              <a:rPr lang="en-US" sz="1900" dirty="0">
+                <a:latin typeface="Aptos" panose="020B0004020202020204" pitchFamily="34" charset="0"/>
+              </a:rPr>
+              <a:t>an ordered list of zero or more elements, each of which may be of any type. Arrays use square bracket notation with comma-separated elements.</a:t>
+            </a:r>
+            <a:endParaRPr lang="en-GB" sz="1900" dirty="0">
+              <a:latin typeface="Aptos" panose="020B0004020202020204" pitchFamily="34" charset="0"/>
+            </a:endParaRPr>
+          </a:p>
+        </p:txBody>
+      </p:sp>
+      <p:sp>
+        <p:nvSpPr>
+          <p:cNvPr id="4" name="Rettangolo 3"/>
+          <p:cNvSpPr/>
+          <p:nvPr/>
+        </p:nvSpPr>
+        <p:spPr>
+          <a:xfrm>
+            <a:off x="839777" y="5507292"/>
+            <a:ext cx="6571030" cy="400110"/>
+          </a:xfrm>
+          <a:prstGeom prst="rect">
+            <a:avLst/>
+          </a:prstGeom>
+        </p:spPr>
+        <p:txBody>
+          <a:bodyPr wrap="none">
+            <a:spAutoFit/>
+          </a:bodyPr>
+          <a:lstStyle/>
+          <a:p>
+            <a:r>
+              <a:rPr lang="en-US" sz="2000" dirty="0">
+                <a:latin typeface="Aptos" panose="020B0004020202020204" pitchFamily="34" charset="0"/>
+              </a:rPr>
+              <a:t>Objects can contain array and arrays can contain objects.</a:t>
+            </a:r>
+          </a:p>
+        </p:txBody>
+      </p:sp>
+      <p:sp>
+        <p:nvSpPr>
+          <p:cNvPr id="9" name="Segnaposto numero diapositiva 8"/>
           <p:cNvSpPr>
             <a:spLocks noGrp="1"/>
           </p:cNvSpPr>
@@ -13582,7 +13085,7 @@
     </p:spTree>
     <p:extLst>
       <p:ext uri="{BB962C8B-B14F-4D97-AF65-F5344CB8AC3E}">
-        <p14:creationId xmlns:p14="http://schemas.microsoft.com/office/powerpoint/2010/main" val="3144760395"/>
+        <p14:creationId xmlns:p14="http://schemas.microsoft.com/office/powerpoint/2010/main" val="2901513629"/>
       </p:ext>
     </p:extLst>
   </p:cSld>
@@ -14356,225 +13859,54 @@
           <a:lstStyle/>
           <a:p>
             <a:r>
+              <a:rPr lang="it-IT" dirty="0" err="1"/>
+              <a:t>Why</a:t>
+            </a:r>
+            <a:r>
               <a:rPr lang="it-IT" dirty="0"/>
-              <a:t>JSON data </a:t>
+              <a:t> JSON are </a:t>
             </a:r>
             <a:r>
               <a:rPr lang="it-IT" dirty="0" err="1"/>
-              <a:t>structures</a:t>
+              <a:t>important</a:t>
+            </a:r>
+            <a:r>
+              <a:rPr lang="it-IT" dirty="0"/>
+              <a:t> </a:t>
+            </a:r>
+            <a:r>
+              <a:rPr lang="it-IT" dirty="0" err="1"/>
+              <a:t>here</a:t>
+            </a:r>
+            <a:r>
+              <a:rPr lang="it-IT" dirty="0"/>
+              <a:t>? </a:t>
+            </a:r>
+            <a:r>
+              <a:rPr lang="it-IT" dirty="0" err="1"/>
+              <a:t>What</a:t>
+            </a:r>
+            <a:r>
+              <a:rPr lang="it-IT" dirty="0"/>
+              <a:t> </a:t>
+            </a:r>
+            <a:r>
+              <a:rPr lang="it-IT" dirty="0" err="1"/>
+              <a:t>we</a:t>
+            </a:r>
+            <a:r>
+              <a:rPr lang="it-IT" dirty="0"/>
+              <a:t> </a:t>
+            </a:r>
+            <a:r>
+              <a:rPr lang="it-IT" dirty="0" err="1"/>
+              <a:t>need</a:t>
+            </a:r>
+            <a:r>
+              <a:rPr lang="it-IT" dirty="0"/>
+              <a:t>?</a:t>
             </a:r>
             <a:endParaRPr lang="en-GB" dirty="0"/>
-          </a:p>
-        </p:txBody>
-      </p:sp>
-      <p:pic>
-        <p:nvPicPr>
-          <p:cNvPr id="5" name="Segnaposto contenuto 4"/>
-          <p:cNvPicPr>
-            <a:picLocks noGrp="1" noChangeAspect="1"/>
-          </p:cNvPicPr>
-          <p:nvPr>
-            <p:ph idx="1"/>
-          </p:nvPr>
-        </p:nvPicPr>
-        <p:blipFill rotWithShape="1">
-          <a:blip r:embed="rId2">
-            <a:extLst>
-              <a:ext uri="{28A0092B-C50C-407E-A947-70E740481C1C}">
-                <a14:useLocalDpi xmlns:a14="http://schemas.microsoft.com/office/drawing/2010/main" val="0"/>
-              </a:ext>
-            </a:extLst>
-          </a:blip>
-          <a:srcRect t="37061"/>
-          <a:stretch/>
-        </p:blipFill>
-        <p:spPr>
-          <a:xfrm>
-            <a:off x="8164878" y="2636875"/>
-            <a:ext cx="2595271" cy="4043695"/>
-          </a:xfrm>
-        </p:spPr>
-      </p:pic>
-      <p:pic>
-        <p:nvPicPr>
-          <p:cNvPr id="6" name="Segnaposto contenuto 4"/>
-          <p:cNvPicPr>
-            <a:picLocks noChangeAspect="1"/>
-          </p:cNvPicPr>
-          <p:nvPr/>
-        </p:nvPicPr>
-        <p:blipFill rotWithShape="1">
-          <a:blip r:embed="rId2">
-            <a:extLst>
-              <a:ext uri="{28A0092B-C50C-407E-A947-70E740481C1C}">
-                <a14:useLocalDpi xmlns:a14="http://schemas.microsoft.com/office/drawing/2010/main" val="0"/>
-              </a:ext>
-            </a:extLst>
-          </a:blip>
-          <a:srcRect t="5772" b="68846"/>
-          <a:stretch/>
-        </p:blipFill>
-        <p:spPr>
-          <a:xfrm>
-            <a:off x="1201116" y="2721934"/>
-            <a:ext cx="3801725" cy="2388781"/>
-          </a:xfrm>
-          <a:prstGeom prst="rect">
-            <a:avLst/>
-          </a:prstGeom>
-        </p:spPr>
-      </p:pic>
-      <p:sp>
-        <p:nvSpPr>
-          <p:cNvPr id="7" name="CasellaDiTesto 6"/>
-          <p:cNvSpPr txBox="1"/>
-          <p:nvPr/>
-        </p:nvSpPr>
-        <p:spPr>
-          <a:xfrm>
-            <a:off x="0" y="1350708"/>
-            <a:ext cx="6203959" cy="1514261"/>
-          </a:xfrm>
-          <a:prstGeom prst="rect">
-            <a:avLst/>
-          </a:prstGeom>
-          <a:noFill/>
-        </p:spPr>
-        <p:txBody>
-          <a:bodyPr wrap="square" rtlCol="0">
-            <a:spAutoFit/>
-          </a:bodyPr>
-          <a:lstStyle/>
-          <a:p>
-            <a:pPr marL="800100" lvl="1" indent="-342900">
-              <a:lnSpc>
-                <a:spcPct val="90000"/>
-              </a:lnSpc>
-              <a:spcBef>
-                <a:spcPts val="500"/>
-              </a:spcBef>
-              <a:buClr>
-                <a:srgbClr val="00B050"/>
-              </a:buClr>
-              <a:buFont typeface="Wingdings" panose="05000000000000000000" pitchFamily="2" charset="2"/>
-              <a:buChar char="Ø"/>
-            </a:pPr>
-            <a:r>
-              <a:rPr lang="it-IT" sz="1900" b="1" dirty="0">
-                <a:latin typeface="Palatino Linotype" panose="02040502050505030304" pitchFamily="18" charset="0"/>
-              </a:rPr>
-              <a:t>JSON </a:t>
-            </a:r>
-            <a:r>
-              <a:rPr lang="it-IT" sz="1900" b="1" dirty="0" err="1">
-                <a:latin typeface="Palatino Linotype" panose="02040502050505030304" pitchFamily="18" charset="0"/>
-              </a:rPr>
-              <a:t>object</a:t>
-            </a:r>
-            <a:r>
-              <a:rPr lang="it-IT" sz="1900" dirty="0">
-                <a:latin typeface="Palatino Linotype" panose="02040502050505030304" pitchFamily="18" charset="0"/>
-              </a:rPr>
-              <a:t>: </a:t>
-            </a:r>
-            <a:r>
-              <a:rPr lang="en-US" sz="1900" dirty="0">
-                <a:solidFill>
-                  <a:prstClr val="black"/>
-                </a:solidFill>
-                <a:latin typeface="Palatino Linotype" panose="02040502050505030304" pitchFamily="18" charset="0"/>
-              </a:rPr>
-              <a:t>a collection of name–value pairs where the names (also called keys) are strings. The order of pairs is not relevant. The object is surrounded by curly braces. </a:t>
-            </a:r>
-          </a:p>
-          <a:p>
-            <a:pPr algn="ctr"/>
-            <a:endParaRPr lang="en-GB" sz="2400" dirty="0">
-              <a:latin typeface="Palatino Linotype" panose="02040502050505030304" pitchFamily="18" charset="0"/>
-            </a:endParaRPr>
-          </a:p>
-        </p:txBody>
-      </p:sp>
-      <p:sp>
-        <p:nvSpPr>
-          <p:cNvPr id="8" name="CasellaDiTesto 7"/>
-          <p:cNvSpPr txBox="1"/>
-          <p:nvPr/>
-        </p:nvSpPr>
-        <p:spPr>
-          <a:xfrm>
-            <a:off x="6203959" y="1350708"/>
-            <a:ext cx="5654609" cy="1144929"/>
-          </a:xfrm>
-          <a:prstGeom prst="rect">
-            <a:avLst/>
-          </a:prstGeom>
-          <a:noFill/>
-        </p:spPr>
-        <p:txBody>
-          <a:bodyPr wrap="square" rtlCol="0">
-            <a:spAutoFit/>
-          </a:bodyPr>
-          <a:lstStyle/>
-          <a:p>
-            <a:pPr marL="800100" lvl="1" indent="-342900">
-              <a:lnSpc>
-                <a:spcPct val="90000"/>
-              </a:lnSpc>
-              <a:spcBef>
-                <a:spcPts val="500"/>
-              </a:spcBef>
-              <a:buClr>
-                <a:srgbClr val="00B050"/>
-              </a:buClr>
-              <a:buFont typeface="Wingdings" panose="05000000000000000000" pitchFamily="2" charset="2"/>
-              <a:buChar char="Ø"/>
-            </a:pPr>
-            <a:r>
-              <a:rPr lang="it-IT" sz="1900" b="1" dirty="0">
-                <a:latin typeface="Palatino Linotype" panose="02040502050505030304" pitchFamily="18" charset="0"/>
-              </a:rPr>
-              <a:t>JSON array: </a:t>
-            </a:r>
-            <a:r>
-              <a:rPr lang="en-US" sz="1900" dirty="0">
-                <a:latin typeface="Palatino Linotype" panose="02040502050505030304" pitchFamily="18" charset="0"/>
-              </a:rPr>
-              <a:t>an ordered list of zero or more elements, each of which may be of any type. Arrays use square bracket notation with comma-separated elements.</a:t>
-            </a:r>
-            <a:endParaRPr lang="en-GB" sz="1900" dirty="0">
-              <a:latin typeface="Palatino Linotype" panose="02040502050505030304" pitchFamily="18" charset="0"/>
-            </a:endParaRPr>
-          </a:p>
-        </p:txBody>
-      </p:sp>
-      <p:sp>
-        <p:nvSpPr>
-          <p:cNvPr id="4" name="Rettangolo 3"/>
-          <p:cNvSpPr/>
-          <p:nvPr/>
-        </p:nvSpPr>
-        <p:spPr>
-          <a:xfrm>
-            <a:off x="839777" y="5507292"/>
-            <a:ext cx="6571030" cy="400110"/>
-          </a:xfrm>
-          <a:prstGeom prst="rect">
-            <a:avLst/>
-          </a:prstGeom>
-        </p:spPr>
-        <p:txBody>
-          <a:bodyPr wrap="none">
-            <a:spAutoFit/>
-          </a:bodyPr>
-          <a:lstStyle/>
-          <a:p>
-            <a:r>
-              <a:rPr lang="en-US" sz="2000" dirty="0">
-                <a:latin typeface="Palatino Linotype" panose="02040502050505030304" pitchFamily="18" charset="0"/>
-              </a:rPr>
-              <a:t>Objects can contain array and arrays can contain objects.</a:t>
-            </a:r>
           </a:p>
         </p:txBody>
       </p:sp>
@@ -14596,126 +13928,6 @@
             <a:fld id="{31DE2C5B-556E-47B8-A792-024C2FCA4ACC}" type="slidenum">
               <a:rPr lang="en-GB" smtClean="0"/>
               <a:t>30</a:t>
-            </a:fld>
-            <a:endParaRPr lang="en-GB"/>
-          </a:p>
-        </p:txBody>
-      </p:sp>
-    </p:spTree>
-    <p:extLst>
-      <p:ext uri="{BB962C8B-B14F-4D97-AF65-F5344CB8AC3E}">
-        <p14:creationId xmlns:p14="http://schemas.microsoft.com/office/powerpoint/2010/main" val="2901513629"/>
-      </p:ext>
-    </p:extLst>
-  </p:cSld>
-  <p:clrMapOvr>
-    <a:masterClrMapping/>
-  </p:clrMapOvr>
-</p:sld>
-</file>
-
-<file path=ppt/slides/slide31.xml><?xml version="1.0" encoding="utf-8"?>
-<p:sld xmlns:a="http://schemas.openxmlformats.org/drawingml/2006/main" xmlns:r="http://schemas.openxmlformats.org/officeDocument/2006/relationships" xmlns:p="http://schemas.openxmlformats.org/presentationml/2006/main">
-  <p:cSld>
-    <p:spTree>
-      <p:nvGrpSpPr>
-        <p:cNvPr id="1" name=""/>
-        <p:cNvGrpSpPr/>
-        <p:nvPr/>
-      </p:nvGrpSpPr>
-      <p:grpSpPr>
-        <a:xfrm>
-          <a:off x="0" y="0"/>
-          <a:ext cx="0" cy="0"/>
-          <a:chOff x="0" y="0"/>
-          <a:chExt cx="0" cy="0"/>
-        </a:xfrm>
-      </p:grpSpPr>
-      <p:sp>
-        <p:nvSpPr>
-          <p:cNvPr id="2" name="Titolo 1"/>
-          <p:cNvSpPr>
-            <a:spLocks noGrp="1"/>
-          </p:cNvSpPr>
-          <p:nvPr>
-            <p:ph type="title"/>
-          </p:nvPr>
-        </p:nvSpPr>
-        <p:spPr/>
-        <p:txBody>
-          <a:bodyPr/>
-          <a:lstStyle/>
-          <a:p>
-            <a:r>
-              <a:rPr lang="it-IT" dirty="0" err="1"/>
-              <a:t>Why</a:t>
-            </a:r>
-            <a:r>
-              <a:rPr lang="it-IT" dirty="0"/>
-              <a:t> JSON are </a:t>
-            </a:r>
-            <a:r>
-              <a:rPr lang="it-IT" dirty="0" err="1"/>
-              <a:t>important</a:t>
-            </a:r>
-            <a:r>
-              <a:rPr lang="it-IT" dirty="0"/>
-              <a:t> </a:t>
-            </a:r>
-            <a:r>
-              <a:rPr lang="it-IT" dirty="0" err="1"/>
-              <a:t>here</a:t>
-            </a:r>
-            <a:r>
-              <a:rPr lang="it-IT" dirty="0"/>
-              <a:t>? </a:t>
-            </a:r>
-            <a:r>
-              <a:rPr lang="it-IT" dirty="0" err="1"/>
-              <a:t>What</a:t>
-            </a:r>
-            <a:r>
-              <a:rPr lang="it-IT" dirty="0"/>
-              <a:t> </a:t>
-            </a:r>
-            <a:r>
-              <a:rPr lang="it-IT" dirty="0" err="1"/>
-              <a:t>we</a:t>
-            </a:r>
-            <a:r>
-              <a:rPr lang="it-IT" dirty="0"/>
-              <a:t> </a:t>
-            </a:r>
-            <a:r>
-              <a:rPr lang="it-IT" dirty="0" err="1"/>
-              <a:t>need</a:t>
-            </a:r>
-            <a:r>
-              <a:rPr lang="it-IT" dirty="0"/>
-              <a:t>?</a:t>
-            </a:r>
-            <a:endParaRPr lang="en-GB" dirty="0"/>
-          </a:p>
-        </p:txBody>
-      </p:sp>
-      <p:sp>
-        <p:nvSpPr>
-          <p:cNvPr id="9" name="Segnaposto numero diapositiva 8"/>
-          <p:cNvSpPr>
-            <a:spLocks noGrp="1"/>
-          </p:cNvSpPr>
-          <p:nvPr>
-            <p:ph type="sldNum" sz="quarter" idx="12"/>
-          </p:nvPr>
-        </p:nvSpPr>
-        <p:spPr/>
-        <p:txBody>
-          <a:bodyPr/>
-          <a:lstStyle/>
-          <a:p>
-            <a:fld id="{31DE2C5B-556E-47B8-A792-024C2FCA4ACC}" type="slidenum">
-              <a:rPr lang="en-GB" smtClean="0"/>
-              <a:t>31</a:t>
             </a:fld>
             <a:endParaRPr lang="en-GB"/>
           </a:p>
@@ -14824,7 +14036,7 @@
             <a:r>
               <a:rPr lang="en-GB" sz="1000" b="0" dirty="0">
                 <a:effectLst/>
-                <a:latin typeface="Menlo" panose="020B0609030804020204" pitchFamily="49" charset="0"/>
+                <a:latin typeface="Aptos" panose="020B0004020202020204" pitchFamily="34" charset="0"/>
               </a:rPr>
               <a:t>[</a:t>
             </a:r>
@@ -14833,7 +14045,7 @@
             <a:r>
               <a:rPr lang="en-GB" sz="1000" b="0" dirty="0">
                 <a:effectLst/>
-                <a:latin typeface="Menlo" panose="020B0609030804020204" pitchFamily="49" charset="0"/>
+                <a:latin typeface="Aptos" panose="020B0004020202020204" pitchFamily="34" charset="0"/>
               </a:rPr>
               <a:t>     {</a:t>
             </a:r>
@@ -14842,7 +14054,7 @@
             <a:r>
               <a:rPr lang="en-GB" sz="1000" b="0" dirty="0">
                 <a:effectLst/>
-                <a:latin typeface="Menlo" panose="020B0609030804020204" pitchFamily="49" charset="0"/>
+                <a:latin typeface="Aptos" panose="020B0004020202020204" pitchFamily="34" charset="0"/>
               </a:rPr>
               <a:t>        "time": "03:10:19",</a:t>
             </a:r>
@@ -14851,7 +14063,7 @@
             <a:r>
               <a:rPr lang="en-GB" sz="1000" b="0" dirty="0">
                 <a:effectLst/>
-                <a:latin typeface="Menlo" panose="020B0609030804020204" pitchFamily="49" charset="0"/>
+                <a:latin typeface="Aptos" panose="020B0004020202020204" pitchFamily="34" charset="0"/>
               </a:rPr>
               <a:t>        "value": 58,</a:t>
             </a:r>
@@ -14860,7 +14072,7 @@
             <a:r>
               <a:rPr lang="en-GB" sz="1000" b="0" dirty="0">
                 <a:effectLst/>
-                <a:latin typeface="Menlo" panose="020B0609030804020204" pitchFamily="49" charset="0"/>
+                <a:latin typeface="Aptos" panose="020B0004020202020204" pitchFamily="34" charset="0"/>
               </a:rPr>
               <a:t>        "confidence": 1</a:t>
             </a:r>
@@ -14869,7 +14081,7 @@
             <a:r>
               <a:rPr lang="en-GB" sz="1000" b="0" dirty="0">
                 <a:effectLst/>
-                <a:latin typeface="Menlo" panose="020B0609030804020204" pitchFamily="49" charset="0"/>
+                <a:latin typeface="Aptos" panose="020B0004020202020204" pitchFamily="34" charset="0"/>
               </a:rPr>
               <a:t>    },</a:t>
             </a:r>
@@ -14878,7 +14090,7 @@
             <a:r>
               <a:rPr lang="en-GB" sz="1000" b="0" dirty="0">
                 <a:effectLst/>
-                <a:latin typeface="Menlo" panose="020B0609030804020204" pitchFamily="49" charset="0"/>
+                <a:latin typeface="Aptos" panose="020B0004020202020204" pitchFamily="34" charset="0"/>
               </a:rPr>
               <a:t>    {</a:t>
             </a:r>
@@ -14887,7 +14099,7 @@
             <a:r>
               <a:rPr lang="en-GB" sz="1000" b="0" dirty="0">
                 <a:effectLst/>
-                <a:latin typeface="Menlo" panose="020B0609030804020204" pitchFamily="49" charset="0"/>
+                <a:latin typeface="Aptos" panose="020B0004020202020204" pitchFamily="34" charset="0"/>
               </a:rPr>
               <a:t>        "time": "03:10:24",</a:t>
             </a:r>
@@ -14896,7 +14108,7 @@
             <a:r>
               <a:rPr lang="en-GB" sz="1000" b="0" dirty="0">
                 <a:effectLst/>
-                <a:latin typeface="Menlo" panose="020B0609030804020204" pitchFamily="49" charset="0"/>
+                <a:latin typeface="Aptos" panose="020B0004020202020204" pitchFamily="34" charset="0"/>
               </a:rPr>
               <a:t>        "value": 54,</a:t>
             </a:r>
@@ -14905,7 +14117,7 @@
             <a:r>
               <a:rPr lang="en-GB" sz="1000" b="0" dirty="0">
                 <a:effectLst/>
-                <a:latin typeface="Menlo" panose="020B0609030804020204" pitchFamily="49" charset="0"/>
+                <a:latin typeface="Aptos" panose="020B0004020202020204" pitchFamily="34" charset="0"/>
               </a:rPr>
               <a:t>        "confidence": 3</a:t>
             </a:r>
@@ -14914,7 +14126,7 @@
             <a:r>
               <a:rPr lang="en-GB" sz="1000" b="0" dirty="0">
                 <a:effectLst/>
-                <a:latin typeface="Menlo" panose="020B0609030804020204" pitchFamily="49" charset="0"/>
+                <a:latin typeface="Aptos" panose="020B0004020202020204" pitchFamily="34" charset="0"/>
               </a:rPr>
               <a:t>    },</a:t>
             </a:r>
@@ -14923,7 +14135,7 @@
             <a:r>
               <a:rPr lang="en-GB" sz="1000" b="0" dirty="0">
                 <a:effectLst/>
-                <a:latin typeface="Menlo" panose="020B0609030804020204" pitchFamily="49" charset="0"/>
+                <a:latin typeface="Aptos" panose="020B0004020202020204" pitchFamily="34" charset="0"/>
               </a:rPr>
               <a:t>    {</a:t>
             </a:r>
@@ -14932,7 +14144,7 @@
             <a:r>
               <a:rPr lang="en-GB" sz="1000" b="0" dirty="0">
                 <a:effectLst/>
-                <a:latin typeface="Menlo" panose="020B0609030804020204" pitchFamily="49" charset="0"/>
+                <a:latin typeface="Aptos" panose="020B0004020202020204" pitchFamily="34" charset="0"/>
               </a:rPr>
               <a:t>        "time": "03:10:29",</a:t>
             </a:r>
@@ -14941,7 +14153,7 @@
             <a:r>
               <a:rPr lang="en-GB" sz="1000" b="0" dirty="0">
                 <a:effectLst/>
-                <a:latin typeface="Menlo" panose="020B0609030804020204" pitchFamily="49" charset="0"/>
+                <a:latin typeface="Aptos" panose="020B0004020202020204" pitchFamily="34" charset="0"/>
               </a:rPr>
               <a:t>        "value": 52,</a:t>
             </a:r>
@@ -14950,7 +14162,7 @@
             <a:r>
               <a:rPr lang="en-GB" sz="1000" b="0" dirty="0">
                 <a:effectLst/>
-                <a:latin typeface="Menlo" panose="020B0609030804020204" pitchFamily="49" charset="0"/>
+                <a:latin typeface="Aptos" panose="020B0004020202020204" pitchFamily="34" charset="0"/>
               </a:rPr>
               <a:t>        "confidence": 3</a:t>
             </a:r>
@@ -14959,26 +14171,26 @@
             <a:r>
               <a:rPr lang="en-GB" sz="1000" b="0" dirty="0">
                 <a:effectLst/>
-                <a:latin typeface="Menlo" panose="020B0609030804020204" pitchFamily="49" charset="0"/>
+                <a:latin typeface="Aptos" panose="020B0004020202020204" pitchFamily="34" charset="0"/>
               </a:rPr>
               <a:t>    },</a:t>
             </a:r>
             <a:br>
               <a:rPr lang="en-GB" sz="1000" b="0" dirty="0">
                 <a:effectLst/>
-                <a:latin typeface="Menlo" panose="020B0609030804020204" pitchFamily="49" charset="0"/>
+                <a:latin typeface="Aptos" panose="020B0004020202020204" pitchFamily="34" charset="0"/>
               </a:rPr>
             </a:br>
             <a:r>
               <a:rPr lang="en-GB" sz="1000" b="0" dirty="0">
                 <a:effectLst/>
-                <a:latin typeface="Menlo" panose="020B0609030804020204" pitchFamily="49" charset="0"/>
+                <a:latin typeface="Aptos" panose="020B0004020202020204" pitchFamily="34" charset="0"/>
               </a:rPr>
               <a:t>    </a:t>
             </a:r>
             <a:r>
               <a:rPr lang="en-GB" sz="1000" dirty="0">
-                <a:latin typeface="Menlo" panose="020B0609030804020204" pitchFamily="49" charset="0"/>
+                <a:latin typeface="Aptos" panose="020B0004020202020204" pitchFamily="34" charset="0"/>
               </a:rPr>
               <a:t>...</a:t>
             </a:r>
@@ -14987,7 +14199,7 @@
             <a:r>
               <a:rPr lang="en-GB" sz="1000" b="0" dirty="0">
                 <a:effectLst/>
-                <a:latin typeface="Menlo" panose="020B0609030804020204" pitchFamily="49" charset="0"/>
+                <a:latin typeface="Aptos" panose="020B0004020202020204" pitchFamily="34" charset="0"/>
               </a:rPr>
               <a:t>]</a:t>
             </a:r>
@@ -15337,7 +14549,9 @@
               <a:buNone/>
             </a:pPr>
             <a:r>
-              <a:rPr lang="en-IT" sz="1400" dirty="0"/>
+              <a:rPr lang="en-IT" sz="1400" dirty="0">
+                <a:latin typeface="Aptos" panose="020B0004020202020204" pitchFamily="34" charset="0"/>
+              </a:rPr>
               <a:t>Your app</a:t>
             </a:r>
           </a:p>
@@ -15600,6 +14814,7 @@
                 <a:solidFill>
                   <a:srgbClr val="C00000"/>
                 </a:solidFill>
+                <a:latin typeface="Aptos" panose="020B0004020202020204" pitchFamily="34" charset="0"/>
               </a:rPr>
               <a:t>https://impact.dei.unipd.it/bwthw/</a:t>
             </a:r>
@@ -15742,7 +14957,7 @@
 </p:sld>
 </file>
 
-<file path=ppt/slides/slide32.xml><?xml version="1.0" encoding="utf-8"?>
+<file path=ppt/slides/slide31.xml><?xml version="1.0" encoding="utf-8"?>
 <p:sld xmlns:a="http://schemas.openxmlformats.org/drawingml/2006/main" xmlns:r="http://schemas.openxmlformats.org/officeDocument/2006/relationships" xmlns:p="http://schemas.openxmlformats.org/presentationml/2006/main">
   <p:cSld>
     <p:spTree>
@@ -15799,7 +15014,7 @@
           <a:p>
             <a:fld id="{31DE2C5B-556E-47B8-A792-024C2FCA4ACC}" type="slidenum">
               <a:rPr lang="en-GB" smtClean="0"/>
-              <a:t>32</a:t>
+              <a:t>31</a:t>
             </a:fld>
             <a:endParaRPr lang="en-GB"/>
           </a:p>
@@ -15944,7 +15159,7 @@
 </p:sld>
 </file>
 
-<file path=ppt/slides/slide33.xml><?xml version="1.0" encoding="utf-8"?>
+<file path=ppt/slides/slide32.xml><?xml version="1.0" encoding="utf-8"?>
 <p:sld xmlns:a="http://schemas.openxmlformats.org/drawingml/2006/main" xmlns:r="http://schemas.openxmlformats.org/officeDocument/2006/relationships" xmlns:p="http://schemas.openxmlformats.org/presentationml/2006/main">
   <p:cSld>
     <p:spTree>
@@ -16001,7 +15216,7 @@
           <a:p>
             <a:fld id="{31DE2C5B-556E-47B8-A792-024C2FCA4ACC}" type="slidenum">
               <a:rPr lang="en-GB" smtClean="0"/>
-              <a:t>33</a:t>
+              <a:t>32</a:t>
             </a:fld>
             <a:endParaRPr lang="en-GB"/>
           </a:p>
@@ -16139,7 +15354,7 @@
 </p:sld>
 </file>
 
-<file path=ppt/slides/slide34.xml><?xml version="1.0" encoding="utf-8"?>
+<file path=ppt/slides/slide33.xml><?xml version="1.0" encoding="utf-8"?>
 <p:sld xmlns:a="http://schemas.openxmlformats.org/drawingml/2006/main" xmlns:r="http://schemas.openxmlformats.org/officeDocument/2006/relationships" xmlns:p="http://schemas.openxmlformats.org/presentationml/2006/main">
   <p:cSld>
     <p:spTree>
@@ -16196,7 +15411,7 @@
           <a:p>
             <a:fld id="{31DE2C5B-556E-47B8-A792-024C2FCA4ACC}" type="slidenum">
               <a:rPr lang="en-GB" smtClean="0"/>
-              <a:t>34</a:t>
+              <a:t>33</a:t>
             </a:fld>
             <a:endParaRPr lang="en-GB"/>
           </a:p>
@@ -16312,7 +15527,7 @@
 </p:sld>
 </file>
 
-<file path=ppt/slides/slide35.xml><?xml version="1.0" encoding="utf-8"?>
+<file path=ppt/slides/slide34.xml><?xml version="1.0" encoding="utf-8"?>
 <p:sld xmlns:a="http://schemas.openxmlformats.org/drawingml/2006/main" xmlns:r="http://schemas.openxmlformats.org/officeDocument/2006/relationships" xmlns:p="http://schemas.openxmlformats.org/presentationml/2006/main">
   <p:cSld>
     <p:spTree>
@@ -16369,7 +15584,7 @@
           <a:p>
             <a:fld id="{31DE2C5B-556E-47B8-A792-024C2FCA4ACC}" type="slidenum">
               <a:rPr lang="en-GB" smtClean="0"/>
-              <a:t>35</a:t>
+              <a:t>34</a:t>
             </a:fld>
             <a:endParaRPr lang="en-GB"/>
           </a:p>
@@ -16486,7 +15701,7 @@
 </p:sld>
 </file>
 
-<file path=ppt/slides/slide36.xml><?xml version="1.0" encoding="utf-8"?>
+<file path=ppt/slides/slide35.xml><?xml version="1.0" encoding="utf-8"?>
 <p:sld xmlns:a="http://schemas.openxmlformats.org/drawingml/2006/main" xmlns:r="http://schemas.openxmlformats.org/officeDocument/2006/relationships" xmlns:p="http://schemas.openxmlformats.org/presentationml/2006/main">
   <p:cSld>
     <p:spTree>
@@ -16543,7 +15758,7 @@
           <a:p>
             <a:fld id="{31DE2C5B-556E-47B8-A792-024C2FCA4ACC}" type="slidenum">
               <a:rPr lang="en-GB" smtClean="0"/>
-              <a:t>36</a:t>
+              <a:t>35</a:t>
             </a:fld>
             <a:endParaRPr lang="en-GB"/>
           </a:p>
@@ -16654,7 +15869,7 @@
 </p:sld>
 </file>
 
-<file path=ppt/slides/slide37.xml><?xml version="1.0" encoding="utf-8"?>
+<file path=ppt/slides/slide36.xml><?xml version="1.0" encoding="utf-8"?>
 <p:sld xmlns:a="http://schemas.openxmlformats.org/drawingml/2006/main" xmlns:r="http://schemas.openxmlformats.org/officeDocument/2006/relationships" xmlns:p="http://schemas.openxmlformats.org/presentationml/2006/main">
   <p:cSld>
     <p:spTree>
@@ -16711,7 +15926,7 @@
           <a:p>
             <a:fld id="{31DE2C5B-556E-47B8-A792-024C2FCA4ACC}" type="slidenum">
               <a:rPr lang="en-GB" smtClean="0"/>
-              <a:t>37</a:t>
+              <a:t>36</a:t>
             </a:fld>
             <a:endParaRPr lang="en-GB"/>
           </a:p>
@@ -16777,7 +15992,7 @@
         </p:spPr>
         <p:txBody>
           <a:bodyPr>
-            <a:normAutofit fontScale="77500" lnSpcReduction="20000"/>
+            <a:normAutofit fontScale="85000" lnSpcReduction="20000"/>
           </a:bodyPr>
           <a:lstStyle/>
           <a:p>
@@ -16847,7 +16062,7 @@
 </p:sld>
 </file>
 
-<file path=ppt/slides/slide38.xml><?xml version="1.0" encoding="utf-8"?>
+<file path=ppt/slides/slide37.xml><?xml version="1.0" encoding="utf-8"?>
 <p:sld xmlns:a="http://schemas.openxmlformats.org/drawingml/2006/main" xmlns:r="http://schemas.openxmlformats.org/officeDocument/2006/relationships" xmlns:p="http://schemas.openxmlformats.org/presentationml/2006/main">
   <p:cSld>
     <p:spTree>
@@ -17014,7 +16229,7 @@
           <a:p>
             <a:fld id="{31DE2C5B-556E-47B8-A792-024C2FCA4ACC}" type="slidenum">
               <a:rPr lang="en-GB" smtClean="0"/>
-              <a:t>38</a:t>
+              <a:t>37</a:t>
             </a:fld>
             <a:endParaRPr lang="en-GB"/>
           </a:p>
@@ -17144,7 +16359,7 @@
           <a:p>
             <a:r>
               <a:rPr lang="en-US" sz="2000" dirty="0">
-                <a:latin typeface="Palatino Linotype" panose="02040502050505030304" pitchFamily="18" charset="0"/>
+                <a:latin typeface="Aptos" panose="020B0004020202020204" pitchFamily="34" charset="0"/>
               </a:rPr>
               <a:t>Name of the protocol version</a:t>
             </a:r>
@@ -17152,7 +16367,7 @@
           <a:p>
             <a:r>
               <a:rPr lang="en-US" sz="2000" dirty="0">
-                <a:latin typeface="Palatino Linotype" panose="02040502050505030304" pitchFamily="18" charset="0"/>
+                <a:latin typeface="Aptos" panose="020B0004020202020204" pitchFamily="34" charset="0"/>
               </a:rPr>
               <a:t>(e.g. HTTP/1.1)</a:t>
             </a:r>
@@ -17183,7 +16398,7 @@
           <a:p>
             <a:r>
               <a:rPr lang="en-US" sz="2000" dirty="0">
-                <a:latin typeface="Palatino Linotype" panose="02040502050505030304" pitchFamily="18" charset="0"/>
+                <a:latin typeface="Aptos" panose="020B0004020202020204" pitchFamily="34" charset="0"/>
               </a:rPr>
               <a:t>Name of the resource in the server</a:t>
             </a:r>
@@ -17273,7 +16488,7 @@
         <p:spPr>
           <a:xfrm>
             <a:off x="2443302" y="2792109"/>
-            <a:ext cx="4227439" cy="461665"/>
+            <a:ext cx="4061689" cy="461665"/>
           </a:xfrm>
           <a:prstGeom prst="rect">
             <a:avLst/>
@@ -17287,7 +16502,7 @@
           <a:p>
             <a:r>
               <a:rPr lang="en-US" sz="2400" b="1" dirty="0">
-                <a:latin typeface="Palatino Linotype" panose="02040502050505030304" pitchFamily="18" charset="0"/>
+                <a:latin typeface="Aptos" panose="020B0004020202020204" pitchFamily="34" charset="0"/>
               </a:rPr>
               <a:t>METHOD resource protocol </a:t>
             </a:r>
@@ -17318,7 +16533,7 @@
           <a:p>
             <a:r>
               <a:rPr lang="en-US" sz="2000" dirty="0">
-                <a:latin typeface="Palatino Linotype" panose="02040502050505030304" pitchFamily="18" charset="0"/>
+                <a:latin typeface="Aptos" panose="020B0004020202020204" pitchFamily="34" charset="0"/>
               </a:rPr>
               <a:t>Case-sensitive name of the method (type of the request)</a:t>
             </a:r>
@@ -17370,7 +16585,7 @@
         <p:spPr>
           <a:xfrm>
             <a:off x="2438777" y="3754721"/>
-            <a:ext cx="2630848" cy="461665"/>
+            <a:ext cx="2682850" cy="461665"/>
           </a:xfrm>
           <a:prstGeom prst="rect">
             <a:avLst/>
@@ -17384,18 +16599,18 @@
           <a:p>
             <a:r>
               <a:rPr lang="en-US" sz="2400" b="1" dirty="0">
-                <a:latin typeface="Palatino Linotype" panose="02040502050505030304" pitchFamily="18" charset="0"/>
+                <a:latin typeface="Aptos" panose="020B0004020202020204" pitchFamily="34" charset="0"/>
               </a:rPr>
               <a:t>Host: </a:t>
             </a:r>
             <a:r>
               <a:rPr lang="en-US" sz="2400" b="1" dirty="0" err="1">
-                <a:latin typeface="Palatino Linotype" panose="02040502050505030304" pitchFamily="18" charset="0"/>
+                <a:latin typeface="Aptos" panose="020B0004020202020204" pitchFamily="34" charset="0"/>
               </a:rPr>
               <a:t>servername</a:t>
             </a:r>
             <a:endParaRPr lang="en-US" sz="2400" b="1" dirty="0">
-              <a:latin typeface="Palatino Linotype" panose="02040502050505030304" pitchFamily="18" charset="0"/>
+              <a:latin typeface="Aptos" panose="020B0004020202020204" pitchFamily="34" charset="0"/>
             </a:endParaRPr>
           </a:p>
         </p:txBody>
@@ -17427,7 +16642,7 @@
             </a:pPr>
             <a:r>
               <a:rPr lang="en-US" sz="2400" dirty="0">
-                <a:latin typeface="Palatino Linotype" panose="02040502050505030304" pitchFamily="18" charset="0"/>
+                <a:latin typeface="Aptos" panose="020B0004020202020204" pitchFamily="34" charset="0"/>
               </a:rPr>
               <a:t>Request body (payload):</a:t>
             </a:r>
@@ -17445,8 +16660,8 @@
         </p:nvCxnSpPr>
         <p:spPr>
           <a:xfrm flipV="1">
-            <a:off x="5069625" y="3985553"/>
-            <a:ext cx="653214" cy="1"/>
+            <a:off x="5121627" y="3985553"/>
+            <a:ext cx="601212" cy="1"/>
           </a:xfrm>
           <a:prstGeom prst="straightConnector1">
             <a:avLst/>
@@ -17497,7 +16712,7 @@
           <a:p>
             <a:r>
               <a:rPr lang="en-US" sz="2000" dirty="0">
-                <a:latin typeface="Palatino Linotype" panose="02040502050505030304" pitchFamily="18" charset="0"/>
+                <a:latin typeface="Aptos" panose="020B0004020202020204" pitchFamily="34" charset="0"/>
               </a:rPr>
               <a:t>Additional information related to the request.</a:t>
             </a:r>
@@ -17505,7 +16720,7 @@
           <a:p>
             <a:r>
               <a:rPr lang="en-US" sz="2000" dirty="0">
-                <a:latin typeface="Palatino Linotype" panose="02040502050505030304" pitchFamily="18" charset="0"/>
+                <a:latin typeface="Aptos" panose="020B0004020202020204" pitchFamily="34" charset="0"/>
               </a:rPr>
               <a:t>In HTTP/1.1 there must be at least one header containing the DNS name of the server.</a:t>
             </a:r>
@@ -17539,7 +16754,7 @@
             </a:pPr>
             <a:r>
               <a:rPr lang="en-US" sz="2400" dirty="0">
-                <a:latin typeface="Palatino Linotype" panose="02040502050505030304" pitchFamily="18" charset="0"/>
+                <a:latin typeface="Aptos" panose="020B0004020202020204" pitchFamily="34" charset="0"/>
               </a:rPr>
               <a:t>First line:</a:t>
             </a:r>
@@ -17573,7 +16788,7 @@
             </a:pPr>
             <a:r>
               <a:rPr lang="en-US" sz="2400" dirty="0">
-                <a:latin typeface="Palatino Linotype" panose="02040502050505030304" pitchFamily="18" charset="0"/>
+                <a:latin typeface="Aptos" panose="020B0004020202020204" pitchFamily="34" charset="0"/>
               </a:rPr>
               <a:t>Request headers:</a:t>
             </a:r>
@@ -17589,7 +16804,7 @@
         <p:spPr>
           <a:xfrm>
             <a:off x="744663" y="4961796"/>
-            <a:ext cx="2076209" cy="461665"/>
+            <a:ext cx="1925527" cy="461665"/>
           </a:xfrm>
           <a:prstGeom prst="rect">
             <a:avLst/>
@@ -17607,7 +16822,7 @@
             </a:pPr>
             <a:r>
               <a:rPr lang="en-US" sz="2400" dirty="0">
-                <a:latin typeface="Palatino Linotype" panose="02040502050505030304" pitchFamily="18" charset="0"/>
+                <a:latin typeface="Aptos" panose="020B0004020202020204" pitchFamily="34" charset="0"/>
               </a:rPr>
               <a:t>Empty line</a:t>
             </a:r>
@@ -17637,7 +16852,7 @@
           <a:p>
             <a:r>
               <a:rPr lang="en-US" sz="2400" b="1" dirty="0">
-                <a:latin typeface="Palatino Linotype" panose="02040502050505030304" pitchFamily="18" charset="0"/>
+                <a:latin typeface="Aptos" panose="020B0004020202020204" pitchFamily="34" charset="0"/>
               </a:rPr>
               <a:t>Optional message body</a:t>
             </a:r>
@@ -17667,7 +16882,7 @@
           <a:p>
             <a:r>
               <a:rPr lang="en-US" sz="2400" b="1" dirty="0">
-                <a:latin typeface="Palatino Linotype" panose="02040502050505030304" pitchFamily="18" charset="0"/>
+                <a:latin typeface="Aptos" panose="020B0004020202020204" pitchFamily="34" charset="0"/>
               </a:rPr>
               <a:t>Other optional headers </a:t>
             </a:r>
@@ -17834,7 +17049,7 @@
           <p:nvPr>
             <p:extLst>
               <p:ext uri="{D42A27DB-BD31-4B8C-83A1-F6EECF244321}">
-                <p14:modId xmlns:p14="http://schemas.microsoft.com/office/powerpoint/2010/main" val="695410915"/>
+                <p14:modId xmlns:p14="http://schemas.microsoft.com/office/powerpoint/2010/main" val="2777693925"/>
               </p:ext>
             </p:extLst>
           </p:nvPr>
@@ -17874,7 +17089,7 @@
                       <a:pPr algn="ctr"/>
                       <a:r>
                         <a:rPr lang="en-US" sz="2000" noProof="0" dirty="0">
-                          <a:latin typeface="Palatino Linotype" panose="02040502050505030304" pitchFamily="18" charset="0"/>
+                          <a:latin typeface="Aptos" panose="020B0004020202020204" pitchFamily="34" charset="0"/>
                         </a:rPr>
                         <a:t>Method</a:t>
                       </a:r>
@@ -17890,7 +17105,7 @@
                       <a:pPr algn="ctr"/>
                       <a:r>
                         <a:rPr lang="en-US" sz="2000" noProof="0" dirty="0">
-                          <a:latin typeface="Palatino Linotype" panose="02040502050505030304" pitchFamily="18" charset="0"/>
+                          <a:latin typeface="Aptos" panose="020B0004020202020204" pitchFamily="34" charset="0"/>
                         </a:rPr>
                         <a:t>Desired action</a:t>
                       </a:r>
@@ -17912,7 +17127,7 @@
                     <a:p>
                       <a:r>
                         <a:rPr lang="en-US" sz="2000" b="1" noProof="0" dirty="0">
-                          <a:latin typeface="Palatino Linotype" panose="02040502050505030304" pitchFamily="18" charset="0"/>
+                          <a:latin typeface="Aptos" panose="020B0004020202020204" pitchFamily="34" charset="0"/>
                         </a:rPr>
                         <a:t>GET</a:t>
                       </a:r>
@@ -17927,7 +17142,7 @@
                     <a:p>
                       <a:r>
                         <a:rPr lang="en-US" sz="2000" noProof="0" dirty="0">
-                          <a:latin typeface="Palatino Linotype" panose="02040502050505030304" pitchFamily="18" charset="0"/>
+                          <a:latin typeface="Aptos" panose="020B0004020202020204" pitchFamily="34" charset="0"/>
                         </a:rPr>
                         <a:t>Retrieves a resource</a:t>
                       </a:r>
@@ -17949,7 +17164,7 @@
                     <a:p>
                       <a:r>
                         <a:rPr lang="en-US" sz="2000" b="1" noProof="0" dirty="0">
-                          <a:latin typeface="Palatino Linotype" panose="02040502050505030304" pitchFamily="18" charset="0"/>
+                          <a:latin typeface="Aptos" panose="020B0004020202020204" pitchFamily="34" charset="0"/>
                         </a:rPr>
                         <a:t>HEAD</a:t>
                       </a:r>
@@ -17964,7 +17179,7 @@
                     <a:p>
                       <a:r>
                         <a:rPr lang="en-US" sz="2000" noProof="0" dirty="0">
-                          <a:latin typeface="Palatino Linotype" panose="02040502050505030304" pitchFamily="18" charset="0"/>
+                          <a:latin typeface="Aptos" panose="020B0004020202020204" pitchFamily="34" charset="0"/>
                         </a:rPr>
                         <a:t>Retrieves a resource header</a:t>
                       </a:r>
@@ -17986,7 +17201,7 @@
                     <a:p>
                       <a:r>
                         <a:rPr lang="en-US" sz="2000" b="1" noProof="0" dirty="0">
-                          <a:latin typeface="Palatino Linotype" panose="02040502050505030304" pitchFamily="18" charset="0"/>
+                          <a:latin typeface="Aptos" panose="020B0004020202020204" pitchFamily="34" charset="0"/>
                         </a:rPr>
                         <a:t>POST</a:t>
                       </a:r>
@@ -18001,7 +17216,7 @@
                     <a:p>
                       <a:r>
                         <a:rPr lang="en-US" sz="2000" noProof="0" dirty="0">
-                          <a:latin typeface="Palatino Linotype" panose="02040502050505030304" pitchFamily="18" charset="0"/>
+                          <a:latin typeface="Aptos" panose="020B0004020202020204" pitchFamily="34" charset="0"/>
                         </a:rPr>
                         <a:t>Submits an entity to the specified resource (causes a change of server state)</a:t>
                       </a:r>
@@ -18023,7 +17238,7 @@
                     <a:p>
                       <a:r>
                         <a:rPr lang="en-US" sz="2000" b="1" noProof="0" dirty="0">
-                          <a:latin typeface="Palatino Linotype" panose="02040502050505030304" pitchFamily="18" charset="0"/>
+                          <a:latin typeface="Aptos" panose="020B0004020202020204" pitchFamily="34" charset="0"/>
                         </a:rPr>
                         <a:t>PUT</a:t>
                       </a:r>
@@ -18038,12 +17253,12 @@
                     <a:p>
                       <a:r>
                         <a:rPr lang="en-US" sz="2000" baseline="0" noProof="0" dirty="0">
-                          <a:latin typeface="Palatino Linotype" panose="02040502050505030304" pitchFamily="18" charset="0"/>
+                          <a:latin typeface="Aptos" panose="020B0004020202020204" pitchFamily="34" charset="0"/>
                         </a:rPr>
                         <a:t>Replaces all current representations of the target resource with the request payload.</a:t>
                       </a:r>
                       <a:endParaRPr lang="en-US" sz="2000" noProof="0" dirty="0">
-                        <a:latin typeface="Palatino Linotype" panose="02040502050505030304" pitchFamily="18" charset="0"/>
+                        <a:latin typeface="Aptos" panose="020B0004020202020204" pitchFamily="34" charset="0"/>
                       </a:endParaRPr>
                     </a:p>
                   </a:txBody>
@@ -18063,7 +17278,7 @@
                     <a:p>
                       <a:r>
                         <a:rPr lang="en-US" sz="2000" b="1" noProof="0" dirty="0">
-                          <a:latin typeface="Palatino Linotype" panose="02040502050505030304" pitchFamily="18" charset="0"/>
+                          <a:latin typeface="Aptos" panose="020B0004020202020204" pitchFamily="34" charset="0"/>
                         </a:rPr>
                         <a:t>DELETE</a:t>
                       </a:r>
@@ -18078,7 +17293,7 @@
                     <a:p>
                       <a:r>
                         <a:rPr lang="en-US" sz="2000" noProof="0" dirty="0">
-                          <a:latin typeface="Palatino Linotype" panose="02040502050505030304" pitchFamily="18" charset="0"/>
+                          <a:latin typeface="Aptos" panose="020B0004020202020204" pitchFamily="34" charset="0"/>
                         </a:rPr>
                         <a:t>Deletes a resource</a:t>
                       </a:r>
@@ -18100,7 +17315,7 @@
                     <a:p>
                       <a:r>
                         <a:rPr lang="en-US" sz="2000" b="1" noProof="0" dirty="0">
-                          <a:latin typeface="Palatino Linotype" panose="02040502050505030304" pitchFamily="18" charset="0"/>
+                          <a:latin typeface="Aptos" panose="020B0004020202020204" pitchFamily="34" charset="0"/>
                         </a:rPr>
                         <a:t>TRACE</a:t>
                       </a:r>
@@ -18115,18 +17330,18 @@
                     <a:p>
                       <a:r>
                         <a:rPr lang="en-US" sz="2000" noProof="0" dirty="0">
-                          <a:latin typeface="Palatino Linotype" panose="02040502050505030304" pitchFamily="18" charset="0"/>
+                          <a:latin typeface="Aptos" panose="020B0004020202020204" pitchFamily="34" charset="0"/>
                         </a:rPr>
                         <a:t>Echoes the incoming</a:t>
                       </a:r>
                       <a:r>
                         <a:rPr lang="en-US" sz="2000" baseline="0" noProof="0" dirty="0">
-                          <a:latin typeface="Palatino Linotype" panose="02040502050505030304" pitchFamily="18" charset="0"/>
+                          <a:latin typeface="Aptos" panose="020B0004020202020204" pitchFamily="34" charset="0"/>
                         </a:rPr>
                         <a:t> request</a:t>
                       </a:r>
                       <a:endParaRPr lang="en-US" sz="2000" noProof="0" dirty="0">
-                        <a:latin typeface="Palatino Linotype" panose="02040502050505030304" pitchFamily="18" charset="0"/>
+                        <a:latin typeface="Aptos" panose="020B0004020202020204" pitchFamily="34" charset="0"/>
                       </a:endParaRPr>
                     </a:p>
                   </a:txBody>
@@ -18146,7 +17361,7 @@
                     <a:p>
                       <a:r>
                         <a:rPr lang="en-US" sz="2000" b="1" noProof="0" dirty="0">
-                          <a:latin typeface="Palatino Linotype" panose="02040502050505030304" pitchFamily="18" charset="0"/>
+                          <a:latin typeface="Aptos" panose="020B0004020202020204" pitchFamily="34" charset="0"/>
                         </a:rPr>
                         <a:t>CONNECT</a:t>
                       </a:r>
@@ -18161,7 +17376,7 @@
                     <a:p>
                       <a:r>
                         <a:rPr lang="en-US" sz="2000" noProof="0" dirty="0">
-                          <a:latin typeface="Palatino Linotype" panose="02040502050505030304" pitchFamily="18" charset="0"/>
+                          <a:latin typeface="Aptos" panose="020B0004020202020204" pitchFamily="34" charset="0"/>
                         </a:rPr>
                         <a:t>Establishes a tunnel to the server identified by the target resource</a:t>
                       </a:r>
@@ -18183,7 +17398,7 @@
                     <a:p>
                       <a:r>
                         <a:rPr lang="en-US" sz="2000" b="1" noProof="0" dirty="0">
-                          <a:latin typeface="Palatino Linotype" panose="02040502050505030304" pitchFamily="18" charset="0"/>
+                          <a:latin typeface="Aptos" panose="020B0004020202020204" pitchFamily="34" charset="0"/>
                         </a:rPr>
                         <a:t>OPTIONS</a:t>
                       </a:r>
@@ -18198,7 +17413,7 @@
                     <a:p>
                       <a:r>
                         <a:rPr lang="en-US" sz="2000" noProof="0" dirty="0">
-                          <a:latin typeface="Palatino Linotype" panose="02040502050505030304" pitchFamily="18" charset="0"/>
+                          <a:latin typeface="Aptos" panose="020B0004020202020204" pitchFamily="34" charset="0"/>
                         </a:rPr>
                         <a:t>Describes the communication option for a resource</a:t>
                       </a:r>
@@ -18220,7 +17435,7 @@
                     <a:p>
                       <a:r>
                         <a:rPr lang="en-US" sz="2000" b="1" noProof="0" dirty="0">
-                          <a:latin typeface="Palatino Linotype" panose="02040502050505030304" pitchFamily="18" charset="0"/>
+                          <a:latin typeface="Aptos" panose="020B0004020202020204" pitchFamily="34" charset="0"/>
                         </a:rPr>
                         <a:t>PATCH</a:t>
                       </a:r>
@@ -18235,7 +17450,7 @@
                     <a:p>
                       <a:r>
                         <a:rPr lang="en-US" sz="2000" noProof="0" dirty="0">
-                          <a:latin typeface="Palatino Linotype" panose="02040502050505030304" pitchFamily="18" charset="0"/>
+                          <a:latin typeface="Aptos" panose="020B0004020202020204" pitchFamily="34" charset="0"/>
                         </a:rPr>
                         <a:t>Applies partial modifications to a resource</a:t>
                       </a:r>
@@ -18358,7 +17573,7 @@
         <p:spPr/>
         <p:txBody>
           <a:bodyPr>
-            <a:normAutofit lnSpcReduction="10000"/>
+            <a:normAutofit/>
           </a:bodyPr>
           <a:lstStyle/>
           <a:p>
@@ -18375,64 +17590,13 @@
           <a:p>
             <a:r>
               <a:rPr lang="en-US" i="1" dirty="0"/>
-              <a:t>User-Agent</a:t>
-            </a:r>
-            <a:r>
-              <a:rPr lang="en-US" dirty="0"/>
-              <a:t>: it allows the client to inform the server about the user agent making the request, e.g., the browser implementation</a:t>
-            </a:r>
-          </a:p>
-          <a:p>
-            <a:r>
-              <a:rPr lang="en-US" i="1" dirty="0"/>
-              <a:t>Accept</a:t>
-            </a:r>
-            <a:r>
-              <a:rPr lang="en-US" dirty="0"/>
-              <a:t>: it allows to tell the server what the client is willing to accept </a:t>
-            </a:r>
-          </a:p>
-          <a:p>
-            <a:r>
-              <a:rPr lang="en-US" i="1" dirty="0"/>
-              <a:t>If-Modified-Since</a:t>
-            </a:r>
-            <a:r>
-              <a:rPr lang="en-US" dirty="0"/>
-              <a:t>: time and date of last page modification, it allows the client to check the validity of cached pages (the client stores recently requested contents in a cache memory, similarly to what the server does).</a:t>
-            </a:r>
-          </a:p>
-          <a:p>
-            <a:r>
-              <a:rPr lang="en-US" i="1" dirty="0"/>
               <a:t>Authorization</a:t>
             </a:r>
             <a:r>
               <a:rPr lang="en-US" dirty="0"/>
               <a:t>: needed for pages that are protected. The client might need to demonstrate it has the right to see the requested page.  </a:t>
             </a:r>
-          </a:p>
-          <a:p>
-            <a:r>
-              <a:rPr lang="en-US" i="1" dirty="0"/>
-              <a:t>Cache-Control</a:t>
-            </a:r>
-            <a:r>
-              <a:rPr lang="en-US" dirty="0"/>
-              <a:t>: it </a:t>
-            </a:r>
-            <a:r>
-              <a:rPr lang="en-GB" dirty="0"/>
-              <a:t>specify directives that must be obeyed by all caching mechanisms along the request/response chain (e.g., </a:t>
-            </a:r>
-            <a:r>
-              <a:rPr lang="en-GB" i="1" dirty="0"/>
-              <a:t>no-cache</a:t>
-            </a:r>
-            <a:r>
-              <a:rPr lang="en-GB" dirty="0"/>
-              <a:t>).</a:t>
-            </a:r>
+            <a:endParaRPr lang="en-GB" dirty="0"/>
           </a:p>
           <a:p>
             <a:r>
@@ -18443,13 +17607,6 @@
               <a:rPr lang="en-US" dirty="0"/>
               <a:t>: the type of the content in the request body. </a:t>
             </a:r>
-          </a:p>
-          <a:p>
-            <a:r>
-              <a:rPr lang="it-IT" dirty="0"/>
-              <a:t>…</a:t>
-            </a:r>
-            <a:endParaRPr lang="en-GB" dirty="0"/>
           </a:p>
         </p:txBody>
       </p:sp>
@@ -18494,6 +17651,265 @@
   <p:cSld>
     <p:spTree>
       <p:nvGrpSpPr>
+        <p:cNvPr id="1" name="">
+          <a:extLst>
+            <a:ext uri="{FF2B5EF4-FFF2-40B4-BE49-F238E27FC236}">
+              <a16:creationId xmlns:a16="http://schemas.microsoft.com/office/drawing/2014/main" id="{654B9156-6FB1-1F52-CBB8-83FA8D64EBDC}"/>
+            </a:ext>
+          </a:extLst>
+        </p:cNvPr>
+        <p:cNvGrpSpPr/>
+        <p:nvPr/>
+      </p:nvGrpSpPr>
+      <p:grpSpPr>
+        <a:xfrm>
+          <a:off x="0" y="0"/>
+          <a:ext cx="0" cy="0"/>
+          <a:chOff x="0" y="0"/>
+          <a:chExt cx="0" cy="0"/>
+        </a:xfrm>
+      </p:grpSpPr>
+      <p:sp>
+        <p:nvSpPr>
+          <p:cNvPr id="2" name="Titolo 1">
+            <a:extLst>
+              <a:ext uri="{FF2B5EF4-FFF2-40B4-BE49-F238E27FC236}">
+                <a16:creationId xmlns:a16="http://schemas.microsoft.com/office/drawing/2014/main" id="{31936708-6A95-7701-39B9-84A0CE15E67C}"/>
+              </a:ext>
+            </a:extLst>
+          </p:cNvPr>
+          <p:cNvSpPr>
+            <a:spLocks noGrp="1"/>
+          </p:cNvSpPr>
+          <p:nvPr>
+            <p:ph type="title"/>
+          </p:nvPr>
+        </p:nvSpPr>
+        <p:spPr/>
+        <p:txBody>
+          <a:bodyPr/>
+          <a:lstStyle/>
+          <a:p>
+            <a:r>
+              <a:rPr lang="it-IT" dirty="0"/>
+              <a:t>(</a:t>
+            </a:r>
+            <a:r>
+              <a:rPr lang="it-IT" dirty="0" err="1"/>
+              <a:t>Other</a:t>
+            </a:r>
+            <a:r>
+              <a:rPr lang="it-IT" dirty="0"/>
+              <a:t>) </a:t>
+            </a:r>
+            <a:r>
+              <a:rPr lang="it-IT" dirty="0" err="1"/>
+              <a:t>Examples</a:t>
+            </a:r>
+            <a:r>
+              <a:rPr lang="it-IT" dirty="0"/>
+              <a:t> of </a:t>
+            </a:r>
+            <a:r>
+              <a:rPr lang="it-IT" dirty="0" err="1"/>
+              <a:t>request</a:t>
+            </a:r>
+            <a:r>
+              <a:rPr lang="it-IT" dirty="0"/>
+              <a:t> </a:t>
+            </a:r>
+            <a:r>
+              <a:rPr lang="it-IT" dirty="0" err="1"/>
+              <a:t>headers</a:t>
+            </a:r>
+            <a:endParaRPr lang="en-GB" dirty="0"/>
+          </a:p>
+        </p:txBody>
+      </p:sp>
+      <p:sp>
+        <p:nvSpPr>
+          <p:cNvPr id="3" name="Segnaposto contenuto 2">
+            <a:extLst>
+              <a:ext uri="{FF2B5EF4-FFF2-40B4-BE49-F238E27FC236}">
+                <a16:creationId xmlns:a16="http://schemas.microsoft.com/office/drawing/2014/main" id="{069EC828-48A7-0C03-E6D2-D08645948388}"/>
+              </a:ext>
+            </a:extLst>
+          </p:cNvPr>
+          <p:cNvSpPr>
+            <a:spLocks noGrp="1"/>
+          </p:cNvSpPr>
+          <p:nvPr>
+            <p:ph idx="1"/>
+          </p:nvPr>
+        </p:nvSpPr>
+        <p:spPr/>
+        <p:txBody>
+          <a:bodyPr>
+            <a:normAutofit/>
+          </a:bodyPr>
+          <a:lstStyle/>
+          <a:p>
+            <a:r>
+              <a:rPr lang="en-US" i="1" dirty="0"/>
+              <a:t>User-Agent</a:t>
+            </a:r>
+            <a:r>
+              <a:rPr lang="en-US" dirty="0"/>
+              <a:t>: it allows the client to inform the server about the user agent making the request, e.g., the browser implementation</a:t>
+            </a:r>
+          </a:p>
+          <a:p>
+            <a:r>
+              <a:rPr lang="en-US" i="1" dirty="0"/>
+              <a:t>Accept</a:t>
+            </a:r>
+            <a:r>
+              <a:rPr lang="en-US" dirty="0"/>
+              <a:t>: it allows to tell the server what the client is willing to accept </a:t>
+            </a:r>
+          </a:p>
+          <a:p>
+            <a:r>
+              <a:rPr lang="en-US" i="1" dirty="0"/>
+              <a:t>If-Modified-Since</a:t>
+            </a:r>
+            <a:r>
+              <a:rPr lang="en-US" dirty="0"/>
+              <a:t>: time and date of last page modification, it allows the client to check the validity of cached pages (the client stores recently requested contents in a cache memory, similarly to what the server does). </a:t>
+            </a:r>
+          </a:p>
+          <a:p>
+            <a:r>
+              <a:rPr lang="en-US" i="1" dirty="0"/>
+              <a:t>Cache-Control</a:t>
+            </a:r>
+            <a:r>
+              <a:rPr lang="en-US" dirty="0"/>
+              <a:t>: it </a:t>
+            </a:r>
+            <a:r>
+              <a:rPr lang="en-GB" dirty="0"/>
+              <a:t>specify directives that must be obeyed by all caching mechanisms along the request/response chain (e.g., </a:t>
+            </a:r>
+            <a:r>
+              <a:rPr lang="en-GB" i="1" dirty="0"/>
+              <a:t>no-cache</a:t>
+            </a:r>
+            <a:r>
+              <a:rPr lang="en-GB" dirty="0"/>
+              <a:t>).</a:t>
+            </a:r>
+          </a:p>
+          <a:p>
+            <a:r>
+              <a:rPr lang="it-IT" dirty="0"/>
+              <a:t>…</a:t>
+            </a:r>
+            <a:endParaRPr lang="en-GB" dirty="0"/>
+          </a:p>
+        </p:txBody>
+      </p:sp>
+      <p:sp>
+        <p:nvSpPr>
+          <p:cNvPr id="4" name="Segnaposto numero diapositiva 3">
+            <a:extLst>
+              <a:ext uri="{FF2B5EF4-FFF2-40B4-BE49-F238E27FC236}">
+                <a16:creationId xmlns:a16="http://schemas.microsoft.com/office/drawing/2014/main" id="{A2908505-AC11-5F4B-AB15-1B0107308342}"/>
+              </a:ext>
+            </a:extLst>
+          </p:cNvPr>
+          <p:cNvSpPr>
+            <a:spLocks noGrp="1"/>
+          </p:cNvSpPr>
+          <p:nvPr>
+            <p:ph type="sldNum" sz="quarter" idx="12"/>
+          </p:nvPr>
+        </p:nvSpPr>
+        <p:spPr/>
+        <p:txBody>
+          <a:bodyPr/>
+          <a:lstStyle/>
+          <a:p>
+            <a:fld id="{31DE2C5B-556E-47B8-A792-024C2FCA4ACC}" type="slidenum">
+              <a:rPr lang="en-GB" smtClean="0"/>
+              <a:t>7</a:t>
+            </a:fld>
+            <a:endParaRPr lang="en-GB"/>
+          </a:p>
+        </p:txBody>
+      </p:sp>
+      <p:sp>
+        <p:nvSpPr>
+          <p:cNvPr id="5" name="Rectangle 4">
+            <a:extLst>
+              <a:ext uri="{FF2B5EF4-FFF2-40B4-BE49-F238E27FC236}">
+                <a16:creationId xmlns:a16="http://schemas.microsoft.com/office/drawing/2014/main" id="{0439AAAC-1E23-5B95-BB98-4966F81D5677}"/>
+              </a:ext>
+            </a:extLst>
+          </p:cNvPr>
+          <p:cNvSpPr/>
+          <p:nvPr/>
+        </p:nvSpPr>
+        <p:spPr>
+          <a:xfrm>
+            <a:off x="9900745" y="325821"/>
+            <a:ext cx="1975945" cy="588579"/>
+          </a:xfrm>
+          <a:prstGeom prst="rect">
+            <a:avLst/>
+          </a:prstGeom>
+        </p:spPr>
+        <p:style>
+          <a:lnRef idx="2">
+            <a:schemeClr val="accent6">
+              <a:shade val="15000"/>
+            </a:schemeClr>
+          </a:lnRef>
+          <a:fillRef idx="1">
+            <a:schemeClr val="accent6"/>
+          </a:fillRef>
+          <a:effectRef idx="0">
+            <a:schemeClr val="accent6"/>
+          </a:effectRef>
+          <a:fontRef idx="minor">
+            <a:schemeClr val="lt1"/>
+          </a:fontRef>
+        </p:style>
+        <p:txBody>
+          <a:bodyPr rtlCol="0" anchor="ctr"/>
+          <a:lstStyle/>
+          <a:p>
+            <a:pPr algn="ctr"/>
+            <a:r>
+              <a:rPr lang="en-US" sz="2000" b="1" dirty="0">
+                <a:solidFill>
+                  <a:schemeClr val="bg1"/>
+                </a:solidFill>
+                <a:latin typeface="Aptos" panose="020B0004020202020204" pitchFamily="34" charset="0"/>
+              </a:rPr>
+              <a:t>BONUS</a:t>
+            </a:r>
+          </a:p>
+        </p:txBody>
+      </p:sp>
+    </p:spTree>
+    <p:extLst>
+      <p:ext uri="{BB962C8B-B14F-4D97-AF65-F5344CB8AC3E}">
+        <p14:creationId xmlns:p14="http://schemas.microsoft.com/office/powerpoint/2010/main" val="3806797876"/>
+      </p:ext>
+    </p:extLst>
+  </p:cSld>
+  <p:clrMapOvr>
+    <a:masterClrMapping/>
+  </p:clrMapOvr>
+</p:sld>
+</file>
+
+<file path=ppt/slides/slide8.xml><?xml version="1.0" encoding="utf-8"?>
+<p:sld xmlns:a="http://schemas.openxmlformats.org/drawingml/2006/main" xmlns:r="http://schemas.openxmlformats.org/officeDocument/2006/relationships" xmlns:p="http://schemas.openxmlformats.org/presentationml/2006/main">
+  <p:cSld>
+    <p:spTree>
+      <p:nvGrpSpPr>
         <p:cNvPr id="1" name=""/>
         <p:cNvGrpSpPr/>
         <p:nvPr/>
@@ -18593,7 +18009,7 @@
             </a:pPr>
             <a:r>
               <a:rPr lang="en-US" sz="2400" dirty="0">
-                <a:latin typeface="Palatino Linotype" panose="02040502050505030304" pitchFamily="18" charset="0"/>
+                <a:latin typeface="Aptos" panose="020B0004020202020204" pitchFamily="34" charset="0"/>
               </a:rPr>
               <a:t>Status line:</a:t>
             </a:r>
@@ -18609,7 +18025,7 @@
         <p:spPr>
           <a:xfrm>
             <a:off x="744662" y="3559435"/>
-            <a:ext cx="3044423" cy="461665"/>
+            <a:ext cx="3081485" cy="461665"/>
           </a:xfrm>
           <a:prstGeom prst="rect">
             <a:avLst/>
@@ -18627,7 +18043,7 @@
             </a:pPr>
             <a:r>
               <a:rPr lang="en-US" sz="2400" dirty="0">
-                <a:latin typeface="Palatino Linotype" panose="02040502050505030304" pitchFamily="18" charset="0"/>
+                <a:latin typeface="Aptos" panose="020B0004020202020204" pitchFamily="34" charset="0"/>
               </a:rPr>
               <a:t>Response headers:</a:t>
             </a:r>
@@ -18661,7 +18077,7 @@
             </a:pPr>
             <a:r>
               <a:rPr lang="en-US" sz="2400" dirty="0">
-                <a:latin typeface="Palatino Linotype" panose="02040502050505030304" pitchFamily="18" charset="0"/>
+                <a:latin typeface="Aptos" panose="020B0004020202020204" pitchFamily="34" charset="0"/>
               </a:rPr>
               <a:t>Request body (payload):</a:t>
             </a:r>
@@ -18677,7 +18093,7 @@
         <p:spPr>
           <a:xfrm>
             <a:off x="744663" y="4961796"/>
-            <a:ext cx="2076209" cy="461665"/>
+            <a:ext cx="1925527" cy="461665"/>
           </a:xfrm>
           <a:prstGeom prst="rect">
             <a:avLst/>
@@ -18695,7 +18111,7 @@
             </a:pPr>
             <a:r>
               <a:rPr lang="en-US" sz="2400" dirty="0">
-                <a:latin typeface="Palatino Linotype" panose="02040502050505030304" pitchFamily="18" charset="0"/>
+                <a:latin typeface="Aptos" panose="020B0004020202020204" pitchFamily="34" charset="0"/>
               </a:rPr>
               <a:t>Empty line</a:t>
             </a:r>
@@ -18725,7 +18141,7 @@
           <a:p>
             <a:r>
               <a:rPr lang="en-US" sz="2400" b="1" dirty="0">
-                <a:latin typeface="Palatino Linotype" panose="02040502050505030304" pitchFamily="18" charset="0"/>
+                <a:latin typeface="Aptos" panose="020B0004020202020204" pitchFamily="34" charset="0"/>
               </a:rPr>
               <a:t>Optional message body</a:t>
             </a:r>
@@ -18755,7 +18171,7 @@
           <a:p>
             <a:r>
               <a:rPr lang="en-US" sz="2400" b="1" dirty="0">
-                <a:latin typeface="Palatino Linotype" panose="02040502050505030304" pitchFamily="18" charset="0"/>
+                <a:latin typeface="Aptos" panose="020B0004020202020204" pitchFamily="34" charset="0"/>
               </a:rPr>
               <a:t>Optional headers</a:t>
             </a:r>
@@ -18771,7 +18187,7 @@
         <p:spPr>
           <a:xfrm>
             <a:off x="1509192" y="2841600"/>
-            <a:ext cx="5141151" cy="461665"/>
+            <a:ext cx="5287153" cy="461665"/>
           </a:xfrm>
           <a:prstGeom prst="rect">
             <a:avLst/>
@@ -18785,30 +18201,30 @@
           <a:p>
             <a:r>
               <a:rPr lang="en-US" sz="2400" b="1" dirty="0">
-                <a:latin typeface="Palatino Linotype" panose="02040502050505030304" pitchFamily="18" charset="0"/>
+                <a:latin typeface="Aptos" panose="020B0004020202020204" pitchFamily="34" charset="0"/>
               </a:rPr>
               <a:t>Protocol </a:t>
             </a:r>
             <a:r>
               <a:rPr lang="en-US" sz="2400" b="1" dirty="0" err="1">
-                <a:latin typeface="Palatino Linotype" panose="02040502050505030304" pitchFamily="18" charset="0"/>
+                <a:latin typeface="Aptos" panose="020B0004020202020204" pitchFamily="34" charset="0"/>
               </a:rPr>
               <a:t>status_code</a:t>
             </a:r>
             <a:r>
               <a:rPr lang="en-US" sz="2400" b="1" dirty="0">
-                <a:latin typeface="Palatino Linotype" panose="02040502050505030304" pitchFamily="18" charset="0"/>
+                <a:latin typeface="Aptos" panose="020B0004020202020204" pitchFamily="34" charset="0"/>
               </a:rPr>
               <a:t> </a:t>
             </a:r>
             <a:r>
               <a:rPr lang="en-US" sz="2400" b="1" dirty="0" err="1">
-                <a:latin typeface="Palatino Linotype" panose="02040502050505030304" pitchFamily="18" charset="0"/>
+                <a:latin typeface="Aptos" panose="020B0004020202020204" pitchFamily="34" charset="0"/>
               </a:rPr>
               <a:t>reason_phrase</a:t>
             </a:r>
             <a:endParaRPr lang="en-US" sz="2400" b="1" dirty="0">
-              <a:latin typeface="Palatino Linotype" panose="02040502050505030304" pitchFamily="18" charset="0"/>
+              <a:latin typeface="Aptos" panose="020B0004020202020204" pitchFamily="34" charset="0"/>
             </a:endParaRPr>
           </a:p>
         </p:txBody>
@@ -18839,12 +18255,12 @@
                 <a:solidFill>
                   <a:srgbClr val="202122"/>
                 </a:solidFill>
-                <a:latin typeface="Palatino Linotype" panose="02040502050505030304" pitchFamily="18" charset="0"/>
+                <a:latin typeface="Aptos" panose="020B0004020202020204" pitchFamily="34" charset="0"/>
               </a:rPr>
               <a:t>Three-digit integer code representing the result of the server's attempt to understand and satisfy the request.</a:t>
             </a:r>
             <a:endParaRPr lang="en-GB" dirty="0">
-              <a:latin typeface="Palatino Linotype" panose="02040502050505030304" pitchFamily="18" charset="0"/>
+              <a:latin typeface="Aptos" panose="020B0004020202020204" pitchFamily="34" charset="0"/>
             </a:endParaRPr>
           </a:p>
         </p:txBody>
@@ -18947,7 +18363,7 @@
                 <a:solidFill>
                   <a:srgbClr val="202122"/>
                 </a:solidFill>
-                <a:latin typeface="Palatino Linotype" panose="02040502050505030304" pitchFamily="18" charset="0"/>
+                <a:latin typeface="Aptos" panose="020B0004020202020204" pitchFamily="34" charset="0"/>
               </a:rPr>
               <a:t>Optional. If the status code indicated a problem, the </a:t>
             </a:r>
@@ -18956,7 +18372,7 @@
                 <a:solidFill>
                   <a:srgbClr val="202122"/>
                 </a:solidFill>
-                <a:latin typeface="Palatino Linotype" panose="02040502050505030304" pitchFamily="18" charset="0"/>
+                <a:latin typeface="Aptos" panose="020B0004020202020204" pitchFamily="34" charset="0"/>
               </a:rPr>
               <a:t>reason phrase</a:t>
             </a:r>
@@ -18965,12 +18381,12 @@
                 <a:solidFill>
                   <a:srgbClr val="202122"/>
                 </a:solidFill>
-                <a:latin typeface="Palatino Linotype" panose="02040502050505030304" pitchFamily="18" charset="0"/>
+                <a:latin typeface="Aptos" panose="020B0004020202020204" pitchFamily="34" charset="0"/>
               </a:rPr>
               <a:t> might displayed the further information about the nature of the problem. </a:t>
             </a:r>
             <a:endParaRPr lang="en-GB" dirty="0">
-              <a:latin typeface="Palatino Linotype" panose="02040502050505030304" pitchFamily="18" charset="0"/>
+              <a:latin typeface="Aptos" panose="020B0004020202020204" pitchFamily="34" charset="0"/>
             </a:endParaRPr>
           </a:p>
         </p:txBody>
@@ -19329,7 +18745,7 @@
           <a:p>
             <a:fld id="{31DE2C5B-556E-47B8-A792-024C2FCA4ACC}" type="slidenum">
               <a:rPr lang="en-GB" smtClean="0"/>
-              <a:t>7</a:t>
+              <a:t>8</a:t>
             </a:fld>
             <a:endParaRPr lang="en-GB"/>
           </a:p>
@@ -19339,247 +18755,6 @@
     <p:extLst>
       <p:ext uri="{BB962C8B-B14F-4D97-AF65-F5344CB8AC3E}">
         <p14:creationId xmlns:p14="http://schemas.microsoft.com/office/powerpoint/2010/main" val="556762351"/>
-      </p:ext>
-    </p:extLst>
-  </p:cSld>
-  <p:clrMapOvr>
-    <a:masterClrMapping/>
-  </p:clrMapOvr>
-</p:sld>
-</file>
-
-<file path=ppt/slides/slide8.xml><?xml version="1.0" encoding="utf-8"?>
-<p:sld xmlns:a="http://schemas.openxmlformats.org/drawingml/2006/main" xmlns:r="http://schemas.openxmlformats.org/officeDocument/2006/relationships" xmlns:p="http://schemas.openxmlformats.org/presentationml/2006/main">
-  <p:cSld>
-    <p:spTree>
-      <p:nvGrpSpPr>
-        <p:cNvPr id="1" name=""/>
-        <p:cNvGrpSpPr/>
-        <p:nvPr/>
-      </p:nvGrpSpPr>
-      <p:grpSpPr>
-        <a:xfrm>
-          <a:off x="0" y="0"/>
-          <a:ext cx="0" cy="0"/>
-          <a:chOff x="0" y="0"/>
-          <a:chExt cx="0" cy="0"/>
-        </a:xfrm>
-      </p:grpSpPr>
-      <p:sp>
-        <p:nvSpPr>
-          <p:cNvPr id="2" name="Titolo 1"/>
-          <p:cNvSpPr>
-            <a:spLocks noGrp="1"/>
-          </p:cNvSpPr>
-          <p:nvPr>
-            <p:ph type="title"/>
-          </p:nvPr>
-        </p:nvSpPr>
-        <p:spPr/>
-        <p:txBody>
-          <a:bodyPr/>
-          <a:lstStyle/>
-          <a:p>
-            <a:r>
-              <a:rPr lang="it-IT" dirty="0" err="1"/>
-              <a:t>Examples</a:t>
-            </a:r>
-            <a:r>
-              <a:rPr lang="it-IT" dirty="0"/>
-              <a:t> of </a:t>
-            </a:r>
-            <a:r>
-              <a:rPr lang="it-IT" dirty="0" err="1"/>
-              <a:t>response</a:t>
-            </a:r>
-            <a:r>
-              <a:rPr lang="it-IT" dirty="0"/>
-              <a:t> </a:t>
-            </a:r>
-            <a:r>
-              <a:rPr lang="it-IT" dirty="0" err="1"/>
-              <a:t>headers</a:t>
-            </a:r>
-            <a:endParaRPr lang="en-GB" dirty="0"/>
-          </a:p>
-        </p:txBody>
-      </p:sp>
-      <p:sp>
-        <p:nvSpPr>
-          <p:cNvPr id="3" name="Segnaposto contenuto 2"/>
-          <p:cNvSpPr>
-            <a:spLocks noGrp="1"/>
-          </p:cNvSpPr>
-          <p:nvPr>
-            <p:ph idx="1"/>
-          </p:nvPr>
-        </p:nvSpPr>
-        <p:spPr/>
-        <p:txBody>
-          <a:bodyPr/>
-          <a:lstStyle/>
-          <a:p>
-            <a:r>
-              <a:rPr lang="en-US" i="1" dirty="0"/>
-              <a:t>Date</a:t>
-            </a:r>
-            <a:r>
-              <a:rPr lang="en-US" dirty="0"/>
-              <a:t>: date and time the message was sent</a:t>
-            </a:r>
-          </a:p>
-          <a:p>
-            <a:r>
-              <a:rPr lang="en-US" i="1" dirty="0"/>
-              <a:t>Content-Language</a:t>
-            </a:r>
-            <a:r>
-              <a:rPr lang="en-US" dirty="0"/>
-              <a:t>: the natural language used in the page</a:t>
-            </a:r>
-          </a:p>
-          <a:p>
-            <a:r>
-              <a:rPr lang="en-US" i="1" dirty="0"/>
-              <a:t>Content-Type</a:t>
-            </a:r>
-            <a:r>
-              <a:rPr lang="en-US" dirty="0"/>
-              <a:t>: the type of the returned content (e.g., HTML, image, plain text, …)</a:t>
-            </a:r>
-          </a:p>
-          <a:p>
-            <a:r>
-              <a:rPr lang="en-US" i="1" dirty="0"/>
-              <a:t>Content-Length</a:t>
-            </a:r>
-            <a:r>
-              <a:rPr lang="en-US" dirty="0"/>
-              <a:t>: the content length in bytes</a:t>
-            </a:r>
-          </a:p>
-          <a:p>
-            <a:r>
-              <a:rPr lang="en-US" i="1" dirty="0"/>
-              <a:t>Last-Modified</a:t>
-            </a:r>
-            <a:r>
-              <a:rPr lang="en-US" dirty="0"/>
-              <a:t>: </a:t>
-            </a:r>
-            <a:r>
-              <a:rPr lang="en-GB" dirty="0"/>
-              <a:t>time and date the page was last changed</a:t>
-            </a:r>
-          </a:p>
-          <a:p>
-            <a:r>
-              <a:rPr lang="en-US" i="1" dirty="0"/>
-              <a:t>Expires</a:t>
-            </a:r>
-            <a:r>
-              <a:rPr lang="en-US" dirty="0"/>
-              <a:t>: </a:t>
-            </a:r>
-            <a:r>
-              <a:rPr lang="en-GB" dirty="0"/>
-              <a:t>Time and date when the page stops being valid</a:t>
-            </a:r>
-          </a:p>
-          <a:p>
-            <a:r>
-              <a:rPr lang="it-IT" i="1" dirty="0" err="1"/>
-              <a:t>ETag</a:t>
-            </a:r>
-            <a:r>
-              <a:rPr lang="it-IT" dirty="0"/>
-              <a:t>: </a:t>
-            </a:r>
-            <a:r>
-              <a:rPr lang="it-IT" dirty="0" err="1"/>
-              <a:t>tag</a:t>
-            </a:r>
-            <a:r>
-              <a:rPr lang="it-IT" dirty="0"/>
-              <a:t> for the </a:t>
-            </a:r>
-            <a:r>
-              <a:rPr lang="it-IT" dirty="0" err="1"/>
-              <a:t>content</a:t>
-            </a:r>
-            <a:r>
-              <a:rPr lang="it-IT" dirty="0"/>
-              <a:t> of the page (</a:t>
-            </a:r>
-            <a:r>
-              <a:rPr lang="it-IT" dirty="0" err="1"/>
-              <a:t>used</a:t>
-            </a:r>
-            <a:r>
-              <a:rPr lang="it-IT" dirty="0"/>
-              <a:t> for </a:t>
-            </a:r>
-            <a:r>
-              <a:rPr lang="it-IT" dirty="0" err="1"/>
-              <a:t>caching</a:t>
-            </a:r>
-            <a:r>
-              <a:rPr lang="it-IT" dirty="0"/>
-              <a:t>)</a:t>
-            </a:r>
-          </a:p>
-          <a:p>
-            <a:pPr algn="just"/>
-            <a:r>
-              <a:rPr lang="it-IT" i="1" dirty="0"/>
-              <a:t>Location</a:t>
-            </a:r>
-            <a:r>
-              <a:rPr lang="it-IT" dirty="0"/>
-              <a:t>: </a:t>
-            </a:r>
-            <a:r>
-              <a:rPr lang="en-GB" dirty="0"/>
-              <a:t>redirect the recipient to a location other than the requested URL for completion of the request or identification of a new resource</a:t>
-            </a:r>
-            <a:endParaRPr lang="it-IT" dirty="0"/>
-          </a:p>
-          <a:p>
-            <a:r>
-              <a:rPr lang="it-IT" dirty="0"/>
-              <a:t>…</a:t>
-            </a:r>
-            <a:endParaRPr lang="en-US" dirty="0"/>
-          </a:p>
-        </p:txBody>
-      </p:sp>
-      <p:sp>
-        <p:nvSpPr>
-          <p:cNvPr id="4" name="Segnaposto numero diapositiva 3"/>
-          <p:cNvSpPr>
-            <a:spLocks noGrp="1"/>
-          </p:cNvSpPr>
-          <p:nvPr>
-            <p:ph type="sldNum" sz="quarter" idx="12"/>
-          </p:nvPr>
-        </p:nvSpPr>
-        <p:spPr/>
-        <p:txBody>
-          <a:bodyPr/>
-          <a:lstStyle/>
-          <a:p>
-            <a:fld id="{31DE2C5B-556E-47B8-A792-024C2FCA4ACC}" type="slidenum">
-              <a:rPr lang="en-GB" smtClean="0"/>
-              <a:t>8</a:t>
-            </a:fld>
-            <a:endParaRPr lang="en-GB"/>
-          </a:p>
-        </p:txBody>
-      </p:sp>
-    </p:spTree>
-    <p:extLst>
-      <p:ext uri="{BB962C8B-B14F-4D97-AF65-F5344CB8AC3E}">
-        <p14:creationId xmlns:p14="http://schemas.microsoft.com/office/powerpoint/2010/main" val="81412953"/>
       </p:ext>
     </p:extLst>
   </p:cSld>
@@ -19622,8 +18797,24 @@
           <a:lstStyle/>
           <a:p>
             <a:r>
+              <a:rPr lang="it-IT" dirty="0" err="1"/>
+              <a:t>Examples</a:t>
+            </a:r>
+            <a:r>
               <a:rPr lang="it-IT" dirty="0"/>
-              <a:t>GET</a:t>
+              <a:t> of </a:t>
+            </a:r>
+            <a:r>
+              <a:rPr lang="it-IT" dirty="0" err="1"/>
+              <a:t>response</a:t>
+            </a:r>
+            <a:r>
+              <a:rPr lang="it-IT" dirty="0"/>
+              <a:t> </a:t>
+            </a:r>
+            <a:r>
+              <a:rPr lang="it-IT" dirty="0" err="1"/>
+              <a:t>headers</a:t>
             </a:r>
             <a:endParaRPr lang="en-GB" dirty="0"/>
           </a:p>
@@ -19639,193 +18830,60 @@
             <p:ph idx="1"/>
           </p:nvPr>
         </p:nvSpPr>
-        <p:spPr>
-          <a:xfrm>
-            <a:off x="428172" y="1361167"/>
-            <a:ext cx="11368314" cy="4954574"/>
-          </a:xfrm>
-        </p:spPr>
-        <p:txBody>
-          <a:bodyPr>
-            <a:normAutofit/>
-          </a:bodyPr>
-          <a:lstStyle/>
-          <a:p>
-            <a:r>
-              <a:rPr lang="en-US" b="1" dirty="0"/>
-              <a:t>GET</a:t>
+        <p:spPr/>
+        <p:txBody>
+          <a:bodyPr/>
+          <a:lstStyle/>
+          <a:p>
+            <a:r>
+              <a:rPr lang="en-US" i="1" dirty="0"/>
+              <a:t>Date</a:t>
+            </a:r>
+            <a:r>
+              <a:rPr lang="en-US" dirty="0"/>
+              <a:t>: date and time the message was sent</a:t>
+            </a:r>
+          </a:p>
+          <a:p>
+            <a:r>
+              <a:rPr lang="en-US" i="1" dirty="0"/>
+              <a:t>Content-Type</a:t>
+            </a:r>
+            <a:r>
+              <a:rPr lang="en-US" dirty="0"/>
+              <a:t>: the type of the returned content (e.g., HTML, image, plain text, …)</a:t>
+            </a:r>
+          </a:p>
+          <a:p>
+            <a:r>
+              <a:rPr lang="en-US" i="1" dirty="0"/>
+              <a:t>Content-Length</a:t>
+            </a:r>
+            <a:r>
+              <a:rPr lang="en-US" dirty="0"/>
+              <a:t>: the content length in bytes</a:t>
+            </a:r>
+          </a:p>
+          <a:p>
+            <a:r>
+              <a:rPr lang="en-US" i="1" dirty="0"/>
+              <a:t>Last-Modified</a:t>
             </a:r>
             <a:r>
               <a:rPr lang="en-US" dirty="0"/>
               <a:t>: </a:t>
             </a:r>
             <a:r>
-              <a:rPr lang="en-US" sz="2400" noProof="0" dirty="0">
-                <a:latin typeface="Palatino Linotype" panose="02040502050505030304" pitchFamily="18" charset="0"/>
-              </a:rPr>
-              <a:t>Retrieves a resource</a:t>
-            </a:r>
-            <a:r>
-              <a:rPr lang="en-US" dirty="0"/>
-              <a:t>.</a:t>
-            </a:r>
-          </a:p>
-          <a:p>
-            <a:pPr marL="0" indent="0">
-              <a:buNone/>
-            </a:pPr>
-            <a:r>
-              <a:rPr lang="en-US" dirty="0"/>
-              <a:t>			GET / HTTP/1.1 </a:t>
-            </a:r>
-          </a:p>
-          <a:p>
-            <a:pPr marL="0" indent="0">
-              <a:buNone/>
-            </a:pPr>
-            <a:r>
-              <a:rPr lang="en-US" dirty="0"/>
-              <a:t>			Host: </a:t>
-            </a:r>
-            <a:r>
-              <a:rPr lang="en-US" dirty="0" err="1"/>
-              <a:t>www.example.com</a:t>
+              <a:rPr lang="en-GB" dirty="0"/>
+              <a:t>time and date the page was last changed</a:t>
+            </a:r>
+          </a:p>
+          <a:p>
+            <a:r>
+              <a:rPr lang="it-IT" dirty="0"/>
+              <a:t>…</a:t>
             </a:r>
             <a:endParaRPr lang="en-US" dirty="0"/>
-          </a:p>
-          <a:p>
-            <a:pPr marL="0" indent="0">
-              <a:buNone/>
-            </a:pPr>
-            <a:r>
-              <a:rPr lang="en-US" dirty="0"/>
-              <a:t>			Accept-Language: </a:t>
-            </a:r>
-            <a:r>
-              <a:rPr lang="en-US" dirty="0" err="1"/>
-              <a:t>en</a:t>
-            </a:r>
-            <a:endParaRPr lang="en-US" dirty="0"/>
-          </a:p>
-        </p:txBody>
-      </p:sp>
-      <p:pic>
-        <p:nvPicPr>
-          <p:cNvPr id="14" name="Immagine 13"/>
-          <p:cNvPicPr>
-            <a:picLocks noChangeAspect="1"/>
-          </p:cNvPicPr>
-          <p:nvPr/>
-        </p:nvPicPr>
-        <p:blipFill>
-          <a:blip r:embed="rId3">
-            <a:extLst>
-              <a:ext uri="{28A0092B-C50C-407E-A947-70E740481C1C}">
-                <a14:useLocalDpi xmlns:a14="http://schemas.microsoft.com/office/drawing/2010/main" val="0"/>
-              </a:ext>
-            </a:extLst>
-          </a:blip>
-          <a:stretch>
-            <a:fillRect/>
-          </a:stretch>
-        </p:blipFill>
-        <p:spPr>
-          <a:xfrm>
-            <a:off x="7186152" y="3415958"/>
-            <a:ext cx="4549534" cy="3238781"/>
-          </a:xfrm>
-          <a:prstGeom prst="rect">
-            <a:avLst/>
-          </a:prstGeom>
-        </p:spPr>
-      </p:pic>
-      <p:pic>
-        <p:nvPicPr>
-          <p:cNvPr id="15" name="Immagine 14"/>
-          <p:cNvPicPr>
-            <a:picLocks noChangeAspect="1"/>
-          </p:cNvPicPr>
-          <p:nvPr/>
-        </p:nvPicPr>
-        <p:blipFill>
-          <a:blip r:embed="rId4">
-            <a:extLst>
-              <a:ext uri="{28A0092B-C50C-407E-A947-70E740481C1C}">
-                <a14:useLocalDpi xmlns:a14="http://schemas.microsoft.com/office/drawing/2010/main" val="0"/>
-              </a:ext>
-            </a:extLst>
-          </a:blip>
-          <a:stretch>
-            <a:fillRect/>
-          </a:stretch>
-        </p:blipFill>
-        <p:spPr>
-          <a:xfrm>
-            <a:off x="229698" y="4093722"/>
-            <a:ext cx="6535678" cy="1208217"/>
-          </a:xfrm>
-          <a:prstGeom prst="rect">
-            <a:avLst/>
-          </a:prstGeom>
-        </p:spPr>
-      </p:pic>
-      <p:sp>
-        <p:nvSpPr>
-          <p:cNvPr id="16" name="Rettangolo 15"/>
-          <p:cNvSpPr/>
-          <p:nvPr/>
-        </p:nvSpPr>
-        <p:spPr>
-          <a:xfrm>
-            <a:off x="155313" y="3693612"/>
-            <a:ext cx="2247731" cy="400110"/>
-          </a:xfrm>
-          <a:prstGeom prst="rect">
-            <a:avLst/>
-          </a:prstGeom>
-        </p:spPr>
-        <p:txBody>
-          <a:bodyPr wrap="none">
-            <a:spAutoFit/>
-          </a:bodyPr>
-          <a:lstStyle/>
-          <a:p>
-            <a:r>
-              <a:rPr lang="en-US" sz="2000" b="1" dirty="0">
-                <a:latin typeface="Palatino Linotype" panose="02040502050505030304" pitchFamily="18" charset="0"/>
-              </a:rPr>
-              <a:t>Request example:</a:t>
-            </a:r>
-          </a:p>
-        </p:txBody>
-      </p:sp>
-      <p:sp>
-        <p:nvSpPr>
-          <p:cNvPr id="17" name="Rettangolo 16"/>
-          <p:cNvSpPr/>
-          <p:nvPr/>
-        </p:nvSpPr>
-        <p:spPr>
-          <a:xfrm>
-            <a:off x="7041667" y="2975239"/>
-            <a:ext cx="2419252" cy="400110"/>
-          </a:xfrm>
-          <a:prstGeom prst="rect">
-            <a:avLst/>
-          </a:prstGeom>
-        </p:spPr>
-        <p:txBody>
-          <a:bodyPr wrap="none">
-            <a:spAutoFit/>
-          </a:bodyPr>
-          <a:lstStyle/>
-          <a:p>
-            <a:r>
-              <a:rPr lang="en-US" sz="2000" b="1" dirty="0">
-                <a:latin typeface="Palatino Linotype" panose="02040502050505030304" pitchFamily="18" charset="0"/>
-              </a:rPr>
-              <a:t>Response example:</a:t>
-            </a:r>
           </a:p>
         </p:txBody>
       </p:sp>
@@ -19855,7 +18913,7 @@
     </p:spTree>
     <p:extLst>
       <p:ext uri="{BB962C8B-B14F-4D97-AF65-F5344CB8AC3E}">
-        <p14:creationId xmlns:p14="http://schemas.microsoft.com/office/powerpoint/2010/main" val="1011575136"/>
+        <p14:creationId xmlns:p14="http://schemas.microsoft.com/office/powerpoint/2010/main" val="81412953"/>
       </p:ext>
     </p:extLst>
   </p:cSld>
